--- a/slides/BaoCao_TangCuongDuLieuThoiTiet.pptx
+++ b/slides/BaoCao_TangCuongDuLieuThoiTiet.pptx
@@ -20,7 +20,6 @@
     <p:sldId id="268" r:id="rId19"/>
     <p:sldId id="269" r:id="rId20"/>
     <p:sldId id="270" r:id="rId21"/>
-    <p:sldId id="271" r:id="rId22"/>
   </p:sldIdLst>
   <p:sldSz cx="12191695" cy="6858000" type="screen4x3"/>
   <p:notesSz cx="6858000" cy="9144000"/>
@@ -3260,8 +3259,8 @@
         </p:nvSpPr>
         <p:spPr>
           <a:xfrm>
-            <a:off x="822960" y="4343400"/>
-            <a:ext cx="10698480" cy="1463040"/>
+            <a:off x="822960" y="4224528"/>
+            <a:ext cx="10698480" cy="914400"/>
           </a:xfrm>
           <a:prstGeom prst="rect">
             <a:avLst/>
@@ -3283,7 +3282,7 @@
               </a:spcAft>
             </a:pPr>
             <a:r>
-              <a:rPr sz="1700" b="0">
+              <a:rPr sz="1600" b="0">
                 <a:solidFill>
                   <a:srgbClr val="C8D2E4"/>
                 </a:solidFill>
@@ -3302,7 +3301,7 @@
               </a:spcAft>
             </a:pPr>
             <a:r>
-              <a:rPr sz="1700" b="0">
+              <a:rPr sz="1600" b="0">
                 <a:solidFill>
                   <a:srgbClr val="C8D2E4"/>
                 </a:solidFill>
@@ -3311,23 +3310,109 @@
               <a:t>Đầu ra: ảnh giao thông dưới thời tiết xấu — giữ nguyên nhãn bounding box</a:t>
             </a:r>
           </a:p>
-          <a:p>
-            <a:pPr algn="l">
-              <a:lnSpc>
-                <a:spcPct val="115000"/>
-              </a:lnSpc>
-              <a:spcAft>
-                <a:spcPts val="600"/>
-              </a:spcAft>
-            </a:pPr>
-            <a:r>
-              <a:rPr sz="1500" b="0">
+        </p:txBody>
+      </p:sp>
+      <p:sp>
+        <p:nvSpPr>
+          <p:cNvPr id="6" name="Rectangle 5"/>
+          <p:cNvSpPr/>
+          <p:nvPr/>
+        </p:nvSpPr>
+        <p:spPr>
+          <a:xfrm>
+            <a:off x="822960" y="5440680"/>
+            <a:ext cx="54864" cy="914400"/>
+          </a:xfrm>
+          <a:prstGeom prst="rect">
+            <a:avLst/>
+          </a:prstGeom>
+          <a:solidFill>
+            <a:srgbClr val="18A099"/>
+          </a:solidFill>
+          <a:ln>
+            <a:noFill/>
+          </a:ln>
+          <a:effectLst/>
+        </p:spPr>
+        <p:style>
+          <a:lnRef idx="1">
+            <a:schemeClr val="accent1"/>
+          </a:lnRef>
+          <a:fillRef idx="3">
+            <a:schemeClr val="accent1"/>
+          </a:fillRef>
+          <a:effectRef idx="2">
+            <a:schemeClr val="accent1"/>
+          </a:effectRef>
+          <a:fontRef idx="minor">
+            <a:schemeClr val="lt1"/>
+          </a:fontRef>
+        </p:style>
+        <p:txBody>
+          <a:bodyPr rtlCol="0" anchor="ctr"/>
+          <a:lstStyle/>
+          <a:p>
+            <a:pPr algn="ctr"/>
+          </a:p>
+        </p:txBody>
+      </p:sp>
+      <p:sp>
+        <p:nvSpPr>
+          <p:cNvPr id="7" name="TextBox 6"/>
+          <p:cNvSpPr txBox="1"/>
+          <p:nvPr/>
+        </p:nvSpPr>
+        <p:spPr>
+          <a:xfrm>
+            <a:off x="1051560" y="5413248"/>
+            <a:ext cx="10424160" cy="1005840"/>
+          </a:xfrm>
+          <a:prstGeom prst="rect">
+            <a:avLst/>
+          </a:prstGeom>
+          <a:noFill/>
+        </p:spPr>
+        <p:txBody>
+          <a:bodyPr wrap="square" lIns="0" rIns="0">
+            <a:spAutoFit/>
+          </a:bodyPr>
+          <a:lstStyle/>
+          <a:p>
+            <a:pPr algn="l">
+              <a:lnSpc>
+                <a:spcPct val="115000"/>
+              </a:lnSpc>
+              <a:spcAft>
+                <a:spcPts val="600"/>
+              </a:spcAft>
+            </a:pPr>
+            <a:r>
+              <a:rPr sz="1500" b="1">
                 <a:solidFill>
                   <a:srgbClr val="18A099"/>
                 </a:solidFill>
                 <a:latin typeface="Arial"/>
               </a:rPr>
-              <a:t>AdaIN (ICCV 2017) + Guided Filter + mô hình tán xạ khí quyển</a:t>
+              <a:t>NHÓM 6  ·  Bài tập cuối khoá — Deep Learning Ứng dụng</a:t>
+            </a:r>
+          </a:p>
+          <a:p>
+            <a:pPr algn="l">
+              <a:lnSpc>
+                <a:spcPct val="115000"/>
+              </a:lnSpc>
+              <a:spcAft>
+                <a:spcPts val="600"/>
+              </a:spcAft>
+            </a:pPr>
+            <a:r>
+              <a:rPr sz="1400" b="0">
+                <a:solidFill>
+                  <a:srgbClr val="C8D2E4"/>
+                </a:solidFill>
+                <a:latin typeface="Arial"/>
+              </a:rPr>
+              <a:t>Hoàng Minh Đức  ·  Trần Quý Đạt  ·  Hoàng Trung Kiên  ·  Vũ Thuỳ Linh</a:t>
             </a:r>
           </a:p>
         </p:txBody>
@@ -7474,26 +7559,7 @@
                 </a:solidFill>
                 <a:latin typeface="Arial"/>
               </a:rPr>
-              <a:t>Sản phẩm bàn giao</a:t>
-            </a:r>
-          </a:p>
-          <a:p>
-            <a:pPr algn="l">
-              <a:lnSpc>
-                <a:spcPct val="115000"/>
-              </a:lnSpc>
-              <a:spcAft>
-                <a:spcPts val="600"/>
-              </a:spcAft>
-            </a:pPr>
-            <a:r>
-              <a:rPr sz="1300" b="0">
-                <a:solidFill>
-                  <a:srgbClr val="B6C2D9"/>
-                </a:solidFill>
-                <a:latin typeface="Arial"/>
-              </a:rPr>
-              <a:t>Mã nguồn chạy được từ đầu đến cuối bằng 1 lệnh</a:t>
+              <a:t>Hạn chế &amp; hướng phát triển</a:t>
             </a:r>
           </a:p>
         </p:txBody>
@@ -7548,8 +7614,8 @@
         </p:nvSpPr>
         <p:spPr>
           <a:xfrm>
-            <a:off x="640080" y="1325880"/>
-            <a:ext cx="10881360" cy="512064"/>
+            <a:off x="640080" y="1371600"/>
+            <a:ext cx="5349240" cy="4480560"/>
           </a:xfrm>
           <a:prstGeom prst="rect">
             <a:avLst/>
@@ -7586,104 +7652,20 @@
       </p:sp>
       <p:sp>
         <p:nvSpPr>
-          <p:cNvPr id="7" name="TextBox 6"/>
-          <p:cNvSpPr txBox="1"/>
-          <p:nvPr/>
-        </p:nvSpPr>
-        <p:spPr>
-          <a:xfrm>
-            <a:off x="822960" y="1435608"/>
-            <a:ext cx="3931920" cy="457200"/>
-          </a:xfrm>
-          <a:prstGeom prst="rect">
-            <a:avLst/>
-          </a:prstGeom>
-          <a:noFill/>
-        </p:spPr>
-        <p:txBody>
-          <a:bodyPr wrap="square" lIns="0" rIns="0">
-            <a:spAutoFit/>
-          </a:bodyPr>
-          <a:lstStyle/>
-          <a:p>
-            <a:pPr algn="l">
-              <a:lnSpc>
-                <a:spcPct val="115000"/>
-              </a:lnSpc>
-              <a:spcAft>
-                <a:spcPts val="600"/>
-              </a:spcAft>
-            </a:pPr>
-            <a:r>
-              <a:rPr sz="1500" b="1">
-                <a:solidFill>
-                  <a:srgbClr val="2E6FD9"/>
-                </a:solidFill>
-                <a:latin typeface="Arial"/>
-              </a:rPr>
-              <a:t>scripts/01,02,03_*.py</a:t>
-            </a:r>
-          </a:p>
-        </p:txBody>
-      </p:sp>
-      <p:sp>
-        <p:nvSpPr>
-          <p:cNvPr id="8" name="TextBox 7"/>
-          <p:cNvSpPr txBox="1"/>
-          <p:nvPr/>
-        </p:nvSpPr>
-        <p:spPr>
-          <a:xfrm>
-            <a:off x="4937760" y="1435608"/>
-            <a:ext cx="6400800" cy="457200"/>
-          </a:xfrm>
-          <a:prstGeom prst="rect">
-            <a:avLst/>
-          </a:prstGeom>
-          <a:noFill/>
-        </p:spPr>
-        <p:txBody>
-          <a:bodyPr wrap="square" lIns="0" rIns="0">
-            <a:spAutoFit/>
-          </a:bodyPr>
-          <a:lstStyle/>
-          <a:p>
-            <a:pPr algn="l">
-              <a:lnSpc>
-                <a:spcPct val="115000"/>
-              </a:lnSpc>
-              <a:spcAft>
-                <a:spcPts val="600"/>
-              </a:spcAft>
-            </a:pPr>
-            <a:r>
-              <a:rPr sz="1500" b="0">
-                <a:solidFill>
-                  <a:srgbClr val="101B33"/>
-                </a:solidFill>
-                <a:latin typeface="Arial"/>
-              </a:rPr>
-              <a:t>Tải dữ liệu · chia tập · sinh hình minh hoạ</a:t>
-            </a:r>
-          </a:p>
-        </p:txBody>
-      </p:sp>
-      <p:sp>
-        <p:nvSpPr>
-          <p:cNvPr id="9" name="Rectangle 8"/>
+          <p:cNvPr id="7" name="Rectangle 6"/>
           <p:cNvSpPr/>
           <p:nvPr/>
         </p:nvSpPr>
         <p:spPr>
           <a:xfrm>
-            <a:off x="640080" y="1929384"/>
-            <a:ext cx="10881360" cy="512064"/>
+            <a:off x="640080" y="1371600"/>
+            <a:ext cx="64008" cy="4480560"/>
           </a:xfrm>
           <a:prstGeom prst="rect">
             <a:avLst/>
           </a:prstGeom>
           <a:solidFill>
-            <a:srgbClr val="FFFFFF"/>
+            <a:srgbClr val="E45A5A"/>
           </a:solidFill>
           <a:ln>
             <a:noFill/>
@@ -7714,14 +7696,14 @@
       </p:sp>
       <p:sp>
         <p:nvSpPr>
-          <p:cNvPr id="10" name="TextBox 9"/>
+          <p:cNvPr id="8" name="TextBox 7"/>
           <p:cNvSpPr txBox="1"/>
           <p:nvPr/>
         </p:nvSpPr>
         <p:spPr>
           <a:xfrm>
-            <a:off x="822960" y="2039112"/>
-            <a:ext cx="3931920" cy="457200"/>
+            <a:off x="896112" y="1536192"/>
+            <a:ext cx="4892040" cy="4480560"/>
           </a:xfrm>
           <a:prstGeom prst="rect">
             <a:avLst/>
@@ -7743,69 +7725,50 @@
               </a:spcAft>
             </a:pPr>
             <a:r>
-              <a:rPr sz="1500" b="1">
-                <a:solidFill>
-                  <a:srgbClr val="2E6FD9"/>
-                </a:solidFill>
-                <a:latin typeface="Arial"/>
-              </a:rPr>
-              <a:t>train.py</a:t>
-            </a:r>
-          </a:p>
-        </p:txBody>
-      </p:sp>
-      <p:sp>
-        <p:nvSpPr>
-          <p:cNvPr id="11" name="TextBox 10"/>
-          <p:cNvSpPr txBox="1"/>
-          <p:nvPr/>
-        </p:nvSpPr>
-        <p:spPr>
-          <a:xfrm>
-            <a:off x="4937760" y="2039112"/>
-            <a:ext cx="6400800" cy="457200"/>
-          </a:xfrm>
-          <a:prstGeom prst="rect">
-            <a:avLst/>
-          </a:prstGeom>
-          <a:noFill/>
-        </p:spPr>
-        <p:txBody>
-          <a:bodyPr wrap="square" lIns="0" rIns="0">
-            <a:spAutoFit/>
-          </a:bodyPr>
-          <a:lstStyle/>
-          <a:p>
-            <a:pPr algn="l">
-              <a:lnSpc>
-                <a:spcPct val="115000"/>
-              </a:lnSpc>
-              <a:spcAft>
-                <a:spcPts val="600"/>
-              </a:spcAft>
-            </a:pPr>
-            <a:r>
-              <a:rPr sz="1500" b="0">
+              <a:rPr sz="1600" b="1">
                 <a:solidFill>
                   <a:srgbClr val="101B33"/>
                 </a:solidFill>
                 <a:latin typeface="Arial"/>
               </a:rPr>
-              <a:t>Huấn luyện (có resume, log, preview, checkpoint)</a:t>
-            </a:r>
-          </a:p>
-        </p:txBody>
-      </p:sp>
-      <p:sp>
-        <p:nvSpPr>
-          <p:cNvPr id="12" name="Rectangle 11"/>
+              <a:t>HẠN CHẾ</a:t>
+            </a:r>
+          </a:p>
+          <a:p>
+            <a:pPr algn="l">
+              <a:lnSpc>
+                <a:spcPct val="115000"/>
+              </a:lnSpc>
+              <a:spcAft>
+                <a:spcPts val="600"/>
+              </a:spcAft>
+            </a:pPr>
+            <a:r>
+              <a:rPr sz="1300" b="0">
+                <a:solidFill>
+                  <a:srgbClr val="5A6375"/>
+                </a:solidFill>
+                <a:latin typeface="Arial"/>
+              </a:rPr>
+              <a:t>
+· AdaIN chuyển thống kê TOÀN CỤC nên chưa phân biệt vùng trời / mặt đường — sương mù dày ở gần cũng như ở xa.
+· Không có bản đồ độ sâu thật; module vật lý dùng giả thiết mặt đường phẳng.
+· Chất lượng phụ thuộc ảnh tham chiếu: ảnh tham chiếu khác góc chụp quá nhiều sẽ cho tông màu lệch.
+· DAWN chỉ được dùng cho mục đích nghiên cứu, không dùng thương mại.</a:t>
+            </a:r>
+          </a:p>
+        </p:txBody>
+      </p:sp>
+      <p:sp>
+        <p:nvSpPr>
+          <p:cNvPr id="9" name="Rectangle 8"/>
           <p:cNvSpPr/>
           <p:nvPr/>
         </p:nvSpPr>
         <p:spPr>
           <a:xfrm>
-            <a:off x="640080" y="2532888"/>
-            <a:ext cx="10881360" cy="512064"/>
+            <a:off x="6355080" y="1371600"/>
+            <a:ext cx="5349240" cy="4480560"/>
           </a:xfrm>
           <a:prstGeom prst="rect">
             <a:avLst/>
@@ -7842,104 +7805,20 @@
       </p:sp>
       <p:sp>
         <p:nvSpPr>
-          <p:cNvPr id="13" name="TextBox 12"/>
-          <p:cNvSpPr txBox="1"/>
-          <p:nvPr/>
-        </p:nvSpPr>
-        <p:spPr>
-          <a:xfrm>
-            <a:off x="822960" y="2642616"/>
-            <a:ext cx="3931920" cy="457200"/>
-          </a:xfrm>
-          <a:prstGeom prst="rect">
-            <a:avLst/>
-          </a:prstGeom>
-          <a:noFill/>
-        </p:spPr>
-        <p:txBody>
-          <a:bodyPr wrap="square" lIns="0" rIns="0">
-            <a:spAutoFit/>
-          </a:bodyPr>
-          <a:lstStyle/>
-          <a:p>
-            <a:pPr algn="l">
-              <a:lnSpc>
-                <a:spcPct val="115000"/>
-              </a:lnSpc>
-              <a:spcAft>
-                <a:spcPts val="600"/>
-              </a:spcAft>
-            </a:pPr>
-            <a:r>
-              <a:rPr sz="1500" b="1">
-                <a:solidFill>
-                  <a:srgbClr val="2E6FD9"/>
-                </a:solidFill>
-                <a:latin typeface="Arial"/>
-              </a:rPr>
-              <a:t>infer.py</a:t>
-            </a:r>
-          </a:p>
-        </p:txBody>
-      </p:sp>
-      <p:sp>
-        <p:nvSpPr>
-          <p:cNvPr id="14" name="TextBox 13"/>
-          <p:cNvSpPr txBox="1"/>
-          <p:nvPr/>
-        </p:nvSpPr>
-        <p:spPr>
-          <a:xfrm>
-            <a:off x="4937760" y="2642616"/>
-            <a:ext cx="6400800" cy="457200"/>
-          </a:xfrm>
-          <a:prstGeom prst="rect">
-            <a:avLst/>
-          </a:prstGeom>
-          <a:noFill/>
-        </p:spPr>
-        <p:txBody>
-          <a:bodyPr wrap="square" lIns="0" rIns="0">
-            <a:spAutoFit/>
-          </a:bodyPr>
-          <a:lstStyle/>
-          <a:p>
-            <a:pPr algn="l">
-              <a:lnSpc>
-                <a:spcPct val="115000"/>
-              </a:lnSpc>
-              <a:spcAft>
-                <a:spcPts val="600"/>
-              </a:spcAft>
-            </a:pPr>
-            <a:r>
-              <a:rPr sz="1500" b="0">
-                <a:solidFill>
-                  <a:srgbClr val="101B33"/>
-                </a:solidFill>
-                <a:latin typeface="Arial"/>
-              </a:rPr>
-              <a:t>Suy luận 1 ảnh hoặc cả thư mục, xuất ảnh so sánh</a:t>
-            </a:r>
-          </a:p>
-        </p:txBody>
-      </p:sp>
-      <p:sp>
-        <p:nvSpPr>
-          <p:cNvPr id="15" name="Rectangle 14"/>
+          <p:cNvPr id="10" name="Rectangle 9"/>
           <p:cNvSpPr/>
           <p:nvPr/>
         </p:nvSpPr>
         <p:spPr>
           <a:xfrm>
-            <a:off x="640080" y="3136392"/>
-            <a:ext cx="10881360" cy="512064"/>
+            <a:off x="6355080" y="1371600"/>
+            <a:ext cx="64008" cy="4480560"/>
           </a:xfrm>
           <a:prstGeom prst="rect">
             <a:avLst/>
           </a:prstGeom>
           <a:solidFill>
-            <a:srgbClr val="FFFFFF"/>
+            <a:srgbClr val="18A099"/>
           </a:solidFill>
           <a:ln>
             <a:noFill/>
@@ -7970,14 +7849,14 @@
       </p:sp>
       <p:sp>
         <p:nvSpPr>
-          <p:cNvPr id="16" name="TextBox 15"/>
+          <p:cNvPr id="11" name="TextBox 10"/>
           <p:cNvSpPr txBox="1"/>
           <p:nvPr/>
         </p:nvSpPr>
         <p:spPr>
           <a:xfrm>
-            <a:off x="822960" y="3246120"/>
-            <a:ext cx="3931920" cy="457200"/>
+            <a:off x="6611112" y="1536192"/>
+            <a:ext cx="4892040" cy="4480560"/>
           </a:xfrm>
           <a:prstGeom prst="rect">
             <a:avLst/>
@@ -7999,567 +7878,37 @@
               </a:spcAft>
             </a:pPr>
             <a:r>
-              <a:rPr sz="1500" b="1">
-                <a:solidFill>
-                  <a:srgbClr val="2E6FD9"/>
-                </a:solidFill>
-                <a:latin typeface="Arial"/>
-              </a:rPr>
-              <a:t>augment_dataset.py</a:t>
-            </a:r>
-          </a:p>
-        </p:txBody>
-      </p:sp>
-      <p:sp>
-        <p:nvSpPr>
-          <p:cNvPr id="17" name="TextBox 16"/>
-          <p:cNvSpPr txBox="1"/>
-          <p:nvPr/>
-        </p:nvSpPr>
-        <p:spPr>
-          <a:xfrm>
-            <a:off x="4937760" y="3246120"/>
-            <a:ext cx="6400800" cy="457200"/>
-          </a:xfrm>
-          <a:prstGeom prst="rect">
-            <a:avLst/>
-          </a:prstGeom>
-          <a:noFill/>
-        </p:spPr>
-        <p:txBody>
-          <a:bodyPr wrap="square" lIns="0" rIns="0">
-            <a:spAutoFit/>
-          </a:bodyPr>
-          <a:lstStyle/>
-          <a:p>
-            <a:pPr algn="l">
-              <a:lnSpc>
-                <a:spcPct val="115000"/>
-              </a:lnSpc>
-              <a:spcAft>
-                <a:spcPts val="600"/>
-              </a:spcAft>
-            </a:pPr>
-            <a:r>
-              <a:rPr sz="1500" b="0">
+              <a:rPr sz="1600" b="1">
                 <a:solidFill>
                   <a:srgbClr val="101B33"/>
                 </a:solidFill>
                 <a:latin typeface="Arial"/>
               </a:rPr>
-              <a:t>Sinh bộ dữ liệu tăng cường kèm nhãn</a:t>
-            </a:r>
-          </a:p>
-        </p:txBody>
-      </p:sp>
-      <p:sp>
-        <p:nvSpPr>
-          <p:cNvPr id="18" name="Rectangle 17"/>
-          <p:cNvSpPr/>
-          <p:nvPr/>
-        </p:nvSpPr>
-        <p:spPr>
-          <a:xfrm>
-            <a:off x="640080" y="3739896"/>
-            <a:ext cx="10881360" cy="512064"/>
-          </a:xfrm>
-          <a:prstGeom prst="rect">
-            <a:avLst/>
-          </a:prstGeom>
-          <a:solidFill>
-            <a:srgbClr val="F4F6FA"/>
-          </a:solidFill>
-          <a:ln>
-            <a:noFill/>
-          </a:ln>
-          <a:effectLst/>
-        </p:spPr>
-        <p:style>
-          <a:lnRef idx="1">
-            <a:schemeClr val="accent1"/>
-          </a:lnRef>
-          <a:fillRef idx="3">
-            <a:schemeClr val="accent1"/>
-          </a:fillRef>
-          <a:effectRef idx="2">
-            <a:schemeClr val="accent1"/>
-          </a:effectRef>
-          <a:fontRef idx="minor">
-            <a:schemeClr val="lt1"/>
-          </a:fontRef>
-        </p:style>
-        <p:txBody>
-          <a:bodyPr rtlCol="0" anchor="ctr"/>
-          <a:lstStyle/>
-          <a:p>
-            <a:pPr algn="ctr"/>
-          </a:p>
-        </p:txBody>
-      </p:sp>
-      <p:sp>
-        <p:nvSpPr>
-          <p:cNvPr id="19" name="TextBox 18"/>
-          <p:cNvSpPr txBox="1"/>
-          <p:nvPr/>
-        </p:nvSpPr>
-        <p:spPr>
-          <a:xfrm>
-            <a:off x="822960" y="3849624"/>
-            <a:ext cx="3931920" cy="457200"/>
-          </a:xfrm>
-          <a:prstGeom prst="rect">
-            <a:avLst/>
-          </a:prstGeom>
-          <a:noFill/>
-        </p:spPr>
-        <p:txBody>
-          <a:bodyPr wrap="square" lIns="0" rIns="0">
-            <a:spAutoFit/>
-          </a:bodyPr>
-          <a:lstStyle/>
-          <a:p>
-            <a:pPr algn="l">
-              <a:lnSpc>
-                <a:spcPct val="115000"/>
-              </a:lnSpc>
-              <a:spcAft>
-                <a:spcPts val="600"/>
-              </a:spcAft>
-            </a:pPr>
-            <a:r>
-              <a:rPr sz="1500" b="1">
-                <a:solidFill>
-                  <a:srgbClr val="2E6FD9"/>
-                </a:solidFill>
-                <a:latin typeface="Arial"/>
-              </a:rPr>
-              <a:t>evaluate.py</a:t>
-            </a:r>
-          </a:p>
-        </p:txBody>
-      </p:sp>
-      <p:sp>
-        <p:nvSpPr>
-          <p:cNvPr id="20" name="TextBox 19"/>
-          <p:cNvSpPr txBox="1"/>
-          <p:nvPr/>
-        </p:nvSpPr>
-        <p:spPr>
-          <a:xfrm>
-            <a:off x="4937760" y="3849624"/>
-            <a:ext cx="6400800" cy="457200"/>
-          </a:xfrm>
-          <a:prstGeom prst="rect">
-            <a:avLst/>
-          </a:prstGeom>
-          <a:noFill/>
-        </p:spPr>
-        <p:txBody>
-          <a:bodyPr wrap="square" lIns="0" rIns="0">
-            <a:spAutoFit/>
-          </a:bodyPr>
-          <a:lstStyle/>
-          <a:p>
-            <a:pPr algn="l">
-              <a:lnSpc>
-                <a:spcPct val="115000"/>
-              </a:lnSpc>
-              <a:spcAft>
-                <a:spcPts val="600"/>
-              </a:spcAft>
-            </a:pPr>
-            <a:r>
-              <a:rPr sz="1500" b="0">
-                <a:solidFill>
-                  <a:srgbClr val="101B33"/>
-                </a:solidFill>
-                <a:latin typeface="Arial"/>
-              </a:rPr>
-              <a:t>SSIM / PSNR / EdgeRecall / FID</a:t>
-            </a:r>
-          </a:p>
-        </p:txBody>
-      </p:sp>
-      <p:sp>
-        <p:nvSpPr>
-          <p:cNvPr id="21" name="Rectangle 20"/>
-          <p:cNvSpPr/>
-          <p:nvPr/>
-        </p:nvSpPr>
-        <p:spPr>
-          <a:xfrm>
-            <a:off x="640080" y="4343400"/>
-            <a:ext cx="10881360" cy="512064"/>
-          </a:xfrm>
-          <a:prstGeom prst="rect">
-            <a:avLst/>
-          </a:prstGeom>
-          <a:solidFill>
-            <a:srgbClr val="FFFFFF"/>
-          </a:solidFill>
-          <a:ln>
-            <a:noFill/>
-          </a:ln>
-          <a:effectLst/>
-        </p:spPr>
-        <p:style>
-          <a:lnRef idx="1">
-            <a:schemeClr val="accent1"/>
-          </a:lnRef>
-          <a:fillRef idx="3">
-            <a:schemeClr val="accent1"/>
-          </a:fillRef>
-          <a:effectRef idx="2">
-            <a:schemeClr val="accent1"/>
-          </a:effectRef>
-          <a:fontRef idx="minor">
-            <a:schemeClr val="lt1"/>
-          </a:fontRef>
-        </p:style>
-        <p:txBody>
-          <a:bodyPr rtlCol="0" anchor="ctr"/>
-          <a:lstStyle/>
-          <a:p>
-            <a:pPr algn="ctr"/>
-          </a:p>
-        </p:txBody>
-      </p:sp>
-      <p:sp>
-        <p:nvSpPr>
-          <p:cNvPr id="22" name="TextBox 21"/>
-          <p:cNvSpPr txBox="1"/>
-          <p:nvPr/>
-        </p:nvSpPr>
-        <p:spPr>
-          <a:xfrm>
-            <a:off x="822960" y="4453128"/>
-            <a:ext cx="3931920" cy="457200"/>
-          </a:xfrm>
-          <a:prstGeom prst="rect">
-            <a:avLst/>
-          </a:prstGeom>
-          <a:noFill/>
-        </p:spPr>
-        <p:txBody>
-          <a:bodyPr wrap="square" lIns="0" rIns="0">
-            <a:spAutoFit/>
-          </a:bodyPr>
-          <a:lstStyle/>
-          <a:p>
-            <a:pPr algn="l">
-              <a:lnSpc>
-                <a:spcPct val="115000"/>
-              </a:lnSpc>
-              <a:spcAft>
-                <a:spcPts val="600"/>
-              </a:spcAft>
-            </a:pPr>
-            <a:r>
-              <a:rPr sz="1500" b="1">
-                <a:solidFill>
-                  <a:srgbClr val="2E6FD9"/>
-                </a:solidFill>
-                <a:latin typeface="Arial"/>
-              </a:rPr>
-              <a:t>experiments/detector_experiment.py</a:t>
-            </a:r>
-          </a:p>
-        </p:txBody>
-      </p:sp>
-      <p:sp>
-        <p:nvSpPr>
-          <p:cNvPr id="23" name="TextBox 22"/>
-          <p:cNvSpPr txBox="1"/>
-          <p:nvPr/>
-        </p:nvSpPr>
-        <p:spPr>
-          <a:xfrm>
-            <a:off x="4937760" y="4453128"/>
-            <a:ext cx="6400800" cy="457200"/>
-          </a:xfrm>
-          <a:prstGeom prst="rect">
-            <a:avLst/>
-          </a:prstGeom>
-          <a:noFill/>
-        </p:spPr>
-        <p:txBody>
-          <a:bodyPr wrap="square" lIns="0" rIns="0">
-            <a:spAutoFit/>
-          </a:bodyPr>
-          <a:lstStyle/>
-          <a:p>
-            <a:pPr algn="l">
-              <a:lnSpc>
-                <a:spcPct val="115000"/>
-              </a:lnSpc>
-              <a:spcAft>
-                <a:spcPts val="600"/>
-              </a:spcAft>
-            </a:pPr>
-            <a:r>
-              <a:rPr sz="1500" b="0">
-                <a:solidFill>
-                  <a:srgbClr val="101B33"/>
-                </a:solidFill>
-                <a:latin typeface="Arial"/>
-              </a:rPr>
-              <a:t>Thí nghiệm YOLOv8 baseline vs tăng cường</a:t>
-            </a:r>
-          </a:p>
-        </p:txBody>
-      </p:sp>
-      <p:sp>
-        <p:nvSpPr>
-          <p:cNvPr id="24" name="Rectangle 23"/>
-          <p:cNvSpPr/>
-          <p:nvPr/>
-        </p:nvSpPr>
-        <p:spPr>
-          <a:xfrm>
-            <a:off x="640080" y="4946904"/>
-            <a:ext cx="10881360" cy="512064"/>
-          </a:xfrm>
-          <a:prstGeom prst="rect">
-            <a:avLst/>
-          </a:prstGeom>
-          <a:solidFill>
-            <a:srgbClr val="F4F6FA"/>
-          </a:solidFill>
-          <a:ln>
-            <a:noFill/>
-          </a:ln>
-          <a:effectLst/>
-        </p:spPr>
-        <p:style>
-          <a:lnRef idx="1">
-            <a:schemeClr val="accent1"/>
-          </a:lnRef>
-          <a:fillRef idx="3">
-            <a:schemeClr val="accent1"/>
-          </a:fillRef>
-          <a:effectRef idx="2">
-            <a:schemeClr val="accent1"/>
-          </a:effectRef>
-          <a:fontRef idx="minor">
-            <a:schemeClr val="lt1"/>
-          </a:fontRef>
-        </p:style>
-        <p:txBody>
-          <a:bodyPr rtlCol="0" anchor="ctr"/>
-          <a:lstStyle/>
-          <a:p>
-            <a:pPr algn="ctr"/>
-          </a:p>
-        </p:txBody>
-      </p:sp>
-      <p:sp>
-        <p:nvSpPr>
-          <p:cNvPr id="25" name="TextBox 24"/>
-          <p:cNvSpPr txBox="1"/>
-          <p:nvPr/>
-        </p:nvSpPr>
-        <p:spPr>
-          <a:xfrm>
-            <a:off x="822960" y="5056632"/>
-            <a:ext cx="3931920" cy="457200"/>
-          </a:xfrm>
-          <a:prstGeom prst="rect">
-            <a:avLst/>
-          </a:prstGeom>
-          <a:noFill/>
-        </p:spPr>
-        <p:txBody>
-          <a:bodyPr wrap="square" lIns="0" rIns="0">
-            <a:spAutoFit/>
-          </a:bodyPr>
-          <a:lstStyle/>
-          <a:p>
-            <a:pPr algn="l">
-              <a:lnSpc>
-                <a:spcPct val="115000"/>
-              </a:lnSpc>
-              <a:spcAft>
-                <a:spcPts val="600"/>
-              </a:spcAft>
-            </a:pPr>
-            <a:r>
-              <a:rPr sz="1500" b="1">
-                <a:solidFill>
-                  <a:srgbClr val="2E6FD9"/>
-                </a:solidFill>
-                <a:latin typeface="Arial"/>
-              </a:rPr>
-              <a:t>app/app.py</a:t>
-            </a:r>
-          </a:p>
-        </p:txBody>
-      </p:sp>
-      <p:sp>
-        <p:nvSpPr>
-          <p:cNvPr id="26" name="TextBox 25"/>
-          <p:cNvSpPr txBox="1"/>
-          <p:nvPr/>
-        </p:nvSpPr>
-        <p:spPr>
-          <a:xfrm>
-            <a:off x="4937760" y="5056632"/>
-            <a:ext cx="6400800" cy="457200"/>
-          </a:xfrm>
-          <a:prstGeom prst="rect">
-            <a:avLst/>
-          </a:prstGeom>
-          <a:noFill/>
-        </p:spPr>
-        <p:txBody>
-          <a:bodyPr wrap="square" lIns="0" rIns="0">
-            <a:spAutoFit/>
-          </a:bodyPr>
-          <a:lstStyle/>
-          <a:p>
-            <a:pPr algn="l">
-              <a:lnSpc>
-                <a:spcPct val="115000"/>
-              </a:lnSpc>
-              <a:spcAft>
-                <a:spcPts val="600"/>
-              </a:spcAft>
-            </a:pPr>
-            <a:r>
-              <a:rPr sz="1500" b="0">
-                <a:solidFill>
-                  <a:srgbClr val="101B33"/>
-                </a:solidFill>
-                <a:latin typeface="Arial"/>
-              </a:rPr>
-              <a:t>Web demo Gradio 4 tab</a:t>
-            </a:r>
-          </a:p>
-        </p:txBody>
-      </p:sp>
-      <p:sp>
-        <p:nvSpPr>
-          <p:cNvPr id="27" name="Rectangle 26"/>
-          <p:cNvSpPr/>
-          <p:nvPr/>
-        </p:nvSpPr>
-        <p:spPr>
-          <a:xfrm>
-            <a:off x="640080" y="5550408"/>
-            <a:ext cx="10881360" cy="512064"/>
-          </a:xfrm>
-          <a:prstGeom prst="rect">
-            <a:avLst/>
-          </a:prstGeom>
-          <a:solidFill>
-            <a:srgbClr val="FFFFFF"/>
-          </a:solidFill>
-          <a:ln>
-            <a:noFill/>
-          </a:ln>
-          <a:effectLst/>
-        </p:spPr>
-        <p:style>
-          <a:lnRef idx="1">
-            <a:schemeClr val="accent1"/>
-          </a:lnRef>
-          <a:fillRef idx="3">
-            <a:schemeClr val="accent1"/>
-          </a:fillRef>
-          <a:effectRef idx="2">
-            <a:schemeClr val="accent1"/>
-          </a:effectRef>
-          <a:fontRef idx="minor">
-            <a:schemeClr val="lt1"/>
-          </a:fontRef>
-        </p:style>
-        <p:txBody>
-          <a:bodyPr rtlCol="0" anchor="ctr"/>
-          <a:lstStyle/>
-          <a:p>
-            <a:pPr algn="ctr"/>
-          </a:p>
-        </p:txBody>
-      </p:sp>
-      <p:sp>
-        <p:nvSpPr>
-          <p:cNvPr id="28" name="TextBox 27"/>
-          <p:cNvSpPr txBox="1"/>
-          <p:nvPr/>
-        </p:nvSpPr>
-        <p:spPr>
-          <a:xfrm>
-            <a:off x="822960" y="5660136"/>
-            <a:ext cx="3931920" cy="457200"/>
-          </a:xfrm>
-          <a:prstGeom prst="rect">
-            <a:avLst/>
-          </a:prstGeom>
-          <a:noFill/>
-        </p:spPr>
-        <p:txBody>
-          <a:bodyPr wrap="square" lIns="0" rIns="0">
-            <a:spAutoFit/>
-          </a:bodyPr>
-          <a:lstStyle/>
-          <a:p>
-            <a:pPr algn="l">
-              <a:lnSpc>
-                <a:spcPct val="115000"/>
-              </a:lnSpc>
-              <a:spcAft>
-                <a:spcPts val="600"/>
-              </a:spcAft>
-            </a:pPr>
-            <a:r>
-              <a:rPr sz="1500" b="1">
-                <a:solidFill>
-                  <a:srgbClr val="2E6FD9"/>
-                </a:solidFill>
-                <a:latin typeface="Arial"/>
-              </a:rPr>
-              <a:t>run_all.sh</a:t>
-            </a:r>
-          </a:p>
-        </p:txBody>
-      </p:sp>
-      <p:sp>
-        <p:nvSpPr>
-          <p:cNvPr id="29" name="TextBox 28"/>
-          <p:cNvSpPr txBox="1"/>
-          <p:nvPr/>
-        </p:nvSpPr>
-        <p:spPr>
-          <a:xfrm>
-            <a:off x="4937760" y="5660136"/>
-            <a:ext cx="6400800" cy="457200"/>
-          </a:xfrm>
-          <a:prstGeom prst="rect">
-            <a:avLst/>
-          </a:prstGeom>
-          <a:noFill/>
-        </p:spPr>
-        <p:txBody>
-          <a:bodyPr wrap="square" lIns="0" rIns="0">
-            <a:spAutoFit/>
-          </a:bodyPr>
-          <a:lstStyle/>
-          <a:p>
-            <a:pPr algn="l">
-              <a:lnSpc>
-                <a:spcPct val="115000"/>
-              </a:lnSpc>
-              <a:spcAft>
-                <a:spcPts val="600"/>
-              </a:spcAft>
-            </a:pPr>
-            <a:r>
-              <a:rPr sz="1500" b="0">
-                <a:solidFill>
-                  <a:srgbClr val="101B33"/>
-                </a:solidFill>
-                <a:latin typeface="Arial"/>
-              </a:rPr>
-              <a:t>Chạy toàn bộ quy trình</a:t>
+              <a:t>HƯỚNG PHÁT TRIỂN</a:t>
+            </a:r>
+          </a:p>
+          <a:p>
+            <a:pPr algn="l">
+              <a:lnSpc>
+                <a:spcPct val="115000"/>
+              </a:lnSpc>
+              <a:spcAft>
+                <a:spcPts val="600"/>
+              </a:spcAft>
+            </a:pPr>
+            <a:r>
+              <a:rPr sz="1300" b="0">
+                <a:solidFill>
+                  <a:srgbClr val="5A6375"/>
+                </a:solidFill>
+                <a:latin typeface="Arial"/>
+              </a:rPr>
+              <a:t>
+· Thêm mặt nạ phân vùng trời / đường để đổi tông theo từng vùng.
+· Dùng mô hình ước lượng độ sâu đơn ảnh (Depth Anything) thay cho giả thiết phẳng.
+· Thay AdaIN bằng AdaAttN / WCT² để bám cấu trúc tốt hơn.
+· Thu thập ảnh tham chiếu thời tiết tại Việt Nam để khớp bối cảnh triển khai thực tế.
+· Mở rộng sang ban đêm, chói nắng ngược, đèn pha.</a:t>
             </a:r>
           </a:p>
         </p:txBody>
@@ -8591,7 +7940,7 @@
         <p:spPr>
           <a:xfrm>
             <a:off x="0" y="0"/>
-            <a:ext cx="12191695" cy="960120"/>
+            <a:ext cx="12191695" cy="6858000"/>
           </a:xfrm>
           <a:prstGeom prst="rect">
             <a:avLst/>
@@ -8634,8 +7983,8 @@
         </p:nvSpPr>
         <p:spPr>
           <a:xfrm>
-            <a:off x="0" y="960120"/>
-            <a:ext cx="12191695" cy="50292"/>
+            <a:off x="914400" y="1371600"/>
+            <a:ext cx="73152" cy="4206240"/>
           </a:xfrm>
           <a:prstGeom prst="rect">
             <a:avLst/>
@@ -8678,8 +8027,8 @@
         </p:nvSpPr>
         <p:spPr>
           <a:xfrm>
-            <a:off x="548640" y="146304"/>
-            <a:ext cx="10424160" cy="822960"/>
+            <a:off x="1280160" y="1371600"/>
+            <a:ext cx="10058400" cy="4389120"/>
           </a:xfrm>
           <a:prstGeom prst="rect">
             <a:avLst/>
@@ -8701,510 +8050,146 @@
               </a:spcAft>
             </a:pPr>
             <a:r>
-              <a:rPr sz="2700" b="1">
+              <a:rPr sz="3400" b="1">
                 <a:solidFill>
                   <a:srgbClr val="FFFFFF"/>
                 </a:solidFill>
                 <a:latin typeface="Arial"/>
               </a:rPr>
-              <a:t>Hạn chế &amp; hướng phát triển</a:t>
-            </a:r>
-          </a:p>
-        </p:txBody>
-      </p:sp>
-      <p:sp>
-        <p:nvSpPr>
-          <p:cNvPr id="5" name="TextBox 4"/>
-          <p:cNvSpPr txBox="1"/>
-          <p:nvPr/>
-        </p:nvSpPr>
-        <p:spPr>
-          <a:xfrm>
-            <a:off x="11155680" y="6355080"/>
-            <a:ext cx="822960" cy="365760"/>
-          </a:xfrm>
-          <a:prstGeom prst="rect">
-            <a:avLst/>
-          </a:prstGeom>
-          <a:noFill/>
-        </p:spPr>
-        <p:txBody>
-          <a:bodyPr wrap="square" lIns="0" rIns="0">
-            <a:spAutoFit/>
-          </a:bodyPr>
-          <a:lstStyle/>
-          <a:p>
-            <a:pPr algn="r">
-              <a:lnSpc>
-                <a:spcPct val="115000"/>
-              </a:lnSpc>
-              <a:spcAft>
-                <a:spcPts val="600"/>
-              </a:spcAft>
-            </a:pPr>
-            <a:r>
-              <a:rPr sz="1100" b="0">
-                <a:solidFill>
-                  <a:srgbClr val="5A6375"/>
-                </a:solidFill>
-                <a:latin typeface="Arial"/>
-              </a:rPr>
-              <a:t>14</a:t>
-            </a:r>
-          </a:p>
-        </p:txBody>
-      </p:sp>
-      <p:sp>
-        <p:nvSpPr>
-          <p:cNvPr id="6" name="Rectangle 5"/>
-          <p:cNvSpPr/>
-          <p:nvPr/>
-        </p:nvSpPr>
-        <p:spPr>
-          <a:xfrm>
-            <a:off x="640080" y="1371600"/>
-            <a:ext cx="5349240" cy="4480560"/>
-          </a:xfrm>
-          <a:prstGeom prst="rect">
-            <a:avLst/>
-          </a:prstGeom>
-          <a:solidFill>
-            <a:srgbClr val="F4F6FA"/>
-          </a:solidFill>
-          <a:ln>
-            <a:noFill/>
-          </a:ln>
-          <a:effectLst/>
-        </p:spPr>
-        <p:style>
-          <a:lnRef idx="1">
-            <a:schemeClr val="accent1"/>
-          </a:lnRef>
-          <a:fillRef idx="3">
-            <a:schemeClr val="accent1"/>
-          </a:fillRef>
-          <a:effectRef idx="2">
-            <a:schemeClr val="accent1"/>
-          </a:effectRef>
-          <a:fontRef idx="minor">
-            <a:schemeClr val="lt1"/>
-          </a:fontRef>
-        </p:style>
-        <p:txBody>
-          <a:bodyPr rtlCol="0" anchor="ctr"/>
-          <a:lstStyle/>
-          <a:p>
-            <a:pPr algn="ctr"/>
-          </a:p>
-        </p:txBody>
-      </p:sp>
-      <p:sp>
-        <p:nvSpPr>
-          <p:cNvPr id="7" name="Rectangle 6"/>
-          <p:cNvSpPr/>
-          <p:nvPr/>
-        </p:nvSpPr>
-        <p:spPr>
-          <a:xfrm>
-            <a:off x="640080" y="1371600"/>
-            <a:ext cx="64008" cy="4480560"/>
-          </a:xfrm>
-          <a:prstGeom prst="rect">
-            <a:avLst/>
-          </a:prstGeom>
-          <a:solidFill>
-            <a:srgbClr val="E45A5A"/>
-          </a:solidFill>
-          <a:ln>
-            <a:noFill/>
-          </a:ln>
-          <a:effectLst/>
-        </p:spPr>
-        <p:style>
-          <a:lnRef idx="1">
-            <a:schemeClr val="accent1"/>
-          </a:lnRef>
-          <a:fillRef idx="3">
-            <a:schemeClr val="accent1"/>
-          </a:fillRef>
-          <a:effectRef idx="2">
-            <a:schemeClr val="accent1"/>
-          </a:effectRef>
-          <a:fontRef idx="minor">
-            <a:schemeClr val="lt1"/>
-          </a:fontRef>
-        </p:style>
-        <p:txBody>
-          <a:bodyPr rtlCol="0" anchor="ctr"/>
-          <a:lstStyle/>
-          <a:p>
-            <a:pPr algn="ctr"/>
-          </a:p>
-        </p:txBody>
-      </p:sp>
-      <p:sp>
-        <p:nvSpPr>
-          <p:cNvPr id="8" name="TextBox 7"/>
-          <p:cNvSpPr txBox="1"/>
-          <p:nvPr/>
-        </p:nvSpPr>
-        <p:spPr>
-          <a:xfrm>
-            <a:off x="896112" y="1536192"/>
-            <a:ext cx="4892040" cy="4480560"/>
-          </a:xfrm>
-          <a:prstGeom prst="rect">
-            <a:avLst/>
-          </a:prstGeom>
-          <a:noFill/>
-        </p:spPr>
-        <p:txBody>
-          <a:bodyPr wrap="square" lIns="0" rIns="0">
-            <a:spAutoFit/>
-          </a:bodyPr>
-          <a:lstStyle/>
-          <a:p>
-            <a:pPr algn="l">
-              <a:lnSpc>
-                <a:spcPct val="115000"/>
-              </a:lnSpc>
-              <a:spcAft>
-                <a:spcPts val="600"/>
-              </a:spcAft>
-            </a:pPr>
-            <a:r>
-              <a:rPr sz="1600" b="1">
-                <a:solidFill>
-                  <a:srgbClr val="101B33"/>
-                </a:solidFill>
-                <a:latin typeface="Arial"/>
-              </a:rPr>
-              <a:t>HẠN CHẾ</a:t>
-            </a:r>
-          </a:p>
-          <a:p>
-            <a:pPr algn="l">
-              <a:lnSpc>
-                <a:spcPct val="115000"/>
-              </a:lnSpc>
-              <a:spcAft>
-                <a:spcPts val="600"/>
-              </a:spcAft>
-            </a:pPr>
-            <a:r>
-              <a:rPr sz="1300" b="0">
-                <a:solidFill>
-                  <a:srgbClr val="5A6375"/>
-                </a:solidFill>
-                <a:latin typeface="Arial"/>
-              </a:rPr>
-              <a:t>
-· AdaIN chuyển thống kê TOÀN CỤC nên chưa phân biệt vùng trời / mặt đường — sương mù dày ở gần cũng như ở xa.
-· Không có bản đồ độ sâu thật; module vật lý dùng giả thiết mặt đường phẳng.
-· Chất lượng phụ thuộc ảnh tham chiếu: ảnh tham chiếu khác góc chụp quá nhiều sẽ cho tông màu lệch.
-· DAWN chỉ được dùng cho mục đích nghiên cứu, không dùng thương mại.</a:t>
-            </a:r>
-          </a:p>
-        </p:txBody>
-      </p:sp>
-      <p:sp>
-        <p:nvSpPr>
-          <p:cNvPr id="9" name="Rectangle 8"/>
-          <p:cNvSpPr/>
-          <p:nvPr/>
-        </p:nvSpPr>
-        <p:spPr>
-          <a:xfrm>
-            <a:off x="6355080" y="1371600"/>
-            <a:ext cx="5349240" cy="4480560"/>
-          </a:xfrm>
-          <a:prstGeom prst="rect">
-            <a:avLst/>
-          </a:prstGeom>
-          <a:solidFill>
-            <a:srgbClr val="F4F6FA"/>
-          </a:solidFill>
-          <a:ln>
-            <a:noFill/>
-          </a:ln>
-          <a:effectLst/>
-        </p:spPr>
-        <p:style>
-          <a:lnRef idx="1">
-            <a:schemeClr val="accent1"/>
-          </a:lnRef>
-          <a:fillRef idx="3">
-            <a:schemeClr val="accent1"/>
-          </a:fillRef>
-          <a:effectRef idx="2">
-            <a:schemeClr val="accent1"/>
-          </a:effectRef>
-          <a:fontRef idx="minor">
-            <a:schemeClr val="lt1"/>
-          </a:fontRef>
-        </p:style>
-        <p:txBody>
-          <a:bodyPr rtlCol="0" anchor="ctr"/>
-          <a:lstStyle/>
-          <a:p>
-            <a:pPr algn="ctr"/>
-          </a:p>
-        </p:txBody>
-      </p:sp>
-      <p:sp>
-        <p:nvSpPr>
-          <p:cNvPr id="10" name="Rectangle 9"/>
-          <p:cNvSpPr/>
-          <p:nvPr/>
-        </p:nvSpPr>
-        <p:spPr>
-          <a:xfrm>
-            <a:off x="6355080" y="1371600"/>
-            <a:ext cx="64008" cy="4480560"/>
-          </a:xfrm>
-          <a:prstGeom prst="rect">
-            <a:avLst/>
-          </a:prstGeom>
-          <a:solidFill>
-            <a:srgbClr val="18A099"/>
-          </a:solidFill>
-          <a:ln>
-            <a:noFill/>
-          </a:ln>
-          <a:effectLst/>
-        </p:spPr>
-        <p:style>
-          <a:lnRef idx="1">
-            <a:schemeClr val="accent1"/>
-          </a:lnRef>
-          <a:fillRef idx="3">
-            <a:schemeClr val="accent1"/>
-          </a:fillRef>
-          <a:effectRef idx="2">
-            <a:schemeClr val="accent1"/>
-          </a:effectRef>
-          <a:fontRef idx="minor">
-            <a:schemeClr val="lt1"/>
-          </a:fontRef>
-        </p:style>
-        <p:txBody>
-          <a:bodyPr rtlCol="0" anchor="ctr"/>
-          <a:lstStyle/>
-          <a:p>
-            <a:pPr algn="ctr"/>
-          </a:p>
-        </p:txBody>
-      </p:sp>
-      <p:sp>
-        <p:nvSpPr>
-          <p:cNvPr id="11" name="TextBox 10"/>
-          <p:cNvSpPr txBox="1"/>
-          <p:nvPr/>
-        </p:nvSpPr>
-        <p:spPr>
-          <a:xfrm>
-            <a:off x="6611112" y="1536192"/>
-            <a:ext cx="4892040" cy="4480560"/>
-          </a:xfrm>
-          <a:prstGeom prst="rect">
-            <a:avLst/>
-          </a:prstGeom>
-          <a:noFill/>
-        </p:spPr>
-        <p:txBody>
-          <a:bodyPr wrap="square" lIns="0" rIns="0">
-            <a:spAutoFit/>
-          </a:bodyPr>
-          <a:lstStyle/>
-          <a:p>
-            <a:pPr algn="l">
-              <a:lnSpc>
-                <a:spcPct val="115000"/>
-              </a:lnSpc>
-              <a:spcAft>
-                <a:spcPts val="600"/>
-              </a:spcAft>
-            </a:pPr>
-            <a:r>
-              <a:rPr sz="1600" b="1">
-                <a:solidFill>
-                  <a:srgbClr val="101B33"/>
-                </a:solidFill>
-                <a:latin typeface="Arial"/>
-              </a:rPr>
-              <a:t>HƯỚNG PHÁT TRIỂN</a:t>
-            </a:r>
-          </a:p>
-          <a:p>
-            <a:pPr algn="l">
-              <a:lnSpc>
-                <a:spcPct val="115000"/>
-              </a:lnSpc>
-              <a:spcAft>
-                <a:spcPts val="600"/>
-              </a:spcAft>
-            </a:pPr>
-            <a:r>
-              <a:rPr sz="1300" b="0">
-                <a:solidFill>
-                  <a:srgbClr val="5A6375"/>
-                </a:solidFill>
-                <a:latin typeface="Arial"/>
-              </a:rPr>
-              <a:t>
-· Thêm mặt nạ phân vùng trời / đường để đổi tông theo từng vùng.
-· Dùng mô hình ước lượng độ sâu đơn ảnh (Depth Anything) thay cho giả thiết phẳng.
-· Thay AdaIN bằng AdaAttN / WCT² để bám cấu trúc tốt hơn.
-· Thu thập ảnh tham chiếu thời tiết tại Việt Nam để khớp bối cảnh triển khai thực tế.
-· Mở rộng sang ban đêm, chói nắng ngược, đèn pha.</a:t>
-            </a:r>
-          </a:p>
-        </p:txBody>
-      </p:sp>
-    </p:spTree>
-  </p:cSld>
-  <p:clrMapOvr>
-    <a:masterClrMapping/>
-  </p:clrMapOvr>
-</p:sld>
-</file>
-
-<file path=ppt/slides/slide16.xml><?xml version="1.0" encoding="utf-8"?>
-<p:sld xmlns:a="http://schemas.openxmlformats.org/drawingml/2006/main" xmlns:p="http://schemas.openxmlformats.org/presentationml/2006/main" xmlns:r="http://schemas.openxmlformats.org/officeDocument/2006/relationships">
-  <p:cSld>
-    <p:spTree>
-      <p:nvGrpSpPr>
-        <p:cNvPr id="1" name=""/>
-        <p:cNvGrpSpPr/>
-        <p:nvPr/>
-      </p:nvGrpSpPr>
-      <p:grpSpPr/>
-      <p:sp>
-        <p:nvSpPr>
-          <p:cNvPr id="2" name="Rectangle 1"/>
-          <p:cNvSpPr/>
-          <p:nvPr/>
-        </p:nvSpPr>
-        <p:spPr>
-          <a:xfrm>
-            <a:off x="0" y="0"/>
-            <a:ext cx="12191695" cy="6858000"/>
-          </a:xfrm>
-          <a:prstGeom prst="rect">
-            <a:avLst/>
-          </a:prstGeom>
-          <a:solidFill>
-            <a:srgbClr val="101B33"/>
-          </a:solidFill>
-          <a:ln>
-            <a:noFill/>
-          </a:ln>
-          <a:effectLst/>
-        </p:spPr>
-        <p:style>
-          <a:lnRef idx="1">
-            <a:schemeClr val="accent1"/>
-          </a:lnRef>
-          <a:fillRef idx="3">
-            <a:schemeClr val="accent1"/>
-          </a:fillRef>
-          <a:effectRef idx="2">
-            <a:schemeClr val="accent1"/>
-          </a:effectRef>
-          <a:fontRef idx="minor">
-            <a:schemeClr val="lt1"/>
-          </a:fontRef>
-        </p:style>
-        <p:txBody>
-          <a:bodyPr rtlCol="0" anchor="ctr"/>
-          <a:lstStyle/>
-          <a:p>
-            <a:pPr algn="ctr"/>
-          </a:p>
-        </p:txBody>
-      </p:sp>
-      <p:sp>
-        <p:nvSpPr>
-          <p:cNvPr id="3" name="Rectangle 2"/>
-          <p:cNvSpPr/>
-          <p:nvPr/>
-        </p:nvSpPr>
-        <p:spPr>
-          <a:xfrm>
-            <a:off x="914400" y="1371600"/>
-            <a:ext cx="73152" cy="4206240"/>
-          </a:xfrm>
-          <a:prstGeom prst="rect">
-            <a:avLst/>
-          </a:prstGeom>
-          <a:solidFill>
-            <a:srgbClr val="18A099"/>
-          </a:solidFill>
-          <a:ln>
-            <a:noFill/>
-          </a:ln>
-          <a:effectLst/>
-        </p:spPr>
-        <p:style>
-          <a:lnRef idx="1">
-            <a:schemeClr val="accent1"/>
-          </a:lnRef>
-          <a:fillRef idx="3">
-            <a:schemeClr val="accent1"/>
-          </a:fillRef>
-          <a:effectRef idx="2">
-            <a:schemeClr val="accent1"/>
-          </a:effectRef>
-          <a:fontRef idx="minor">
-            <a:schemeClr val="lt1"/>
-          </a:fontRef>
-        </p:style>
-        <p:txBody>
-          <a:bodyPr rtlCol="0" anchor="ctr"/>
-          <a:lstStyle/>
-          <a:p>
-            <a:pPr algn="ctr"/>
-          </a:p>
-        </p:txBody>
-      </p:sp>
-      <p:sp>
-        <p:nvSpPr>
-          <p:cNvPr id="4" name="TextBox 3"/>
-          <p:cNvSpPr txBox="1"/>
-          <p:nvPr/>
-        </p:nvSpPr>
-        <p:spPr>
-          <a:xfrm>
-            <a:off x="1280160" y="1371600"/>
-            <a:ext cx="10058400" cy="4389120"/>
-          </a:xfrm>
-          <a:prstGeom prst="rect">
-            <a:avLst/>
-          </a:prstGeom>
-          <a:noFill/>
-        </p:spPr>
-        <p:txBody>
-          <a:bodyPr wrap="square" lIns="0" rIns="0">
-            <a:spAutoFit/>
-          </a:bodyPr>
-          <a:lstStyle/>
-          <a:p>
-            <a:pPr algn="l">
-              <a:lnSpc>
-                <a:spcPct val="115000"/>
-              </a:lnSpc>
-              <a:spcAft>
-                <a:spcPts val="600"/>
-              </a:spcAft>
-            </a:pPr>
-            <a:r>
-              <a:rPr sz="3400" b="1">
+              <a:t>KẾT LUẬN</a:t>
+            </a:r>
+          </a:p>
+          <a:p>
+            <a:pPr algn="l">
+              <a:lnSpc>
+                <a:spcPct val="115000"/>
+              </a:lnSpc>
+              <a:spcAft>
+                <a:spcPts val="600"/>
+              </a:spcAft>
+            </a:pPr>
+            <a:r>
+              <a:rPr sz="1000" b="0">
                 <a:solidFill>
                   <a:srgbClr val="FFFFFF"/>
                 </a:solidFill>
                 <a:latin typeface="Arial"/>
               </a:rPr>
-              <a:t>KẾT LUẬN</a:t>
+              <a:t/>
+            </a:r>
+          </a:p>
+          <a:p>
+            <a:pPr algn="l">
+              <a:lnSpc>
+                <a:spcPct val="115000"/>
+              </a:lnSpc>
+              <a:spcAft>
+                <a:spcPts val="600"/>
+              </a:spcAft>
+            </a:pPr>
+            <a:r>
+              <a:rPr sz="1800" b="0">
+                <a:solidFill>
+                  <a:srgbClr val="D5DEEC"/>
+                </a:solidFill>
+                <a:latin typeface="Arial"/>
+              </a:rPr>
+              <a:t>· Xây dựng trọn vẹn pipeline sinh ảnh giao thông thời tiết xấu từ 2 ảnh đầu vào, đúng yêu cầu đề bài.</a:t>
+            </a:r>
+          </a:p>
+          <a:p>
+            <a:pPr algn="l">
+              <a:lnSpc>
+                <a:spcPct val="115000"/>
+              </a:lnSpc>
+              <a:spcAft>
+                <a:spcPts val="600"/>
+              </a:spcAft>
+            </a:pPr>
+            <a:r>
+              <a:rPr sz="1800" b="0">
+                <a:solidFill>
+                  <a:srgbClr val="D5DEEC"/>
+                </a:solidFill>
+                <a:latin typeface="Arial"/>
+              </a:rPr>
+              <a:t>· Toàn bộ dùng mã nguồn mở; decoder chỉ 3,51 M tham số, huấn luyện 37 phút trên 1 GPU.</a:t>
+            </a:r>
+          </a:p>
+          <a:p>
+            <a:pPr algn="l">
+              <a:lnSpc>
+                <a:spcPct val="115000"/>
+              </a:lnSpc>
+              <a:spcAft>
+                <a:spcPts val="600"/>
+              </a:spcAft>
+            </a:pPr>
+            <a:r>
+              <a:rPr sz="1800" b="0">
+                <a:solidFill>
+                  <a:srgbClr val="D5DEEC"/>
+                </a:solidFill>
+                <a:latin typeface="Arial"/>
+              </a:rPr>
+              <a:t>· Nhãn bounding box tái sử dụng 100% — chi phí gán nhãn cho dữ liệu mới bằng 0.</a:t>
+            </a:r>
+          </a:p>
+          <a:p>
+            <a:pPr algn="l">
+              <a:lnSpc>
+                <a:spcPct val="115000"/>
+              </a:lnSpc>
+              <a:spcAft>
+                <a:spcPts val="600"/>
+              </a:spcAft>
+            </a:pPr>
+            <a:r>
+              <a:rPr sz="1800" b="0">
+                <a:solidFill>
+                  <a:srgbClr val="D5DEEC"/>
+                </a:solidFill>
+                <a:latin typeface="Arial"/>
+              </a:rPr>
+              <a:t>· Có kiểm chứng định lượng (SSIM/EdgeRecall/FID) và thí nghiệm downstream với YOLOv8.</a:t>
+            </a:r>
+          </a:p>
+          <a:p>
+            <a:pPr algn="l">
+              <a:lnSpc>
+                <a:spcPct val="115000"/>
+              </a:lnSpc>
+              <a:spcAft>
+                <a:spcPts val="600"/>
+              </a:spcAft>
+            </a:pPr>
+            <a:r>
+              <a:rPr sz="1800" b="0">
+                <a:solidFill>
+                  <a:srgbClr val="D5DEEC"/>
+                </a:solidFill>
+                <a:latin typeface="Arial"/>
+              </a:rPr>
+              <a:t>· Bàn giao: mã nguồn chạy được bằng 1 lệnh, web demo Gradio, mô hình đã huấn luyện,</a:t>
+            </a:r>
+          </a:p>
+          <a:p>
+            <a:pPr algn="l">
+              <a:lnSpc>
+                <a:spcPct val="115000"/>
+              </a:lnSpc>
+              <a:spcAft>
+                <a:spcPts val="600"/>
+              </a:spcAft>
+            </a:pPr>
+            <a:r>
+              <a:rPr sz="1800" b="0">
+                <a:solidFill>
+                  <a:srgbClr val="D5DEEC"/>
+                </a:solidFill>
+                <a:latin typeface="Arial"/>
+              </a:rPr>
+              <a:t>   báo cáo và slide — toàn bộ số liệu sinh tự động từ kết quả thật.</a:t>
             </a:r>
           </a:p>
           <a:p>
@@ -9236,127 +8221,13 @@
               </a:spcAft>
             </a:pPr>
             <a:r>
-              <a:rPr sz="1800" b="0">
-                <a:solidFill>
-                  <a:srgbClr val="D5DEEC"/>
-                </a:solidFill>
-                <a:latin typeface="Arial"/>
-              </a:rPr>
-              <a:t>· Xây dựng trọn vẹn pipeline sinh ảnh giao thông thời tiết xấu từ 2 ảnh đầu vào, đúng yêu cầu đề bài.</a:t>
-            </a:r>
-          </a:p>
-          <a:p>
-            <a:pPr algn="l">
-              <a:lnSpc>
-                <a:spcPct val="115000"/>
-              </a:lnSpc>
-              <a:spcAft>
-                <a:spcPts val="600"/>
-              </a:spcAft>
-            </a:pPr>
-            <a:r>
-              <a:rPr sz="1800" b="0">
-                <a:solidFill>
-                  <a:srgbClr val="D5DEEC"/>
-                </a:solidFill>
-                <a:latin typeface="Arial"/>
-              </a:rPr>
-              <a:t>· Toàn bộ dùng mã nguồn mở; decoder chỉ 3,51 M tham số, huấn luyện ~1 giờ trên 1 GPU.</a:t>
-            </a:r>
-          </a:p>
-          <a:p>
-            <a:pPr algn="l">
-              <a:lnSpc>
-                <a:spcPct val="115000"/>
-              </a:lnSpc>
-              <a:spcAft>
-                <a:spcPts val="600"/>
-              </a:spcAft>
-            </a:pPr>
-            <a:r>
-              <a:rPr sz="1800" b="0">
-                <a:solidFill>
-                  <a:srgbClr val="D5DEEC"/>
-                </a:solidFill>
-                <a:latin typeface="Arial"/>
-              </a:rPr>
-              <a:t>· Nhãn bounding box tái sử dụng 100% — chi phí gán nhãn cho dữ liệu mới bằng 0.</a:t>
-            </a:r>
-          </a:p>
-          <a:p>
-            <a:pPr algn="l">
-              <a:lnSpc>
-                <a:spcPct val="115000"/>
-              </a:lnSpc>
-              <a:spcAft>
-                <a:spcPts val="600"/>
-              </a:spcAft>
-            </a:pPr>
-            <a:r>
-              <a:rPr sz="1800" b="0">
-                <a:solidFill>
-                  <a:srgbClr val="D5DEEC"/>
-                </a:solidFill>
-                <a:latin typeface="Arial"/>
-              </a:rPr>
-              <a:t>· Có kiểm chứng định lượng (SSIM/EdgeRecall/FID) và thí nghiệm downstream với YOLOv8.</a:t>
-            </a:r>
-          </a:p>
-          <a:p>
-            <a:pPr algn="l">
-              <a:lnSpc>
-                <a:spcPct val="115000"/>
-              </a:lnSpc>
-              <a:spcAft>
-                <a:spcPts val="600"/>
-              </a:spcAft>
-            </a:pPr>
-            <a:r>
-              <a:rPr sz="1800" b="0">
-                <a:solidFill>
-                  <a:srgbClr val="D5DEEC"/>
-                </a:solidFill>
-                <a:latin typeface="Arial"/>
-              </a:rPr>
-              <a:t>· Kèm web demo trực quan, chạy toàn bộ quy trình bằng một lệnh.</a:t>
-            </a:r>
-          </a:p>
-          <a:p>
-            <a:pPr algn="l">
-              <a:lnSpc>
-                <a:spcPct val="115000"/>
-              </a:lnSpc>
-              <a:spcAft>
-                <a:spcPts val="600"/>
-              </a:spcAft>
-            </a:pPr>
-            <a:r>
-              <a:rPr sz="1200" b="0">
-                <a:solidFill>
-                  <a:srgbClr val="FFFFFF"/>
-                </a:solidFill>
-                <a:latin typeface="Arial"/>
-              </a:rPr>
-              <a:t/>
-            </a:r>
-          </a:p>
-          <a:p>
-            <a:pPr algn="l">
-              <a:lnSpc>
-                <a:spcPct val="115000"/>
-              </a:lnSpc>
-              <a:spcAft>
-                <a:spcPts val="600"/>
-              </a:spcAft>
-            </a:pPr>
-            <a:r>
               <a:rPr sz="2400" b="1">
                 <a:solidFill>
                   <a:srgbClr val="18A099"/>
                 </a:solidFill>
                 <a:latin typeface="Arial"/>
               </a:rPr>
-              <a:t>Xin cảm ơn!</a:t>
+              <a:t>Nhóm 6  —  Xin cảm ơn!</a:t>
             </a:r>
           </a:p>
         </p:txBody>
@@ -14207,7 +13078,7 @@
                 </a:solidFill>
                 <a:latin typeface="Arial"/>
               </a:rPr>
-              <a:t>8 / 20.000</a:t>
+              <a:t>8 / 12.000</a:t>
             </a:r>
           </a:p>
         </p:txBody>
@@ -14591,7 +13462,7 @@
                 </a:solidFill>
                 <a:latin typeface="Arial"/>
               </a:rPr>
-              <a:t>≈ 1 giờ (RTX 5060 Ti)</a:t>
+              <a:t>37 phút (RTX 5060 Ti)</a:t>
             </a:r>
           </a:p>
         </p:txBody>

--- a/slides/BaoCao_TangCuongDuLieuThoiTiet.pptx
+++ b/slides/BaoCao_TangCuongDuLieuThoiTiet.pptx
@@ -9718,8 +9718,8 @@
         </p:blipFill>
         <p:spPr>
           <a:xfrm>
-            <a:off x="553720" y="1234440"/>
-            <a:ext cx="11054080" cy="2926080"/>
+            <a:off x="838775" y="1188720"/>
+            <a:ext cx="10483969" cy="2743199"/>
           </a:xfrm>
           <a:prstGeom prst="rect">
             <a:avLst/>
@@ -9728,13 +9728,55 @@
       </p:pic>
       <p:sp>
         <p:nvSpPr>
-          <p:cNvPr id="7" name="Rectangle 6"/>
+          <p:cNvPr id="7" name="TextBox 6"/>
+          <p:cNvSpPr txBox="1"/>
+          <p:nvPr/>
+        </p:nvSpPr>
+        <p:spPr>
+          <a:xfrm>
+            <a:off x="685800" y="3977639"/>
+            <a:ext cx="10789920" cy="365760"/>
+          </a:xfrm>
+          <a:prstGeom prst="rect">
+            <a:avLst/>
+          </a:prstGeom>
+          <a:noFill/>
+        </p:spPr>
+        <p:txBody>
+          <a:bodyPr wrap="square" lIns="0" rIns="0">
+            <a:spAutoFit/>
+          </a:bodyPr>
+          <a:lstStyle/>
+          <a:p>
+            <a:pPr algn="l">
+              <a:lnSpc>
+                <a:spcPct val="115000"/>
+              </a:lnSpc>
+              <a:spcAft>
+                <a:spcPts val="600"/>
+              </a:spcAft>
+            </a:pPr>
+            <a:r>
+              <a:rPr sz="1300" b="0">
+                <a:solidFill>
+                  <a:srgbClr val="5A6375"/>
+                </a:solidFill>
+                <a:latin typeface="Arial"/>
+              </a:rPr>
+              <a:t>Biểu đồ = kho 10.000 ảnh có sẵn để chọn.   Bảng = số ảnh đã LỌC RA và thực sự dùng (chỉ lấy ban ngày, giới hạn số lượng cho nhẹ).</a:t>
+            </a:r>
+          </a:p>
+        </p:txBody>
+      </p:sp>
+      <p:sp>
+        <p:nvSpPr>
+          <p:cNvPr id="8" name="Rectangle 7"/>
           <p:cNvSpPr/>
           <p:nvPr/>
         </p:nvSpPr>
         <p:spPr>
           <a:xfrm>
-            <a:off x="685800" y="4434840"/>
+            <a:off x="685800" y="4407408"/>
             <a:ext cx="10789920" cy="384048"/>
           </a:xfrm>
           <a:prstGeom prst="rect">
@@ -9772,14 +9814,14 @@
       </p:sp>
       <p:sp>
         <p:nvSpPr>
-          <p:cNvPr id="8" name="TextBox 7"/>
+          <p:cNvPr id="9" name="TextBox 8"/>
           <p:cNvSpPr txBox="1"/>
           <p:nvPr/>
         </p:nvSpPr>
         <p:spPr>
           <a:xfrm>
-            <a:off x="795528" y="4498848"/>
-            <a:ext cx="2312125" cy="384048"/>
+            <a:off x="795528" y="4471416"/>
+            <a:ext cx="2790496" cy="384048"/>
           </a:xfrm>
           <a:prstGeom prst="rect">
             <a:avLst/>
@@ -9801,27 +9843,27 @@
               </a:spcAft>
             </a:pPr>
             <a:r>
-              <a:rPr sz="1300" b="1">
+              <a:rPr sz="1200" b="1">
                 <a:solidFill>
                   <a:srgbClr val="FFFFFF"/>
                 </a:solidFill>
                 <a:latin typeface="Arial"/>
               </a:rPr>
-              <a:t>Bộ dữ liệu</a:t>
-            </a:r>
-          </a:p>
-        </p:txBody>
-      </p:sp>
-      <p:sp>
-        <p:nvSpPr>
-          <p:cNvPr id="9" name="TextBox 8"/>
+              <a:t>Đã chọn ra từ kho</a:t>
+            </a:r>
+          </a:p>
+        </p:txBody>
+      </p:sp>
+      <p:sp>
+        <p:nvSpPr>
+          <p:cNvPr id="10" name="TextBox 9"/>
           <p:cNvSpPr txBox="1"/>
           <p:nvPr/>
         </p:nvSpPr>
         <p:spPr>
           <a:xfrm>
-            <a:off x="3107653" y="4498848"/>
-            <a:ext cx="5009605" cy="384048"/>
+            <a:off x="3586024" y="4471416"/>
+            <a:ext cx="4650827" cy="384048"/>
           </a:xfrm>
           <a:prstGeom prst="rect">
             <a:avLst/>
@@ -9843,7 +9885,7 @@
               </a:spcAft>
             </a:pPr>
             <a:r>
-              <a:rPr sz="1300" b="1">
+              <a:rPr sz="1200" b="1">
                 <a:solidFill>
                   <a:srgbClr val="FFFFFF"/>
                 </a:solidFill>
@@ -9856,14 +9898,14 @@
       </p:sp>
       <p:sp>
         <p:nvSpPr>
-          <p:cNvPr id="10" name="TextBox 9"/>
+          <p:cNvPr id="11" name="TextBox 10"/>
           <p:cNvSpPr txBox="1"/>
           <p:nvPr/>
         </p:nvSpPr>
         <p:spPr>
           <a:xfrm>
-            <a:off x="8117258" y="4498848"/>
-            <a:ext cx="1637755" cy="384048"/>
+            <a:off x="8236851" y="4471416"/>
+            <a:ext cx="1581281" cy="384048"/>
           </a:xfrm>
           <a:prstGeom prst="rect">
             <a:avLst/>
@@ -9885,7 +9927,7 @@
               </a:spcAft>
             </a:pPr>
             <a:r>
-              <a:rPr sz="1300" b="1">
+              <a:rPr sz="1200" b="1">
                 <a:solidFill>
                   <a:srgbClr val="FFFFFF"/>
                 </a:solidFill>
@@ -9898,14 +9940,14 @@
       </p:sp>
       <p:sp>
         <p:nvSpPr>
-          <p:cNvPr id="11" name="TextBox 10"/>
+          <p:cNvPr id="12" name="TextBox 11"/>
           <p:cNvSpPr txBox="1"/>
           <p:nvPr/>
         </p:nvSpPr>
         <p:spPr>
           <a:xfrm>
-            <a:off x="9755013" y="4498848"/>
-            <a:ext cx="1830432" cy="384048"/>
+            <a:off x="9818132" y="4471416"/>
+            <a:ext cx="1767314" cy="384048"/>
           </a:xfrm>
           <a:prstGeom prst="rect">
             <a:avLst/>
@@ -9927,7 +9969,7 @@
               </a:spcAft>
             </a:pPr>
             <a:r>
-              <a:rPr sz="1300" b="1">
+              <a:rPr sz="1200" b="1">
                 <a:solidFill>
                   <a:srgbClr val="FFFFFF"/>
                 </a:solidFill>
@@ -9940,13 +9982,13 @@
       </p:sp>
       <p:sp>
         <p:nvSpPr>
-          <p:cNvPr id="12" name="Rectangle 11"/>
+          <p:cNvPr id="13" name="Rectangle 12"/>
           <p:cNvSpPr/>
           <p:nvPr/>
         </p:nvSpPr>
         <p:spPr>
           <a:xfrm>
-            <a:off x="685800" y="4818888"/>
+            <a:off x="685800" y="4791456"/>
             <a:ext cx="10789920" cy="384048"/>
           </a:xfrm>
           <a:prstGeom prst="rect">
@@ -9984,14 +10026,14 @@
       </p:sp>
       <p:sp>
         <p:nvSpPr>
-          <p:cNvPr id="13" name="TextBox 12"/>
+          <p:cNvPr id="14" name="TextBox 13"/>
           <p:cNvSpPr txBox="1"/>
           <p:nvPr/>
         </p:nvSpPr>
         <p:spPr>
           <a:xfrm>
-            <a:off x="795528" y="4882896"/>
-            <a:ext cx="2312125" cy="384048"/>
+            <a:off x="795528" y="4855464"/>
+            <a:ext cx="2790496" cy="384048"/>
           </a:xfrm>
           <a:prstGeom prst="rect">
             <a:avLst/>
@@ -10013,27 +10055,27 @@
               </a:spcAft>
             </a:pPr>
             <a:r>
-              <a:rPr sz="1300" b="0">
+              <a:rPr sz="1200" b="0">
                 <a:solidFill>
                   <a:srgbClr val="101B33"/>
                 </a:solidFill>
                 <a:latin typeface="Arial"/>
               </a:rPr>
-              <a:t>BDD100K (subset 10k)</a:t>
-            </a:r>
-          </a:p>
-        </p:txBody>
-      </p:sp>
-      <p:sp>
-        <p:nvSpPr>
-          <p:cNvPr id="14" name="TextBox 13"/>
+              <a:t>BDD100K — trời quang, ban ngày</a:t>
+            </a:r>
+          </a:p>
+        </p:txBody>
+      </p:sp>
+      <p:sp>
+        <p:nvSpPr>
+          <p:cNvPr id="15" name="TextBox 14"/>
           <p:cNvSpPr txBox="1"/>
           <p:nvPr/>
         </p:nvSpPr>
         <p:spPr>
           <a:xfrm>
-            <a:off x="3107653" y="4882896"/>
-            <a:ext cx="5009605" cy="384048"/>
+            <a:off x="3586024" y="4855464"/>
+            <a:ext cx="4650827" cy="384048"/>
           </a:xfrm>
           <a:prstGeom prst="rect">
             <a:avLst/>
@@ -10055,27 +10097,27 @@
               </a:spcAft>
             </a:pPr>
             <a:r>
-              <a:rPr sz="1300" b="0">
+              <a:rPr sz="1200" b="0">
                 <a:solidFill>
                   <a:srgbClr val="101B33"/>
                 </a:solidFill>
                 <a:latin typeface="Arial"/>
               </a:rPr>
-              <a:t>Ảnh nội dung (trời quang, ban ngày) + nhãn box</a:t>
-            </a:r>
-          </a:p>
-        </p:txBody>
-      </p:sp>
-      <p:sp>
-        <p:nvSpPr>
-          <p:cNvPr id="15" name="TextBox 14"/>
+              <a:t>Ảnh nội dung (đầu vào) + nhãn bounding box</a:t>
+            </a:r>
+          </a:p>
+        </p:txBody>
+      </p:sp>
+      <p:sp>
+        <p:nvSpPr>
+          <p:cNvPr id="16" name="TextBox 15"/>
           <p:cNvSpPr txBox="1"/>
           <p:nvPr/>
         </p:nvSpPr>
         <p:spPr>
           <a:xfrm>
-            <a:off x="8117258" y="4882896"/>
-            <a:ext cx="1637755" cy="384048"/>
+            <a:off x="8236851" y="4855464"/>
+            <a:ext cx="1581281" cy="384048"/>
           </a:xfrm>
           <a:prstGeom prst="rect">
             <a:avLst/>
@@ -10097,7 +10139,7 @@
               </a:spcAft>
             </a:pPr>
             <a:r>
-              <a:rPr sz="1300" b="0">
+              <a:rPr sz="1200" b="0">
                 <a:solidFill>
                   <a:srgbClr val="101B33"/>
                 </a:solidFill>
@@ -10110,14 +10152,14 @@
       </p:sp>
       <p:sp>
         <p:nvSpPr>
-          <p:cNvPr id="16" name="TextBox 15"/>
+          <p:cNvPr id="17" name="TextBox 16"/>
           <p:cNvSpPr txBox="1"/>
           <p:nvPr/>
         </p:nvSpPr>
         <p:spPr>
           <a:xfrm>
-            <a:off x="9755013" y="4882896"/>
-            <a:ext cx="1830432" cy="384048"/>
+            <a:off x="9818132" y="4855464"/>
+            <a:ext cx="1767314" cy="384048"/>
           </a:xfrm>
           <a:prstGeom prst="rect">
             <a:avLst/>
@@ -10139,7 +10181,7 @@
               </a:spcAft>
             </a:pPr>
             <a:r>
-              <a:rPr sz="1300" b="0">
+              <a:rPr sz="1200" b="0">
                 <a:solidFill>
                   <a:srgbClr val="101B33"/>
                 </a:solidFill>
@@ -10152,13 +10194,13 @@
       </p:sp>
       <p:sp>
         <p:nvSpPr>
-          <p:cNvPr id="17" name="Rectangle 16"/>
+          <p:cNvPr id="18" name="Rectangle 17"/>
           <p:cNvSpPr/>
           <p:nvPr/>
         </p:nvSpPr>
         <p:spPr>
           <a:xfrm>
-            <a:off x="685800" y="5202936"/>
+            <a:off x="685800" y="5175504"/>
             <a:ext cx="10789920" cy="384048"/>
           </a:xfrm>
           <a:prstGeom prst="rect">
@@ -10196,14 +10238,14 @@
       </p:sp>
       <p:sp>
         <p:nvSpPr>
-          <p:cNvPr id="18" name="TextBox 17"/>
+          <p:cNvPr id="19" name="TextBox 18"/>
           <p:cNvSpPr txBox="1"/>
           <p:nvPr/>
         </p:nvSpPr>
         <p:spPr>
           <a:xfrm>
-            <a:off x="795528" y="5266944"/>
-            <a:ext cx="2312125" cy="384048"/>
+            <a:off x="795528" y="5239512"/>
+            <a:ext cx="2790496" cy="384048"/>
           </a:xfrm>
           <a:prstGeom prst="rect">
             <a:avLst/>
@@ -10225,27 +10267,27 @@
               </a:spcAft>
             </a:pPr>
             <a:r>
-              <a:rPr sz="1300" b="0">
+              <a:rPr sz="1200" b="0">
                 <a:solidFill>
                   <a:srgbClr val="101B33"/>
                 </a:solidFill>
                 <a:latin typeface="Arial"/>
               </a:rPr>
-              <a:t>BDD100K (mưa / tuyết)</a:t>
-            </a:r>
-          </a:p>
-        </p:txBody>
-      </p:sp>
-      <p:sp>
-        <p:nvSpPr>
-          <p:cNvPr id="19" name="TextBox 18"/>
+              <a:t>BDD100K — mưa/tuyết, ban ngày</a:t>
+            </a:r>
+          </a:p>
+        </p:txBody>
+      </p:sp>
+      <p:sp>
+        <p:nvSpPr>
+          <p:cNvPr id="20" name="TextBox 19"/>
           <p:cNvSpPr txBox="1"/>
           <p:nvPr/>
         </p:nvSpPr>
         <p:spPr>
           <a:xfrm>
-            <a:off x="3107653" y="5266944"/>
-            <a:ext cx="5009605" cy="384048"/>
+            <a:off x="3586024" y="5239512"/>
+            <a:ext cx="4650827" cy="384048"/>
           </a:xfrm>
           <a:prstGeom prst="rect">
             <a:avLst/>
@@ -10267,27 +10309,27 @@
               </a:spcAft>
             </a:pPr>
             <a:r>
-              <a:rPr sz="1300" b="0">
+              <a:rPr sz="1200" b="0">
                 <a:solidFill>
                   <a:srgbClr val="101B33"/>
                 </a:solidFill>
                 <a:latin typeface="Arial"/>
               </a:rPr>
-              <a:t>Ảnh tham chiếu + tập test THẬT</a:t>
-            </a:r>
-          </a:p>
-        </p:txBody>
-      </p:sp>
-      <p:sp>
-        <p:nvSpPr>
-          <p:cNvPr id="20" name="TextBox 19"/>
+              <a:t>300 ảnh tham chiếu  +  500 ảnh tập test THẬT</a:t>
+            </a:r>
+          </a:p>
+        </p:txBody>
+      </p:sp>
+      <p:sp>
+        <p:nvSpPr>
+          <p:cNvPr id="21" name="TextBox 20"/>
           <p:cNvSpPr txBox="1"/>
           <p:nvPr/>
         </p:nvSpPr>
         <p:spPr>
           <a:xfrm>
-            <a:off x="8117258" y="5266944"/>
-            <a:ext cx="1637755" cy="384048"/>
+            <a:off x="8236851" y="5239512"/>
+            <a:ext cx="1581281" cy="384048"/>
           </a:xfrm>
           <a:prstGeom prst="rect">
             <a:avLst/>
@@ -10309,7 +10351,7 @@
               </a:spcAft>
             </a:pPr>
             <a:r>
-              <a:rPr sz="1300" b="0">
+              <a:rPr sz="1200" b="0">
                 <a:solidFill>
                   <a:srgbClr val="101B33"/>
                 </a:solidFill>
@@ -10322,14 +10364,14 @@
       </p:sp>
       <p:sp>
         <p:nvSpPr>
-          <p:cNvPr id="21" name="TextBox 20"/>
+          <p:cNvPr id="22" name="TextBox 21"/>
           <p:cNvSpPr txBox="1"/>
           <p:nvPr/>
         </p:nvSpPr>
         <p:spPr>
           <a:xfrm>
-            <a:off x="9755013" y="5266944"/>
-            <a:ext cx="1830432" cy="384048"/>
+            <a:off x="9818132" y="5239512"/>
+            <a:ext cx="1767314" cy="384048"/>
           </a:xfrm>
           <a:prstGeom prst="rect">
             <a:avLst/>
@@ -10351,7 +10393,7 @@
               </a:spcAft>
             </a:pPr>
             <a:r>
-              <a:rPr sz="1300" b="0">
+              <a:rPr sz="1200" b="0">
                 <a:solidFill>
                   <a:srgbClr val="101B33"/>
                 </a:solidFill>
@@ -10364,13 +10406,13 @@
       </p:sp>
       <p:sp>
         <p:nvSpPr>
-          <p:cNvPr id="22" name="Rectangle 21"/>
+          <p:cNvPr id="23" name="Rectangle 22"/>
           <p:cNvSpPr/>
           <p:nvPr/>
         </p:nvSpPr>
         <p:spPr>
           <a:xfrm>
-            <a:off x="685800" y="5586984"/>
+            <a:off x="685800" y="5559552"/>
             <a:ext cx="10789920" cy="384048"/>
           </a:xfrm>
           <a:prstGeom prst="rect">
@@ -10408,14 +10450,14 @@
       </p:sp>
       <p:sp>
         <p:nvSpPr>
-          <p:cNvPr id="23" name="TextBox 22"/>
+          <p:cNvPr id="24" name="TextBox 23"/>
           <p:cNvSpPr txBox="1"/>
           <p:nvPr/>
         </p:nvSpPr>
         <p:spPr>
           <a:xfrm>
-            <a:off x="795528" y="5650992"/>
-            <a:ext cx="2312125" cy="384048"/>
+            <a:off x="795528" y="5623560"/>
+            <a:ext cx="2790496" cy="384048"/>
           </a:xfrm>
           <a:prstGeom prst="rect">
             <a:avLst/>
@@ -10437,7 +10479,7 @@
               </a:spcAft>
             </a:pPr>
             <a:r>
-              <a:rPr sz="1300" b="0">
+              <a:rPr sz="1200" b="0">
                 <a:solidFill>
                   <a:srgbClr val="101B33"/>
                 </a:solidFill>
@@ -10450,14 +10492,14 @@
       </p:sp>
       <p:sp>
         <p:nvSpPr>
-          <p:cNvPr id="24" name="TextBox 23"/>
+          <p:cNvPr id="25" name="TextBox 24"/>
           <p:cNvSpPr txBox="1"/>
           <p:nvPr/>
         </p:nvSpPr>
         <p:spPr>
           <a:xfrm>
-            <a:off x="3107653" y="5650992"/>
-            <a:ext cx="5009605" cy="384048"/>
+            <a:off x="3586024" y="5623560"/>
+            <a:ext cx="4650827" cy="384048"/>
           </a:xfrm>
           <a:prstGeom prst="rect">
             <a:avLst/>
@@ -10479,7 +10521,7 @@
               </a:spcAft>
             </a:pPr>
             <a:r>
-              <a:rPr sz="1300" b="0">
+              <a:rPr sz="1200" b="0">
                 <a:solidFill>
                   <a:srgbClr val="101B33"/>
                 </a:solidFill>
@@ -10492,14 +10534,14 @@
       </p:sp>
       <p:sp>
         <p:nvSpPr>
-          <p:cNvPr id="25" name="TextBox 24"/>
+          <p:cNvPr id="26" name="TextBox 25"/>
           <p:cNvSpPr txBox="1"/>
           <p:nvPr/>
         </p:nvSpPr>
         <p:spPr>
           <a:xfrm>
-            <a:off x="8117258" y="5650992"/>
-            <a:ext cx="1637755" cy="384048"/>
+            <a:off x="8236851" y="5623560"/>
+            <a:ext cx="1581281" cy="384048"/>
           </a:xfrm>
           <a:prstGeom prst="rect">
             <a:avLst/>
@@ -10521,27 +10563,27 @@
               </a:spcAft>
             </a:pPr>
             <a:r>
-              <a:rPr sz="1300" b="0">
+              <a:rPr sz="1200" b="0">
                 <a:solidFill>
                   <a:srgbClr val="101B33"/>
                 </a:solidFill>
                 <a:latin typeface="Arial"/>
               </a:rPr>
-              <a:t>1.000 ảnh</a:t>
-            </a:r>
-          </a:p>
-        </p:txBody>
-      </p:sp>
-      <p:sp>
-        <p:nvSpPr>
-          <p:cNvPr id="26" name="TextBox 25"/>
+              <a:t>1.027 ảnh</a:t>
+            </a:r>
+          </a:p>
+        </p:txBody>
+      </p:sp>
+      <p:sp>
+        <p:nvSpPr>
+          <p:cNvPr id="27" name="TextBox 26"/>
           <p:cNvSpPr txBox="1"/>
           <p:nvPr/>
         </p:nvSpPr>
         <p:spPr>
           <a:xfrm>
-            <a:off x="9755013" y="5650992"/>
-            <a:ext cx="1830432" cy="384048"/>
+            <a:off x="9818132" y="5623560"/>
+            <a:ext cx="1767314" cy="384048"/>
           </a:xfrm>
           <a:prstGeom prst="rect">
             <a:avLst/>
@@ -10563,7 +10605,7 @@
               </a:spcAft>
             </a:pPr>
             <a:r>
-              <a:rPr sz="1300" b="0">
+              <a:rPr sz="1200" b="0">
                 <a:solidFill>
                   <a:srgbClr val="101B33"/>
                 </a:solidFill>

--- a/slides/BaoCao_TangCuongDuLieuThoiTiet.pptx
+++ b/slides/BaoCao_TangCuongDuLieuThoiTiet.pptx
@@ -10759,7 +10759,7 @@
                 </a:solidFill>
                 <a:latin typeface="Arial"/>
               </a:rPr>
-              <a:t>Phương pháp — 3 khối nối tiếp</a:t>
+              <a:t>Dữ liệu — ảnh mẫu &amp; định dạng nhãn</a:t>
             </a:r>
           </a:p>
           <a:p>
@@ -10778,7 +10778,7 @@
                 </a:solidFill>
                 <a:latin typeface="Arial"/>
               </a:rPr>
-              <a:t>Mỗi khối bù đúng một điểm yếu của khối trước</a:t>
+              <a:t>Hai loại ảnh đầu vào, và nhãn đi kèm mỗi ảnh nội dung</a:t>
             </a:r>
           </a:p>
         </p:txBody>
@@ -10825,16 +10825,40 @@
           </a:p>
         </p:txBody>
       </p:sp>
-      <p:sp>
-        <p:nvSpPr>
-          <p:cNvPr id="6" name="Rectangle 5"/>
+      <p:pic>
+        <p:nvPicPr>
+          <p:cNvPr id="6" name="Picture 5" descr="fig_data_samples.jpg"/>
+          <p:cNvPicPr>
+            <a:picLocks noChangeAspect="1"/>
+          </p:cNvPicPr>
+          <p:nvPr/>
+        </p:nvPicPr>
+        <p:blipFill>
+          <a:blip r:embed="rId2"/>
+          <a:stretch>
+            <a:fillRect/>
+          </a:stretch>
+        </p:blipFill>
+        <p:spPr>
+          <a:xfrm>
+            <a:off x="823878" y="1170432"/>
+            <a:ext cx="10513763" cy="3200400"/>
+          </a:xfrm>
+          <a:prstGeom prst="rect">
+            <a:avLst/>
+          </a:prstGeom>
+        </p:spPr>
+      </p:pic>
+      <p:sp>
+        <p:nvSpPr>
+          <p:cNvPr id="7" name="Rectangle 6"/>
           <p:cNvSpPr/>
           <p:nvPr/>
         </p:nvSpPr>
         <p:spPr>
           <a:xfrm>
-            <a:off x="548640" y="1371600"/>
-            <a:ext cx="3337560" cy="3017520"/>
+            <a:off x="640080" y="4526280"/>
+            <a:ext cx="5394960" cy="1783080"/>
           </a:xfrm>
           <a:prstGeom prst="rect">
             <a:avLst/>
@@ -10871,14 +10895,14 @@
       </p:sp>
       <p:sp>
         <p:nvSpPr>
-          <p:cNvPr id="7" name="Rectangle 6"/>
+          <p:cNvPr id="8" name="Rectangle 7"/>
           <p:cNvSpPr/>
           <p:nvPr/>
         </p:nvSpPr>
         <p:spPr>
           <a:xfrm>
-            <a:off x="548640" y="1371600"/>
-            <a:ext cx="3337560" cy="82296"/>
+            <a:off x="640080" y="4526280"/>
+            <a:ext cx="64008" cy="1783080"/>
           </a:xfrm>
           <a:prstGeom prst="rect">
             <a:avLst/>
@@ -10915,14 +10939,14 @@
       </p:sp>
       <p:sp>
         <p:nvSpPr>
-          <p:cNvPr id="8" name="TextBox 7"/>
+          <p:cNvPr id="9" name="TextBox 8"/>
           <p:cNvSpPr txBox="1"/>
           <p:nvPr/>
         </p:nvSpPr>
         <p:spPr>
           <a:xfrm>
-            <a:off x="777240" y="1600200"/>
-            <a:ext cx="2926080" cy="2743200"/>
+            <a:off x="896112" y="4690872"/>
+            <a:ext cx="4937760" cy="1783080"/>
           </a:xfrm>
           <a:prstGeom prst="rect">
             <a:avLst/>
@@ -10944,13 +10968,13 @@
               </a:spcAft>
             </a:pPr>
             <a:r>
-              <a:rPr sz="1700" b="1">
+              <a:rPr sz="1600" b="1">
                 <a:solidFill>
                   <a:srgbClr val="101B33"/>
                 </a:solidFill>
                 <a:latin typeface="Arial"/>
               </a:rPr>
-              <a:t>① AdaIN  (học sâu)</a:t>
+              <a:t>MỖI ẢNH NỘI DUNG CÓ 3 LOẠI NHÃN</a:t>
             </a:r>
           </a:p>
           <a:p>
@@ -10969,28 +10993,30 @@
                 </a:solidFill>
                 <a:latin typeface="Arial"/>
               </a:rPr>
-              <a:t>Chuẩn hoá đặc trưng VGG của ảnh gốc rồi nhuộm lại bằng mean/std của ảnh thời tiết.
-→ Đổi tông màu, độ sáng, độ mù toàn cục.</a:t>
-            </a:r>
-          </a:p>
-        </p:txBody>
-      </p:sp>
-      <p:sp>
-        <p:nvSpPr>
-          <p:cNvPr id="9" name="Rectangle 8"/>
+              <a:t>· weather   — clear / overcast / rainy / snowy / foggy …
+· timeofday — daytime / night / dawn-dusk
+· bounding box — 10 lớp (car, pedestrian, traffic sign …)
+   62.468 box trên 3.200 ảnh, trung bình ~20 box/ảnh</a:t>
+            </a:r>
+          </a:p>
+        </p:txBody>
+      </p:sp>
+      <p:sp>
+        <p:nvSpPr>
+          <p:cNvPr id="10" name="Rectangle 9"/>
           <p:cNvSpPr/>
           <p:nvPr/>
         </p:nvSpPr>
         <p:spPr>
           <a:xfrm>
-            <a:off x="4434840" y="1371600"/>
-            <a:ext cx="3337560" cy="3017520"/>
+            <a:off x="6400800" y="4526280"/>
+            <a:ext cx="5120640" cy="1783080"/>
           </a:xfrm>
           <a:prstGeom prst="rect">
             <a:avLst/>
           </a:prstGeom>
           <a:solidFill>
-            <a:srgbClr val="F4F6FA"/>
+            <a:srgbClr val="101B33"/>
           </a:solidFill>
           <a:ln>
             <a:noFill/>
@@ -11021,58 +11047,14 @@
       </p:sp>
       <p:sp>
         <p:nvSpPr>
-          <p:cNvPr id="10" name="Rectangle 9"/>
-          <p:cNvSpPr/>
-          <p:nvPr/>
-        </p:nvSpPr>
-        <p:spPr>
-          <a:xfrm>
-            <a:off x="4434840" y="1371600"/>
-            <a:ext cx="3337560" cy="82296"/>
-          </a:xfrm>
-          <a:prstGeom prst="rect">
-            <a:avLst/>
-          </a:prstGeom>
-          <a:solidFill>
-            <a:srgbClr val="18A099"/>
-          </a:solidFill>
-          <a:ln>
-            <a:noFill/>
-          </a:ln>
-          <a:effectLst/>
-        </p:spPr>
-        <p:style>
-          <a:lnRef idx="1">
-            <a:schemeClr val="accent1"/>
-          </a:lnRef>
-          <a:fillRef idx="3">
-            <a:schemeClr val="accent1"/>
-          </a:fillRef>
-          <a:effectRef idx="2">
-            <a:schemeClr val="accent1"/>
-          </a:effectRef>
-          <a:fontRef idx="minor">
-            <a:schemeClr val="lt1"/>
-          </a:fontRef>
-        </p:style>
-        <p:txBody>
-          <a:bodyPr rtlCol="0" anchor="ctr"/>
-          <a:lstStyle/>
-          <a:p>
-            <a:pPr algn="ctr"/>
-          </a:p>
-        </p:txBody>
-      </p:sp>
-      <p:sp>
-        <p:nvSpPr>
           <p:cNvPr id="11" name="TextBox 10"/>
           <p:cNvSpPr txBox="1"/>
           <p:nvPr/>
         </p:nvSpPr>
         <p:spPr>
           <a:xfrm>
-            <a:off x="4663440" y="1600200"/>
-            <a:ext cx="2926080" cy="2743200"/>
+            <a:off x="6629400" y="4663440"/>
+            <a:ext cx="4754880" cy="1645920"/>
           </a:xfrm>
           <a:prstGeom prst="rect">
             <a:avLst/>
@@ -11087,26 +11069,26 @@
           <a:p>
             <a:pPr algn="l">
               <a:lnSpc>
-                <a:spcPct val="115000"/>
-              </a:lnSpc>
-              <a:spcAft>
-                <a:spcPts val="600"/>
-              </a:spcAft>
-            </a:pPr>
-            <a:r>
-              <a:rPr sz="1700" b="1">
-                <a:solidFill>
-                  <a:srgbClr val="101B33"/>
-                </a:solidFill>
-                <a:latin typeface="Arial"/>
-              </a:rPr>
-              <a:t>② Guided Filter</a:t>
-            </a:r>
-          </a:p>
-          <a:p>
-            <a:pPr algn="l">
-              <a:lnSpc>
-                <a:spcPct val="115000"/>
+                <a:spcPct val="110000"/>
+              </a:lnSpc>
+              <a:spcAft>
+                <a:spcPts val="600"/>
+              </a:spcAft>
+            </a:pPr>
+            <a:r>
+              <a:rPr sz="1500" b="1">
+                <a:solidFill>
+                  <a:srgbClr val="18A099"/>
+                </a:solidFill>
+                <a:latin typeface="Arial"/>
+              </a:rPr>
+              <a:t>ĐỊNH DẠNG NHÃN (YOLO)</a:t>
+            </a:r>
+          </a:p>
+          <a:p>
+            <a:pPr algn="l">
+              <a:lnSpc>
+                <a:spcPct val="110000"/>
               </a:lnSpc>
               <a:spcAft>
                 <a:spcPts val="600"/>
@@ -11115,149 +11097,17 @@
             <a:r>
               <a:rPr sz="1300" b="0">
                 <a:solidFill>
-                  <a:srgbClr val="5A6375"/>
-                </a:solidFill>
-                <a:latin typeface="Arial"/>
-              </a:rPr>
-              <a:t>Dùng ảnh gốc làm ảnh dẫn hướng, lọc tuyến tính cục bộ q = a·I + b.
-Bán kính lớn (32) → a, b mượt → đầu ra = ẢNH GỐC nhân trường tương phản + lệch màu.
-→ Giữ 100% chi tiết ảnh chụp, chỉ đổi tông thời tiết.</a:t>
-            </a:r>
-          </a:p>
-        </p:txBody>
-      </p:sp>
-      <p:sp>
-        <p:nvSpPr>
-          <p:cNvPr id="12" name="Rectangle 11"/>
-          <p:cNvSpPr/>
-          <p:nvPr/>
-        </p:nvSpPr>
-        <p:spPr>
-          <a:xfrm>
-            <a:off x="8321040" y="1371600"/>
-            <a:ext cx="3337560" cy="3017520"/>
-          </a:xfrm>
-          <a:prstGeom prst="rect">
-            <a:avLst/>
-          </a:prstGeom>
-          <a:solidFill>
-            <a:srgbClr val="F4F6FA"/>
-          </a:solidFill>
-          <a:ln>
-            <a:noFill/>
-          </a:ln>
-          <a:effectLst/>
-        </p:spPr>
-        <p:style>
-          <a:lnRef idx="1">
-            <a:schemeClr val="accent1"/>
-          </a:lnRef>
-          <a:fillRef idx="3">
-            <a:schemeClr val="accent1"/>
-          </a:fillRef>
-          <a:effectRef idx="2">
-            <a:schemeClr val="accent1"/>
-          </a:effectRef>
-          <a:fontRef idx="minor">
-            <a:schemeClr val="lt1"/>
-          </a:fontRef>
-        </p:style>
-        <p:txBody>
-          <a:bodyPr rtlCol="0" anchor="ctr"/>
-          <a:lstStyle/>
-          <a:p>
-            <a:pPr algn="ctr"/>
-          </a:p>
-        </p:txBody>
-      </p:sp>
-      <p:sp>
-        <p:nvSpPr>
-          <p:cNvPr id="13" name="Rectangle 12"/>
-          <p:cNvSpPr/>
-          <p:nvPr/>
-        </p:nvSpPr>
-        <p:spPr>
-          <a:xfrm>
-            <a:off x="8321040" y="1371600"/>
-            <a:ext cx="3337560" cy="82296"/>
-          </a:xfrm>
-          <a:prstGeom prst="rect">
-            <a:avLst/>
-          </a:prstGeom>
-          <a:solidFill>
-            <a:srgbClr val="E48A2E"/>
-          </a:solidFill>
-          <a:ln>
-            <a:noFill/>
-          </a:ln>
-          <a:effectLst/>
-        </p:spPr>
-        <p:style>
-          <a:lnRef idx="1">
-            <a:schemeClr val="accent1"/>
-          </a:lnRef>
-          <a:fillRef idx="3">
-            <a:schemeClr val="accent1"/>
-          </a:fillRef>
-          <a:effectRef idx="2">
-            <a:schemeClr val="accent1"/>
-          </a:effectRef>
-          <a:fontRef idx="minor">
-            <a:schemeClr val="lt1"/>
-          </a:fontRef>
-        </p:style>
-        <p:txBody>
-          <a:bodyPr rtlCol="0" anchor="ctr"/>
-          <a:lstStyle/>
-          <a:p>
-            <a:pPr algn="ctr"/>
-          </a:p>
-        </p:txBody>
-      </p:sp>
-      <p:sp>
-        <p:nvSpPr>
-          <p:cNvPr id="14" name="TextBox 13"/>
-          <p:cNvSpPr txBox="1"/>
-          <p:nvPr/>
-        </p:nvSpPr>
-        <p:spPr>
-          <a:xfrm>
-            <a:off x="8549640" y="1600200"/>
-            <a:ext cx="2926080" cy="2743200"/>
-          </a:xfrm>
-          <a:prstGeom prst="rect">
-            <a:avLst/>
-          </a:prstGeom>
-          <a:noFill/>
-        </p:spPr>
-        <p:txBody>
-          <a:bodyPr wrap="square" lIns="0" rIns="0">
-            <a:spAutoFit/>
-          </a:bodyPr>
-          <a:lstStyle/>
-          <a:p>
-            <a:pPr algn="l">
-              <a:lnSpc>
-                <a:spcPct val="115000"/>
-              </a:lnSpc>
-              <a:spcAft>
-                <a:spcPts val="600"/>
-              </a:spcAft>
-            </a:pPr>
-            <a:r>
-              <a:rPr sz="1700" b="1">
-                <a:solidFill>
-                  <a:srgbClr val="101B33"/>
-                </a:solidFill>
-                <a:latin typeface="Arial"/>
-              </a:rPr>
-              <a:t>③ Phủ hạt (vật lý)</a:t>
-            </a:r>
-          </a:p>
-          <a:p>
-            <a:pPr algn="l">
-              <a:lnSpc>
-                <a:spcPct val="115000"/>
+                  <a:srgbClr val="9FB0C8"/>
+                </a:solidFill>
+                <a:latin typeface="Arial"/>
+              </a:rPr>
+              <a:t>b1c66a42-6f7d68ca.txt</a:t>
+            </a:r>
+          </a:p>
+          <a:p>
+            <a:pPr algn="l">
+              <a:lnSpc>
+                <a:spcPct val="110000"/>
               </a:lnSpc>
               <a:spcAft>
                 <a:spcPts val="600"/>
@@ -11266,73 +11116,49 @@
             <a:r>
               <a:rPr sz="1300" b="0">
                 <a:solidFill>
-                  <a:srgbClr val="5A6375"/>
-                </a:solidFill>
-                <a:latin typeface="Arial"/>
-              </a:rPr>
-              <a:t>Sinh vệt mưa (nhiễu + motion blur) và bông tuyết (3 lớp độ sâu), phủ theo chế độ screen.
-→ Thêm chi tiết cục bộ mà AdaIN không tạo ra được.</a:t>
-            </a:r>
-          </a:p>
-        </p:txBody>
-      </p:sp>
-      <p:sp>
-        <p:nvSpPr>
-          <p:cNvPr id="15" name="TextBox 14"/>
-          <p:cNvSpPr txBox="1"/>
-          <p:nvPr/>
-        </p:nvSpPr>
-        <p:spPr>
-          <a:xfrm>
-            <a:off x="548640" y="4617720"/>
-            <a:ext cx="11064240" cy="1463040"/>
-          </a:xfrm>
-          <a:prstGeom prst="rect">
-            <a:avLst/>
-          </a:prstGeom>
-          <a:noFill/>
-        </p:spPr>
-        <p:txBody>
-          <a:bodyPr wrap="square" lIns="0" rIns="0">
-            <a:spAutoFit/>
-          </a:bodyPr>
-          <a:lstStyle/>
-          <a:p>
-            <a:pPr algn="l">
-              <a:lnSpc>
-                <a:spcPct val="115000"/>
-              </a:lnSpc>
-              <a:spcAft>
-                <a:spcPts val="600"/>
-              </a:spcAft>
-            </a:pPr>
-            <a:r>
-              <a:rPr sz="1900" b="1">
-                <a:solidFill>
-                  <a:srgbClr val="101B33"/>
-                </a:solidFill>
-                <a:latin typeface="Arial"/>
-              </a:rPr>
-              <a:t>Vì sao nhãn bounding box vẫn dùng lại được?</a:t>
-            </a:r>
-          </a:p>
-          <a:p>
-            <a:pPr algn="l">
-              <a:lnSpc>
-                <a:spcPct val="115000"/>
-              </a:lnSpc>
-              <a:spcAft>
-                <a:spcPts val="600"/>
-              </a:spcAft>
-            </a:pPr>
-            <a:r>
-              <a:rPr sz="1500" b="0">
-                <a:solidFill>
-                  <a:srgbClr val="5A6375"/>
-                </a:solidFill>
-                <a:latin typeface="Arial"/>
-              </a:rPr>
-              <a:t>Cả 3 khối chỉ thay đổi GIÁ TRỊ MÀU tại từng pixel — không dịch chuyển, không co giãn, không xoay vật thể. Vị trí chiếc xe trong ảnh đầu ra trùng khít vị trí trong ảnh gốc, nên toàn bộ nhãn cũ được sao chép nguyên vẹn. Chi phí gán nhãn cho dữ liệu mới = 0.</a:t>
+                  <a:srgbClr val="FFFFFF"/>
+                </a:solidFill>
+                <a:latin typeface="Arial"/>
+              </a:rPr>
+              <a:t>2  0.482  0.531  0.061  0.088     → car</a:t>
+            </a:r>
+          </a:p>
+          <a:p>
+            <a:pPr algn="l">
+              <a:lnSpc>
+                <a:spcPct val="110000"/>
+              </a:lnSpc>
+              <a:spcAft>
+                <a:spcPts val="600"/>
+              </a:spcAft>
+            </a:pPr>
+            <a:r>
+              <a:rPr sz="1300" b="0">
+                <a:solidFill>
+                  <a:srgbClr val="FFFFFF"/>
+                </a:solidFill>
+                <a:latin typeface="Arial"/>
+              </a:rPr>
+              <a:t>9  0.781  0.391  0.031  0.062     → traffic sign</a:t>
+            </a:r>
+          </a:p>
+          <a:p>
+            <a:pPr algn="l">
+              <a:lnSpc>
+                <a:spcPct val="110000"/>
+              </a:lnSpc>
+              <a:spcAft>
+                <a:spcPts val="600"/>
+              </a:spcAft>
+            </a:pPr>
+            <a:r>
+              <a:rPr sz="1200" b="0">
+                <a:solidFill>
+                  <a:srgbClr val="9FB0C8"/>
+                </a:solidFill>
+                <a:latin typeface="Arial"/>
+              </a:rPr>
+              <a:t>lớp   x_tâm   y_tâm   rộng   cao   (đã chuẩn hoá 0–1)</a:t>
             </a:r>
           </a:p>
         </p:txBody>
@@ -11480,7 +11306,7 @@
                 </a:solidFill>
                 <a:latin typeface="Arial"/>
               </a:rPr>
-              <a:t>① AdaIN — trái tim của phương pháp</a:t>
+              <a:t>Phương pháp — 3 khối nối tiếp</a:t>
             </a:r>
           </a:p>
           <a:p>
@@ -11499,7 +11325,7 @@
                 </a:solidFill>
                 <a:latin typeface="Arial"/>
               </a:rPr>
-              <a:t>Huang &amp; Belongie, ICCV 2017</a:t>
+              <a:t>Mỗi khối bù đúng một điểm yếu của khối trước</a:t>
             </a:r>
           </a:p>
         </p:txBody>
@@ -11554,14 +11380,14 @@
         </p:nvSpPr>
         <p:spPr>
           <a:xfrm>
-            <a:off x="640080" y="1371600"/>
-            <a:ext cx="10881360" cy="1234440"/>
+            <a:off x="548640" y="1371600"/>
+            <a:ext cx="3337560" cy="3017520"/>
           </a:xfrm>
           <a:prstGeom prst="rect">
             <a:avLst/>
           </a:prstGeom>
           <a:solidFill>
-            <a:srgbClr val="101B33"/>
+            <a:srgbClr val="F4F6FA"/>
           </a:solidFill>
           <a:ln>
             <a:noFill/>
@@ -11592,14 +11418,58 @@
       </p:sp>
       <p:sp>
         <p:nvSpPr>
-          <p:cNvPr id="7" name="TextBox 6"/>
+          <p:cNvPr id="7" name="Rectangle 6"/>
+          <p:cNvSpPr/>
+          <p:nvPr/>
+        </p:nvSpPr>
+        <p:spPr>
+          <a:xfrm>
+            <a:off x="548640" y="1371600"/>
+            <a:ext cx="3337560" cy="82296"/>
+          </a:xfrm>
+          <a:prstGeom prst="rect">
+            <a:avLst/>
+          </a:prstGeom>
+          <a:solidFill>
+            <a:srgbClr val="2E6FD9"/>
+          </a:solidFill>
+          <a:ln>
+            <a:noFill/>
+          </a:ln>
+          <a:effectLst/>
+        </p:spPr>
+        <p:style>
+          <a:lnRef idx="1">
+            <a:schemeClr val="accent1"/>
+          </a:lnRef>
+          <a:fillRef idx="3">
+            <a:schemeClr val="accent1"/>
+          </a:fillRef>
+          <a:effectRef idx="2">
+            <a:schemeClr val="accent1"/>
+          </a:effectRef>
+          <a:fontRef idx="minor">
+            <a:schemeClr val="lt1"/>
+          </a:fontRef>
+        </p:style>
+        <p:txBody>
+          <a:bodyPr rtlCol="0" anchor="ctr"/>
+          <a:lstStyle/>
+          <a:p>
+            <a:pPr algn="ctr"/>
+          </a:p>
+        </p:txBody>
+      </p:sp>
+      <p:sp>
+        <p:nvSpPr>
+          <p:cNvPr id="8" name="TextBox 7"/>
           <p:cNvSpPr txBox="1"/>
           <p:nvPr/>
         </p:nvSpPr>
         <p:spPr>
           <a:xfrm>
-            <a:off x="640080" y="1627632"/>
-            <a:ext cx="10881360" cy="914400"/>
+            <a:off x="777240" y="1600200"/>
+            <a:ext cx="2926080" cy="2743200"/>
           </a:xfrm>
           <a:prstGeom prst="rect">
             <a:avLst/>
@@ -11612,36 +11482,100 @@
           </a:bodyPr>
           <a:lstStyle/>
           <a:p>
-            <a:pPr algn="ctr">
-              <a:lnSpc>
-                <a:spcPct val="115000"/>
-              </a:lnSpc>
-              <a:spcAft>
-                <a:spcPts val="600"/>
-              </a:spcAft>
-            </a:pPr>
-            <a:r>
-              <a:rPr sz="3000" b="1">
-                <a:solidFill>
-                  <a:srgbClr val="18A099"/>
-                </a:solidFill>
-                <a:latin typeface="Arial"/>
-              </a:rPr>
-              <a:t>AdaIN(c, s)  =  σ(s) · ( c − μ(c) ) / σ(c)  +  μ(s)</a:t>
-            </a:r>
-          </a:p>
-        </p:txBody>
-      </p:sp>
-      <p:sp>
-        <p:nvSpPr>
-          <p:cNvPr id="8" name="Rectangle 7"/>
+            <a:pPr algn="l">
+              <a:lnSpc>
+                <a:spcPct val="115000"/>
+              </a:lnSpc>
+              <a:spcAft>
+                <a:spcPts val="600"/>
+              </a:spcAft>
+            </a:pPr>
+            <a:r>
+              <a:rPr sz="1700" b="1">
+                <a:solidFill>
+                  <a:srgbClr val="101B33"/>
+                </a:solidFill>
+                <a:latin typeface="Arial"/>
+              </a:rPr>
+              <a:t>① AdaIN  (học sâu)</a:t>
+            </a:r>
+          </a:p>
+          <a:p>
+            <a:pPr algn="l">
+              <a:lnSpc>
+                <a:spcPct val="115000"/>
+              </a:lnSpc>
+              <a:spcAft>
+                <a:spcPts val="600"/>
+              </a:spcAft>
+            </a:pPr>
+            <a:r>
+              <a:rPr sz="1300" b="0">
+                <a:solidFill>
+                  <a:srgbClr val="5A6375"/>
+                </a:solidFill>
+                <a:latin typeface="Arial"/>
+              </a:rPr>
+              <a:t>Chuẩn hoá đặc trưng VGG của ảnh gốc rồi nhuộm lại bằng mean/std của ảnh thời tiết.
+→ Đổi tông màu, độ sáng, độ mù toàn cục.</a:t>
+            </a:r>
+          </a:p>
+        </p:txBody>
+      </p:sp>
+      <p:sp>
+        <p:nvSpPr>
+          <p:cNvPr id="9" name="Rectangle 8"/>
           <p:cNvSpPr/>
           <p:nvPr/>
         </p:nvSpPr>
         <p:spPr>
           <a:xfrm>
-            <a:off x="640080" y="3026664"/>
-            <a:ext cx="100584" cy="100584"/>
+            <a:off x="4434840" y="1371600"/>
+            <a:ext cx="3337560" cy="3017520"/>
+          </a:xfrm>
+          <a:prstGeom prst="rect">
+            <a:avLst/>
+          </a:prstGeom>
+          <a:solidFill>
+            <a:srgbClr val="F4F6FA"/>
+          </a:solidFill>
+          <a:ln>
+            <a:noFill/>
+          </a:ln>
+          <a:effectLst/>
+        </p:spPr>
+        <p:style>
+          <a:lnRef idx="1">
+            <a:schemeClr val="accent1"/>
+          </a:lnRef>
+          <a:fillRef idx="3">
+            <a:schemeClr val="accent1"/>
+          </a:fillRef>
+          <a:effectRef idx="2">
+            <a:schemeClr val="accent1"/>
+          </a:effectRef>
+          <a:fontRef idx="minor">
+            <a:schemeClr val="lt1"/>
+          </a:fontRef>
+        </p:style>
+        <p:txBody>
+          <a:bodyPr rtlCol="0" anchor="ctr"/>
+          <a:lstStyle/>
+          <a:p>
+            <a:pPr algn="ctr"/>
+          </a:p>
+        </p:txBody>
+      </p:sp>
+      <p:sp>
+        <p:nvSpPr>
+          <p:cNvPr id="10" name="Rectangle 9"/>
+          <p:cNvSpPr/>
+          <p:nvPr/>
+        </p:nvSpPr>
+        <p:spPr>
+          <a:xfrm>
+            <a:off x="4434840" y="1371600"/>
+            <a:ext cx="3337560" cy="82296"/>
           </a:xfrm>
           <a:prstGeom prst="rect">
             <a:avLst/>
@@ -11678,14 +11612,14 @@
       </p:sp>
       <p:sp>
         <p:nvSpPr>
-          <p:cNvPr id="9" name="TextBox 8"/>
+          <p:cNvPr id="11" name="TextBox 10"/>
           <p:cNvSpPr txBox="1"/>
           <p:nvPr/>
         </p:nvSpPr>
         <p:spPr>
           <a:xfrm>
-            <a:off x="914400" y="2926080"/>
-            <a:ext cx="10607040" cy="548640"/>
+            <a:off x="4663440" y="1600200"/>
+            <a:ext cx="2926080" cy="2743200"/>
           </a:xfrm>
           <a:prstGeom prst="rect">
             <a:avLst/>
@@ -11707,33 +11641,54 @@
               </a:spcAft>
             </a:pPr>
             <a:r>
-              <a:rPr sz="1600" b="1">
+              <a:rPr sz="1700" b="1">
                 <a:solidFill>
                   <a:srgbClr val="101B33"/>
                 </a:solidFill>
                 <a:latin typeface="Arial"/>
               </a:rPr>
-              <a:t>c = đặc trưng VGG của ảnh giao thông,  s = đặc trưng VGG của ảnh thời tiết.</a:t>
-            </a:r>
-          </a:p>
-        </p:txBody>
-      </p:sp>
-      <p:sp>
-        <p:nvSpPr>
-          <p:cNvPr id="10" name="Rectangle 9"/>
+              <a:t>② Guided Filter</a:t>
+            </a:r>
+          </a:p>
+          <a:p>
+            <a:pPr algn="l">
+              <a:lnSpc>
+                <a:spcPct val="115000"/>
+              </a:lnSpc>
+              <a:spcAft>
+                <a:spcPts val="600"/>
+              </a:spcAft>
+            </a:pPr>
+            <a:r>
+              <a:rPr sz="1300" b="0">
+                <a:solidFill>
+                  <a:srgbClr val="5A6375"/>
+                </a:solidFill>
+                <a:latin typeface="Arial"/>
+              </a:rPr>
+              <a:t>Dùng ảnh gốc làm ảnh dẫn hướng, lọc tuyến tính cục bộ q = a·I + b.
+Bán kính lớn (32) → a, b mượt → đầu ra = ẢNH GỐC nhân trường tương phản + lệch màu.
+→ Giữ 100% chi tiết ảnh chụp, chỉ đổi tông thời tiết.</a:t>
+            </a:r>
+          </a:p>
+        </p:txBody>
+      </p:sp>
+      <p:sp>
+        <p:nvSpPr>
+          <p:cNvPr id="12" name="Rectangle 11"/>
           <p:cNvSpPr/>
           <p:nvPr/>
         </p:nvSpPr>
         <p:spPr>
           <a:xfrm>
-            <a:off x="640080" y="3575304"/>
-            <a:ext cx="100584" cy="100584"/>
+            <a:off x="8321040" y="1371600"/>
+            <a:ext cx="3337560" cy="3017520"/>
           </a:xfrm>
           <a:prstGeom prst="rect">
             <a:avLst/>
           </a:prstGeom>
           <a:solidFill>
-            <a:srgbClr val="18A099"/>
+            <a:srgbClr val="F4F6FA"/>
           </a:solidFill>
           <a:ln>
             <a:noFill/>
@@ -11764,62 +11719,20 @@
       </p:sp>
       <p:sp>
         <p:nvSpPr>
-          <p:cNvPr id="11" name="TextBox 10"/>
-          <p:cNvSpPr txBox="1"/>
-          <p:nvPr/>
-        </p:nvSpPr>
-        <p:spPr>
-          <a:xfrm>
-            <a:off x="914400" y="3474720"/>
-            <a:ext cx="10607040" cy="548640"/>
-          </a:xfrm>
-          <a:prstGeom prst="rect">
-            <a:avLst/>
-          </a:prstGeom>
-          <a:noFill/>
-        </p:spPr>
-        <p:txBody>
-          <a:bodyPr wrap="square" lIns="0" rIns="0">
-            <a:spAutoFit/>
-          </a:bodyPr>
-          <a:lstStyle/>
-          <a:p>
-            <a:pPr algn="l">
-              <a:lnSpc>
-                <a:spcPct val="115000"/>
-              </a:lnSpc>
-              <a:spcAft>
-                <a:spcPts val="600"/>
-              </a:spcAft>
-            </a:pPr>
-            <a:r>
-              <a:rPr sz="1600" b="0">
-                <a:solidFill>
-                  <a:srgbClr val="101B33"/>
-                </a:solidFill>
-                <a:latin typeface="Arial"/>
-              </a:rPr>
-              <a:t>Bước 1 — ( c − μ(c) ) / σ(c): xoá phong cách gốc (trời quang), giữ lại cấu trúc không gian.</a:t>
-            </a:r>
-          </a:p>
-        </p:txBody>
-      </p:sp>
-      <p:sp>
-        <p:nvSpPr>
-          <p:cNvPr id="12" name="Rectangle 11"/>
+          <p:cNvPr id="13" name="Rectangle 12"/>
           <p:cNvSpPr/>
           <p:nvPr/>
         </p:nvSpPr>
         <p:spPr>
           <a:xfrm>
-            <a:off x="640080" y="4123944"/>
-            <a:ext cx="100584" cy="100584"/>
+            <a:off x="8321040" y="1371600"/>
+            <a:ext cx="3337560" cy="82296"/>
           </a:xfrm>
           <a:prstGeom prst="rect">
             <a:avLst/>
           </a:prstGeom>
           <a:solidFill>
-            <a:srgbClr val="18A099"/>
+            <a:srgbClr val="E48A2E"/>
           </a:solidFill>
           <a:ln>
             <a:noFill/>
@@ -11850,14 +11763,14 @@
       </p:sp>
       <p:sp>
         <p:nvSpPr>
-          <p:cNvPr id="13" name="TextBox 12"/>
+          <p:cNvPr id="14" name="TextBox 13"/>
           <p:cNvSpPr txBox="1"/>
           <p:nvPr/>
         </p:nvSpPr>
         <p:spPr>
           <a:xfrm>
-            <a:off x="914400" y="4023360"/>
-            <a:ext cx="10607040" cy="548640"/>
+            <a:off x="8549640" y="1600200"/>
+            <a:ext cx="2926080" cy="2743200"/>
           </a:xfrm>
           <a:prstGeom prst="rect">
             <a:avLst/>
@@ -11879,58 +11792,34 @@
               </a:spcAft>
             </a:pPr>
             <a:r>
-              <a:rPr sz="1600" b="0">
+              <a:rPr sz="1700" b="1">
                 <a:solidFill>
                   <a:srgbClr val="101B33"/>
                 </a:solidFill>
                 <a:latin typeface="Arial"/>
               </a:rPr>
-              <a:t>Bước 2 — nhân σ(s), cộng μ(s): 'nhuộm' bằng thống kê của ảnh thời tiết.</a:t>
-            </a:r>
-          </a:p>
-        </p:txBody>
-      </p:sp>
-      <p:sp>
-        <p:nvSpPr>
-          <p:cNvPr id="14" name="Rectangle 13"/>
-          <p:cNvSpPr/>
-          <p:nvPr/>
-        </p:nvSpPr>
-        <p:spPr>
-          <a:xfrm>
-            <a:off x="640080" y="4672584"/>
-            <a:ext cx="100584" cy="100584"/>
-          </a:xfrm>
-          <a:prstGeom prst="rect">
-            <a:avLst/>
-          </a:prstGeom>
-          <a:solidFill>
-            <a:srgbClr val="18A099"/>
-          </a:solidFill>
-          <a:ln>
-            <a:noFill/>
-          </a:ln>
-          <a:effectLst/>
-        </p:spPr>
-        <p:style>
-          <a:lnRef idx="1">
-            <a:schemeClr val="accent1"/>
-          </a:lnRef>
-          <a:fillRef idx="3">
-            <a:schemeClr val="accent1"/>
-          </a:fillRef>
-          <a:effectRef idx="2">
-            <a:schemeClr val="accent1"/>
-          </a:effectRef>
-          <a:fontRef idx="minor">
-            <a:schemeClr val="lt1"/>
-          </a:fontRef>
-        </p:style>
-        <p:txBody>
-          <a:bodyPr rtlCol="0" anchor="ctr"/>
-          <a:lstStyle/>
-          <a:p>
-            <a:pPr algn="ctr"/>
+              <a:t>③ Phủ hạt (vật lý)</a:t>
+            </a:r>
+          </a:p>
+          <a:p>
+            <a:pPr algn="l">
+              <a:lnSpc>
+                <a:spcPct val="115000"/>
+              </a:lnSpc>
+              <a:spcAft>
+                <a:spcPts val="600"/>
+              </a:spcAft>
+            </a:pPr>
+            <a:r>
+              <a:rPr sz="1300" b="0">
+                <a:solidFill>
+                  <a:srgbClr val="5A6375"/>
+                </a:solidFill>
+                <a:latin typeface="Arial"/>
+              </a:rPr>
+              <a:t>Sinh vệt mưa (nhiễu + motion blur) và bông tuyết (3 lớp độ sâu), phủ theo chế độ screen.
+→ Thêm chi tiết cục bộ mà AdaIN không tạo ra được.</a:t>
+            </a:r>
           </a:p>
         </p:txBody>
       </p:sp>
@@ -11942,8 +11831,8 @@
         </p:nvSpPr>
         <p:spPr>
           <a:xfrm>
-            <a:off x="914400" y="4572000"/>
-            <a:ext cx="10607040" cy="548640"/>
+            <a:off x="548640" y="4617720"/>
+            <a:ext cx="11064240" cy="1463040"/>
           </a:xfrm>
           <a:prstGeom prst="rect">
             <a:avLst/>
@@ -11965,185 +11854,32 @@
               </a:spcAft>
             </a:pPr>
             <a:r>
-              <a:rPr sz="1600" b="1">
+              <a:rPr sz="1900" b="1">
                 <a:solidFill>
                   <a:srgbClr val="101B33"/>
                 </a:solidFill>
                 <a:latin typeface="Arial"/>
               </a:rPr>
-              <a:t>Chỉ đổi thống kê THEO KÊNH ⇒ bản đồ đặc trưng không bị dịch chuyển ⇒ giữ bố cục.</a:t>
-            </a:r>
-          </a:p>
-        </p:txBody>
-      </p:sp>
-      <p:sp>
-        <p:nvSpPr>
-          <p:cNvPr id="16" name="Rectangle 15"/>
-          <p:cNvSpPr/>
-          <p:nvPr/>
-        </p:nvSpPr>
-        <p:spPr>
-          <a:xfrm>
-            <a:off x="640080" y="5221224"/>
-            <a:ext cx="100584" cy="100584"/>
-          </a:xfrm>
-          <a:prstGeom prst="rect">
-            <a:avLst/>
-          </a:prstGeom>
-          <a:solidFill>
-            <a:srgbClr val="18A099"/>
-          </a:solidFill>
-          <a:ln>
-            <a:noFill/>
-          </a:ln>
-          <a:effectLst/>
-        </p:spPr>
-        <p:style>
-          <a:lnRef idx="1">
-            <a:schemeClr val="accent1"/>
-          </a:lnRef>
-          <a:fillRef idx="3">
-            <a:schemeClr val="accent1"/>
-          </a:fillRef>
-          <a:effectRef idx="2">
-            <a:schemeClr val="accent1"/>
-          </a:effectRef>
-          <a:fontRef idx="minor">
-            <a:schemeClr val="lt1"/>
-          </a:fontRef>
-        </p:style>
-        <p:txBody>
-          <a:bodyPr rtlCol="0" anchor="ctr"/>
-          <a:lstStyle/>
-          <a:p>
-            <a:pPr algn="ctr"/>
-          </a:p>
-        </p:txBody>
-      </p:sp>
-      <p:sp>
-        <p:nvSpPr>
-          <p:cNvPr id="17" name="TextBox 16"/>
-          <p:cNvSpPr txBox="1"/>
-          <p:nvPr/>
-        </p:nvSpPr>
-        <p:spPr>
-          <a:xfrm>
-            <a:off x="914400" y="5120640"/>
-            <a:ext cx="10607040" cy="548640"/>
-          </a:xfrm>
-          <a:prstGeom prst="rect">
-            <a:avLst/>
-          </a:prstGeom>
-          <a:noFill/>
-        </p:spPr>
-        <p:txBody>
-          <a:bodyPr wrap="square" lIns="0" rIns="0">
-            <a:spAutoFit/>
-          </a:bodyPr>
-          <a:lstStyle/>
-          <a:p>
-            <a:pPr algn="l">
-              <a:lnSpc>
-                <a:spcPct val="115000"/>
-              </a:lnSpc>
-              <a:spcAft>
-                <a:spcPts val="600"/>
-              </a:spcAft>
-            </a:pPr>
-            <a:r>
-              <a:rPr sz="1600" b="0">
-                <a:solidFill>
-                  <a:srgbClr val="101B33"/>
-                </a:solidFill>
-                <a:latin typeface="Arial"/>
-              </a:rPr>
-              <a:t>Không có tham số học nào trong AdaIN — chỉ Decoder (3,51 triệu tham số) được huấn luyện.</a:t>
-            </a:r>
-          </a:p>
-        </p:txBody>
-      </p:sp>
-      <p:sp>
-        <p:nvSpPr>
-          <p:cNvPr id="18" name="Rectangle 17"/>
-          <p:cNvSpPr/>
-          <p:nvPr/>
-        </p:nvSpPr>
-        <p:spPr>
-          <a:xfrm>
-            <a:off x="640080" y="5769864"/>
-            <a:ext cx="100584" cy="100584"/>
-          </a:xfrm>
-          <a:prstGeom prst="rect">
-            <a:avLst/>
-          </a:prstGeom>
-          <a:solidFill>
-            <a:srgbClr val="18A099"/>
-          </a:solidFill>
-          <a:ln>
-            <a:noFill/>
-          </a:ln>
-          <a:effectLst/>
-        </p:spPr>
-        <p:style>
-          <a:lnRef idx="1">
-            <a:schemeClr val="accent1"/>
-          </a:lnRef>
-          <a:fillRef idx="3">
-            <a:schemeClr val="accent1"/>
-          </a:fillRef>
-          <a:effectRef idx="2">
-            <a:schemeClr val="accent1"/>
-          </a:effectRef>
-          <a:fontRef idx="minor">
-            <a:schemeClr val="lt1"/>
-          </a:fontRef>
-        </p:style>
-        <p:txBody>
-          <a:bodyPr rtlCol="0" anchor="ctr"/>
-          <a:lstStyle/>
-          <a:p>
-            <a:pPr algn="ctr"/>
-          </a:p>
-        </p:txBody>
-      </p:sp>
-      <p:sp>
-        <p:nvSpPr>
-          <p:cNvPr id="19" name="TextBox 18"/>
-          <p:cNvSpPr txBox="1"/>
-          <p:nvPr/>
-        </p:nvSpPr>
-        <p:spPr>
-          <a:xfrm>
-            <a:off x="914400" y="5669280"/>
-            <a:ext cx="10607040" cy="548640"/>
-          </a:xfrm>
-          <a:prstGeom prst="rect">
-            <a:avLst/>
-          </a:prstGeom>
-          <a:noFill/>
-        </p:spPr>
-        <p:txBody>
-          <a:bodyPr wrap="square" lIns="0" rIns="0">
-            <a:spAutoFit/>
-          </a:bodyPr>
-          <a:lstStyle/>
-          <a:p>
-            <a:pPr algn="l">
-              <a:lnSpc>
-                <a:spcPct val="115000"/>
-              </a:lnSpc>
-              <a:spcAft>
-                <a:spcPts val="600"/>
-              </a:spcAft>
-            </a:pPr>
-            <a:r>
-              <a:rPr sz="1600" b="1">
-                <a:solidFill>
-                  <a:srgbClr val="101B33"/>
-                </a:solidFill>
-                <a:latin typeface="Arial"/>
-              </a:rPr>
-              <a:t>Hệ quả: thời tiết mới chỉ cần đưa ảnh tham chiếu vào, KHÔNG huấn luyện lại.</a:t>
+              <a:t>Vì sao nhãn bounding box vẫn dùng lại được?</a:t>
+            </a:r>
+          </a:p>
+          <a:p>
+            <a:pPr algn="l">
+              <a:lnSpc>
+                <a:spcPct val="115000"/>
+              </a:lnSpc>
+              <a:spcAft>
+                <a:spcPts val="600"/>
+              </a:spcAft>
+            </a:pPr>
+            <a:r>
+              <a:rPr sz="1500" b="0">
+                <a:solidFill>
+                  <a:srgbClr val="5A6375"/>
+                </a:solidFill>
+                <a:latin typeface="Arial"/>
+              </a:rPr>
+              <a:t>Cả 3 khối chỉ thay đổi GIÁ TRỊ MÀU tại từng pixel — không dịch chuyển, không co giãn, không xoay vật thể. Vị trí chiếc xe trong ảnh đầu ra trùng khít vị trí trong ảnh gốc, nên toàn bộ nhãn cũ được sao chép nguyên vẹn. Chi phí gán nhãn cho dữ liệu mới = 0.</a:t>
             </a:r>
           </a:p>
         </p:txBody>
@@ -12291,7 +12027,7 @@
                 </a:solidFill>
                 <a:latin typeface="Arial"/>
               </a:rPr>
-              <a:t>Huấn luyện</a:t>
+              <a:t>① AdaIN — trái tim của phương pháp</a:t>
             </a:r>
           </a:p>
           <a:p>
@@ -12310,7 +12046,7 @@
                 </a:solidFill>
                 <a:latin typeface="Arial"/>
               </a:rPr>
-              <a:t>Chỉ Decoder được học — VGG-19 đóng băng hoàn toàn</a:t>
+              <a:t>Huang &amp; Belongie, ICCV 2017</a:t>
             </a:r>
           </a:p>
         </p:txBody>
@@ -12365,8 +12101,8 @@
         </p:nvSpPr>
         <p:spPr>
           <a:xfrm>
-            <a:off x="640080" y="1280160"/>
-            <a:ext cx="5120640" cy="329184"/>
+            <a:off x="640080" y="1371600"/>
+            <a:ext cx="10881360" cy="1234440"/>
           </a:xfrm>
           <a:prstGeom prst="rect">
             <a:avLst/>
@@ -12409,8 +12145,8 @@
         </p:nvSpPr>
         <p:spPr>
           <a:xfrm>
-            <a:off x="749808" y="1344168"/>
-            <a:ext cx="1920240" cy="329184"/>
+            <a:off x="640080" y="1627632"/>
+            <a:ext cx="10881360" cy="914400"/>
           </a:xfrm>
           <a:prstGeom prst="rect">
             <a:avLst/>
@@ -12423,84 +12159,42 @@
           </a:bodyPr>
           <a:lstStyle/>
           <a:p>
-            <a:pPr algn="l">
-              <a:lnSpc>
-                <a:spcPct val="115000"/>
-              </a:lnSpc>
-              <a:spcAft>
-                <a:spcPts val="600"/>
-              </a:spcAft>
-            </a:pPr>
-            <a:r>
-              <a:rPr sz="1300" b="1">
-                <a:solidFill>
-                  <a:srgbClr val="FFFFFF"/>
-                </a:solidFill>
-                <a:latin typeface="Arial"/>
-              </a:rPr>
-              <a:t>Thành phần</a:t>
-            </a:r>
-          </a:p>
-        </p:txBody>
-      </p:sp>
-      <p:sp>
-        <p:nvSpPr>
-          <p:cNvPr id="8" name="TextBox 7"/>
-          <p:cNvSpPr txBox="1"/>
-          <p:nvPr/>
-        </p:nvSpPr>
-        <p:spPr>
-          <a:xfrm>
-            <a:off x="2670048" y="1344168"/>
-            <a:ext cx="3200400" cy="329184"/>
-          </a:xfrm>
-          <a:prstGeom prst="rect">
-            <a:avLst/>
-          </a:prstGeom>
-          <a:noFill/>
-        </p:spPr>
-        <p:txBody>
-          <a:bodyPr wrap="square" lIns="0" rIns="0">
-            <a:spAutoFit/>
-          </a:bodyPr>
-          <a:lstStyle/>
-          <a:p>
-            <a:pPr algn="l">
-              <a:lnSpc>
-                <a:spcPct val="115000"/>
-              </a:lnSpc>
-              <a:spcAft>
-                <a:spcPts val="600"/>
-              </a:spcAft>
-            </a:pPr>
-            <a:r>
-              <a:rPr sz="1300" b="1">
-                <a:solidFill>
-                  <a:srgbClr val="FFFFFF"/>
-                </a:solidFill>
-                <a:latin typeface="Arial"/>
-              </a:rPr>
-              <a:t>Giá trị</a:t>
-            </a:r>
-          </a:p>
-        </p:txBody>
-      </p:sp>
-      <p:sp>
-        <p:nvSpPr>
-          <p:cNvPr id="9" name="Rectangle 8"/>
+            <a:pPr algn="ctr">
+              <a:lnSpc>
+                <a:spcPct val="115000"/>
+              </a:lnSpc>
+              <a:spcAft>
+                <a:spcPts val="600"/>
+              </a:spcAft>
+            </a:pPr>
+            <a:r>
+              <a:rPr sz="3000" b="1">
+                <a:solidFill>
+                  <a:srgbClr val="18A099"/>
+                </a:solidFill>
+                <a:latin typeface="Arial"/>
+              </a:rPr>
+              <a:t>AdaIN(c, s)  =  σ(s) · ( c − μ(c) ) / σ(c)  +  μ(s)</a:t>
+            </a:r>
+          </a:p>
+        </p:txBody>
+      </p:sp>
+      <p:sp>
+        <p:nvSpPr>
+          <p:cNvPr id="8" name="Rectangle 7"/>
           <p:cNvSpPr/>
           <p:nvPr/>
         </p:nvSpPr>
         <p:spPr>
           <a:xfrm>
-            <a:off x="640080" y="1609344"/>
-            <a:ext cx="5120640" cy="329184"/>
+            <a:off x="640080" y="3026664"/>
+            <a:ext cx="100584" cy="100584"/>
           </a:xfrm>
           <a:prstGeom prst="rect">
             <a:avLst/>
           </a:prstGeom>
           <a:solidFill>
-            <a:srgbClr val="F4F6FA"/>
+            <a:srgbClr val="18A099"/>
           </a:solidFill>
           <a:ln>
             <a:noFill/>
@@ -12531,14 +12225,14 @@
       </p:sp>
       <p:sp>
         <p:nvSpPr>
-          <p:cNvPr id="10" name="TextBox 9"/>
+          <p:cNvPr id="9" name="TextBox 8"/>
           <p:cNvSpPr txBox="1"/>
           <p:nvPr/>
         </p:nvSpPr>
         <p:spPr>
           <a:xfrm>
-            <a:off x="749808" y="1673352"/>
-            <a:ext cx="1920240" cy="329184"/>
+            <a:off x="914400" y="2926080"/>
+            <a:ext cx="10607040" cy="548640"/>
           </a:xfrm>
           <a:prstGeom prst="rect">
             <a:avLst/>
@@ -12560,75 +12254,33 @@
               </a:spcAft>
             </a:pPr>
             <a:r>
-              <a:rPr sz="1300" b="0">
+              <a:rPr sz="1600" b="1">
                 <a:solidFill>
                   <a:srgbClr val="101B33"/>
                 </a:solidFill>
                 <a:latin typeface="Arial"/>
               </a:rPr>
-              <a:t>Encoder</a:t>
-            </a:r>
-          </a:p>
-        </p:txBody>
-      </p:sp>
-      <p:sp>
-        <p:nvSpPr>
-          <p:cNvPr id="11" name="TextBox 10"/>
-          <p:cNvSpPr txBox="1"/>
-          <p:nvPr/>
-        </p:nvSpPr>
-        <p:spPr>
-          <a:xfrm>
-            <a:off x="2670048" y="1673352"/>
-            <a:ext cx="3200400" cy="329184"/>
-          </a:xfrm>
-          <a:prstGeom prst="rect">
-            <a:avLst/>
-          </a:prstGeom>
-          <a:noFill/>
-        </p:spPr>
-        <p:txBody>
-          <a:bodyPr wrap="square" lIns="0" rIns="0">
-            <a:spAutoFit/>
-          </a:bodyPr>
-          <a:lstStyle/>
-          <a:p>
-            <a:pPr algn="l">
-              <a:lnSpc>
-                <a:spcPct val="115000"/>
-              </a:lnSpc>
-              <a:spcAft>
-                <a:spcPts val="600"/>
-              </a:spcAft>
-            </a:pPr>
-            <a:r>
-              <a:rPr sz="1300" b="0">
-                <a:solidFill>
-                  <a:srgbClr val="101B33"/>
-                </a:solidFill>
-                <a:latin typeface="Arial"/>
-              </a:rPr>
-              <a:t>VGG-19 (ImageNet), đóng băng</a:t>
-            </a:r>
-          </a:p>
-        </p:txBody>
-      </p:sp>
-      <p:sp>
-        <p:nvSpPr>
-          <p:cNvPr id="12" name="Rectangle 11"/>
+              <a:t>c = đặc trưng VGG của ảnh giao thông,  s = đặc trưng VGG của ảnh thời tiết.</a:t>
+            </a:r>
+          </a:p>
+        </p:txBody>
+      </p:sp>
+      <p:sp>
+        <p:nvSpPr>
+          <p:cNvPr id="10" name="Rectangle 9"/>
           <p:cNvSpPr/>
           <p:nvPr/>
         </p:nvSpPr>
         <p:spPr>
           <a:xfrm>
-            <a:off x="640080" y="1938528"/>
-            <a:ext cx="5120640" cy="329184"/>
+            <a:off x="640080" y="3575304"/>
+            <a:ext cx="100584" cy="100584"/>
           </a:xfrm>
           <a:prstGeom prst="rect">
             <a:avLst/>
           </a:prstGeom>
           <a:solidFill>
-            <a:srgbClr val="FFFFFF"/>
+            <a:srgbClr val="18A099"/>
           </a:solidFill>
           <a:ln>
             <a:noFill/>
@@ -12659,14 +12311,14 @@
       </p:sp>
       <p:sp>
         <p:nvSpPr>
-          <p:cNvPr id="13" name="TextBox 12"/>
+          <p:cNvPr id="11" name="TextBox 10"/>
           <p:cNvSpPr txBox="1"/>
           <p:nvPr/>
         </p:nvSpPr>
         <p:spPr>
           <a:xfrm>
-            <a:off x="749808" y="2002536"/>
-            <a:ext cx="1920240" cy="329184"/>
+            <a:off x="914400" y="3474720"/>
+            <a:ext cx="10607040" cy="548640"/>
           </a:xfrm>
           <a:prstGeom prst="rect">
             <a:avLst/>
@@ -12688,75 +12340,33 @@
               </a:spcAft>
             </a:pPr>
             <a:r>
-              <a:rPr sz="1300" b="0">
+              <a:rPr sz="1600" b="0">
                 <a:solidFill>
                   <a:srgbClr val="101B33"/>
                 </a:solidFill>
                 <a:latin typeface="Arial"/>
               </a:rPr>
-              <a:t>Decoder</a:t>
-            </a:r>
-          </a:p>
-        </p:txBody>
-      </p:sp>
-      <p:sp>
-        <p:nvSpPr>
-          <p:cNvPr id="14" name="TextBox 13"/>
-          <p:cNvSpPr txBox="1"/>
-          <p:nvPr/>
-        </p:nvSpPr>
-        <p:spPr>
-          <a:xfrm>
-            <a:off x="2670048" y="2002536"/>
-            <a:ext cx="3200400" cy="329184"/>
-          </a:xfrm>
-          <a:prstGeom prst="rect">
-            <a:avLst/>
-          </a:prstGeom>
-          <a:noFill/>
-        </p:spPr>
-        <p:txBody>
-          <a:bodyPr wrap="square" lIns="0" rIns="0">
-            <a:spAutoFit/>
-          </a:bodyPr>
-          <a:lstStyle/>
-          <a:p>
-            <a:pPr algn="l">
-              <a:lnSpc>
-                <a:spcPct val="115000"/>
-              </a:lnSpc>
-              <a:spcAft>
-                <a:spcPts val="600"/>
-              </a:spcAft>
-            </a:pPr>
-            <a:r>
-              <a:rPr sz="1300" b="0">
-                <a:solidFill>
-                  <a:srgbClr val="101B33"/>
-                </a:solidFill>
-                <a:latin typeface="Arial"/>
-              </a:rPr>
-              <a:t>3,51 M tham số</a:t>
-            </a:r>
-          </a:p>
-        </p:txBody>
-      </p:sp>
-      <p:sp>
-        <p:nvSpPr>
-          <p:cNvPr id="15" name="Rectangle 14"/>
+              <a:t>Bước 1 — ( c − μ(c) ) / σ(c): xoá phong cách gốc (trời quang), giữ lại cấu trúc không gian.</a:t>
+            </a:r>
+          </a:p>
+        </p:txBody>
+      </p:sp>
+      <p:sp>
+        <p:nvSpPr>
+          <p:cNvPr id="12" name="Rectangle 11"/>
           <p:cNvSpPr/>
           <p:nvPr/>
         </p:nvSpPr>
         <p:spPr>
           <a:xfrm>
-            <a:off x="640080" y="2267712"/>
-            <a:ext cx="5120640" cy="329184"/>
+            <a:off x="640080" y="4123944"/>
+            <a:ext cx="100584" cy="100584"/>
           </a:xfrm>
           <a:prstGeom prst="rect">
             <a:avLst/>
           </a:prstGeom>
           <a:solidFill>
-            <a:srgbClr val="F4F6FA"/>
+            <a:srgbClr val="18A099"/>
           </a:solidFill>
           <a:ln>
             <a:noFill/>
@@ -12787,14 +12397,14 @@
       </p:sp>
       <p:sp>
         <p:nvSpPr>
-          <p:cNvPr id="16" name="TextBox 15"/>
+          <p:cNvPr id="13" name="TextBox 12"/>
           <p:cNvSpPr txBox="1"/>
           <p:nvPr/>
         </p:nvSpPr>
         <p:spPr>
           <a:xfrm>
-            <a:off x="749808" y="2331720"/>
-            <a:ext cx="1920240" cy="329184"/>
+            <a:off x="914400" y="4023360"/>
+            <a:ext cx="10607040" cy="548640"/>
           </a:xfrm>
           <a:prstGeom prst="rect">
             <a:avLst/>
@@ -12816,75 +12426,33 @@
               </a:spcAft>
             </a:pPr>
             <a:r>
-              <a:rPr sz="1300" b="0">
+              <a:rPr sz="1600" b="0">
                 <a:solidFill>
                   <a:srgbClr val="101B33"/>
                 </a:solidFill>
                 <a:latin typeface="Arial"/>
               </a:rPr>
-              <a:t>Ảnh huấn luyện</a:t>
-            </a:r>
-          </a:p>
-        </p:txBody>
-      </p:sp>
-      <p:sp>
-        <p:nvSpPr>
-          <p:cNvPr id="17" name="TextBox 16"/>
-          <p:cNvSpPr txBox="1"/>
-          <p:nvPr/>
-        </p:nvSpPr>
-        <p:spPr>
-          <a:xfrm>
-            <a:off x="2670048" y="2331720"/>
-            <a:ext cx="3200400" cy="329184"/>
-          </a:xfrm>
-          <a:prstGeom prst="rect">
-            <a:avLst/>
-          </a:prstGeom>
-          <a:noFill/>
-        </p:spPr>
-        <p:txBody>
-          <a:bodyPr wrap="square" lIns="0" rIns="0">
-            <a:spAutoFit/>
-          </a:bodyPr>
-          <a:lstStyle/>
-          <a:p>
-            <a:pPr algn="l">
-              <a:lnSpc>
-                <a:spcPct val="115000"/>
-              </a:lnSpc>
-              <a:spcAft>
-                <a:spcPts val="600"/>
-              </a:spcAft>
-            </a:pPr>
-            <a:r>
-              <a:rPr sz="1300" b="0">
-                <a:solidFill>
-                  <a:srgbClr val="101B33"/>
-                </a:solidFill>
-                <a:latin typeface="Arial"/>
-              </a:rPr>
-              <a:t>2.160 nội dung × 1.327 style</a:t>
-            </a:r>
-          </a:p>
-        </p:txBody>
-      </p:sp>
-      <p:sp>
-        <p:nvSpPr>
-          <p:cNvPr id="18" name="Rectangle 17"/>
+              <a:t>Bước 2 — nhân σ(s), cộng μ(s): 'nhuộm' bằng thống kê của ảnh thời tiết.</a:t>
+            </a:r>
+          </a:p>
+        </p:txBody>
+      </p:sp>
+      <p:sp>
+        <p:nvSpPr>
+          <p:cNvPr id="14" name="Rectangle 13"/>
           <p:cNvSpPr/>
           <p:nvPr/>
         </p:nvSpPr>
         <p:spPr>
           <a:xfrm>
-            <a:off x="640080" y="2596896"/>
-            <a:ext cx="5120640" cy="329184"/>
+            <a:off x="640080" y="4672584"/>
+            <a:ext cx="100584" cy="100584"/>
           </a:xfrm>
           <a:prstGeom prst="rect">
             <a:avLst/>
           </a:prstGeom>
           <a:solidFill>
-            <a:srgbClr val="FFFFFF"/>
+            <a:srgbClr val="18A099"/>
           </a:solidFill>
           <a:ln>
             <a:noFill/>
@@ -12915,14 +12483,14 @@
       </p:sp>
       <p:sp>
         <p:nvSpPr>
-          <p:cNvPr id="19" name="TextBox 18"/>
+          <p:cNvPr id="15" name="TextBox 14"/>
           <p:cNvSpPr txBox="1"/>
           <p:nvPr/>
         </p:nvSpPr>
         <p:spPr>
           <a:xfrm>
-            <a:off x="749808" y="2660904"/>
-            <a:ext cx="1920240" cy="329184"/>
+            <a:off x="914400" y="4572000"/>
+            <a:ext cx="10607040" cy="548640"/>
           </a:xfrm>
           <a:prstGeom prst="rect">
             <a:avLst/>
@@ -12944,75 +12512,33 @@
               </a:spcAft>
             </a:pPr>
             <a:r>
-              <a:rPr sz="1300" b="0">
+              <a:rPr sz="1600" b="1">
                 <a:solidFill>
                   <a:srgbClr val="101B33"/>
                 </a:solidFill>
                 <a:latin typeface="Arial"/>
               </a:rPr>
-              <a:t>Kích thước</a:t>
-            </a:r>
-          </a:p>
-        </p:txBody>
-      </p:sp>
-      <p:sp>
-        <p:nvSpPr>
-          <p:cNvPr id="20" name="TextBox 19"/>
-          <p:cNvSpPr txBox="1"/>
-          <p:nvPr/>
-        </p:nvSpPr>
-        <p:spPr>
-          <a:xfrm>
-            <a:off x="2670048" y="2660904"/>
-            <a:ext cx="3200400" cy="329184"/>
-          </a:xfrm>
-          <a:prstGeom prst="rect">
-            <a:avLst/>
-          </a:prstGeom>
-          <a:noFill/>
-        </p:spPr>
-        <p:txBody>
-          <a:bodyPr wrap="square" lIns="0" rIns="0">
-            <a:spAutoFit/>
-          </a:bodyPr>
-          <a:lstStyle/>
-          <a:p>
-            <a:pPr algn="l">
-              <a:lnSpc>
-                <a:spcPct val="115000"/>
-              </a:lnSpc>
-              <a:spcAft>
-                <a:spcPts val="600"/>
-              </a:spcAft>
-            </a:pPr>
-            <a:r>
-              <a:rPr sz="1300" b="0">
-                <a:solidFill>
-                  <a:srgbClr val="101B33"/>
-                </a:solidFill>
-                <a:latin typeface="Arial"/>
-              </a:rPr>
-              <a:t>resize 320 → crop 256</a:t>
-            </a:r>
-          </a:p>
-        </p:txBody>
-      </p:sp>
-      <p:sp>
-        <p:nvSpPr>
-          <p:cNvPr id="21" name="Rectangle 20"/>
+              <a:t>Chỉ đổi thống kê THEO KÊNH ⇒ bản đồ đặc trưng không bị dịch chuyển ⇒ giữ bố cục.</a:t>
+            </a:r>
+          </a:p>
+        </p:txBody>
+      </p:sp>
+      <p:sp>
+        <p:nvSpPr>
+          <p:cNvPr id="16" name="Rectangle 15"/>
           <p:cNvSpPr/>
           <p:nvPr/>
         </p:nvSpPr>
         <p:spPr>
           <a:xfrm>
-            <a:off x="640080" y="2926080"/>
-            <a:ext cx="5120640" cy="329184"/>
+            <a:off x="640080" y="5221224"/>
+            <a:ext cx="100584" cy="100584"/>
           </a:xfrm>
           <a:prstGeom prst="rect">
             <a:avLst/>
           </a:prstGeom>
           <a:solidFill>
-            <a:srgbClr val="F4F6FA"/>
+            <a:srgbClr val="18A099"/>
           </a:solidFill>
           <a:ln>
             <a:noFill/>
@@ -13043,14 +12569,14 @@
       </p:sp>
       <p:sp>
         <p:nvSpPr>
-          <p:cNvPr id="22" name="TextBox 21"/>
+          <p:cNvPr id="17" name="TextBox 16"/>
           <p:cNvSpPr txBox="1"/>
           <p:nvPr/>
         </p:nvSpPr>
         <p:spPr>
           <a:xfrm>
-            <a:off x="749808" y="2990088"/>
-            <a:ext cx="1920240" cy="329184"/>
+            <a:off x="914400" y="5120640"/>
+            <a:ext cx="10607040" cy="548640"/>
           </a:xfrm>
           <a:prstGeom prst="rect">
             <a:avLst/>
@@ -13072,75 +12598,33 @@
               </a:spcAft>
             </a:pPr>
             <a:r>
-              <a:rPr sz="1300" b="0">
+              <a:rPr sz="1600" b="0">
                 <a:solidFill>
                   <a:srgbClr val="101B33"/>
                 </a:solidFill>
                 <a:latin typeface="Arial"/>
               </a:rPr>
-              <a:t>Batch / bước</a:t>
-            </a:r>
-          </a:p>
-        </p:txBody>
-      </p:sp>
-      <p:sp>
-        <p:nvSpPr>
-          <p:cNvPr id="23" name="TextBox 22"/>
-          <p:cNvSpPr txBox="1"/>
-          <p:nvPr/>
-        </p:nvSpPr>
-        <p:spPr>
-          <a:xfrm>
-            <a:off x="2670048" y="2990088"/>
-            <a:ext cx="3200400" cy="329184"/>
-          </a:xfrm>
-          <a:prstGeom prst="rect">
-            <a:avLst/>
-          </a:prstGeom>
-          <a:noFill/>
-        </p:spPr>
-        <p:txBody>
-          <a:bodyPr wrap="square" lIns="0" rIns="0">
-            <a:spAutoFit/>
-          </a:bodyPr>
-          <a:lstStyle/>
-          <a:p>
-            <a:pPr algn="l">
-              <a:lnSpc>
-                <a:spcPct val="115000"/>
-              </a:lnSpc>
-              <a:spcAft>
-                <a:spcPts val="600"/>
-              </a:spcAft>
-            </a:pPr>
-            <a:r>
-              <a:rPr sz="1300" b="0">
-                <a:solidFill>
-                  <a:srgbClr val="101B33"/>
-                </a:solidFill>
-                <a:latin typeface="Arial"/>
-              </a:rPr>
-              <a:t>8 / 12.000</a:t>
-            </a:r>
-          </a:p>
-        </p:txBody>
-      </p:sp>
-      <p:sp>
-        <p:nvSpPr>
-          <p:cNvPr id="24" name="Rectangle 23"/>
+              <a:t>Không có tham số học nào trong AdaIN — chỉ Decoder (3,51 triệu tham số) được huấn luyện.</a:t>
+            </a:r>
+          </a:p>
+        </p:txBody>
+      </p:sp>
+      <p:sp>
+        <p:nvSpPr>
+          <p:cNvPr id="18" name="Rectangle 17"/>
           <p:cNvSpPr/>
           <p:nvPr/>
         </p:nvSpPr>
         <p:spPr>
           <a:xfrm>
-            <a:off x="640080" y="3255264"/>
-            <a:ext cx="5120640" cy="329184"/>
+            <a:off x="640080" y="5769864"/>
+            <a:ext cx="100584" cy="100584"/>
           </a:xfrm>
           <a:prstGeom prst="rect">
             <a:avLst/>
           </a:prstGeom>
           <a:solidFill>
-            <a:srgbClr val="FFFFFF"/>
+            <a:srgbClr val="18A099"/>
           </a:solidFill>
           <a:ln>
             <a:noFill/>
@@ -13171,14 +12655,14 @@
       </p:sp>
       <p:sp>
         <p:nvSpPr>
-          <p:cNvPr id="25" name="TextBox 24"/>
+          <p:cNvPr id="19" name="TextBox 18"/>
           <p:cNvSpPr txBox="1"/>
           <p:nvPr/>
         </p:nvSpPr>
         <p:spPr>
           <a:xfrm>
-            <a:off x="749808" y="3319272"/>
-            <a:ext cx="1920240" cy="329184"/>
+            <a:off x="914400" y="5669280"/>
+            <a:ext cx="10607040" cy="548640"/>
           </a:xfrm>
           <a:prstGeom prst="rect">
             <a:avLst/>
@@ -13200,495 +12684,17 @@
               </a:spcAft>
             </a:pPr>
             <a:r>
-              <a:rPr sz="1300" b="0">
+              <a:rPr sz="1600" b="1">
                 <a:solidFill>
                   <a:srgbClr val="101B33"/>
                 </a:solidFill>
                 <a:latin typeface="Arial"/>
               </a:rPr>
-              <a:t>Optimizer</a:t>
-            </a:r>
-          </a:p>
-        </p:txBody>
-      </p:sp>
-      <p:sp>
-        <p:nvSpPr>
-          <p:cNvPr id="26" name="TextBox 25"/>
-          <p:cNvSpPr txBox="1"/>
-          <p:nvPr/>
-        </p:nvSpPr>
-        <p:spPr>
-          <a:xfrm>
-            <a:off x="2670048" y="3319272"/>
-            <a:ext cx="3200400" cy="329184"/>
-          </a:xfrm>
-          <a:prstGeom prst="rect">
-            <a:avLst/>
-          </a:prstGeom>
-          <a:noFill/>
-        </p:spPr>
-        <p:txBody>
-          <a:bodyPr wrap="square" lIns="0" rIns="0">
-            <a:spAutoFit/>
-          </a:bodyPr>
-          <a:lstStyle/>
-          <a:p>
-            <a:pPr algn="l">
-              <a:lnSpc>
-                <a:spcPct val="115000"/>
-              </a:lnSpc>
-              <a:spcAft>
-                <a:spcPts val="600"/>
-              </a:spcAft>
-            </a:pPr>
-            <a:r>
-              <a:rPr sz="1300" b="0">
-                <a:solidFill>
-                  <a:srgbClr val="101B33"/>
-                </a:solidFill>
-                <a:latin typeface="Arial"/>
-              </a:rPr>
-              <a:t>Adam, lr 1e-4, decay 5e-5</a:t>
-            </a:r>
-          </a:p>
-        </p:txBody>
-      </p:sp>
-      <p:sp>
-        <p:nvSpPr>
-          <p:cNvPr id="27" name="Rectangle 26"/>
-          <p:cNvSpPr/>
-          <p:nvPr/>
-        </p:nvSpPr>
-        <p:spPr>
-          <a:xfrm>
-            <a:off x="640080" y="3584448"/>
-            <a:ext cx="5120640" cy="329184"/>
-          </a:xfrm>
-          <a:prstGeom prst="rect">
-            <a:avLst/>
-          </a:prstGeom>
-          <a:solidFill>
-            <a:srgbClr val="F4F6FA"/>
-          </a:solidFill>
-          <a:ln>
-            <a:noFill/>
-          </a:ln>
-          <a:effectLst/>
-        </p:spPr>
-        <p:style>
-          <a:lnRef idx="1">
-            <a:schemeClr val="accent1"/>
-          </a:lnRef>
-          <a:fillRef idx="3">
-            <a:schemeClr val="accent1"/>
-          </a:fillRef>
-          <a:effectRef idx="2">
-            <a:schemeClr val="accent1"/>
-          </a:effectRef>
-          <a:fontRef idx="minor">
-            <a:schemeClr val="lt1"/>
-          </a:fontRef>
-        </p:style>
-        <p:txBody>
-          <a:bodyPr rtlCol="0" anchor="ctr"/>
-          <a:lstStyle/>
-          <a:p>
-            <a:pPr algn="ctr"/>
-          </a:p>
-        </p:txBody>
-      </p:sp>
-      <p:sp>
-        <p:nvSpPr>
-          <p:cNvPr id="28" name="TextBox 27"/>
-          <p:cNvSpPr txBox="1"/>
-          <p:nvPr/>
-        </p:nvSpPr>
-        <p:spPr>
-          <a:xfrm>
-            <a:off x="749808" y="3648456"/>
-            <a:ext cx="1920240" cy="329184"/>
-          </a:xfrm>
-          <a:prstGeom prst="rect">
-            <a:avLst/>
-          </a:prstGeom>
-          <a:noFill/>
-        </p:spPr>
-        <p:txBody>
-          <a:bodyPr wrap="square" lIns="0" rIns="0">
-            <a:spAutoFit/>
-          </a:bodyPr>
-          <a:lstStyle/>
-          <a:p>
-            <a:pPr algn="l">
-              <a:lnSpc>
-                <a:spcPct val="115000"/>
-              </a:lnSpc>
-              <a:spcAft>
-                <a:spcPts val="600"/>
-              </a:spcAft>
-            </a:pPr>
-            <a:r>
-              <a:rPr sz="1300" b="0">
-                <a:solidFill>
-                  <a:srgbClr val="101B33"/>
-                </a:solidFill>
-                <a:latin typeface="Arial"/>
-              </a:rPr>
-              <a:t>Mixed precision</a:t>
-            </a:r>
-          </a:p>
-        </p:txBody>
-      </p:sp>
-      <p:sp>
-        <p:nvSpPr>
-          <p:cNvPr id="29" name="TextBox 28"/>
-          <p:cNvSpPr txBox="1"/>
-          <p:nvPr/>
-        </p:nvSpPr>
-        <p:spPr>
-          <a:xfrm>
-            <a:off x="2670048" y="3648456"/>
-            <a:ext cx="3200400" cy="329184"/>
-          </a:xfrm>
-          <a:prstGeom prst="rect">
-            <a:avLst/>
-          </a:prstGeom>
-          <a:noFill/>
-        </p:spPr>
-        <p:txBody>
-          <a:bodyPr wrap="square" lIns="0" rIns="0">
-            <a:spAutoFit/>
-          </a:bodyPr>
-          <a:lstStyle/>
-          <a:p>
-            <a:pPr algn="l">
-              <a:lnSpc>
-                <a:spcPct val="115000"/>
-              </a:lnSpc>
-              <a:spcAft>
-                <a:spcPts val="600"/>
-              </a:spcAft>
-            </a:pPr>
-            <a:r>
-              <a:rPr sz="1300" b="0">
-                <a:solidFill>
-                  <a:srgbClr val="101B33"/>
-                </a:solidFill>
-                <a:latin typeface="Arial"/>
-              </a:rPr>
-              <a:t>bfloat16</a:t>
-            </a:r>
-          </a:p>
-        </p:txBody>
-      </p:sp>
-      <p:sp>
-        <p:nvSpPr>
-          <p:cNvPr id="30" name="Rectangle 29"/>
-          <p:cNvSpPr/>
-          <p:nvPr/>
-        </p:nvSpPr>
-        <p:spPr>
-          <a:xfrm>
-            <a:off x="640080" y="3913632"/>
-            <a:ext cx="5120640" cy="329184"/>
-          </a:xfrm>
-          <a:prstGeom prst="rect">
-            <a:avLst/>
-          </a:prstGeom>
-          <a:solidFill>
-            <a:srgbClr val="FFFFFF"/>
-          </a:solidFill>
-          <a:ln>
-            <a:noFill/>
-          </a:ln>
-          <a:effectLst/>
-        </p:spPr>
-        <p:style>
-          <a:lnRef idx="1">
-            <a:schemeClr val="accent1"/>
-          </a:lnRef>
-          <a:fillRef idx="3">
-            <a:schemeClr val="accent1"/>
-          </a:fillRef>
-          <a:effectRef idx="2">
-            <a:schemeClr val="accent1"/>
-          </a:effectRef>
-          <a:fontRef idx="minor">
-            <a:schemeClr val="lt1"/>
-          </a:fontRef>
-        </p:style>
-        <p:txBody>
-          <a:bodyPr rtlCol="0" anchor="ctr"/>
-          <a:lstStyle/>
-          <a:p>
-            <a:pPr algn="ctr"/>
-          </a:p>
-        </p:txBody>
-      </p:sp>
-      <p:sp>
-        <p:nvSpPr>
-          <p:cNvPr id="31" name="TextBox 30"/>
-          <p:cNvSpPr txBox="1"/>
-          <p:nvPr/>
-        </p:nvSpPr>
-        <p:spPr>
-          <a:xfrm>
-            <a:off x="749808" y="3977640"/>
-            <a:ext cx="1920240" cy="329184"/>
-          </a:xfrm>
-          <a:prstGeom prst="rect">
-            <a:avLst/>
-          </a:prstGeom>
-          <a:noFill/>
-        </p:spPr>
-        <p:txBody>
-          <a:bodyPr wrap="square" lIns="0" rIns="0">
-            <a:spAutoFit/>
-          </a:bodyPr>
-          <a:lstStyle/>
-          <a:p>
-            <a:pPr algn="l">
-              <a:lnSpc>
-                <a:spcPct val="115000"/>
-              </a:lnSpc>
-              <a:spcAft>
-                <a:spcPts val="600"/>
-              </a:spcAft>
-            </a:pPr>
-            <a:r>
-              <a:rPr sz="1300" b="0">
-                <a:solidFill>
-                  <a:srgbClr val="101B33"/>
-                </a:solidFill>
-                <a:latin typeface="Arial"/>
-              </a:rPr>
-              <a:t>Thời gian</a:t>
-            </a:r>
-          </a:p>
-        </p:txBody>
-      </p:sp>
-      <p:sp>
-        <p:nvSpPr>
-          <p:cNvPr id="32" name="TextBox 31"/>
-          <p:cNvSpPr txBox="1"/>
-          <p:nvPr/>
-        </p:nvSpPr>
-        <p:spPr>
-          <a:xfrm>
-            <a:off x="2670048" y="3977640"/>
-            <a:ext cx="3200400" cy="329184"/>
-          </a:xfrm>
-          <a:prstGeom prst="rect">
-            <a:avLst/>
-          </a:prstGeom>
-          <a:noFill/>
-        </p:spPr>
-        <p:txBody>
-          <a:bodyPr wrap="square" lIns="0" rIns="0">
-            <a:spAutoFit/>
-          </a:bodyPr>
-          <a:lstStyle/>
-          <a:p>
-            <a:pPr algn="l">
-              <a:lnSpc>
-                <a:spcPct val="115000"/>
-              </a:lnSpc>
-              <a:spcAft>
-                <a:spcPts val="600"/>
-              </a:spcAft>
-            </a:pPr>
-            <a:r>
-              <a:rPr sz="1300" b="0">
-                <a:solidFill>
-                  <a:srgbClr val="101B33"/>
-                </a:solidFill>
-                <a:latin typeface="Arial"/>
-              </a:rPr>
-              <a:t>37 phút (RTX 5060 Ti)</a:t>
-            </a:r>
-          </a:p>
-        </p:txBody>
-      </p:sp>
-      <p:sp>
-        <p:nvSpPr>
-          <p:cNvPr id="33" name="TextBox 32"/>
-          <p:cNvSpPr txBox="1"/>
-          <p:nvPr/>
-        </p:nvSpPr>
-        <p:spPr>
-          <a:xfrm>
-            <a:off x="6126480" y="1280160"/>
-            <a:ext cx="5394960" cy="2194560"/>
-          </a:xfrm>
-          <a:prstGeom prst="rect">
-            <a:avLst/>
-          </a:prstGeom>
-          <a:noFill/>
-        </p:spPr>
-        <p:txBody>
-          <a:bodyPr wrap="square" lIns="0" rIns="0">
-            <a:spAutoFit/>
-          </a:bodyPr>
-          <a:lstStyle/>
-          <a:p>
-            <a:pPr algn="l">
-              <a:lnSpc>
-                <a:spcPct val="115000"/>
-              </a:lnSpc>
-              <a:spcAft>
-                <a:spcPts val="600"/>
-              </a:spcAft>
-            </a:pPr>
-            <a:r>
-              <a:rPr sz="1900" b="1">
-                <a:solidFill>
-                  <a:srgbClr val="101B33"/>
-                </a:solidFill>
-                <a:latin typeface="Arial"/>
-              </a:rPr>
-              <a:t>Hàm mất mát</a:t>
-            </a:r>
-          </a:p>
-          <a:p>
-            <a:pPr algn="l">
-              <a:lnSpc>
-                <a:spcPct val="115000"/>
-              </a:lnSpc>
-              <a:spcAft>
-                <a:spcPts val="600"/>
-              </a:spcAft>
-            </a:pPr>
-            <a:r>
-              <a:rPr sz="1500" b="1">
-                <a:solidFill>
-                  <a:srgbClr val="2E6FD9"/>
-                </a:solidFill>
-                <a:latin typeface="Arial"/>
-              </a:rPr>
-              <a:t>L  =  L_content  +  10 · L_style  +  1 · L_identity</a:t>
-            </a:r>
-          </a:p>
-          <a:p>
-            <a:pPr algn="l">
-              <a:lnSpc>
-                <a:spcPct val="115000"/>
-              </a:lnSpc>
-              <a:spcAft>
-                <a:spcPts val="600"/>
-              </a:spcAft>
-            </a:pPr>
-            <a:r>
-              <a:rPr sz="1400" b="0">
-                <a:solidFill>
-                  <a:srgbClr val="5A6375"/>
-                </a:solidFill>
-                <a:latin typeface="Arial"/>
-              </a:rPr>
-              <a:t>· L_content — khớp đặc trưng đầu ra với đặc trưng AdaIN → giữ bố cục.</a:t>
-            </a:r>
-          </a:p>
-          <a:p>
-            <a:pPr algn="l">
-              <a:lnSpc>
-                <a:spcPct val="115000"/>
-              </a:lnSpc>
-              <a:spcAft>
-                <a:spcPts val="600"/>
-              </a:spcAft>
-            </a:pPr>
-            <a:r>
-              <a:rPr sz="1400" b="0">
-                <a:solidFill>
-                  <a:srgbClr val="5A6375"/>
-                </a:solidFill>
-                <a:latin typeface="Arial"/>
-              </a:rPr>
-              <a:t>· L_style — khớp mean/std ở 4 tầng VGG → giống tông thời tiết.</a:t>
-            </a:r>
-          </a:p>
-          <a:p>
-            <a:pPr algn="l">
-              <a:lnSpc>
-                <a:spcPct val="115000"/>
-              </a:lnSpc>
-              <a:spcAft>
-                <a:spcPts val="600"/>
-              </a:spcAft>
-            </a:pPr>
-            <a:r>
-              <a:rPr sz="1400" b="0">
-                <a:solidFill>
-                  <a:srgbClr val="5A6375"/>
-                </a:solidFill>
-                <a:latin typeface="Arial"/>
-              </a:rPr>
-              <a:t>· L_identity — khi style = content thì đầu ra phải bằng ảnh gốc.</a:t>
-            </a:r>
-          </a:p>
-          <a:p>
-            <a:pPr algn="l">
-              <a:lnSpc>
-                <a:spcPct val="115000"/>
-              </a:lnSpc>
-              <a:spcAft>
-                <a:spcPts val="600"/>
-              </a:spcAft>
-            </a:pPr>
-            <a:r>
-              <a:rPr sz="1400" b="0">
-                <a:solidFill>
-                  <a:srgbClr val="5A6375"/>
-                </a:solidFill>
-                <a:latin typeface="Arial"/>
-              </a:rPr>
-              <a:t>   Đây là điểm bổ sung so với AdaIN gốc: ép decoder trung thực,</a:t>
-            </a:r>
-          </a:p>
-          <a:p>
-            <a:pPr algn="l">
-              <a:lnSpc>
-                <a:spcPct val="115000"/>
-              </a:lnSpc>
-              <a:spcAft>
-                <a:spcPts val="600"/>
-              </a:spcAft>
-            </a:pPr>
-            <a:r>
-              <a:rPr sz="1400" b="0">
-                <a:solidFill>
-                  <a:srgbClr val="5A6375"/>
-                </a:solidFill>
-                <a:latin typeface="Arial"/>
-              </a:rPr>
-              <a:t>   giảm méo cấu trúc — điều kiện sống còn để nhãn còn dùng được.</a:t>
-            </a:r>
-          </a:p>
-        </p:txBody>
-      </p:sp>
-      <p:pic>
-        <p:nvPicPr>
-          <p:cNvPr id="34" name="Picture 33" descr="fig_loss.png"/>
-          <p:cNvPicPr>
-            <a:picLocks noChangeAspect="1"/>
-          </p:cNvPicPr>
-          <p:nvPr/>
-        </p:nvPicPr>
-        <p:blipFill>
-          <a:blip r:embed="rId2"/>
-          <a:stretch>
-            <a:fillRect/>
-          </a:stretch>
-        </p:blipFill>
-        <p:spPr>
-          <a:xfrm>
-            <a:off x="2123667" y="4434840"/>
-            <a:ext cx="7914185" cy="2011680"/>
-          </a:xfrm>
-          <a:prstGeom prst="rect">
-            <a:avLst/>
-          </a:prstGeom>
-        </p:spPr>
-      </p:pic>
+              <a:t>Hệ quả: thời tiết mới chỉ cần đưa ảnh tham chiếu vào, KHÔNG huấn luyện lại.</a:t>
+            </a:r>
+          </a:p>
+        </p:txBody>
+      </p:sp>
     </p:spTree>
   </p:cSld>
   <p:clrMapOvr>
@@ -13832,7 +12838,7 @@
                 </a:solidFill>
                 <a:latin typeface="Arial"/>
               </a:rPr>
-              <a:t>Kết quả — 5 loại thời tiết</a:t>
+              <a:t>Huấn luyện</a:t>
             </a:r>
           </a:p>
           <a:p>
@@ -13851,7 +12857,7 @@
                 </a:solidFill>
                 <a:latin typeface="Arial"/>
               </a:rPr>
-              <a:t>Cùng một ảnh gốc, đổi ảnh tham chiếu là đổi thời tiết</a:t>
+              <a:t>Chỉ Decoder được học — VGG-19 đóng băng hoàn toàn</a:t>
             </a:r>
           </a:p>
         </p:txBody>
@@ -13898,9 +12904,1317 @@
           </a:p>
         </p:txBody>
       </p:sp>
+      <p:sp>
+        <p:nvSpPr>
+          <p:cNvPr id="6" name="Rectangle 5"/>
+          <p:cNvSpPr/>
+          <p:nvPr/>
+        </p:nvSpPr>
+        <p:spPr>
+          <a:xfrm>
+            <a:off x="640080" y="1280160"/>
+            <a:ext cx="5120640" cy="329184"/>
+          </a:xfrm>
+          <a:prstGeom prst="rect">
+            <a:avLst/>
+          </a:prstGeom>
+          <a:solidFill>
+            <a:srgbClr val="101B33"/>
+          </a:solidFill>
+          <a:ln>
+            <a:noFill/>
+          </a:ln>
+          <a:effectLst/>
+        </p:spPr>
+        <p:style>
+          <a:lnRef idx="1">
+            <a:schemeClr val="accent1"/>
+          </a:lnRef>
+          <a:fillRef idx="3">
+            <a:schemeClr val="accent1"/>
+          </a:fillRef>
+          <a:effectRef idx="2">
+            <a:schemeClr val="accent1"/>
+          </a:effectRef>
+          <a:fontRef idx="minor">
+            <a:schemeClr val="lt1"/>
+          </a:fontRef>
+        </p:style>
+        <p:txBody>
+          <a:bodyPr rtlCol="0" anchor="ctr"/>
+          <a:lstStyle/>
+          <a:p>
+            <a:pPr algn="ctr"/>
+          </a:p>
+        </p:txBody>
+      </p:sp>
+      <p:sp>
+        <p:nvSpPr>
+          <p:cNvPr id="7" name="TextBox 6"/>
+          <p:cNvSpPr txBox="1"/>
+          <p:nvPr/>
+        </p:nvSpPr>
+        <p:spPr>
+          <a:xfrm>
+            <a:off x="749808" y="1344168"/>
+            <a:ext cx="1920240" cy="329184"/>
+          </a:xfrm>
+          <a:prstGeom prst="rect">
+            <a:avLst/>
+          </a:prstGeom>
+          <a:noFill/>
+        </p:spPr>
+        <p:txBody>
+          <a:bodyPr wrap="square" lIns="0" rIns="0">
+            <a:spAutoFit/>
+          </a:bodyPr>
+          <a:lstStyle/>
+          <a:p>
+            <a:pPr algn="l">
+              <a:lnSpc>
+                <a:spcPct val="115000"/>
+              </a:lnSpc>
+              <a:spcAft>
+                <a:spcPts val="600"/>
+              </a:spcAft>
+            </a:pPr>
+            <a:r>
+              <a:rPr sz="1300" b="1">
+                <a:solidFill>
+                  <a:srgbClr val="FFFFFF"/>
+                </a:solidFill>
+                <a:latin typeface="Arial"/>
+              </a:rPr>
+              <a:t>Thành phần</a:t>
+            </a:r>
+          </a:p>
+        </p:txBody>
+      </p:sp>
+      <p:sp>
+        <p:nvSpPr>
+          <p:cNvPr id="8" name="TextBox 7"/>
+          <p:cNvSpPr txBox="1"/>
+          <p:nvPr/>
+        </p:nvSpPr>
+        <p:spPr>
+          <a:xfrm>
+            <a:off x="2670048" y="1344168"/>
+            <a:ext cx="3200400" cy="329184"/>
+          </a:xfrm>
+          <a:prstGeom prst="rect">
+            <a:avLst/>
+          </a:prstGeom>
+          <a:noFill/>
+        </p:spPr>
+        <p:txBody>
+          <a:bodyPr wrap="square" lIns="0" rIns="0">
+            <a:spAutoFit/>
+          </a:bodyPr>
+          <a:lstStyle/>
+          <a:p>
+            <a:pPr algn="l">
+              <a:lnSpc>
+                <a:spcPct val="115000"/>
+              </a:lnSpc>
+              <a:spcAft>
+                <a:spcPts val="600"/>
+              </a:spcAft>
+            </a:pPr>
+            <a:r>
+              <a:rPr sz="1300" b="1">
+                <a:solidFill>
+                  <a:srgbClr val="FFFFFF"/>
+                </a:solidFill>
+                <a:latin typeface="Arial"/>
+              </a:rPr>
+              <a:t>Giá trị</a:t>
+            </a:r>
+          </a:p>
+        </p:txBody>
+      </p:sp>
+      <p:sp>
+        <p:nvSpPr>
+          <p:cNvPr id="9" name="Rectangle 8"/>
+          <p:cNvSpPr/>
+          <p:nvPr/>
+        </p:nvSpPr>
+        <p:spPr>
+          <a:xfrm>
+            <a:off x="640080" y="1609344"/>
+            <a:ext cx="5120640" cy="329184"/>
+          </a:xfrm>
+          <a:prstGeom prst="rect">
+            <a:avLst/>
+          </a:prstGeom>
+          <a:solidFill>
+            <a:srgbClr val="F4F6FA"/>
+          </a:solidFill>
+          <a:ln>
+            <a:noFill/>
+          </a:ln>
+          <a:effectLst/>
+        </p:spPr>
+        <p:style>
+          <a:lnRef idx="1">
+            <a:schemeClr val="accent1"/>
+          </a:lnRef>
+          <a:fillRef idx="3">
+            <a:schemeClr val="accent1"/>
+          </a:fillRef>
+          <a:effectRef idx="2">
+            <a:schemeClr val="accent1"/>
+          </a:effectRef>
+          <a:fontRef idx="minor">
+            <a:schemeClr val="lt1"/>
+          </a:fontRef>
+        </p:style>
+        <p:txBody>
+          <a:bodyPr rtlCol="0" anchor="ctr"/>
+          <a:lstStyle/>
+          <a:p>
+            <a:pPr algn="ctr"/>
+          </a:p>
+        </p:txBody>
+      </p:sp>
+      <p:sp>
+        <p:nvSpPr>
+          <p:cNvPr id="10" name="TextBox 9"/>
+          <p:cNvSpPr txBox="1"/>
+          <p:nvPr/>
+        </p:nvSpPr>
+        <p:spPr>
+          <a:xfrm>
+            <a:off x="749808" y="1673352"/>
+            <a:ext cx="1920240" cy="329184"/>
+          </a:xfrm>
+          <a:prstGeom prst="rect">
+            <a:avLst/>
+          </a:prstGeom>
+          <a:noFill/>
+        </p:spPr>
+        <p:txBody>
+          <a:bodyPr wrap="square" lIns="0" rIns="0">
+            <a:spAutoFit/>
+          </a:bodyPr>
+          <a:lstStyle/>
+          <a:p>
+            <a:pPr algn="l">
+              <a:lnSpc>
+                <a:spcPct val="115000"/>
+              </a:lnSpc>
+              <a:spcAft>
+                <a:spcPts val="600"/>
+              </a:spcAft>
+            </a:pPr>
+            <a:r>
+              <a:rPr sz="1300" b="0">
+                <a:solidFill>
+                  <a:srgbClr val="101B33"/>
+                </a:solidFill>
+                <a:latin typeface="Arial"/>
+              </a:rPr>
+              <a:t>Encoder</a:t>
+            </a:r>
+          </a:p>
+        </p:txBody>
+      </p:sp>
+      <p:sp>
+        <p:nvSpPr>
+          <p:cNvPr id="11" name="TextBox 10"/>
+          <p:cNvSpPr txBox="1"/>
+          <p:nvPr/>
+        </p:nvSpPr>
+        <p:spPr>
+          <a:xfrm>
+            <a:off x="2670048" y="1673352"/>
+            <a:ext cx="3200400" cy="329184"/>
+          </a:xfrm>
+          <a:prstGeom prst="rect">
+            <a:avLst/>
+          </a:prstGeom>
+          <a:noFill/>
+        </p:spPr>
+        <p:txBody>
+          <a:bodyPr wrap="square" lIns="0" rIns="0">
+            <a:spAutoFit/>
+          </a:bodyPr>
+          <a:lstStyle/>
+          <a:p>
+            <a:pPr algn="l">
+              <a:lnSpc>
+                <a:spcPct val="115000"/>
+              </a:lnSpc>
+              <a:spcAft>
+                <a:spcPts val="600"/>
+              </a:spcAft>
+            </a:pPr>
+            <a:r>
+              <a:rPr sz="1300" b="0">
+                <a:solidFill>
+                  <a:srgbClr val="101B33"/>
+                </a:solidFill>
+                <a:latin typeface="Arial"/>
+              </a:rPr>
+              <a:t>VGG-19 (ImageNet), đóng băng</a:t>
+            </a:r>
+          </a:p>
+        </p:txBody>
+      </p:sp>
+      <p:sp>
+        <p:nvSpPr>
+          <p:cNvPr id="12" name="Rectangle 11"/>
+          <p:cNvSpPr/>
+          <p:nvPr/>
+        </p:nvSpPr>
+        <p:spPr>
+          <a:xfrm>
+            <a:off x="640080" y="1938528"/>
+            <a:ext cx="5120640" cy="329184"/>
+          </a:xfrm>
+          <a:prstGeom prst="rect">
+            <a:avLst/>
+          </a:prstGeom>
+          <a:solidFill>
+            <a:srgbClr val="FFFFFF"/>
+          </a:solidFill>
+          <a:ln>
+            <a:noFill/>
+          </a:ln>
+          <a:effectLst/>
+        </p:spPr>
+        <p:style>
+          <a:lnRef idx="1">
+            <a:schemeClr val="accent1"/>
+          </a:lnRef>
+          <a:fillRef idx="3">
+            <a:schemeClr val="accent1"/>
+          </a:fillRef>
+          <a:effectRef idx="2">
+            <a:schemeClr val="accent1"/>
+          </a:effectRef>
+          <a:fontRef idx="minor">
+            <a:schemeClr val="lt1"/>
+          </a:fontRef>
+        </p:style>
+        <p:txBody>
+          <a:bodyPr rtlCol="0" anchor="ctr"/>
+          <a:lstStyle/>
+          <a:p>
+            <a:pPr algn="ctr"/>
+          </a:p>
+        </p:txBody>
+      </p:sp>
+      <p:sp>
+        <p:nvSpPr>
+          <p:cNvPr id="13" name="TextBox 12"/>
+          <p:cNvSpPr txBox="1"/>
+          <p:nvPr/>
+        </p:nvSpPr>
+        <p:spPr>
+          <a:xfrm>
+            <a:off x="749808" y="2002536"/>
+            <a:ext cx="1920240" cy="329184"/>
+          </a:xfrm>
+          <a:prstGeom prst="rect">
+            <a:avLst/>
+          </a:prstGeom>
+          <a:noFill/>
+        </p:spPr>
+        <p:txBody>
+          <a:bodyPr wrap="square" lIns="0" rIns="0">
+            <a:spAutoFit/>
+          </a:bodyPr>
+          <a:lstStyle/>
+          <a:p>
+            <a:pPr algn="l">
+              <a:lnSpc>
+                <a:spcPct val="115000"/>
+              </a:lnSpc>
+              <a:spcAft>
+                <a:spcPts val="600"/>
+              </a:spcAft>
+            </a:pPr>
+            <a:r>
+              <a:rPr sz="1300" b="0">
+                <a:solidFill>
+                  <a:srgbClr val="101B33"/>
+                </a:solidFill>
+                <a:latin typeface="Arial"/>
+              </a:rPr>
+              <a:t>Decoder</a:t>
+            </a:r>
+          </a:p>
+        </p:txBody>
+      </p:sp>
+      <p:sp>
+        <p:nvSpPr>
+          <p:cNvPr id="14" name="TextBox 13"/>
+          <p:cNvSpPr txBox="1"/>
+          <p:nvPr/>
+        </p:nvSpPr>
+        <p:spPr>
+          <a:xfrm>
+            <a:off x="2670048" y="2002536"/>
+            <a:ext cx="3200400" cy="329184"/>
+          </a:xfrm>
+          <a:prstGeom prst="rect">
+            <a:avLst/>
+          </a:prstGeom>
+          <a:noFill/>
+        </p:spPr>
+        <p:txBody>
+          <a:bodyPr wrap="square" lIns="0" rIns="0">
+            <a:spAutoFit/>
+          </a:bodyPr>
+          <a:lstStyle/>
+          <a:p>
+            <a:pPr algn="l">
+              <a:lnSpc>
+                <a:spcPct val="115000"/>
+              </a:lnSpc>
+              <a:spcAft>
+                <a:spcPts val="600"/>
+              </a:spcAft>
+            </a:pPr>
+            <a:r>
+              <a:rPr sz="1300" b="0">
+                <a:solidFill>
+                  <a:srgbClr val="101B33"/>
+                </a:solidFill>
+                <a:latin typeface="Arial"/>
+              </a:rPr>
+              <a:t>3,51 M tham số</a:t>
+            </a:r>
+          </a:p>
+        </p:txBody>
+      </p:sp>
+      <p:sp>
+        <p:nvSpPr>
+          <p:cNvPr id="15" name="Rectangle 14"/>
+          <p:cNvSpPr/>
+          <p:nvPr/>
+        </p:nvSpPr>
+        <p:spPr>
+          <a:xfrm>
+            <a:off x="640080" y="2267712"/>
+            <a:ext cx="5120640" cy="329184"/>
+          </a:xfrm>
+          <a:prstGeom prst="rect">
+            <a:avLst/>
+          </a:prstGeom>
+          <a:solidFill>
+            <a:srgbClr val="F4F6FA"/>
+          </a:solidFill>
+          <a:ln>
+            <a:noFill/>
+          </a:ln>
+          <a:effectLst/>
+        </p:spPr>
+        <p:style>
+          <a:lnRef idx="1">
+            <a:schemeClr val="accent1"/>
+          </a:lnRef>
+          <a:fillRef idx="3">
+            <a:schemeClr val="accent1"/>
+          </a:fillRef>
+          <a:effectRef idx="2">
+            <a:schemeClr val="accent1"/>
+          </a:effectRef>
+          <a:fontRef idx="minor">
+            <a:schemeClr val="lt1"/>
+          </a:fontRef>
+        </p:style>
+        <p:txBody>
+          <a:bodyPr rtlCol="0" anchor="ctr"/>
+          <a:lstStyle/>
+          <a:p>
+            <a:pPr algn="ctr"/>
+          </a:p>
+        </p:txBody>
+      </p:sp>
+      <p:sp>
+        <p:nvSpPr>
+          <p:cNvPr id="16" name="TextBox 15"/>
+          <p:cNvSpPr txBox="1"/>
+          <p:nvPr/>
+        </p:nvSpPr>
+        <p:spPr>
+          <a:xfrm>
+            <a:off x="749808" y="2331720"/>
+            <a:ext cx="1920240" cy="329184"/>
+          </a:xfrm>
+          <a:prstGeom prst="rect">
+            <a:avLst/>
+          </a:prstGeom>
+          <a:noFill/>
+        </p:spPr>
+        <p:txBody>
+          <a:bodyPr wrap="square" lIns="0" rIns="0">
+            <a:spAutoFit/>
+          </a:bodyPr>
+          <a:lstStyle/>
+          <a:p>
+            <a:pPr algn="l">
+              <a:lnSpc>
+                <a:spcPct val="115000"/>
+              </a:lnSpc>
+              <a:spcAft>
+                <a:spcPts val="600"/>
+              </a:spcAft>
+            </a:pPr>
+            <a:r>
+              <a:rPr sz="1300" b="0">
+                <a:solidFill>
+                  <a:srgbClr val="101B33"/>
+                </a:solidFill>
+                <a:latin typeface="Arial"/>
+              </a:rPr>
+              <a:t>Ảnh huấn luyện</a:t>
+            </a:r>
+          </a:p>
+        </p:txBody>
+      </p:sp>
+      <p:sp>
+        <p:nvSpPr>
+          <p:cNvPr id="17" name="TextBox 16"/>
+          <p:cNvSpPr txBox="1"/>
+          <p:nvPr/>
+        </p:nvSpPr>
+        <p:spPr>
+          <a:xfrm>
+            <a:off x="2670048" y="2331720"/>
+            <a:ext cx="3200400" cy="329184"/>
+          </a:xfrm>
+          <a:prstGeom prst="rect">
+            <a:avLst/>
+          </a:prstGeom>
+          <a:noFill/>
+        </p:spPr>
+        <p:txBody>
+          <a:bodyPr wrap="square" lIns="0" rIns="0">
+            <a:spAutoFit/>
+          </a:bodyPr>
+          <a:lstStyle/>
+          <a:p>
+            <a:pPr algn="l">
+              <a:lnSpc>
+                <a:spcPct val="115000"/>
+              </a:lnSpc>
+              <a:spcAft>
+                <a:spcPts val="600"/>
+              </a:spcAft>
+            </a:pPr>
+            <a:r>
+              <a:rPr sz="1300" b="0">
+                <a:solidFill>
+                  <a:srgbClr val="101B33"/>
+                </a:solidFill>
+                <a:latin typeface="Arial"/>
+              </a:rPr>
+              <a:t>2.160 nội dung × 1.327 style</a:t>
+            </a:r>
+          </a:p>
+        </p:txBody>
+      </p:sp>
+      <p:sp>
+        <p:nvSpPr>
+          <p:cNvPr id="18" name="Rectangle 17"/>
+          <p:cNvSpPr/>
+          <p:nvPr/>
+        </p:nvSpPr>
+        <p:spPr>
+          <a:xfrm>
+            <a:off x="640080" y="2596896"/>
+            <a:ext cx="5120640" cy="329184"/>
+          </a:xfrm>
+          <a:prstGeom prst="rect">
+            <a:avLst/>
+          </a:prstGeom>
+          <a:solidFill>
+            <a:srgbClr val="FFFFFF"/>
+          </a:solidFill>
+          <a:ln>
+            <a:noFill/>
+          </a:ln>
+          <a:effectLst/>
+        </p:spPr>
+        <p:style>
+          <a:lnRef idx="1">
+            <a:schemeClr val="accent1"/>
+          </a:lnRef>
+          <a:fillRef idx="3">
+            <a:schemeClr val="accent1"/>
+          </a:fillRef>
+          <a:effectRef idx="2">
+            <a:schemeClr val="accent1"/>
+          </a:effectRef>
+          <a:fontRef idx="minor">
+            <a:schemeClr val="lt1"/>
+          </a:fontRef>
+        </p:style>
+        <p:txBody>
+          <a:bodyPr rtlCol="0" anchor="ctr"/>
+          <a:lstStyle/>
+          <a:p>
+            <a:pPr algn="ctr"/>
+          </a:p>
+        </p:txBody>
+      </p:sp>
+      <p:sp>
+        <p:nvSpPr>
+          <p:cNvPr id="19" name="TextBox 18"/>
+          <p:cNvSpPr txBox="1"/>
+          <p:nvPr/>
+        </p:nvSpPr>
+        <p:spPr>
+          <a:xfrm>
+            <a:off x="749808" y="2660904"/>
+            <a:ext cx="1920240" cy="329184"/>
+          </a:xfrm>
+          <a:prstGeom prst="rect">
+            <a:avLst/>
+          </a:prstGeom>
+          <a:noFill/>
+        </p:spPr>
+        <p:txBody>
+          <a:bodyPr wrap="square" lIns="0" rIns="0">
+            <a:spAutoFit/>
+          </a:bodyPr>
+          <a:lstStyle/>
+          <a:p>
+            <a:pPr algn="l">
+              <a:lnSpc>
+                <a:spcPct val="115000"/>
+              </a:lnSpc>
+              <a:spcAft>
+                <a:spcPts val="600"/>
+              </a:spcAft>
+            </a:pPr>
+            <a:r>
+              <a:rPr sz="1300" b="0">
+                <a:solidFill>
+                  <a:srgbClr val="101B33"/>
+                </a:solidFill>
+                <a:latin typeface="Arial"/>
+              </a:rPr>
+              <a:t>Kích thước</a:t>
+            </a:r>
+          </a:p>
+        </p:txBody>
+      </p:sp>
+      <p:sp>
+        <p:nvSpPr>
+          <p:cNvPr id="20" name="TextBox 19"/>
+          <p:cNvSpPr txBox="1"/>
+          <p:nvPr/>
+        </p:nvSpPr>
+        <p:spPr>
+          <a:xfrm>
+            <a:off x="2670048" y="2660904"/>
+            <a:ext cx="3200400" cy="329184"/>
+          </a:xfrm>
+          <a:prstGeom prst="rect">
+            <a:avLst/>
+          </a:prstGeom>
+          <a:noFill/>
+        </p:spPr>
+        <p:txBody>
+          <a:bodyPr wrap="square" lIns="0" rIns="0">
+            <a:spAutoFit/>
+          </a:bodyPr>
+          <a:lstStyle/>
+          <a:p>
+            <a:pPr algn="l">
+              <a:lnSpc>
+                <a:spcPct val="115000"/>
+              </a:lnSpc>
+              <a:spcAft>
+                <a:spcPts val="600"/>
+              </a:spcAft>
+            </a:pPr>
+            <a:r>
+              <a:rPr sz="1300" b="0">
+                <a:solidFill>
+                  <a:srgbClr val="101B33"/>
+                </a:solidFill>
+                <a:latin typeface="Arial"/>
+              </a:rPr>
+              <a:t>resize 320 → crop 256</a:t>
+            </a:r>
+          </a:p>
+        </p:txBody>
+      </p:sp>
+      <p:sp>
+        <p:nvSpPr>
+          <p:cNvPr id="21" name="Rectangle 20"/>
+          <p:cNvSpPr/>
+          <p:nvPr/>
+        </p:nvSpPr>
+        <p:spPr>
+          <a:xfrm>
+            <a:off x="640080" y="2926080"/>
+            <a:ext cx="5120640" cy="329184"/>
+          </a:xfrm>
+          <a:prstGeom prst="rect">
+            <a:avLst/>
+          </a:prstGeom>
+          <a:solidFill>
+            <a:srgbClr val="F4F6FA"/>
+          </a:solidFill>
+          <a:ln>
+            <a:noFill/>
+          </a:ln>
+          <a:effectLst/>
+        </p:spPr>
+        <p:style>
+          <a:lnRef idx="1">
+            <a:schemeClr val="accent1"/>
+          </a:lnRef>
+          <a:fillRef idx="3">
+            <a:schemeClr val="accent1"/>
+          </a:fillRef>
+          <a:effectRef idx="2">
+            <a:schemeClr val="accent1"/>
+          </a:effectRef>
+          <a:fontRef idx="minor">
+            <a:schemeClr val="lt1"/>
+          </a:fontRef>
+        </p:style>
+        <p:txBody>
+          <a:bodyPr rtlCol="0" anchor="ctr"/>
+          <a:lstStyle/>
+          <a:p>
+            <a:pPr algn="ctr"/>
+          </a:p>
+        </p:txBody>
+      </p:sp>
+      <p:sp>
+        <p:nvSpPr>
+          <p:cNvPr id="22" name="TextBox 21"/>
+          <p:cNvSpPr txBox="1"/>
+          <p:nvPr/>
+        </p:nvSpPr>
+        <p:spPr>
+          <a:xfrm>
+            <a:off x="749808" y="2990088"/>
+            <a:ext cx="1920240" cy="329184"/>
+          </a:xfrm>
+          <a:prstGeom prst="rect">
+            <a:avLst/>
+          </a:prstGeom>
+          <a:noFill/>
+        </p:spPr>
+        <p:txBody>
+          <a:bodyPr wrap="square" lIns="0" rIns="0">
+            <a:spAutoFit/>
+          </a:bodyPr>
+          <a:lstStyle/>
+          <a:p>
+            <a:pPr algn="l">
+              <a:lnSpc>
+                <a:spcPct val="115000"/>
+              </a:lnSpc>
+              <a:spcAft>
+                <a:spcPts val="600"/>
+              </a:spcAft>
+            </a:pPr>
+            <a:r>
+              <a:rPr sz="1300" b="0">
+                <a:solidFill>
+                  <a:srgbClr val="101B33"/>
+                </a:solidFill>
+                <a:latin typeface="Arial"/>
+              </a:rPr>
+              <a:t>Batch / bước</a:t>
+            </a:r>
+          </a:p>
+        </p:txBody>
+      </p:sp>
+      <p:sp>
+        <p:nvSpPr>
+          <p:cNvPr id="23" name="TextBox 22"/>
+          <p:cNvSpPr txBox="1"/>
+          <p:nvPr/>
+        </p:nvSpPr>
+        <p:spPr>
+          <a:xfrm>
+            <a:off x="2670048" y="2990088"/>
+            <a:ext cx="3200400" cy="329184"/>
+          </a:xfrm>
+          <a:prstGeom prst="rect">
+            <a:avLst/>
+          </a:prstGeom>
+          <a:noFill/>
+        </p:spPr>
+        <p:txBody>
+          <a:bodyPr wrap="square" lIns="0" rIns="0">
+            <a:spAutoFit/>
+          </a:bodyPr>
+          <a:lstStyle/>
+          <a:p>
+            <a:pPr algn="l">
+              <a:lnSpc>
+                <a:spcPct val="115000"/>
+              </a:lnSpc>
+              <a:spcAft>
+                <a:spcPts val="600"/>
+              </a:spcAft>
+            </a:pPr>
+            <a:r>
+              <a:rPr sz="1300" b="0">
+                <a:solidFill>
+                  <a:srgbClr val="101B33"/>
+                </a:solidFill>
+                <a:latin typeface="Arial"/>
+              </a:rPr>
+              <a:t>8 / 12.000</a:t>
+            </a:r>
+          </a:p>
+        </p:txBody>
+      </p:sp>
+      <p:sp>
+        <p:nvSpPr>
+          <p:cNvPr id="24" name="Rectangle 23"/>
+          <p:cNvSpPr/>
+          <p:nvPr/>
+        </p:nvSpPr>
+        <p:spPr>
+          <a:xfrm>
+            <a:off x="640080" y="3255264"/>
+            <a:ext cx="5120640" cy="329184"/>
+          </a:xfrm>
+          <a:prstGeom prst="rect">
+            <a:avLst/>
+          </a:prstGeom>
+          <a:solidFill>
+            <a:srgbClr val="FFFFFF"/>
+          </a:solidFill>
+          <a:ln>
+            <a:noFill/>
+          </a:ln>
+          <a:effectLst/>
+        </p:spPr>
+        <p:style>
+          <a:lnRef idx="1">
+            <a:schemeClr val="accent1"/>
+          </a:lnRef>
+          <a:fillRef idx="3">
+            <a:schemeClr val="accent1"/>
+          </a:fillRef>
+          <a:effectRef idx="2">
+            <a:schemeClr val="accent1"/>
+          </a:effectRef>
+          <a:fontRef idx="minor">
+            <a:schemeClr val="lt1"/>
+          </a:fontRef>
+        </p:style>
+        <p:txBody>
+          <a:bodyPr rtlCol="0" anchor="ctr"/>
+          <a:lstStyle/>
+          <a:p>
+            <a:pPr algn="ctr"/>
+          </a:p>
+        </p:txBody>
+      </p:sp>
+      <p:sp>
+        <p:nvSpPr>
+          <p:cNvPr id="25" name="TextBox 24"/>
+          <p:cNvSpPr txBox="1"/>
+          <p:nvPr/>
+        </p:nvSpPr>
+        <p:spPr>
+          <a:xfrm>
+            <a:off x="749808" y="3319272"/>
+            <a:ext cx="1920240" cy="329184"/>
+          </a:xfrm>
+          <a:prstGeom prst="rect">
+            <a:avLst/>
+          </a:prstGeom>
+          <a:noFill/>
+        </p:spPr>
+        <p:txBody>
+          <a:bodyPr wrap="square" lIns="0" rIns="0">
+            <a:spAutoFit/>
+          </a:bodyPr>
+          <a:lstStyle/>
+          <a:p>
+            <a:pPr algn="l">
+              <a:lnSpc>
+                <a:spcPct val="115000"/>
+              </a:lnSpc>
+              <a:spcAft>
+                <a:spcPts val="600"/>
+              </a:spcAft>
+            </a:pPr>
+            <a:r>
+              <a:rPr sz="1300" b="0">
+                <a:solidFill>
+                  <a:srgbClr val="101B33"/>
+                </a:solidFill>
+                <a:latin typeface="Arial"/>
+              </a:rPr>
+              <a:t>Optimizer</a:t>
+            </a:r>
+          </a:p>
+        </p:txBody>
+      </p:sp>
+      <p:sp>
+        <p:nvSpPr>
+          <p:cNvPr id="26" name="TextBox 25"/>
+          <p:cNvSpPr txBox="1"/>
+          <p:nvPr/>
+        </p:nvSpPr>
+        <p:spPr>
+          <a:xfrm>
+            <a:off x="2670048" y="3319272"/>
+            <a:ext cx="3200400" cy="329184"/>
+          </a:xfrm>
+          <a:prstGeom prst="rect">
+            <a:avLst/>
+          </a:prstGeom>
+          <a:noFill/>
+        </p:spPr>
+        <p:txBody>
+          <a:bodyPr wrap="square" lIns="0" rIns="0">
+            <a:spAutoFit/>
+          </a:bodyPr>
+          <a:lstStyle/>
+          <a:p>
+            <a:pPr algn="l">
+              <a:lnSpc>
+                <a:spcPct val="115000"/>
+              </a:lnSpc>
+              <a:spcAft>
+                <a:spcPts val="600"/>
+              </a:spcAft>
+            </a:pPr>
+            <a:r>
+              <a:rPr sz="1300" b="0">
+                <a:solidFill>
+                  <a:srgbClr val="101B33"/>
+                </a:solidFill>
+                <a:latin typeface="Arial"/>
+              </a:rPr>
+              <a:t>Adam, lr 1e-4, decay 5e-5</a:t>
+            </a:r>
+          </a:p>
+        </p:txBody>
+      </p:sp>
+      <p:sp>
+        <p:nvSpPr>
+          <p:cNvPr id="27" name="Rectangle 26"/>
+          <p:cNvSpPr/>
+          <p:nvPr/>
+        </p:nvSpPr>
+        <p:spPr>
+          <a:xfrm>
+            <a:off x="640080" y="3584448"/>
+            <a:ext cx="5120640" cy="329184"/>
+          </a:xfrm>
+          <a:prstGeom prst="rect">
+            <a:avLst/>
+          </a:prstGeom>
+          <a:solidFill>
+            <a:srgbClr val="F4F6FA"/>
+          </a:solidFill>
+          <a:ln>
+            <a:noFill/>
+          </a:ln>
+          <a:effectLst/>
+        </p:spPr>
+        <p:style>
+          <a:lnRef idx="1">
+            <a:schemeClr val="accent1"/>
+          </a:lnRef>
+          <a:fillRef idx="3">
+            <a:schemeClr val="accent1"/>
+          </a:fillRef>
+          <a:effectRef idx="2">
+            <a:schemeClr val="accent1"/>
+          </a:effectRef>
+          <a:fontRef idx="minor">
+            <a:schemeClr val="lt1"/>
+          </a:fontRef>
+        </p:style>
+        <p:txBody>
+          <a:bodyPr rtlCol="0" anchor="ctr"/>
+          <a:lstStyle/>
+          <a:p>
+            <a:pPr algn="ctr"/>
+          </a:p>
+        </p:txBody>
+      </p:sp>
+      <p:sp>
+        <p:nvSpPr>
+          <p:cNvPr id="28" name="TextBox 27"/>
+          <p:cNvSpPr txBox="1"/>
+          <p:nvPr/>
+        </p:nvSpPr>
+        <p:spPr>
+          <a:xfrm>
+            <a:off x="749808" y="3648456"/>
+            <a:ext cx="1920240" cy="329184"/>
+          </a:xfrm>
+          <a:prstGeom prst="rect">
+            <a:avLst/>
+          </a:prstGeom>
+          <a:noFill/>
+        </p:spPr>
+        <p:txBody>
+          <a:bodyPr wrap="square" lIns="0" rIns="0">
+            <a:spAutoFit/>
+          </a:bodyPr>
+          <a:lstStyle/>
+          <a:p>
+            <a:pPr algn="l">
+              <a:lnSpc>
+                <a:spcPct val="115000"/>
+              </a:lnSpc>
+              <a:spcAft>
+                <a:spcPts val="600"/>
+              </a:spcAft>
+            </a:pPr>
+            <a:r>
+              <a:rPr sz="1300" b="0">
+                <a:solidFill>
+                  <a:srgbClr val="101B33"/>
+                </a:solidFill>
+                <a:latin typeface="Arial"/>
+              </a:rPr>
+              <a:t>Mixed precision</a:t>
+            </a:r>
+          </a:p>
+        </p:txBody>
+      </p:sp>
+      <p:sp>
+        <p:nvSpPr>
+          <p:cNvPr id="29" name="TextBox 28"/>
+          <p:cNvSpPr txBox="1"/>
+          <p:nvPr/>
+        </p:nvSpPr>
+        <p:spPr>
+          <a:xfrm>
+            <a:off x="2670048" y="3648456"/>
+            <a:ext cx="3200400" cy="329184"/>
+          </a:xfrm>
+          <a:prstGeom prst="rect">
+            <a:avLst/>
+          </a:prstGeom>
+          <a:noFill/>
+        </p:spPr>
+        <p:txBody>
+          <a:bodyPr wrap="square" lIns="0" rIns="0">
+            <a:spAutoFit/>
+          </a:bodyPr>
+          <a:lstStyle/>
+          <a:p>
+            <a:pPr algn="l">
+              <a:lnSpc>
+                <a:spcPct val="115000"/>
+              </a:lnSpc>
+              <a:spcAft>
+                <a:spcPts val="600"/>
+              </a:spcAft>
+            </a:pPr>
+            <a:r>
+              <a:rPr sz="1300" b="0">
+                <a:solidFill>
+                  <a:srgbClr val="101B33"/>
+                </a:solidFill>
+                <a:latin typeface="Arial"/>
+              </a:rPr>
+              <a:t>bfloat16</a:t>
+            </a:r>
+          </a:p>
+        </p:txBody>
+      </p:sp>
+      <p:sp>
+        <p:nvSpPr>
+          <p:cNvPr id="30" name="Rectangle 29"/>
+          <p:cNvSpPr/>
+          <p:nvPr/>
+        </p:nvSpPr>
+        <p:spPr>
+          <a:xfrm>
+            <a:off x="640080" y="3913632"/>
+            <a:ext cx="5120640" cy="329184"/>
+          </a:xfrm>
+          <a:prstGeom prst="rect">
+            <a:avLst/>
+          </a:prstGeom>
+          <a:solidFill>
+            <a:srgbClr val="FFFFFF"/>
+          </a:solidFill>
+          <a:ln>
+            <a:noFill/>
+          </a:ln>
+          <a:effectLst/>
+        </p:spPr>
+        <p:style>
+          <a:lnRef idx="1">
+            <a:schemeClr val="accent1"/>
+          </a:lnRef>
+          <a:fillRef idx="3">
+            <a:schemeClr val="accent1"/>
+          </a:fillRef>
+          <a:effectRef idx="2">
+            <a:schemeClr val="accent1"/>
+          </a:effectRef>
+          <a:fontRef idx="minor">
+            <a:schemeClr val="lt1"/>
+          </a:fontRef>
+        </p:style>
+        <p:txBody>
+          <a:bodyPr rtlCol="0" anchor="ctr"/>
+          <a:lstStyle/>
+          <a:p>
+            <a:pPr algn="ctr"/>
+          </a:p>
+        </p:txBody>
+      </p:sp>
+      <p:sp>
+        <p:nvSpPr>
+          <p:cNvPr id="31" name="TextBox 30"/>
+          <p:cNvSpPr txBox="1"/>
+          <p:nvPr/>
+        </p:nvSpPr>
+        <p:spPr>
+          <a:xfrm>
+            <a:off x="749808" y="3977640"/>
+            <a:ext cx="1920240" cy="329184"/>
+          </a:xfrm>
+          <a:prstGeom prst="rect">
+            <a:avLst/>
+          </a:prstGeom>
+          <a:noFill/>
+        </p:spPr>
+        <p:txBody>
+          <a:bodyPr wrap="square" lIns="0" rIns="0">
+            <a:spAutoFit/>
+          </a:bodyPr>
+          <a:lstStyle/>
+          <a:p>
+            <a:pPr algn="l">
+              <a:lnSpc>
+                <a:spcPct val="115000"/>
+              </a:lnSpc>
+              <a:spcAft>
+                <a:spcPts val="600"/>
+              </a:spcAft>
+            </a:pPr>
+            <a:r>
+              <a:rPr sz="1300" b="0">
+                <a:solidFill>
+                  <a:srgbClr val="101B33"/>
+                </a:solidFill>
+                <a:latin typeface="Arial"/>
+              </a:rPr>
+              <a:t>Thời gian</a:t>
+            </a:r>
+          </a:p>
+        </p:txBody>
+      </p:sp>
+      <p:sp>
+        <p:nvSpPr>
+          <p:cNvPr id="32" name="TextBox 31"/>
+          <p:cNvSpPr txBox="1"/>
+          <p:nvPr/>
+        </p:nvSpPr>
+        <p:spPr>
+          <a:xfrm>
+            <a:off x="2670048" y="3977640"/>
+            <a:ext cx="3200400" cy="329184"/>
+          </a:xfrm>
+          <a:prstGeom prst="rect">
+            <a:avLst/>
+          </a:prstGeom>
+          <a:noFill/>
+        </p:spPr>
+        <p:txBody>
+          <a:bodyPr wrap="square" lIns="0" rIns="0">
+            <a:spAutoFit/>
+          </a:bodyPr>
+          <a:lstStyle/>
+          <a:p>
+            <a:pPr algn="l">
+              <a:lnSpc>
+                <a:spcPct val="115000"/>
+              </a:lnSpc>
+              <a:spcAft>
+                <a:spcPts val="600"/>
+              </a:spcAft>
+            </a:pPr>
+            <a:r>
+              <a:rPr sz="1300" b="0">
+                <a:solidFill>
+                  <a:srgbClr val="101B33"/>
+                </a:solidFill>
+                <a:latin typeface="Arial"/>
+              </a:rPr>
+              <a:t>37 phút (RTX 5060 Ti)</a:t>
+            </a:r>
+          </a:p>
+        </p:txBody>
+      </p:sp>
+      <p:sp>
+        <p:nvSpPr>
+          <p:cNvPr id="33" name="TextBox 32"/>
+          <p:cNvSpPr txBox="1"/>
+          <p:nvPr/>
+        </p:nvSpPr>
+        <p:spPr>
+          <a:xfrm>
+            <a:off x="6126480" y="1280160"/>
+            <a:ext cx="5394960" cy="2194560"/>
+          </a:xfrm>
+          <a:prstGeom prst="rect">
+            <a:avLst/>
+          </a:prstGeom>
+          <a:noFill/>
+        </p:spPr>
+        <p:txBody>
+          <a:bodyPr wrap="square" lIns="0" rIns="0">
+            <a:spAutoFit/>
+          </a:bodyPr>
+          <a:lstStyle/>
+          <a:p>
+            <a:pPr algn="l">
+              <a:lnSpc>
+                <a:spcPct val="115000"/>
+              </a:lnSpc>
+              <a:spcAft>
+                <a:spcPts val="600"/>
+              </a:spcAft>
+            </a:pPr>
+            <a:r>
+              <a:rPr sz="1900" b="1">
+                <a:solidFill>
+                  <a:srgbClr val="101B33"/>
+                </a:solidFill>
+                <a:latin typeface="Arial"/>
+              </a:rPr>
+              <a:t>Hàm mất mát</a:t>
+            </a:r>
+          </a:p>
+          <a:p>
+            <a:pPr algn="l">
+              <a:lnSpc>
+                <a:spcPct val="115000"/>
+              </a:lnSpc>
+              <a:spcAft>
+                <a:spcPts val="600"/>
+              </a:spcAft>
+            </a:pPr>
+            <a:r>
+              <a:rPr sz="1500" b="1">
+                <a:solidFill>
+                  <a:srgbClr val="2E6FD9"/>
+                </a:solidFill>
+                <a:latin typeface="Arial"/>
+              </a:rPr>
+              <a:t>L  =  L_content  +  10 · L_style  +  1 · L_identity</a:t>
+            </a:r>
+          </a:p>
+          <a:p>
+            <a:pPr algn="l">
+              <a:lnSpc>
+                <a:spcPct val="115000"/>
+              </a:lnSpc>
+              <a:spcAft>
+                <a:spcPts val="600"/>
+              </a:spcAft>
+            </a:pPr>
+            <a:r>
+              <a:rPr sz="1400" b="0">
+                <a:solidFill>
+                  <a:srgbClr val="5A6375"/>
+                </a:solidFill>
+                <a:latin typeface="Arial"/>
+              </a:rPr>
+              <a:t>· L_content — khớp đặc trưng đầu ra với đặc trưng AdaIN → giữ bố cục.</a:t>
+            </a:r>
+          </a:p>
+          <a:p>
+            <a:pPr algn="l">
+              <a:lnSpc>
+                <a:spcPct val="115000"/>
+              </a:lnSpc>
+              <a:spcAft>
+                <a:spcPts val="600"/>
+              </a:spcAft>
+            </a:pPr>
+            <a:r>
+              <a:rPr sz="1400" b="0">
+                <a:solidFill>
+                  <a:srgbClr val="5A6375"/>
+                </a:solidFill>
+                <a:latin typeface="Arial"/>
+              </a:rPr>
+              <a:t>· L_style — khớp mean/std ở 4 tầng VGG → giống tông thời tiết.</a:t>
+            </a:r>
+          </a:p>
+          <a:p>
+            <a:pPr algn="l">
+              <a:lnSpc>
+                <a:spcPct val="115000"/>
+              </a:lnSpc>
+              <a:spcAft>
+                <a:spcPts val="600"/>
+              </a:spcAft>
+            </a:pPr>
+            <a:r>
+              <a:rPr sz="1400" b="0">
+                <a:solidFill>
+                  <a:srgbClr val="5A6375"/>
+                </a:solidFill>
+                <a:latin typeface="Arial"/>
+              </a:rPr>
+              <a:t>· L_identity — khi style = content thì đầu ra phải bằng ảnh gốc.</a:t>
+            </a:r>
+          </a:p>
+          <a:p>
+            <a:pPr algn="l">
+              <a:lnSpc>
+                <a:spcPct val="115000"/>
+              </a:lnSpc>
+              <a:spcAft>
+                <a:spcPts val="600"/>
+              </a:spcAft>
+            </a:pPr>
+            <a:r>
+              <a:rPr sz="1400" b="0">
+                <a:solidFill>
+                  <a:srgbClr val="5A6375"/>
+                </a:solidFill>
+                <a:latin typeface="Arial"/>
+              </a:rPr>
+              <a:t>   Đây là điểm bổ sung so với AdaIN gốc: ép decoder trung thực,</a:t>
+            </a:r>
+          </a:p>
+          <a:p>
+            <a:pPr algn="l">
+              <a:lnSpc>
+                <a:spcPct val="115000"/>
+              </a:lnSpc>
+              <a:spcAft>
+                <a:spcPts val="600"/>
+              </a:spcAft>
+            </a:pPr>
+            <a:r>
+              <a:rPr sz="1400" b="0">
+                <a:solidFill>
+                  <a:srgbClr val="5A6375"/>
+                </a:solidFill>
+                <a:latin typeface="Arial"/>
+              </a:rPr>
+              <a:t>   giảm méo cấu trúc — điều kiện sống còn để nhãn còn dùng được.</a:t>
+            </a:r>
+          </a:p>
+        </p:txBody>
+      </p:sp>
       <p:pic>
         <p:nvPicPr>
-          <p:cNvPr id="6" name="Picture 5" descr="fig_weather_types.jpg"/>
+          <p:cNvPr id="34" name="Picture 33" descr="fig_loss.png"/>
           <p:cNvPicPr>
             <a:picLocks noChangeAspect="1"/>
           </p:cNvPicPr>
@@ -13914,8 +14228,8 @@
         </p:blipFill>
         <p:spPr>
           <a:xfrm>
-            <a:off x="457200" y="2208193"/>
-            <a:ext cx="11247120" cy="3173133"/>
+            <a:off x="2123667" y="4434840"/>
+            <a:ext cx="7914185" cy="2011680"/>
           </a:xfrm>
           <a:prstGeom prst="rect">
             <a:avLst/>
@@ -14065,7 +14379,7 @@
                 </a:solidFill>
                 <a:latin typeface="Arial"/>
               </a:rPr>
-              <a:t>Kết quả — ví dụ đầu vào/đầu ra</a:t>
+              <a:t>Kết quả — 5 loại thời tiết</a:t>
             </a:r>
           </a:p>
           <a:p>
@@ -14084,7 +14398,7 @@
                 </a:solidFill>
                 <a:latin typeface="Arial"/>
               </a:rPr>
-              <a:t>Trái: 2 đầu vào · Phải: ảnh sinh ra</a:t>
+              <a:t>Cùng một ảnh gốc, đổi ảnh tham chiếu là đổi thời tiết</a:t>
             </a:r>
           </a:p>
         </p:txBody>
@@ -14133,7 +14447,7 @@
       </p:sp>
       <p:pic>
         <p:nvPicPr>
-          <p:cNvPr id="6" name="Picture 5" descr="fig_examples.jpg"/>
+          <p:cNvPr id="6" name="Picture 5" descr="fig_weather_types.jpg"/>
           <p:cNvPicPr>
             <a:picLocks noChangeAspect="1"/>
           </p:cNvPicPr>
@@ -14147,8 +14461,8 @@
         </p:blipFill>
         <p:spPr>
           <a:xfrm>
-            <a:off x="2407987" y="1234440"/>
-            <a:ext cx="7345546" cy="5120639"/>
+            <a:off x="457200" y="2208193"/>
+            <a:ext cx="11247120" cy="3173133"/>
           </a:xfrm>
           <a:prstGeom prst="rect">
             <a:avLst/>
@@ -14298,7 +14612,7 @@
                 </a:solidFill>
                 <a:latin typeface="Arial"/>
               </a:rPr>
-              <a:t>Điều khiển cường độ bằng alpha</a:t>
+              <a:t>Kết quả — ví dụ đầu vào/đầu ra</a:t>
             </a:r>
           </a:p>
           <a:p>
@@ -14317,7 +14631,7 @@
                 </a:solidFill>
                 <a:latin typeface="Arial"/>
               </a:rPr>
-              <a:t>Một cặp ảnh sinh ra nhiều mức nặng/nhẹ → tăng độ đa dạng dữ liệu</a:t>
+              <a:t>Trái: 2 đầu vào · Phải: ảnh sinh ra</a:t>
             </a:r>
           </a:p>
         </p:txBody>
@@ -14366,7 +14680,7 @@
       </p:sp>
       <p:pic>
         <p:nvPicPr>
-          <p:cNvPr id="6" name="Picture 5" descr="fig_alpha.jpg"/>
+          <p:cNvPr id="6" name="Picture 5" descr="fig_examples.jpg"/>
           <p:cNvPicPr>
             <a:picLocks noChangeAspect="1"/>
           </p:cNvPicPr>
@@ -14380,8 +14694,8 @@
         </p:blipFill>
         <p:spPr>
           <a:xfrm>
-            <a:off x="457200" y="2497500"/>
-            <a:ext cx="11247120" cy="2594520"/>
+            <a:off x="2407987" y="1234440"/>
+            <a:ext cx="7345546" cy="5120639"/>
           </a:xfrm>
           <a:prstGeom prst="rect">
             <a:avLst/>

--- a/slides/BaoCao_TangCuongDuLieuThoiTiet.pptx
+++ b/slides/BaoCao_TangCuongDuLieuThoiTiet.pptx
@@ -3560,7 +3560,7 @@
                 </a:solidFill>
                 <a:latin typeface="Arial"/>
               </a:rPr>
-              <a:t>Đóng góp của từng khối (ablation)</a:t>
+              <a:t>Kết quả — ví dụ đầu vào/đầu ra</a:t>
             </a:r>
           </a:p>
           <a:p>
@@ -3579,7 +3579,7 @@
                 </a:solidFill>
                 <a:latin typeface="Arial"/>
               </a:rPr>
-              <a:t>Từ trái sang phải: thêm dần từng thành phần</a:t>
+              <a:t>Trái: 2 đầu vào · Phải: ảnh sinh ra</a:t>
             </a:r>
           </a:p>
         </p:txBody>
@@ -3628,7 +3628,7 @@
       </p:sp>
       <p:pic>
         <p:nvPicPr>
-          <p:cNvPr id="6" name="Picture 5" descr="fig_ablation.jpg"/>
+          <p:cNvPr id="6" name="Picture 5" descr="fig_examples.jpg"/>
           <p:cNvPicPr>
             <a:picLocks noChangeAspect="1"/>
           </p:cNvPicPr>
@@ -3642,8 +3642,8 @@
         </p:blipFill>
         <p:spPr>
           <a:xfrm>
-            <a:off x="457200" y="1920240"/>
-            <a:ext cx="11247120" cy="3749040"/>
+            <a:off x="2407987" y="1234440"/>
+            <a:ext cx="7345546" cy="5120639"/>
           </a:xfrm>
           <a:prstGeom prst="rect">
             <a:avLst/>
@@ -3793,7 +3793,7 @@
                 </a:solidFill>
                 <a:latin typeface="Arial"/>
               </a:rPr>
-              <a:t>Bằng chứng: nhãn cũ vẫn khớp</a:t>
+              <a:t>Đóng góp của từng khối (ablation)</a:t>
             </a:r>
           </a:p>
           <a:p>
@@ -3812,7 +3812,7 @@
                 </a:solidFill>
                 <a:latin typeface="Arial"/>
               </a:rPr>
-              <a:t>Cùng một bộ bounding box vẽ lên ảnh gốc và ảnh tăng cường</a:t>
+              <a:t>Từ trái sang phải: thêm dần từng thành phần</a:t>
             </a:r>
           </a:p>
         </p:txBody>
@@ -3861,7 +3861,7 @@
       </p:sp>
       <p:pic>
         <p:nvPicPr>
-          <p:cNvPr id="6" name="Picture 5" descr="fig_labels.jpg"/>
+          <p:cNvPr id="6" name="Picture 5" descr="fig_ablation.jpg"/>
           <p:cNvPicPr>
             <a:picLocks noChangeAspect="1"/>
           </p:cNvPicPr>
@@ -3875,56 +3875,14 @@
         </p:blipFill>
         <p:spPr>
           <a:xfrm>
-            <a:off x="3183267" y="1188720"/>
-            <a:ext cx="5794985" cy="4480560"/>
+            <a:off x="457200" y="1920240"/>
+            <a:ext cx="11247120" cy="3749040"/>
           </a:xfrm>
           <a:prstGeom prst="rect">
             <a:avLst/>
           </a:prstGeom>
         </p:spPr>
       </p:pic>
-      <p:sp>
-        <p:nvSpPr>
-          <p:cNvPr id="7" name="TextBox 6"/>
-          <p:cNvSpPr txBox="1"/>
-          <p:nvPr/>
-        </p:nvSpPr>
-        <p:spPr>
-          <a:xfrm>
-            <a:off x="640080" y="5806440"/>
-            <a:ext cx="10881360" cy="731520"/>
-          </a:xfrm>
-          <a:prstGeom prst="rect">
-            <a:avLst/>
-          </a:prstGeom>
-          <a:noFill/>
-        </p:spPr>
-        <p:txBody>
-          <a:bodyPr wrap="square" lIns="0" rIns="0">
-            <a:spAutoFit/>
-          </a:bodyPr>
-          <a:lstStyle/>
-          <a:p>
-            <a:pPr algn="l">
-              <a:lnSpc>
-                <a:spcPct val="115000"/>
-              </a:lnSpc>
-              <a:spcAft>
-                <a:spcPts val="600"/>
-              </a:spcAft>
-            </a:pPr>
-            <a:r>
-              <a:rPr sz="1600" b="1">
-                <a:solidFill>
-                  <a:srgbClr val="101B33"/>
-                </a:solidFill>
-                <a:latin typeface="Arial"/>
-              </a:rPr>
-              <a:t>Không cần gán nhãn lại: mỗi ảnh sinh ra chỉ việc sao chép file nhãn của ảnh gốc.</a:t>
-            </a:r>
-          </a:p>
-        </p:txBody>
-      </p:sp>
     </p:spTree>
   </p:cSld>
   <p:clrMapOvr>
@@ -4068,7 +4026,7 @@
                 </a:solidFill>
                 <a:latin typeface="Arial"/>
               </a:rPr>
-              <a:t>Đánh giá định lượng</a:t>
+              <a:t>Bằng chứng: nhãn cũ vẫn khớp</a:t>
             </a:r>
           </a:p>
           <a:p>
@@ -4087,7 +4045,7 @@
                 </a:solidFill>
                 <a:latin typeface="Arial"/>
               </a:rPr>
-              <a:t>Giữ nội dung (SSIM/EdgeRecall) và giống thật (FID)</a:t>
+              <a:t>Cùng một bộ bounding box vẽ lên ảnh gốc và ảnh tăng cường</a:t>
             </a:r>
           </a:p>
         </p:txBody>
@@ -4134,50 +4092,30 @@
           </a:p>
         </p:txBody>
       </p:sp>
-      <p:sp>
-        <p:nvSpPr>
-          <p:cNvPr id="6" name="Rectangle 5"/>
-          <p:cNvSpPr/>
-          <p:nvPr/>
-        </p:nvSpPr>
-        <p:spPr>
-          <a:xfrm>
-            <a:off x="640080" y="1371600"/>
-            <a:ext cx="10881360" cy="457200"/>
-          </a:xfrm>
-          <a:prstGeom prst="rect">
-            <a:avLst/>
-          </a:prstGeom>
-          <a:solidFill>
-            <a:srgbClr val="101B33"/>
-          </a:solidFill>
-          <a:ln>
-            <a:noFill/>
-          </a:ln>
-          <a:effectLst/>
-        </p:spPr>
-        <p:style>
-          <a:lnRef idx="1">
-            <a:schemeClr val="accent1"/>
-          </a:lnRef>
-          <a:fillRef idx="3">
-            <a:schemeClr val="accent1"/>
-          </a:fillRef>
-          <a:effectRef idx="2">
-            <a:schemeClr val="accent1"/>
-          </a:effectRef>
-          <a:fontRef idx="minor">
-            <a:schemeClr val="lt1"/>
-          </a:fontRef>
-        </p:style>
-        <p:txBody>
-          <a:bodyPr rtlCol="0" anchor="ctr"/>
-          <a:lstStyle/>
-          <a:p>
-            <a:pPr algn="ctr"/>
-          </a:p>
-        </p:txBody>
-      </p:sp>
+      <p:pic>
+        <p:nvPicPr>
+          <p:cNvPr id="6" name="Picture 5" descr="fig_labels.jpg"/>
+          <p:cNvPicPr>
+            <a:picLocks noChangeAspect="1"/>
+          </p:cNvPicPr>
+          <p:nvPr/>
+        </p:nvPicPr>
+        <p:blipFill>
+          <a:blip r:embed="rId2"/>
+          <a:stretch>
+            <a:fillRect/>
+          </a:stretch>
+        </p:blipFill>
+        <p:spPr>
+          <a:xfrm>
+            <a:off x="3183267" y="1188720"/>
+            <a:ext cx="5794985" cy="4480560"/>
+          </a:xfrm>
+          <a:prstGeom prst="rect">
+            <a:avLst/>
+          </a:prstGeom>
+        </p:spPr>
+      </p:pic>
       <p:sp>
         <p:nvSpPr>
           <p:cNvPr id="7" name="TextBox 6"/>
@@ -4186,1650 +4124,36 @@
         </p:nvSpPr>
         <p:spPr>
           <a:xfrm>
-            <a:off x="749808" y="1435608"/>
-            <a:ext cx="3840480" cy="457200"/>
-          </a:xfrm>
-          <a:prstGeom prst="rect">
-            <a:avLst/>
-          </a:prstGeom>
-          <a:noFill/>
-        </p:spPr>
-        <p:txBody>
-          <a:bodyPr wrap="square" lIns="0" rIns="0">
-            <a:spAutoFit/>
-          </a:bodyPr>
-          <a:lstStyle/>
-          <a:p>
-            <a:pPr algn="l">
-              <a:lnSpc>
-                <a:spcPct val="115000"/>
-              </a:lnSpc>
-              <a:spcAft>
-                <a:spcPts val="600"/>
-              </a:spcAft>
-            </a:pPr>
-            <a:r>
-              <a:rPr sz="1300" b="1">
-                <a:solidFill>
-                  <a:srgbClr val="FFFFFF"/>
-                </a:solidFill>
-                <a:latin typeface="Arial"/>
-              </a:rPr>
-              <a:t>Phương pháp</a:t>
-            </a:r>
-          </a:p>
-        </p:txBody>
-      </p:sp>
-      <p:sp>
-        <p:nvSpPr>
-          <p:cNvPr id="8" name="TextBox 7"/>
-          <p:cNvSpPr txBox="1"/>
-          <p:nvPr/>
-        </p:nvSpPr>
-        <p:spPr>
-          <a:xfrm>
-            <a:off x="4590288" y="1435608"/>
-            <a:ext cx="1737360" cy="457200"/>
-          </a:xfrm>
-          <a:prstGeom prst="rect">
-            <a:avLst/>
-          </a:prstGeom>
-          <a:noFill/>
-        </p:spPr>
-        <p:txBody>
-          <a:bodyPr wrap="square" lIns="0" rIns="0">
-            <a:spAutoFit/>
-          </a:bodyPr>
-          <a:lstStyle/>
-          <a:p>
-            <a:pPr algn="l">
-              <a:lnSpc>
-                <a:spcPct val="115000"/>
-              </a:lnSpc>
-              <a:spcAft>
-                <a:spcPts val="600"/>
-              </a:spcAft>
-            </a:pPr>
-            <a:r>
-              <a:rPr sz="1300" b="1">
-                <a:solidFill>
-                  <a:srgbClr val="FFFFFF"/>
-                </a:solidFill>
-                <a:latin typeface="Arial"/>
-              </a:rPr>
-              <a:t>SSIM ↑</a:t>
-            </a:r>
-          </a:p>
-        </p:txBody>
-      </p:sp>
-      <p:sp>
-        <p:nvSpPr>
-          <p:cNvPr id="9" name="TextBox 8"/>
-          <p:cNvSpPr txBox="1"/>
-          <p:nvPr/>
-        </p:nvSpPr>
-        <p:spPr>
-          <a:xfrm>
-            <a:off x="6327648" y="1435608"/>
-            <a:ext cx="1737360" cy="457200"/>
-          </a:xfrm>
-          <a:prstGeom prst="rect">
-            <a:avLst/>
-          </a:prstGeom>
-          <a:noFill/>
-        </p:spPr>
-        <p:txBody>
-          <a:bodyPr wrap="square" lIns="0" rIns="0">
-            <a:spAutoFit/>
-          </a:bodyPr>
-          <a:lstStyle/>
-          <a:p>
-            <a:pPr algn="l">
-              <a:lnSpc>
-                <a:spcPct val="115000"/>
-              </a:lnSpc>
-              <a:spcAft>
-                <a:spcPts val="600"/>
-              </a:spcAft>
-            </a:pPr>
-            <a:r>
-              <a:rPr sz="1300" b="1">
-                <a:solidFill>
-                  <a:srgbClr val="FFFFFF"/>
-                </a:solidFill>
-                <a:latin typeface="Arial"/>
-              </a:rPr>
-              <a:t>PSNR ↑</a:t>
-            </a:r>
-          </a:p>
-        </p:txBody>
-      </p:sp>
-      <p:sp>
-        <p:nvSpPr>
-          <p:cNvPr id="10" name="TextBox 9"/>
-          <p:cNvSpPr txBox="1"/>
-          <p:nvPr/>
-        </p:nvSpPr>
-        <p:spPr>
-          <a:xfrm>
-            <a:off x="8065008" y="1435608"/>
-            <a:ext cx="1828800" cy="457200"/>
-          </a:xfrm>
-          <a:prstGeom prst="rect">
-            <a:avLst/>
-          </a:prstGeom>
-          <a:noFill/>
-        </p:spPr>
-        <p:txBody>
-          <a:bodyPr wrap="square" lIns="0" rIns="0">
-            <a:spAutoFit/>
-          </a:bodyPr>
-          <a:lstStyle/>
-          <a:p>
-            <a:pPr algn="l">
-              <a:lnSpc>
-                <a:spcPct val="115000"/>
-              </a:lnSpc>
-              <a:spcAft>
-                <a:spcPts val="600"/>
-              </a:spcAft>
-            </a:pPr>
-            <a:r>
-              <a:rPr sz="1300" b="1">
-                <a:solidFill>
-                  <a:srgbClr val="FFFFFF"/>
-                </a:solidFill>
-                <a:latin typeface="Arial"/>
-              </a:rPr>
-              <a:t>EdgeRec ↑</a:t>
-            </a:r>
-          </a:p>
-        </p:txBody>
-      </p:sp>
-      <p:sp>
-        <p:nvSpPr>
-          <p:cNvPr id="11" name="TextBox 10"/>
-          <p:cNvSpPr txBox="1"/>
-          <p:nvPr/>
-        </p:nvSpPr>
-        <p:spPr>
-          <a:xfrm>
-            <a:off x="9893808" y="1435608"/>
-            <a:ext cx="1737360" cy="457200"/>
-          </a:xfrm>
-          <a:prstGeom prst="rect">
-            <a:avLst/>
-          </a:prstGeom>
-          <a:noFill/>
-        </p:spPr>
-        <p:txBody>
-          <a:bodyPr wrap="square" lIns="0" rIns="0">
-            <a:spAutoFit/>
-          </a:bodyPr>
-          <a:lstStyle/>
-          <a:p>
-            <a:pPr algn="l">
-              <a:lnSpc>
-                <a:spcPct val="115000"/>
-              </a:lnSpc>
-              <a:spcAft>
-                <a:spcPts val="600"/>
-              </a:spcAft>
-            </a:pPr>
-            <a:r>
-              <a:rPr sz="1300" b="1">
-                <a:solidFill>
-                  <a:srgbClr val="FFFFFF"/>
-                </a:solidFill>
-                <a:latin typeface="Arial"/>
-              </a:rPr>
-              <a:t>FID ↓</a:t>
-            </a:r>
-          </a:p>
-        </p:txBody>
-      </p:sp>
-      <p:sp>
-        <p:nvSpPr>
-          <p:cNvPr id="12" name="Rectangle 11"/>
-          <p:cNvSpPr/>
-          <p:nvPr/>
-        </p:nvSpPr>
-        <p:spPr>
-          <a:xfrm>
-            <a:off x="640080" y="1828800"/>
-            <a:ext cx="10881360" cy="457200"/>
-          </a:xfrm>
-          <a:prstGeom prst="rect">
-            <a:avLst/>
-          </a:prstGeom>
-          <a:solidFill>
-            <a:srgbClr val="F4F6FA"/>
-          </a:solidFill>
-          <a:ln>
-            <a:noFill/>
-          </a:ln>
-          <a:effectLst/>
-        </p:spPr>
-        <p:style>
-          <a:lnRef idx="1">
-            <a:schemeClr val="accent1"/>
-          </a:lnRef>
-          <a:fillRef idx="3">
-            <a:schemeClr val="accent1"/>
-          </a:fillRef>
-          <a:effectRef idx="2">
-            <a:schemeClr val="accent1"/>
-          </a:effectRef>
-          <a:fontRef idx="minor">
-            <a:schemeClr val="lt1"/>
-          </a:fontRef>
-        </p:style>
-        <p:txBody>
-          <a:bodyPr rtlCol="0" anchor="ctr"/>
-          <a:lstStyle/>
-          <a:p>
-            <a:pPr algn="ctr"/>
-          </a:p>
-        </p:txBody>
-      </p:sp>
-      <p:sp>
-        <p:nvSpPr>
-          <p:cNvPr id="13" name="TextBox 12"/>
-          <p:cNvSpPr txBox="1"/>
-          <p:nvPr/>
-        </p:nvSpPr>
-        <p:spPr>
-          <a:xfrm>
-            <a:off x="749808" y="1892808"/>
-            <a:ext cx="3840480" cy="457200"/>
-          </a:xfrm>
-          <a:prstGeom prst="rect">
-            <a:avLst/>
-          </a:prstGeom>
-          <a:noFill/>
-        </p:spPr>
-        <p:txBody>
-          <a:bodyPr wrap="square" lIns="0" rIns="0">
-            <a:spAutoFit/>
-          </a:bodyPr>
-          <a:lstStyle/>
-          <a:p>
-            <a:pPr algn="l">
-              <a:lnSpc>
-                <a:spcPct val="115000"/>
-              </a:lnSpc>
-              <a:spcAft>
-                <a:spcPts val="600"/>
-              </a:spcAft>
-            </a:pPr>
-            <a:r>
-              <a:rPr sz="1300" b="0">
+            <a:off x="640080" y="5806440"/>
+            <a:ext cx="10881360" cy="731520"/>
+          </a:xfrm>
+          <a:prstGeom prst="rect">
+            <a:avLst/>
+          </a:prstGeom>
+          <a:noFill/>
+        </p:spPr>
+        <p:txBody>
+          <a:bodyPr wrap="square" lIns="0" rIns="0">
+            <a:spAutoFit/>
+          </a:bodyPr>
+          <a:lstStyle/>
+          <a:p>
+            <a:pPr algn="l">
+              <a:lnSpc>
+                <a:spcPct val="115000"/>
+              </a:lnSpc>
+              <a:spcAft>
+                <a:spcPts val="600"/>
+              </a:spcAft>
+            </a:pPr>
+            <a:r>
+              <a:rPr sz="1600" b="1">
                 <a:solidFill>
                   <a:srgbClr val="101B33"/>
                 </a:solidFill>
                 <a:latin typeface="Arial"/>
               </a:rPr>
-              <a:t>Không tăng cường (mốc domain gap)</a:t>
-            </a:r>
-          </a:p>
-        </p:txBody>
-      </p:sp>
-      <p:sp>
-        <p:nvSpPr>
-          <p:cNvPr id="14" name="TextBox 13"/>
-          <p:cNvSpPr txBox="1"/>
-          <p:nvPr/>
-        </p:nvSpPr>
-        <p:spPr>
-          <a:xfrm>
-            <a:off x="4590288" y="1892808"/>
-            <a:ext cx="1737360" cy="457200"/>
-          </a:xfrm>
-          <a:prstGeom prst="rect">
-            <a:avLst/>
-          </a:prstGeom>
-          <a:noFill/>
-        </p:spPr>
-        <p:txBody>
-          <a:bodyPr wrap="square" lIns="0" rIns="0">
-            <a:spAutoFit/>
-          </a:bodyPr>
-          <a:lstStyle/>
-          <a:p>
-            <a:pPr algn="l">
-              <a:lnSpc>
-                <a:spcPct val="115000"/>
-              </a:lnSpc>
-              <a:spcAft>
-                <a:spcPts val="600"/>
-              </a:spcAft>
-            </a:pPr>
-            <a:r>
-              <a:rPr sz="1300" b="0">
-                <a:solidFill>
-                  <a:srgbClr val="101B33"/>
-                </a:solidFill>
-                <a:latin typeface="Arial"/>
-              </a:rPr>
-              <a:t>—</a:t>
-            </a:r>
-          </a:p>
-        </p:txBody>
-      </p:sp>
-      <p:sp>
-        <p:nvSpPr>
-          <p:cNvPr id="15" name="TextBox 14"/>
-          <p:cNvSpPr txBox="1"/>
-          <p:nvPr/>
-        </p:nvSpPr>
-        <p:spPr>
-          <a:xfrm>
-            <a:off x="6327648" y="1892808"/>
-            <a:ext cx="1737360" cy="457200"/>
-          </a:xfrm>
-          <a:prstGeom prst="rect">
-            <a:avLst/>
-          </a:prstGeom>
-          <a:noFill/>
-        </p:spPr>
-        <p:txBody>
-          <a:bodyPr wrap="square" lIns="0" rIns="0">
-            <a:spAutoFit/>
-          </a:bodyPr>
-          <a:lstStyle/>
-          <a:p>
-            <a:pPr algn="l">
-              <a:lnSpc>
-                <a:spcPct val="115000"/>
-              </a:lnSpc>
-              <a:spcAft>
-                <a:spcPts val="600"/>
-              </a:spcAft>
-            </a:pPr>
-            <a:r>
-              <a:rPr sz="1300" b="0">
-                <a:solidFill>
-                  <a:srgbClr val="101B33"/>
-                </a:solidFill>
-                <a:latin typeface="Arial"/>
-              </a:rPr>
-              <a:t>—</a:t>
-            </a:r>
-          </a:p>
-        </p:txBody>
-      </p:sp>
-      <p:sp>
-        <p:nvSpPr>
-          <p:cNvPr id="16" name="TextBox 15"/>
-          <p:cNvSpPr txBox="1"/>
-          <p:nvPr/>
-        </p:nvSpPr>
-        <p:spPr>
-          <a:xfrm>
-            <a:off x="8065008" y="1892808"/>
-            <a:ext cx="1828800" cy="457200"/>
-          </a:xfrm>
-          <a:prstGeom prst="rect">
-            <a:avLst/>
-          </a:prstGeom>
-          <a:noFill/>
-        </p:spPr>
-        <p:txBody>
-          <a:bodyPr wrap="square" lIns="0" rIns="0">
-            <a:spAutoFit/>
-          </a:bodyPr>
-          <a:lstStyle/>
-          <a:p>
-            <a:pPr algn="l">
-              <a:lnSpc>
-                <a:spcPct val="115000"/>
-              </a:lnSpc>
-              <a:spcAft>
-                <a:spcPts val="600"/>
-              </a:spcAft>
-            </a:pPr>
-            <a:r>
-              <a:rPr sz="1300" b="0">
-                <a:solidFill>
-                  <a:srgbClr val="101B33"/>
-                </a:solidFill>
-                <a:latin typeface="Arial"/>
-              </a:rPr>
-              <a:t>—</a:t>
-            </a:r>
-          </a:p>
-        </p:txBody>
-      </p:sp>
-      <p:sp>
-        <p:nvSpPr>
-          <p:cNvPr id="17" name="TextBox 16"/>
-          <p:cNvSpPr txBox="1"/>
-          <p:nvPr/>
-        </p:nvSpPr>
-        <p:spPr>
-          <a:xfrm>
-            <a:off x="9893808" y="1892808"/>
-            <a:ext cx="1737360" cy="457200"/>
-          </a:xfrm>
-          <a:prstGeom prst="rect">
-            <a:avLst/>
-          </a:prstGeom>
-          <a:noFill/>
-        </p:spPr>
-        <p:txBody>
-          <a:bodyPr wrap="square" lIns="0" rIns="0">
-            <a:spAutoFit/>
-          </a:bodyPr>
-          <a:lstStyle/>
-          <a:p>
-            <a:pPr algn="l">
-              <a:lnSpc>
-                <a:spcPct val="115000"/>
-              </a:lnSpc>
-              <a:spcAft>
-                <a:spcPts val="600"/>
-              </a:spcAft>
-            </a:pPr>
-            <a:r>
-              <a:rPr sz="1300" b="0">
-                <a:solidFill>
-                  <a:srgbClr val="101B33"/>
-                </a:solidFill>
-                <a:latin typeface="Arial"/>
-              </a:rPr>
-              <a:t>99.40</a:t>
-            </a:r>
-          </a:p>
-        </p:txBody>
-      </p:sp>
-      <p:sp>
-        <p:nvSpPr>
-          <p:cNvPr id="18" name="Rectangle 17"/>
-          <p:cNvSpPr/>
-          <p:nvPr/>
-        </p:nvSpPr>
-        <p:spPr>
-          <a:xfrm>
-            <a:off x="640080" y="2286000"/>
-            <a:ext cx="10881360" cy="457200"/>
-          </a:xfrm>
-          <a:prstGeom prst="rect">
-            <a:avLst/>
-          </a:prstGeom>
-          <a:solidFill>
-            <a:srgbClr val="FFFFFF"/>
-          </a:solidFill>
-          <a:ln>
-            <a:noFill/>
-          </a:ln>
-          <a:effectLst/>
-        </p:spPr>
-        <p:style>
-          <a:lnRef idx="1">
-            <a:schemeClr val="accent1"/>
-          </a:lnRef>
-          <a:fillRef idx="3">
-            <a:schemeClr val="accent1"/>
-          </a:fillRef>
-          <a:effectRef idx="2">
-            <a:schemeClr val="accent1"/>
-          </a:effectRef>
-          <a:fontRef idx="minor">
-            <a:schemeClr val="lt1"/>
-          </a:fontRef>
-        </p:style>
-        <p:txBody>
-          <a:bodyPr rtlCol="0" anchor="ctr"/>
-          <a:lstStyle/>
-          <a:p>
-            <a:pPr algn="ctr"/>
-          </a:p>
-        </p:txBody>
-      </p:sp>
-      <p:sp>
-        <p:nvSpPr>
-          <p:cNvPr id="19" name="TextBox 18"/>
-          <p:cNvSpPr txBox="1"/>
-          <p:nvPr/>
-        </p:nvSpPr>
-        <p:spPr>
-          <a:xfrm>
-            <a:off x="749808" y="2350008"/>
-            <a:ext cx="3840480" cy="457200"/>
-          </a:xfrm>
-          <a:prstGeom prst="rect">
-            <a:avLst/>
-          </a:prstGeom>
-          <a:noFill/>
-        </p:spPr>
-        <p:txBody>
-          <a:bodyPr wrap="square" lIns="0" rIns="0">
-            <a:spAutoFit/>
-          </a:bodyPr>
-          <a:lstStyle/>
-          <a:p>
-            <a:pPr algn="l">
-              <a:lnSpc>
-                <a:spcPct val="115000"/>
-              </a:lnSpc>
-              <a:spcAft>
-                <a:spcPts val="600"/>
-              </a:spcAft>
-            </a:pPr>
-            <a:r>
-              <a:rPr sz="1300" b="0">
-                <a:solidFill>
-                  <a:srgbClr val="101B33"/>
-                </a:solidFill>
-                <a:latin typeface="Arial"/>
-              </a:rPr>
-              <a:t>Baseline vật lý</a:t>
-            </a:r>
-          </a:p>
-        </p:txBody>
-      </p:sp>
-      <p:sp>
-        <p:nvSpPr>
-          <p:cNvPr id="20" name="TextBox 19"/>
-          <p:cNvSpPr txBox="1"/>
-          <p:nvPr/>
-        </p:nvSpPr>
-        <p:spPr>
-          <a:xfrm>
-            <a:off x="4590288" y="2350008"/>
-            <a:ext cx="1737360" cy="457200"/>
-          </a:xfrm>
-          <a:prstGeom prst="rect">
-            <a:avLst/>
-          </a:prstGeom>
-          <a:noFill/>
-        </p:spPr>
-        <p:txBody>
-          <a:bodyPr wrap="square" lIns="0" rIns="0">
-            <a:spAutoFit/>
-          </a:bodyPr>
-          <a:lstStyle/>
-          <a:p>
-            <a:pPr algn="l">
-              <a:lnSpc>
-                <a:spcPct val="115000"/>
-              </a:lnSpc>
-              <a:spcAft>
-                <a:spcPts val="600"/>
-              </a:spcAft>
-            </a:pPr>
-            <a:r>
-              <a:rPr sz="1300" b="0">
-                <a:solidFill>
-                  <a:srgbClr val="101B33"/>
-                </a:solidFill>
-                <a:latin typeface="Arial"/>
-              </a:rPr>
-              <a:t>0.6076</a:t>
-            </a:r>
-          </a:p>
-        </p:txBody>
-      </p:sp>
-      <p:sp>
-        <p:nvSpPr>
-          <p:cNvPr id="21" name="TextBox 20"/>
-          <p:cNvSpPr txBox="1"/>
-          <p:nvPr/>
-        </p:nvSpPr>
-        <p:spPr>
-          <a:xfrm>
-            <a:off x="6327648" y="2350008"/>
-            <a:ext cx="1737360" cy="457200"/>
-          </a:xfrm>
-          <a:prstGeom prst="rect">
-            <a:avLst/>
-          </a:prstGeom>
-          <a:noFill/>
-        </p:spPr>
-        <p:txBody>
-          <a:bodyPr wrap="square" lIns="0" rIns="0">
-            <a:spAutoFit/>
-          </a:bodyPr>
-          <a:lstStyle/>
-          <a:p>
-            <a:pPr algn="l">
-              <a:lnSpc>
-                <a:spcPct val="115000"/>
-              </a:lnSpc>
-              <a:spcAft>
-                <a:spcPts val="600"/>
-              </a:spcAft>
-            </a:pPr>
-            <a:r>
-              <a:rPr sz="1300" b="0">
-                <a:solidFill>
-                  <a:srgbClr val="101B33"/>
-                </a:solidFill>
-                <a:latin typeface="Arial"/>
-              </a:rPr>
-              <a:t>13.32</a:t>
-            </a:r>
-          </a:p>
-        </p:txBody>
-      </p:sp>
-      <p:sp>
-        <p:nvSpPr>
-          <p:cNvPr id="22" name="TextBox 21"/>
-          <p:cNvSpPr txBox="1"/>
-          <p:nvPr/>
-        </p:nvSpPr>
-        <p:spPr>
-          <a:xfrm>
-            <a:off x="8065008" y="2350008"/>
-            <a:ext cx="1828800" cy="457200"/>
-          </a:xfrm>
-          <a:prstGeom prst="rect">
-            <a:avLst/>
-          </a:prstGeom>
-          <a:noFill/>
-        </p:spPr>
-        <p:txBody>
-          <a:bodyPr wrap="square" lIns="0" rIns="0">
-            <a:spAutoFit/>
-          </a:bodyPr>
-          <a:lstStyle/>
-          <a:p>
-            <a:pPr algn="l">
-              <a:lnSpc>
-                <a:spcPct val="115000"/>
-              </a:lnSpc>
-              <a:spcAft>
-                <a:spcPts val="600"/>
-              </a:spcAft>
-            </a:pPr>
-            <a:r>
-              <a:rPr sz="1300" b="0">
-                <a:solidFill>
-                  <a:srgbClr val="101B33"/>
-                </a:solidFill>
-                <a:latin typeface="Arial"/>
-              </a:rPr>
-              <a:t>0.5092</a:t>
-            </a:r>
-          </a:p>
-        </p:txBody>
-      </p:sp>
-      <p:sp>
-        <p:nvSpPr>
-          <p:cNvPr id="23" name="TextBox 22"/>
-          <p:cNvSpPr txBox="1"/>
-          <p:nvPr/>
-        </p:nvSpPr>
-        <p:spPr>
-          <a:xfrm>
-            <a:off x="9893808" y="2350008"/>
-            <a:ext cx="1737360" cy="457200"/>
-          </a:xfrm>
-          <a:prstGeom prst="rect">
-            <a:avLst/>
-          </a:prstGeom>
-          <a:noFill/>
-        </p:spPr>
-        <p:txBody>
-          <a:bodyPr wrap="square" lIns="0" rIns="0">
-            <a:spAutoFit/>
-          </a:bodyPr>
-          <a:lstStyle/>
-          <a:p>
-            <a:pPr algn="l">
-              <a:lnSpc>
-                <a:spcPct val="115000"/>
-              </a:lnSpc>
-              <a:spcAft>
-                <a:spcPts val="600"/>
-              </a:spcAft>
-            </a:pPr>
-            <a:r>
-              <a:rPr sz="1300" b="0">
-                <a:solidFill>
-                  <a:srgbClr val="101B33"/>
-                </a:solidFill>
-                <a:latin typeface="Arial"/>
-              </a:rPr>
-              <a:t>177.03</a:t>
-            </a:r>
-          </a:p>
-        </p:txBody>
-      </p:sp>
-      <p:sp>
-        <p:nvSpPr>
-          <p:cNvPr id="24" name="Rectangle 23"/>
-          <p:cNvSpPr/>
-          <p:nvPr/>
-        </p:nvSpPr>
-        <p:spPr>
-          <a:xfrm>
-            <a:off x="640080" y="2743200"/>
-            <a:ext cx="10881360" cy="457200"/>
-          </a:xfrm>
-          <a:prstGeom prst="rect">
-            <a:avLst/>
-          </a:prstGeom>
-          <a:solidFill>
-            <a:srgbClr val="F4F6FA"/>
-          </a:solidFill>
-          <a:ln>
-            <a:noFill/>
-          </a:ln>
-          <a:effectLst/>
-        </p:spPr>
-        <p:style>
-          <a:lnRef idx="1">
-            <a:schemeClr val="accent1"/>
-          </a:lnRef>
-          <a:fillRef idx="3">
-            <a:schemeClr val="accent1"/>
-          </a:fillRef>
-          <a:effectRef idx="2">
-            <a:schemeClr val="accent1"/>
-          </a:effectRef>
-          <a:fontRef idx="minor">
-            <a:schemeClr val="lt1"/>
-          </a:fontRef>
-        </p:style>
-        <p:txBody>
-          <a:bodyPr rtlCol="0" anchor="ctr"/>
-          <a:lstStyle/>
-          <a:p>
-            <a:pPr algn="ctr"/>
-          </a:p>
-        </p:txBody>
-      </p:sp>
-      <p:sp>
-        <p:nvSpPr>
-          <p:cNvPr id="25" name="TextBox 24"/>
-          <p:cNvSpPr txBox="1"/>
-          <p:nvPr/>
-        </p:nvSpPr>
-        <p:spPr>
-          <a:xfrm>
-            <a:off x="749808" y="2807208"/>
-            <a:ext cx="3840480" cy="457200"/>
-          </a:xfrm>
-          <a:prstGeom prst="rect">
-            <a:avLst/>
-          </a:prstGeom>
-          <a:noFill/>
-        </p:spPr>
-        <p:txBody>
-          <a:bodyPr wrap="square" lIns="0" rIns="0">
-            <a:spAutoFit/>
-          </a:bodyPr>
-          <a:lstStyle/>
-          <a:p>
-            <a:pPr algn="l">
-              <a:lnSpc>
-                <a:spcPct val="115000"/>
-              </a:lnSpc>
-              <a:spcAft>
-                <a:spcPts val="600"/>
-              </a:spcAft>
-            </a:pPr>
-            <a:r>
-              <a:rPr sz="1300" b="0">
-                <a:solidFill>
-                  <a:srgbClr val="101B33"/>
-                </a:solidFill>
-                <a:latin typeface="Arial"/>
-              </a:rPr>
-              <a:t>Chỉ AdaIN</a:t>
-            </a:r>
-          </a:p>
-        </p:txBody>
-      </p:sp>
-      <p:sp>
-        <p:nvSpPr>
-          <p:cNvPr id="26" name="TextBox 25"/>
-          <p:cNvSpPr txBox="1"/>
-          <p:nvPr/>
-        </p:nvSpPr>
-        <p:spPr>
-          <a:xfrm>
-            <a:off x="4590288" y="2807208"/>
-            <a:ext cx="1737360" cy="457200"/>
-          </a:xfrm>
-          <a:prstGeom prst="rect">
-            <a:avLst/>
-          </a:prstGeom>
-          <a:noFill/>
-        </p:spPr>
-        <p:txBody>
-          <a:bodyPr wrap="square" lIns="0" rIns="0">
-            <a:spAutoFit/>
-          </a:bodyPr>
-          <a:lstStyle/>
-          <a:p>
-            <a:pPr algn="l">
-              <a:lnSpc>
-                <a:spcPct val="115000"/>
-              </a:lnSpc>
-              <a:spcAft>
-                <a:spcPts val="600"/>
-              </a:spcAft>
-            </a:pPr>
-            <a:r>
-              <a:rPr sz="1300" b="0">
-                <a:solidFill>
-                  <a:srgbClr val="101B33"/>
-                </a:solidFill>
-                <a:latin typeface="Arial"/>
-              </a:rPr>
-              <a:t>0.4521</a:t>
-            </a:r>
-          </a:p>
-        </p:txBody>
-      </p:sp>
-      <p:sp>
-        <p:nvSpPr>
-          <p:cNvPr id="27" name="TextBox 26"/>
-          <p:cNvSpPr txBox="1"/>
-          <p:nvPr/>
-        </p:nvSpPr>
-        <p:spPr>
-          <a:xfrm>
-            <a:off x="6327648" y="2807208"/>
-            <a:ext cx="1737360" cy="457200"/>
-          </a:xfrm>
-          <a:prstGeom prst="rect">
-            <a:avLst/>
-          </a:prstGeom>
-          <a:noFill/>
-        </p:spPr>
-        <p:txBody>
-          <a:bodyPr wrap="square" lIns="0" rIns="0">
-            <a:spAutoFit/>
-          </a:bodyPr>
-          <a:lstStyle/>
-          <a:p>
-            <a:pPr algn="l">
-              <a:lnSpc>
-                <a:spcPct val="115000"/>
-              </a:lnSpc>
-              <a:spcAft>
-                <a:spcPts val="600"/>
-              </a:spcAft>
-            </a:pPr>
-            <a:r>
-              <a:rPr sz="1300" b="0">
-                <a:solidFill>
-                  <a:srgbClr val="101B33"/>
-                </a:solidFill>
-                <a:latin typeface="Arial"/>
-              </a:rPr>
-              <a:t>14.13</a:t>
-            </a:r>
-          </a:p>
-        </p:txBody>
-      </p:sp>
-      <p:sp>
-        <p:nvSpPr>
-          <p:cNvPr id="28" name="TextBox 27"/>
-          <p:cNvSpPr txBox="1"/>
-          <p:nvPr/>
-        </p:nvSpPr>
-        <p:spPr>
-          <a:xfrm>
-            <a:off x="8065008" y="2807208"/>
-            <a:ext cx="1828800" cy="457200"/>
-          </a:xfrm>
-          <a:prstGeom prst="rect">
-            <a:avLst/>
-          </a:prstGeom>
-          <a:noFill/>
-        </p:spPr>
-        <p:txBody>
-          <a:bodyPr wrap="square" lIns="0" rIns="0">
-            <a:spAutoFit/>
-          </a:bodyPr>
-          <a:lstStyle/>
-          <a:p>
-            <a:pPr algn="l">
-              <a:lnSpc>
-                <a:spcPct val="115000"/>
-              </a:lnSpc>
-              <a:spcAft>
-                <a:spcPts val="600"/>
-              </a:spcAft>
-            </a:pPr>
-            <a:r>
-              <a:rPr sz="1300" b="0">
-                <a:solidFill>
-                  <a:srgbClr val="101B33"/>
-                </a:solidFill>
-                <a:latin typeface="Arial"/>
-              </a:rPr>
-              <a:t>0.6073</a:t>
-            </a:r>
-          </a:p>
-        </p:txBody>
-      </p:sp>
-      <p:sp>
-        <p:nvSpPr>
-          <p:cNvPr id="29" name="TextBox 28"/>
-          <p:cNvSpPr txBox="1"/>
-          <p:nvPr/>
-        </p:nvSpPr>
-        <p:spPr>
-          <a:xfrm>
-            <a:off x="9893808" y="2807208"/>
-            <a:ext cx="1737360" cy="457200"/>
-          </a:xfrm>
-          <a:prstGeom prst="rect">
-            <a:avLst/>
-          </a:prstGeom>
-          <a:noFill/>
-        </p:spPr>
-        <p:txBody>
-          <a:bodyPr wrap="square" lIns="0" rIns="0">
-            <a:spAutoFit/>
-          </a:bodyPr>
-          <a:lstStyle/>
-          <a:p>
-            <a:pPr algn="l">
-              <a:lnSpc>
-                <a:spcPct val="115000"/>
-              </a:lnSpc>
-              <a:spcAft>
-                <a:spcPts val="600"/>
-              </a:spcAft>
-            </a:pPr>
-            <a:r>
-              <a:rPr sz="1300" b="0">
-                <a:solidFill>
-                  <a:srgbClr val="101B33"/>
-                </a:solidFill>
-                <a:latin typeface="Arial"/>
-              </a:rPr>
-              <a:t>125.85</a:t>
-            </a:r>
-          </a:p>
-        </p:txBody>
-      </p:sp>
-      <p:sp>
-        <p:nvSpPr>
-          <p:cNvPr id="30" name="Rectangle 29"/>
-          <p:cNvSpPr/>
-          <p:nvPr/>
-        </p:nvSpPr>
-        <p:spPr>
-          <a:xfrm>
-            <a:off x="640080" y="3200400"/>
-            <a:ext cx="10881360" cy="457200"/>
-          </a:xfrm>
-          <a:prstGeom prst="rect">
-            <a:avLst/>
-          </a:prstGeom>
-          <a:solidFill>
-            <a:srgbClr val="FFFFFF"/>
-          </a:solidFill>
-          <a:ln>
-            <a:noFill/>
-          </a:ln>
-          <a:effectLst/>
-        </p:spPr>
-        <p:style>
-          <a:lnRef idx="1">
-            <a:schemeClr val="accent1"/>
-          </a:lnRef>
-          <a:fillRef idx="3">
-            <a:schemeClr val="accent1"/>
-          </a:fillRef>
-          <a:effectRef idx="2">
-            <a:schemeClr val="accent1"/>
-          </a:effectRef>
-          <a:fontRef idx="minor">
-            <a:schemeClr val="lt1"/>
-          </a:fontRef>
-        </p:style>
-        <p:txBody>
-          <a:bodyPr rtlCol="0" anchor="ctr"/>
-          <a:lstStyle/>
-          <a:p>
-            <a:pPr algn="ctr"/>
-          </a:p>
-        </p:txBody>
-      </p:sp>
-      <p:sp>
-        <p:nvSpPr>
-          <p:cNvPr id="31" name="TextBox 30"/>
-          <p:cNvSpPr txBox="1"/>
-          <p:nvPr/>
-        </p:nvSpPr>
-        <p:spPr>
-          <a:xfrm>
-            <a:off x="749808" y="3264408"/>
-            <a:ext cx="3840480" cy="457200"/>
-          </a:xfrm>
-          <a:prstGeom prst="rect">
-            <a:avLst/>
-          </a:prstGeom>
-          <a:noFill/>
-        </p:spPr>
-        <p:txBody>
-          <a:bodyPr wrap="square" lIns="0" rIns="0">
-            <a:spAutoFit/>
-          </a:bodyPr>
-          <a:lstStyle/>
-          <a:p>
-            <a:pPr algn="l">
-              <a:lnSpc>
-                <a:spcPct val="115000"/>
-              </a:lnSpc>
-              <a:spcAft>
-                <a:spcPts val="600"/>
-              </a:spcAft>
-            </a:pPr>
-            <a:r>
-              <a:rPr sz="1300" b="0">
-                <a:solidFill>
-                  <a:srgbClr val="101B33"/>
-                </a:solidFill>
-                <a:latin typeface="Arial"/>
-              </a:rPr>
-              <a:t>AdaIN + GF + hạt (đề xuất)</a:t>
-            </a:r>
-          </a:p>
-        </p:txBody>
-      </p:sp>
-      <p:sp>
-        <p:nvSpPr>
-          <p:cNvPr id="32" name="TextBox 31"/>
-          <p:cNvSpPr txBox="1"/>
-          <p:nvPr/>
-        </p:nvSpPr>
-        <p:spPr>
-          <a:xfrm>
-            <a:off x="4590288" y="3264408"/>
-            <a:ext cx="1737360" cy="457200"/>
-          </a:xfrm>
-          <a:prstGeom prst="rect">
-            <a:avLst/>
-          </a:prstGeom>
-          <a:noFill/>
-        </p:spPr>
-        <p:txBody>
-          <a:bodyPr wrap="square" lIns="0" rIns="0">
-            <a:spAutoFit/>
-          </a:bodyPr>
-          <a:lstStyle/>
-          <a:p>
-            <a:pPr algn="l">
-              <a:lnSpc>
-                <a:spcPct val="115000"/>
-              </a:lnSpc>
-              <a:spcAft>
-                <a:spcPts val="600"/>
-              </a:spcAft>
-            </a:pPr>
-            <a:r>
-              <a:rPr sz="1300" b="0">
-                <a:solidFill>
-                  <a:srgbClr val="101B33"/>
-                </a:solidFill>
-                <a:latin typeface="Arial"/>
-              </a:rPr>
-              <a:t>0.6100</a:t>
-            </a:r>
-          </a:p>
-        </p:txBody>
-      </p:sp>
-      <p:sp>
-        <p:nvSpPr>
-          <p:cNvPr id="33" name="TextBox 32"/>
-          <p:cNvSpPr txBox="1"/>
-          <p:nvPr/>
-        </p:nvSpPr>
-        <p:spPr>
-          <a:xfrm>
-            <a:off x="6327648" y="3264408"/>
-            <a:ext cx="1737360" cy="457200"/>
-          </a:xfrm>
-          <a:prstGeom prst="rect">
-            <a:avLst/>
-          </a:prstGeom>
-          <a:noFill/>
-        </p:spPr>
-        <p:txBody>
-          <a:bodyPr wrap="square" lIns="0" rIns="0">
-            <a:spAutoFit/>
-          </a:bodyPr>
-          <a:lstStyle/>
-          <a:p>
-            <a:pPr algn="l">
-              <a:lnSpc>
-                <a:spcPct val="115000"/>
-              </a:lnSpc>
-              <a:spcAft>
-                <a:spcPts val="600"/>
-              </a:spcAft>
-            </a:pPr>
-            <a:r>
-              <a:rPr sz="1300" b="0">
-                <a:solidFill>
-                  <a:srgbClr val="101B33"/>
-                </a:solidFill>
-                <a:latin typeface="Arial"/>
-              </a:rPr>
-              <a:t>14.61</a:t>
-            </a:r>
-          </a:p>
-        </p:txBody>
-      </p:sp>
-      <p:sp>
-        <p:nvSpPr>
-          <p:cNvPr id="34" name="TextBox 33"/>
-          <p:cNvSpPr txBox="1"/>
-          <p:nvPr/>
-        </p:nvSpPr>
-        <p:spPr>
-          <a:xfrm>
-            <a:off x="8065008" y="3264408"/>
-            <a:ext cx="1828800" cy="457200"/>
-          </a:xfrm>
-          <a:prstGeom prst="rect">
-            <a:avLst/>
-          </a:prstGeom>
-          <a:noFill/>
-        </p:spPr>
-        <p:txBody>
-          <a:bodyPr wrap="square" lIns="0" rIns="0">
-            <a:spAutoFit/>
-          </a:bodyPr>
-          <a:lstStyle/>
-          <a:p>
-            <a:pPr algn="l">
-              <a:lnSpc>
-                <a:spcPct val="115000"/>
-              </a:lnSpc>
-              <a:spcAft>
-                <a:spcPts val="600"/>
-              </a:spcAft>
-            </a:pPr>
-            <a:r>
-              <a:rPr sz="1300" b="0">
-                <a:solidFill>
-                  <a:srgbClr val="101B33"/>
-                </a:solidFill>
-                <a:latin typeface="Arial"/>
-              </a:rPr>
-              <a:t>0.4997</a:t>
-            </a:r>
-          </a:p>
-        </p:txBody>
-      </p:sp>
-      <p:sp>
-        <p:nvSpPr>
-          <p:cNvPr id="35" name="TextBox 34"/>
-          <p:cNvSpPr txBox="1"/>
-          <p:nvPr/>
-        </p:nvSpPr>
-        <p:spPr>
-          <a:xfrm>
-            <a:off x="9893808" y="3264408"/>
-            <a:ext cx="1737360" cy="457200"/>
-          </a:xfrm>
-          <a:prstGeom prst="rect">
-            <a:avLst/>
-          </a:prstGeom>
-          <a:noFill/>
-        </p:spPr>
-        <p:txBody>
-          <a:bodyPr wrap="square" lIns="0" rIns="0">
-            <a:spAutoFit/>
-          </a:bodyPr>
-          <a:lstStyle/>
-          <a:p>
-            <a:pPr algn="l">
-              <a:lnSpc>
-                <a:spcPct val="115000"/>
-              </a:lnSpc>
-              <a:spcAft>
-                <a:spcPts val="600"/>
-              </a:spcAft>
-            </a:pPr>
-            <a:r>
-              <a:rPr sz="1300" b="0">
-                <a:solidFill>
-                  <a:srgbClr val="101B33"/>
-                </a:solidFill>
-                <a:latin typeface="Arial"/>
-              </a:rPr>
-              <a:t>164.38</a:t>
-            </a:r>
-          </a:p>
-        </p:txBody>
-      </p:sp>
-      <p:sp>
-        <p:nvSpPr>
-          <p:cNvPr id="36" name="Rectangle 35"/>
-          <p:cNvSpPr/>
-          <p:nvPr/>
-        </p:nvSpPr>
-        <p:spPr>
-          <a:xfrm>
-            <a:off x="640080" y="3986784"/>
-            <a:ext cx="100584" cy="100584"/>
-          </a:xfrm>
-          <a:prstGeom prst="rect">
-            <a:avLst/>
-          </a:prstGeom>
-          <a:solidFill>
-            <a:srgbClr val="18A099"/>
-          </a:solidFill>
-          <a:ln>
-            <a:noFill/>
-          </a:ln>
-          <a:effectLst/>
-        </p:spPr>
-        <p:style>
-          <a:lnRef idx="1">
-            <a:schemeClr val="accent1"/>
-          </a:lnRef>
-          <a:fillRef idx="3">
-            <a:schemeClr val="accent1"/>
-          </a:fillRef>
-          <a:effectRef idx="2">
-            <a:schemeClr val="accent1"/>
-          </a:effectRef>
-          <a:fontRef idx="minor">
-            <a:schemeClr val="lt1"/>
-          </a:fontRef>
-        </p:style>
-        <p:txBody>
-          <a:bodyPr rtlCol="0" anchor="ctr"/>
-          <a:lstStyle/>
-          <a:p>
-            <a:pPr algn="ctr"/>
-          </a:p>
-        </p:txBody>
-      </p:sp>
-      <p:sp>
-        <p:nvSpPr>
-          <p:cNvPr id="37" name="TextBox 36"/>
-          <p:cNvSpPr txBox="1"/>
-          <p:nvPr/>
-        </p:nvSpPr>
-        <p:spPr>
-          <a:xfrm>
-            <a:off x="914400" y="3886200"/>
-            <a:ext cx="10607040" cy="548640"/>
-          </a:xfrm>
-          <a:prstGeom prst="rect">
-            <a:avLst/>
-          </a:prstGeom>
-          <a:noFill/>
-        </p:spPr>
-        <p:txBody>
-          <a:bodyPr wrap="square" lIns="0" rIns="0">
-            <a:spAutoFit/>
-          </a:bodyPr>
-          <a:lstStyle/>
-          <a:p>
-            <a:pPr algn="l">
-              <a:lnSpc>
-                <a:spcPct val="115000"/>
-              </a:lnSpc>
-              <a:spcAft>
-                <a:spcPts val="600"/>
-              </a:spcAft>
-            </a:pPr>
-            <a:r>
-              <a:rPr sz="1400" b="1">
-                <a:solidFill>
-                  <a:srgbClr val="101B33"/>
-                </a:solidFill>
-                <a:latin typeface="Arial"/>
-              </a:rPr>
-              <a:t>SSIM / PSNR / EdgeRecall — mức giữ nội dung so với ảnh gốc (cao = nhãn còn dùng được).</a:t>
-            </a:r>
-          </a:p>
-        </p:txBody>
-      </p:sp>
-      <p:sp>
-        <p:nvSpPr>
-          <p:cNvPr id="38" name="Rectangle 37"/>
-          <p:cNvSpPr/>
-          <p:nvPr/>
-        </p:nvSpPr>
-        <p:spPr>
-          <a:xfrm>
-            <a:off x="640080" y="4443984"/>
-            <a:ext cx="100584" cy="100584"/>
-          </a:xfrm>
-          <a:prstGeom prst="rect">
-            <a:avLst/>
-          </a:prstGeom>
-          <a:solidFill>
-            <a:srgbClr val="18A099"/>
-          </a:solidFill>
-          <a:ln>
-            <a:noFill/>
-          </a:ln>
-          <a:effectLst/>
-        </p:spPr>
-        <p:style>
-          <a:lnRef idx="1">
-            <a:schemeClr val="accent1"/>
-          </a:lnRef>
-          <a:fillRef idx="3">
-            <a:schemeClr val="accent1"/>
-          </a:fillRef>
-          <a:effectRef idx="2">
-            <a:schemeClr val="accent1"/>
-          </a:effectRef>
-          <a:fontRef idx="minor">
-            <a:schemeClr val="lt1"/>
-          </a:fontRef>
-        </p:style>
-        <p:txBody>
-          <a:bodyPr rtlCol="0" anchor="ctr"/>
-          <a:lstStyle/>
-          <a:p>
-            <a:pPr algn="ctr"/>
-          </a:p>
-        </p:txBody>
-      </p:sp>
-      <p:sp>
-        <p:nvSpPr>
-          <p:cNvPr id="39" name="TextBox 38"/>
-          <p:cNvSpPr txBox="1"/>
-          <p:nvPr/>
-        </p:nvSpPr>
-        <p:spPr>
-          <a:xfrm>
-            <a:off x="914400" y="4343400"/>
-            <a:ext cx="10607040" cy="548640"/>
-          </a:xfrm>
-          <a:prstGeom prst="rect">
-            <a:avLst/>
-          </a:prstGeom>
-          <a:noFill/>
-        </p:spPr>
-        <p:txBody>
-          <a:bodyPr wrap="square" lIns="0" rIns="0">
-            <a:spAutoFit/>
-          </a:bodyPr>
-          <a:lstStyle/>
-          <a:p>
-            <a:pPr algn="l">
-              <a:lnSpc>
-                <a:spcPct val="115000"/>
-              </a:lnSpc>
-              <a:spcAft>
-                <a:spcPts val="600"/>
-              </a:spcAft>
-            </a:pPr>
-            <a:r>
-              <a:rPr sz="1400" b="1">
-                <a:solidFill>
-                  <a:srgbClr val="101B33"/>
-                </a:solidFill>
-                <a:latin typeface="Arial"/>
-              </a:rPr>
-              <a:t>FID — khoảng cách tới ảnh mưa/tuyết THẬT của BDD100K (thấp = trông giống thật hơn).</a:t>
-            </a:r>
-          </a:p>
-        </p:txBody>
-      </p:sp>
-      <p:sp>
-        <p:nvSpPr>
-          <p:cNvPr id="40" name="Rectangle 39"/>
-          <p:cNvSpPr/>
-          <p:nvPr/>
-        </p:nvSpPr>
-        <p:spPr>
-          <a:xfrm>
-            <a:off x="640080" y="4901184"/>
-            <a:ext cx="100584" cy="100584"/>
-          </a:xfrm>
-          <a:prstGeom prst="rect">
-            <a:avLst/>
-          </a:prstGeom>
-          <a:solidFill>
-            <a:srgbClr val="18A099"/>
-          </a:solidFill>
-          <a:ln>
-            <a:noFill/>
-          </a:ln>
-          <a:effectLst/>
-        </p:spPr>
-        <p:style>
-          <a:lnRef idx="1">
-            <a:schemeClr val="accent1"/>
-          </a:lnRef>
-          <a:fillRef idx="3">
-            <a:schemeClr val="accent1"/>
-          </a:fillRef>
-          <a:effectRef idx="2">
-            <a:schemeClr val="accent1"/>
-          </a:effectRef>
-          <a:fontRef idx="minor">
-            <a:schemeClr val="lt1"/>
-          </a:fontRef>
-        </p:style>
-        <p:txBody>
-          <a:bodyPr rtlCol="0" anchor="ctr"/>
-          <a:lstStyle/>
-          <a:p>
-            <a:pPr algn="ctr"/>
-          </a:p>
-        </p:txBody>
-      </p:sp>
-      <p:sp>
-        <p:nvSpPr>
-          <p:cNvPr id="41" name="TextBox 40"/>
-          <p:cNvSpPr txBox="1"/>
-          <p:nvPr/>
-        </p:nvSpPr>
-        <p:spPr>
-          <a:xfrm>
-            <a:off x="914400" y="4800600"/>
-            <a:ext cx="10607040" cy="548640"/>
-          </a:xfrm>
-          <a:prstGeom prst="rect">
-            <a:avLst/>
-          </a:prstGeom>
-          <a:noFill/>
-        </p:spPr>
-        <p:txBody>
-          <a:bodyPr wrap="square" lIns="0" rIns="0">
-            <a:spAutoFit/>
-          </a:bodyPr>
-          <a:lstStyle/>
-          <a:p>
-            <a:pPr algn="l">
-              <a:lnSpc>
-                <a:spcPct val="115000"/>
-              </a:lnSpc>
-              <a:spcAft>
-                <a:spcPts val="600"/>
-              </a:spcAft>
-            </a:pPr>
-            <a:r>
-              <a:rPr sz="1400" b="0">
-                <a:solidFill>
-                  <a:srgbClr val="101B33"/>
-                </a:solidFill>
-                <a:latin typeface="Arial"/>
-              </a:rPr>
-              <a:t>Không phương pháp nào thắng tuyệt đối: bản đề xuất giữ nội dung tốt nhất (SSIM, PSNR),</a:t>
-            </a:r>
-          </a:p>
-        </p:txBody>
-      </p:sp>
-      <p:sp>
-        <p:nvSpPr>
-          <p:cNvPr id="42" name="Rectangle 41"/>
-          <p:cNvSpPr/>
-          <p:nvPr/>
-        </p:nvSpPr>
-        <p:spPr>
-          <a:xfrm>
-            <a:off x="640080" y="5358384"/>
-            <a:ext cx="100584" cy="100584"/>
-          </a:xfrm>
-          <a:prstGeom prst="rect">
-            <a:avLst/>
-          </a:prstGeom>
-          <a:solidFill>
-            <a:srgbClr val="18A099"/>
-          </a:solidFill>
-          <a:ln>
-            <a:noFill/>
-          </a:ln>
-          <a:effectLst/>
-        </p:spPr>
-        <p:style>
-          <a:lnRef idx="1">
-            <a:schemeClr val="accent1"/>
-          </a:lnRef>
-          <a:fillRef idx="3">
-            <a:schemeClr val="accent1"/>
-          </a:fillRef>
-          <a:effectRef idx="2">
-            <a:schemeClr val="accent1"/>
-          </a:effectRef>
-          <a:fontRef idx="minor">
-            <a:schemeClr val="lt1"/>
-          </a:fontRef>
-        </p:style>
-        <p:txBody>
-          <a:bodyPr rtlCol="0" anchor="ctr"/>
-          <a:lstStyle/>
-          <a:p>
-            <a:pPr algn="ctr"/>
-          </a:p>
-        </p:txBody>
-      </p:sp>
-      <p:sp>
-        <p:nvSpPr>
-          <p:cNvPr id="43" name="TextBox 42"/>
-          <p:cNvSpPr txBox="1"/>
-          <p:nvPr/>
-        </p:nvSpPr>
-        <p:spPr>
-          <a:xfrm>
-            <a:off x="914400" y="5257800"/>
-            <a:ext cx="10607040" cy="548640"/>
-          </a:xfrm>
-          <a:prstGeom prst="rect">
-            <a:avLst/>
-          </a:prstGeom>
-          <a:noFill/>
-        </p:spPr>
-        <p:txBody>
-          <a:bodyPr wrap="square" lIns="0" rIns="0">
-            <a:spAutoFit/>
-          </a:bodyPr>
-          <a:lstStyle/>
-          <a:p>
-            <a:pPr algn="l">
-              <a:lnSpc>
-                <a:spcPct val="115000"/>
-              </a:lnSpc>
-              <a:spcAft>
-                <a:spcPts val="600"/>
-              </a:spcAft>
-            </a:pPr>
-            <a:r>
-              <a:rPr sz="1400" b="0">
-                <a:solidFill>
-                  <a:srgbClr val="101B33"/>
-                </a:solidFill>
-                <a:latin typeface="Arial"/>
-              </a:rPr>
-              <a:t>AdaIN thuần thắng FID vì lớp phủ hạt là dấu vết tổng hợp bị Inception phạt.</a:t>
-            </a:r>
-          </a:p>
-        </p:txBody>
-      </p:sp>
-      <p:sp>
-        <p:nvSpPr>
-          <p:cNvPr id="44" name="Rectangle 43"/>
-          <p:cNvSpPr/>
-          <p:nvPr/>
-        </p:nvSpPr>
-        <p:spPr>
-          <a:xfrm>
-            <a:off x="640080" y="5815584"/>
-            <a:ext cx="100584" cy="100584"/>
-          </a:xfrm>
-          <a:prstGeom prst="rect">
-            <a:avLst/>
-          </a:prstGeom>
-          <a:solidFill>
-            <a:srgbClr val="18A099"/>
-          </a:solidFill>
-          <a:ln>
-            <a:noFill/>
-          </a:ln>
-          <a:effectLst/>
-        </p:spPr>
-        <p:style>
-          <a:lnRef idx="1">
-            <a:schemeClr val="accent1"/>
-          </a:lnRef>
-          <a:fillRef idx="3">
-            <a:schemeClr val="accent1"/>
-          </a:fillRef>
-          <a:effectRef idx="2">
-            <a:schemeClr val="accent1"/>
-          </a:effectRef>
-          <a:fontRef idx="minor">
-            <a:schemeClr val="lt1"/>
-          </a:fontRef>
-        </p:style>
-        <p:txBody>
-          <a:bodyPr rtlCol="0" anchor="ctr"/>
-          <a:lstStyle/>
-          <a:p>
-            <a:pPr algn="ctr"/>
-          </a:p>
-        </p:txBody>
-      </p:sp>
-      <p:sp>
-        <p:nvSpPr>
-          <p:cNvPr id="45" name="TextBox 44"/>
-          <p:cNvSpPr txBox="1"/>
-          <p:nvPr/>
-        </p:nvSpPr>
-        <p:spPr>
-          <a:xfrm>
-            <a:off x="914400" y="5715000"/>
-            <a:ext cx="10607040" cy="548640"/>
-          </a:xfrm>
-          <a:prstGeom prst="rect">
-            <a:avLst/>
-          </a:prstGeom>
-          <a:noFill/>
-        </p:spPr>
-        <p:txBody>
-          <a:bodyPr wrap="square" lIns="0" rIns="0">
-            <a:spAutoFit/>
-          </a:bodyPr>
-          <a:lstStyle/>
-          <a:p>
-            <a:pPr algn="l">
-              <a:lnSpc>
-                <a:spcPct val="115000"/>
-              </a:lnSpc>
-              <a:spcAft>
-                <a:spcPts val="600"/>
-              </a:spcAft>
-            </a:pPr>
-            <a:r>
-              <a:rPr sz="1400" b="1">
-                <a:solidFill>
-                  <a:srgbClr val="101B33"/>
-                </a:solidFill>
-                <a:latin typeface="Arial"/>
-              </a:rPr>
-              <a:t>Kết luận: với ảnh dashcam nên giảm mật độ hạt — mưa thật qua kính chắn gió gần như không thấy vệt.</a:t>
+              <a:t>Không cần gán nhãn lại: mỗi ảnh sinh ra chỉ việc sao chép file nhãn của ảnh gốc.</a:t>
             </a:r>
           </a:p>
         </p:txBody>
@@ -5977,7 +4301,7 @@
                 </a:solidFill>
                 <a:latin typeface="Arial"/>
               </a:rPr>
-              <a:t>Thí nghiệm quyết định: dữ liệu này có thực sự hữu ích?</a:t>
+              <a:t>Đánh giá định lượng</a:t>
             </a:r>
           </a:p>
           <a:p>
@@ -5996,7 +4320,7 @@
                 </a:solidFill>
                 <a:latin typeface="Arial"/>
               </a:rPr>
-              <a:t>YOLOv8n — chỉ khác nhau ở tập huấn luyện</a:t>
+              <a:t>Giữ nội dung (SSIM/EdgeRecall) và giống thật (FID)</a:t>
             </a:r>
           </a:p>
         </p:txBody>
@@ -6045,75 +4369,14 @@
       </p:sp>
       <p:sp>
         <p:nvSpPr>
-          <p:cNvPr id="6" name="TextBox 5"/>
-          <p:cNvSpPr txBox="1"/>
+          <p:cNvPr id="6" name="Rectangle 5"/>
+          <p:cNvSpPr/>
           <p:nvPr/>
         </p:nvSpPr>
         <p:spPr>
           <a:xfrm>
             <a:off x="640080" y="1234440"/>
-            <a:ext cx="10881360" cy="1188720"/>
-          </a:xfrm>
-          <a:prstGeom prst="rect">
-            <a:avLst/>
-          </a:prstGeom>
-          <a:noFill/>
-        </p:spPr>
-        <p:txBody>
-          <a:bodyPr wrap="square" lIns="0" rIns="0">
-            <a:spAutoFit/>
-          </a:bodyPr>
-          <a:lstStyle/>
-          <a:p>
-            <a:pPr algn="l">
-              <a:lnSpc>
-                <a:spcPct val="115000"/>
-              </a:lnSpc>
-              <a:spcAft>
-                <a:spcPts val="600"/>
-              </a:spcAft>
-            </a:pPr>
-            <a:r>
-              <a:rPr sz="1500" b="1">
-                <a:solidFill>
-                  <a:srgbClr val="101B33"/>
-                </a:solidFill>
-                <a:latin typeface="Arial"/>
-              </a:rPr>
-              <a:t>A. Baseline: ảnh trời quang   ·   B. Baseline-long: cùng ảnh đó, gấp đôi epoch   ·   C. Augmented: ảnh trời quang + ảnh sinh ra</a:t>
-            </a:r>
-          </a:p>
-          <a:p>
-            <a:pPr algn="l">
-              <a:lnSpc>
-                <a:spcPct val="115000"/>
-              </a:lnSpc>
-              <a:spcAft>
-                <a:spcPts val="600"/>
-              </a:spcAft>
-            </a:pPr>
-            <a:r>
-              <a:rPr sz="1300" b="0">
-                <a:solidFill>
-                  <a:srgbClr val="5A6375"/>
-                </a:solidFill>
-                <a:latin typeface="Arial"/>
-              </a:rPr>
-              <a:t>Nhánh B có ĐÚNG số bước cập nhật như C nhưng không có dữ liệu mới ⇒ so sánh công bằng là C − B. Cả hai đánh giá trên cùng tập test: ảnh mưa/tuyết THẬT của BDD100K, chưa từng dùng ở bất kỳ khâu nào khác.</a:t>
-            </a:r>
-          </a:p>
-        </p:txBody>
-      </p:sp>
-      <p:sp>
-        <p:nvSpPr>
-          <p:cNvPr id="7" name="Rectangle 6"/>
-          <p:cNvSpPr/>
-          <p:nvPr/>
-        </p:nvSpPr>
-        <p:spPr>
-          <a:xfrm>
-            <a:off x="640080" y="2606040"/>
-            <a:ext cx="10881360" cy="457200"/>
+            <a:ext cx="10881360" cy="420624"/>
           </a:xfrm>
           <a:prstGeom prst="rect">
             <a:avLst/>
@@ -6150,42 +4413,84 @@
       </p:sp>
       <p:sp>
         <p:nvSpPr>
+          <p:cNvPr id="7" name="TextBox 6"/>
+          <p:cNvSpPr txBox="1"/>
+          <p:nvPr/>
+        </p:nvSpPr>
+        <p:spPr>
+          <a:xfrm>
+            <a:off x="749808" y="1298448"/>
+            <a:ext cx="3840480" cy="420624"/>
+          </a:xfrm>
+          <a:prstGeom prst="rect">
+            <a:avLst/>
+          </a:prstGeom>
+          <a:noFill/>
+        </p:spPr>
+        <p:txBody>
+          <a:bodyPr wrap="square" lIns="0" rIns="0">
+            <a:spAutoFit/>
+          </a:bodyPr>
+          <a:lstStyle/>
+          <a:p>
+            <a:pPr algn="l">
+              <a:lnSpc>
+                <a:spcPct val="115000"/>
+              </a:lnSpc>
+              <a:spcAft>
+                <a:spcPts val="600"/>
+              </a:spcAft>
+            </a:pPr>
+            <a:r>
+              <a:rPr sz="1300" b="1">
+                <a:solidFill>
+                  <a:srgbClr val="FFFFFF"/>
+                </a:solidFill>
+                <a:latin typeface="Arial"/>
+              </a:rPr>
+              <a:t>Phương pháp</a:t>
+            </a:r>
+          </a:p>
+        </p:txBody>
+      </p:sp>
+      <p:sp>
+        <p:nvSpPr>
           <p:cNvPr id="8" name="TextBox 7"/>
           <p:cNvSpPr txBox="1"/>
           <p:nvPr/>
         </p:nvSpPr>
         <p:spPr>
           <a:xfrm>
-            <a:off x="749808" y="2670048"/>
-            <a:ext cx="3348110" cy="457200"/>
-          </a:xfrm>
-          <a:prstGeom prst="rect">
-            <a:avLst/>
-          </a:prstGeom>
-          <a:noFill/>
-        </p:spPr>
-        <p:txBody>
-          <a:bodyPr wrap="square" lIns="0" rIns="0">
-            <a:spAutoFit/>
-          </a:bodyPr>
-          <a:lstStyle/>
-          <a:p>
-            <a:pPr algn="l">
-              <a:lnSpc>
-                <a:spcPct val="115000"/>
-              </a:lnSpc>
-              <a:spcAft>
-                <a:spcPts val="600"/>
-              </a:spcAft>
-            </a:pPr>
-            <a:r>
-              <a:rPr sz="1200" b="1">
+            <a:off x="4590288" y="1298448"/>
+            <a:ext cx="1737360" cy="420624"/>
+          </a:xfrm>
+          <a:prstGeom prst="rect">
+            <a:avLst/>
+          </a:prstGeom>
+          <a:noFill/>
+        </p:spPr>
+        <p:txBody>
+          <a:bodyPr wrap="square" lIns="0" rIns="0">
+            <a:spAutoFit/>
+          </a:bodyPr>
+          <a:lstStyle/>
+          <a:p>
+            <a:pPr algn="l">
+              <a:lnSpc>
+                <a:spcPct val="115000"/>
+              </a:lnSpc>
+              <a:spcAft>
+                <a:spcPts val="600"/>
+              </a:spcAft>
+            </a:pPr>
+            <a:r>
+              <a:rPr sz="1300" b="1">
                 <a:solidFill>
                   <a:srgbClr val="FFFFFF"/>
                 </a:solidFill>
                 <a:latin typeface="Arial"/>
               </a:rPr>
-              <a:t>Tập kiểm tra</a:t>
+              <a:t>SSIM ↑</a:t>
             </a:r>
           </a:p>
         </p:txBody>
@@ -6198,36 +4503,36 @@
         </p:nvSpPr>
         <p:spPr>
           <a:xfrm>
-            <a:off x="4097918" y="2670048"/>
-            <a:ext cx="1767058" cy="457200"/>
-          </a:xfrm>
-          <a:prstGeom prst="rect">
-            <a:avLst/>
-          </a:prstGeom>
-          <a:noFill/>
-        </p:spPr>
-        <p:txBody>
-          <a:bodyPr wrap="square" lIns="0" rIns="0">
-            <a:spAutoFit/>
-          </a:bodyPr>
-          <a:lstStyle/>
-          <a:p>
-            <a:pPr algn="l">
-              <a:lnSpc>
-                <a:spcPct val="115000"/>
-              </a:lnSpc>
-              <a:spcAft>
-                <a:spcPts val="600"/>
-              </a:spcAft>
-            </a:pPr>
-            <a:r>
-              <a:rPr sz="1200" b="1">
+            <a:off x="6327648" y="1298448"/>
+            <a:ext cx="1737360" cy="420624"/>
+          </a:xfrm>
+          <a:prstGeom prst="rect">
+            <a:avLst/>
+          </a:prstGeom>
+          <a:noFill/>
+        </p:spPr>
+        <p:txBody>
+          <a:bodyPr wrap="square" lIns="0" rIns="0">
+            <a:spAutoFit/>
+          </a:bodyPr>
+          <a:lstStyle/>
+          <a:p>
+            <a:pPr algn="l">
+              <a:lnSpc>
+                <a:spcPct val="115000"/>
+              </a:lnSpc>
+              <a:spcAft>
+                <a:spcPts val="600"/>
+              </a:spcAft>
+            </a:pPr>
+            <a:r>
+              <a:rPr sz="1300" b="1">
                 <a:solidFill>
                   <a:srgbClr val="FFFFFF"/>
                 </a:solidFill>
                 <a:latin typeface="Arial"/>
               </a:rPr>
-              <a:t>A. Baseline</a:t>
+              <a:t>PSNR ↑</a:t>
             </a:r>
           </a:p>
         </p:txBody>
@@ -6240,36 +4545,36 @@
         </p:nvSpPr>
         <p:spPr>
           <a:xfrm>
-            <a:off x="5864976" y="2670048"/>
-            <a:ext cx="1767058" cy="457200"/>
-          </a:xfrm>
-          <a:prstGeom prst="rect">
-            <a:avLst/>
-          </a:prstGeom>
-          <a:noFill/>
-        </p:spPr>
-        <p:txBody>
-          <a:bodyPr wrap="square" lIns="0" rIns="0">
-            <a:spAutoFit/>
-          </a:bodyPr>
-          <a:lstStyle/>
-          <a:p>
-            <a:pPr algn="l">
-              <a:lnSpc>
-                <a:spcPct val="115000"/>
-              </a:lnSpc>
-              <a:spcAft>
-                <a:spcPts val="600"/>
-              </a:spcAft>
-            </a:pPr>
-            <a:r>
-              <a:rPr sz="1200" b="1">
+            <a:off x="8065008" y="1298448"/>
+            <a:ext cx="1828800" cy="420624"/>
+          </a:xfrm>
+          <a:prstGeom prst="rect">
+            <a:avLst/>
+          </a:prstGeom>
+          <a:noFill/>
+        </p:spPr>
+        <p:txBody>
+          <a:bodyPr wrap="square" lIns="0" rIns="0">
+            <a:spAutoFit/>
+          </a:bodyPr>
+          <a:lstStyle/>
+          <a:p>
+            <a:pPr algn="l">
+              <a:lnSpc>
+                <a:spcPct val="115000"/>
+              </a:lnSpc>
+              <a:spcAft>
+                <a:spcPts val="600"/>
+              </a:spcAft>
+            </a:pPr>
+            <a:r>
+              <a:rPr sz="1300" b="1">
                 <a:solidFill>
                   <a:srgbClr val="FFFFFF"/>
                 </a:solidFill>
                 <a:latin typeface="Arial"/>
               </a:rPr>
-              <a:t>B. Baseline-long</a:t>
+              <a:t>EdgeRec ↑</a:t>
             </a:r>
           </a:p>
         </p:txBody>
@@ -6282,92 +4587,50 @@
         </p:nvSpPr>
         <p:spPr>
           <a:xfrm>
-            <a:off x="7632034" y="2670048"/>
-            <a:ext cx="1767058" cy="457200"/>
-          </a:xfrm>
-          <a:prstGeom prst="rect">
-            <a:avLst/>
-          </a:prstGeom>
-          <a:noFill/>
-        </p:spPr>
-        <p:txBody>
-          <a:bodyPr wrap="square" lIns="0" rIns="0">
-            <a:spAutoFit/>
-          </a:bodyPr>
-          <a:lstStyle/>
-          <a:p>
-            <a:pPr algn="l">
-              <a:lnSpc>
-                <a:spcPct val="115000"/>
-              </a:lnSpc>
-              <a:spcAft>
-                <a:spcPts val="600"/>
-              </a:spcAft>
-            </a:pPr>
-            <a:r>
-              <a:rPr sz="1200" b="1">
+            <a:off x="9893808" y="1298448"/>
+            <a:ext cx="1737360" cy="420624"/>
+          </a:xfrm>
+          <a:prstGeom prst="rect">
+            <a:avLst/>
+          </a:prstGeom>
+          <a:noFill/>
+        </p:spPr>
+        <p:txBody>
+          <a:bodyPr wrap="square" lIns="0" rIns="0">
+            <a:spAutoFit/>
+          </a:bodyPr>
+          <a:lstStyle/>
+          <a:p>
+            <a:pPr algn="l">
+              <a:lnSpc>
+                <a:spcPct val="115000"/>
+              </a:lnSpc>
+              <a:spcAft>
+                <a:spcPts val="600"/>
+              </a:spcAft>
+            </a:pPr>
+            <a:r>
+              <a:rPr sz="1300" b="1">
                 <a:solidFill>
                   <a:srgbClr val="FFFFFF"/>
                 </a:solidFill>
                 <a:latin typeface="Arial"/>
               </a:rPr>
-              <a:t>C. + Tăng cường</a:t>
-            </a:r>
-          </a:p>
-        </p:txBody>
-      </p:sp>
-      <p:sp>
-        <p:nvSpPr>
-          <p:cNvPr id="12" name="TextBox 11"/>
-          <p:cNvSpPr txBox="1"/>
-          <p:nvPr/>
-        </p:nvSpPr>
-        <p:spPr>
-          <a:xfrm>
-            <a:off x="9399092" y="2670048"/>
-            <a:ext cx="2232073" cy="457200"/>
-          </a:xfrm>
-          <a:prstGeom prst="rect">
-            <a:avLst/>
-          </a:prstGeom>
-          <a:noFill/>
-        </p:spPr>
-        <p:txBody>
-          <a:bodyPr wrap="square" lIns="0" rIns="0">
-            <a:spAutoFit/>
-          </a:bodyPr>
-          <a:lstStyle/>
-          <a:p>
-            <a:pPr algn="l">
-              <a:lnSpc>
-                <a:spcPct val="115000"/>
-              </a:lnSpc>
-              <a:spcAft>
-                <a:spcPts val="600"/>
-              </a:spcAft>
-            </a:pPr>
-            <a:r>
-              <a:rPr sz="1200" b="1">
-                <a:solidFill>
-                  <a:srgbClr val="FFFFFF"/>
-                </a:solidFill>
-                <a:latin typeface="Arial"/>
-              </a:rPr>
-              <a:t>C − B</a:t>
-            </a:r>
-          </a:p>
-        </p:txBody>
-      </p:sp>
-      <p:sp>
-        <p:nvSpPr>
-          <p:cNvPr id="13" name="Rectangle 12"/>
+              <a:t>FID ↓</a:t>
+            </a:r>
+          </a:p>
+        </p:txBody>
+      </p:sp>
+      <p:sp>
+        <p:nvSpPr>
+          <p:cNvPr id="12" name="Rectangle 11"/>
           <p:cNvSpPr/>
           <p:nvPr/>
         </p:nvSpPr>
         <p:spPr>
           <a:xfrm>
-            <a:off x="640080" y="3063240"/>
-            <a:ext cx="10881360" cy="457200"/>
+            <a:off x="640080" y="1655064"/>
+            <a:ext cx="10881360" cy="420624"/>
           </a:xfrm>
           <a:prstGeom prst="rect">
             <a:avLst/>
@@ -6404,42 +4667,84 @@
       </p:sp>
       <p:sp>
         <p:nvSpPr>
+          <p:cNvPr id="13" name="TextBox 12"/>
+          <p:cNvSpPr txBox="1"/>
+          <p:nvPr/>
+        </p:nvSpPr>
+        <p:spPr>
+          <a:xfrm>
+            <a:off x="749808" y="1719072"/>
+            <a:ext cx="3840480" cy="420624"/>
+          </a:xfrm>
+          <a:prstGeom prst="rect">
+            <a:avLst/>
+          </a:prstGeom>
+          <a:noFill/>
+        </p:spPr>
+        <p:txBody>
+          <a:bodyPr wrap="square" lIns="0" rIns="0">
+            <a:spAutoFit/>
+          </a:bodyPr>
+          <a:lstStyle/>
+          <a:p>
+            <a:pPr algn="l">
+              <a:lnSpc>
+                <a:spcPct val="115000"/>
+              </a:lnSpc>
+              <a:spcAft>
+                <a:spcPts val="600"/>
+              </a:spcAft>
+            </a:pPr>
+            <a:r>
+              <a:rPr sz="1300" b="0">
+                <a:solidFill>
+                  <a:srgbClr val="101B33"/>
+                </a:solidFill>
+                <a:latin typeface="Arial"/>
+              </a:rPr>
+              <a:t>Không tăng cường (mốc domain gap)</a:t>
+            </a:r>
+          </a:p>
+        </p:txBody>
+      </p:sp>
+      <p:sp>
+        <p:nvSpPr>
           <p:cNvPr id="14" name="TextBox 13"/>
           <p:cNvSpPr txBox="1"/>
           <p:nvPr/>
         </p:nvSpPr>
         <p:spPr>
           <a:xfrm>
-            <a:off x="749808" y="3127248"/>
-            <a:ext cx="3348110" cy="457200"/>
-          </a:xfrm>
-          <a:prstGeom prst="rect">
-            <a:avLst/>
-          </a:prstGeom>
-          <a:noFill/>
-        </p:spPr>
-        <p:txBody>
-          <a:bodyPr wrap="square" lIns="0" rIns="0">
-            <a:spAutoFit/>
-          </a:bodyPr>
-          <a:lstStyle/>
-          <a:p>
-            <a:pPr algn="l">
-              <a:lnSpc>
-                <a:spcPct val="115000"/>
-              </a:lnSpc>
-              <a:spcAft>
-                <a:spcPts val="600"/>
-              </a:spcAft>
-            </a:pPr>
-            <a:r>
-              <a:rPr sz="1200" b="0">
+            <a:off x="4590288" y="1719072"/>
+            <a:ext cx="1737360" cy="420624"/>
+          </a:xfrm>
+          <a:prstGeom prst="rect">
+            <a:avLst/>
+          </a:prstGeom>
+          <a:noFill/>
+        </p:spPr>
+        <p:txBody>
+          <a:bodyPr wrap="square" lIns="0" rIns="0">
+            <a:spAutoFit/>
+          </a:bodyPr>
+          <a:lstStyle/>
+          <a:p>
+            <a:pPr algn="l">
+              <a:lnSpc>
+                <a:spcPct val="115000"/>
+              </a:lnSpc>
+              <a:spcAft>
+                <a:spcPts val="600"/>
+              </a:spcAft>
+            </a:pPr>
+            <a:r>
+              <a:rPr sz="1300" b="0">
                 <a:solidFill>
                   <a:srgbClr val="101B33"/>
                 </a:solidFill>
                 <a:latin typeface="Arial"/>
               </a:rPr>
-              <a:t>Thời tiết xấu THẬT · mAP50</a:t>
+              <a:t>—</a:t>
             </a:r>
           </a:p>
         </p:txBody>
@@ -6452,36 +4757,36 @@
         </p:nvSpPr>
         <p:spPr>
           <a:xfrm>
-            <a:off x="4097918" y="3127248"/>
-            <a:ext cx="1767058" cy="457200"/>
-          </a:xfrm>
-          <a:prstGeom prst="rect">
-            <a:avLst/>
-          </a:prstGeom>
-          <a:noFill/>
-        </p:spPr>
-        <p:txBody>
-          <a:bodyPr wrap="square" lIns="0" rIns="0">
-            <a:spAutoFit/>
-          </a:bodyPr>
-          <a:lstStyle/>
-          <a:p>
-            <a:pPr algn="l">
-              <a:lnSpc>
-                <a:spcPct val="115000"/>
-              </a:lnSpc>
-              <a:spcAft>
-                <a:spcPts val="600"/>
-              </a:spcAft>
-            </a:pPr>
-            <a:r>
-              <a:rPr sz="1200" b="0">
+            <a:off x="6327648" y="1719072"/>
+            <a:ext cx="1737360" cy="420624"/>
+          </a:xfrm>
+          <a:prstGeom prst="rect">
+            <a:avLst/>
+          </a:prstGeom>
+          <a:noFill/>
+        </p:spPr>
+        <p:txBody>
+          <a:bodyPr wrap="square" lIns="0" rIns="0">
+            <a:spAutoFit/>
+          </a:bodyPr>
+          <a:lstStyle/>
+          <a:p>
+            <a:pPr algn="l">
+              <a:lnSpc>
+                <a:spcPct val="115000"/>
+              </a:lnSpc>
+              <a:spcAft>
+                <a:spcPts val="600"/>
+              </a:spcAft>
+            </a:pPr>
+            <a:r>
+              <a:rPr sz="1300" b="0">
                 <a:solidFill>
                   <a:srgbClr val="101B33"/>
                 </a:solidFill>
                 <a:latin typeface="Arial"/>
               </a:rPr>
-              <a:t>0.2363</a:t>
+              <a:t>—</a:t>
             </a:r>
           </a:p>
         </p:txBody>
@@ -6494,36 +4799,36 @@
         </p:nvSpPr>
         <p:spPr>
           <a:xfrm>
-            <a:off x="5864976" y="3127248"/>
-            <a:ext cx="1767058" cy="457200"/>
-          </a:xfrm>
-          <a:prstGeom prst="rect">
-            <a:avLst/>
-          </a:prstGeom>
-          <a:noFill/>
-        </p:spPr>
-        <p:txBody>
-          <a:bodyPr wrap="square" lIns="0" rIns="0">
-            <a:spAutoFit/>
-          </a:bodyPr>
-          <a:lstStyle/>
-          <a:p>
-            <a:pPr algn="l">
-              <a:lnSpc>
-                <a:spcPct val="115000"/>
-              </a:lnSpc>
-              <a:spcAft>
-                <a:spcPts val="600"/>
-              </a:spcAft>
-            </a:pPr>
-            <a:r>
-              <a:rPr sz="1200" b="0">
+            <a:off x="8065008" y="1719072"/>
+            <a:ext cx="1828800" cy="420624"/>
+          </a:xfrm>
+          <a:prstGeom prst="rect">
+            <a:avLst/>
+          </a:prstGeom>
+          <a:noFill/>
+        </p:spPr>
+        <p:txBody>
+          <a:bodyPr wrap="square" lIns="0" rIns="0">
+            <a:spAutoFit/>
+          </a:bodyPr>
+          <a:lstStyle/>
+          <a:p>
+            <a:pPr algn="l">
+              <a:lnSpc>
+                <a:spcPct val="115000"/>
+              </a:lnSpc>
+              <a:spcAft>
+                <a:spcPts val="600"/>
+              </a:spcAft>
+            </a:pPr>
+            <a:r>
+              <a:rPr sz="1300" b="0">
                 <a:solidFill>
                   <a:srgbClr val="101B33"/>
                 </a:solidFill>
                 <a:latin typeface="Arial"/>
               </a:rPr>
-              <a:t>0.2451</a:t>
+              <a:t>—</a:t>
             </a:r>
           </a:p>
         </p:txBody>
@@ -6536,92 +4841,50 @@
         </p:nvSpPr>
         <p:spPr>
           <a:xfrm>
-            <a:off x="7632034" y="3127248"/>
-            <a:ext cx="1767058" cy="457200"/>
-          </a:xfrm>
-          <a:prstGeom prst="rect">
-            <a:avLst/>
-          </a:prstGeom>
-          <a:noFill/>
-        </p:spPr>
-        <p:txBody>
-          <a:bodyPr wrap="square" lIns="0" rIns="0">
-            <a:spAutoFit/>
-          </a:bodyPr>
-          <a:lstStyle/>
-          <a:p>
-            <a:pPr algn="l">
-              <a:lnSpc>
-                <a:spcPct val="115000"/>
-              </a:lnSpc>
-              <a:spcAft>
-                <a:spcPts val="600"/>
-              </a:spcAft>
-            </a:pPr>
-            <a:r>
-              <a:rPr sz="1200" b="0">
+            <a:off x="9893808" y="1719072"/>
+            <a:ext cx="1737360" cy="420624"/>
+          </a:xfrm>
+          <a:prstGeom prst="rect">
+            <a:avLst/>
+          </a:prstGeom>
+          <a:noFill/>
+        </p:spPr>
+        <p:txBody>
+          <a:bodyPr wrap="square" lIns="0" rIns="0">
+            <a:spAutoFit/>
+          </a:bodyPr>
+          <a:lstStyle/>
+          <a:p>
+            <a:pPr algn="l">
+              <a:lnSpc>
+                <a:spcPct val="115000"/>
+              </a:lnSpc>
+              <a:spcAft>
+                <a:spcPts val="600"/>
+              </a:spcAft>
+            </a:pPr>
+            <a:r>
+              <a:rPr sz="1300" b="0">
                 <a:solidFill>
                   <a:srgbClr val="101B33"/>
                 </a:solidFill>
                 <a:latin typeface="Arial"/>
               </a:rPr>
-              <a:t>0.2603</a:t>
-            </a:r>
-          </a:p>
-        </p:txBody>
-      </p:sp>
-      <p:sp>
-        <p:nvSpPr>
-          <p:cNvPr id="18" name="TextBox 17"/>
-          <p:cNvSpPr txBox="1"/>
-          <p:nvPr/>
-        </p:nvSpPr>
-        <p:spPr>
-          <a:xfrm>
-            <a:off x="9399092" y="3127248"/>
-            <a:ext cx="2232073" cy="457200"/>
-          </a:xfrm>
-          <a:prstGeom prst="rect">
-            <a:avLst/>
-          </a:prstGeom>
-          <a:noFill/>
-        </p:spPr>
-        <p:txBody>
-          <a:bodyPr wrap="square" lIns="0" rIns="0">
-            <a:spAutoFit/>
-          </a:bodyPr>
-          <a:lstStyle/>
-          <a:p>
-            <a:pPr algn="l">
-              <a:lnSpc>
-                <a:spcPct val="115000"/>
-              </a:lnSpc>
-              <a:spcAft>
-                <a:spcPts val="600"/>
-              </a:spcAft>
-            </a:pPr>
-            <a:r>
-              <a:rPr sz="1200" b="0">
-                <a:solidFill>
-                  <a:srgbClr val="101B33"/>
-                </a:solidFill>
-                <a:latin typeface="Arial"/>
-              </a:rPr>
-              <a:t>+0.0153 (+6.2%)</a:t>
-            </a:r>
-          </a:p>
-        </p:txBody>
-      </p:sp>
-      <p:sp>
-        <p:nvSpPr>
-          <p:cNvPr id="19" name="Rectangle 18"/>
+              <a:t>99.40</a:t>
+            </a:r>
+          </a:p>
+        </p:txBody>
+      </p:sp>
+      <p:sp>
+        <p:nvSpPr>
+          <p:cNvPr id="18" name="Rectangle 17"/>
           <p:cNvSpPr/>
           <p:nvPr/>
         </p:nvSpPr>
         <p:spPr>
           <a:xfrm>
-            <a:off x="640080" y="3520440"/>
-            <a:ext cx="10881360" cy="457200"/>
+            <a:off x="640080" y="2075688"/>
+            <a:ext cx="10881360" cy="420624"/>
           </a:xfrm>
           <a:prstGeom prst="rect">
             <a:avLst/>
@@ -6658,42 +4921,84 @@
       </p:sp>
       <p:sp>
         <p:nvSpPr>
+          <p:cNvPr id="19" name="TextBox 18"/>
+          <p:cNvSpPr txBox="1"/>
+          <p:nvPr/>
+        </p:nvSpPr>
+        <p:spPr>
+          <a:xfrm>
+            <a:off x="749808" y="2139696"/>
+            <a:ext cx="3840480" cy="420624"/>
+          </a:xfrm>
+          <a:prstGeom prst="rect">
+            <a:avLst/>
+          </a:prstGeom>
+          <a:noFill/>
+        </p:spPr>
+        <p:txBody>
+          <a:bodyPr wrap="square" lIns="0" rIns="0">
+            <a:spAutoFit/>
+          </a:bodyPr>
+          <a:lstStyle/>
+          <a:p>
+            <a:pPr algn="l">
+              <a:lnSpc>
+                <a:spcPct val="115000"/>
+              </a:lnSpc>
+              <a:spcAft>
+                <a:spcPts val="600"/>
+              </a:spcAft>
+            </a:pPr>
+            <a:r>
+              <a:rPr sz="1300" b="0">
+                <a:solidFill>
+                  <a:srgbClr val="101B33"/>
+                </a:solidFill>
+                <a:latin typeface="Arial"/>
+              </a:rPr>
+              <a:t>Baseline vật lý</a:t>
+            </a:r>
+          </a:p>
+        </p:txBody>
+      </p:sp>
+      <p:sp>
+        <p:nvSpPr>
           <p:cNvPr id="20" name="TextBox 19"/>
           <p:cNvSpPr txBox="1"/>
           <p:nvPr/>
         </p:nvSpPr>
         <p:spPr>
           <a:xfrm>
-            <a:off x="749808" y="3584448"/>
-            <a:ext cx="3348110" cy="457200"/>
-          </a:xfrm>
-          <a:prstGeom prst="rect">
-            <a:avLst/>
-          </a:prstGeom>
-          <a:noFill/>
-        </p:spPr>
-        <p:txBody>
-          <a:bodyPr wrap="square" lIns="0" rIns="0">
-            <a:spAutoFit/>
-          </a:bodyPr>
-          <a:lstStyle/>
-          <a:p>
-            <a:pPr algn="l">
-              <a:lnSpc>
-                <a:spcPct val="115000"/>
-              </a:lnSpc>
-              <a:spcAft>
-                <a:spcPts val="600"/>
-              </a:spcAft>
-            </a:pPr>
-            <a:r>
-              <a:rPr sz="1200" b="0">
+            <a:off x="4590288" y="2139696"/>
+            <a:ext cx="1737360" cy="420624"/>
+          </a:xfrm>
+          <a:prstGeom prst="rect">
+            <a:avLst/>
+          </a:prstGeom>
+          <a:noFill/>
+        </p:spPr>
+        <p:txBody>
+          <a:bodyPr wrap="square" lIns="0" rIns="0">
+            <a:spAutoFit/>
+          </a:bodyPr>
+          <a:lstStyle/>
+          <a:p>
+            <a:pPr algn="l">
+              <a:lnSpc>
+                <a:spcPct val="115000"/>
+              </a:lnSpc>
+              <a:spcAft>
+                <a:spcPts val="600"/>
+              </a:spcAft>
+            </a:pPr>
+            <a:r>
+              <a:rPr sz="1300" b="0">
                 <a:solidFill>
                   <a:srgbClr val="101B33"/>
                 </a:solidFill>
                 <a:latin typeface="Arial"/>
               </a:rPr>
-              <a:t>Thời tiết xấu THẬT · mAP50-95</a:t>
+              <a:t>0.6076</a:t>
             </a:r>
           </a:p>
         </p:txBody>
@@ -6706,36 +5011,36 @@
         </p:nvSpPr>
         <p:spPr>
           <a:xfrm>
-            <a:off x="4097918" y="3584448"/>
-            <a:ext cx="1767058" cy="457200"/>
-          </a:xfrm>
-          <a:prstGeom prst="rect">
-            <a:avLst/>
-          </a:prstGeom>
-          <a:noFill/>
-        </p:spPr>
-        <p:txBody>
-          <a:bodyPr wrap="square" lIns="0" rIns="0">
-            <a:spAutoFit/>
-          </a:bodyPr>
-          <a:lstStyle/>
-          <a:p>
-            <a:pPr algn="l">
-              <a:lnSpc>
-                <a:spcPct val="115000"/>
-              </a:lnSpc>
-              <a:spcAft>
-                <a:spcPts val="600"/>
-              </a:spcAft>
-            </a:pPr>
-            <a:r>
-              <a:rPr sz="1200" b="0">
+            <a:off x="6327648" y="2139696"/>
+            <a:ext cx="1737360" cy="420624"/>
+          </a:xfrm>
+          <a:prstGeom prst="rect">
+            <a:avLst/>
+          </a:prstGeom>
+          <a:noFill/>
+        </p:spPr>
+        <p:txBody>
+          <a:bodyPr wrap="square" lIns="0" rIns="0">
+            <a:spAutoFit/>
+          </a:bodyPr>
+          <a:lstStyle/>
+          <a:p>
+            <a:pPr algn="l">
+              <a:lnSpc>
+                <a:spcPct val="115000"/>
+              </a:lnSpc>
+              <a:spcAft>
+                <a:spcPts val="600"/>
+              </a:spcAft>
+            </a:pPr>
+            <a:r>
+              <a:rPr sz="1300" b="0">
                 <a:solidFill>
                   <a:srgbClr val="101B33"/>
                 </a:solidFill>
                 <a:latin typeface="Arial"/>
               </a:rPr>
-              <a:t>0.1299</a:t>
+              <a:t>13.32</a:t>
             </a:r>
           </a:p>
         </p:txBody>
@@ -6748,36 +5053,36 @@
         </p:nvSpPr>
         <p:spPr>
           <a:xfrm>
-            <a:off x="5864976" y="3584448"/>
-            <a:ext cx="1767058" cy="457200"/>
-          </a:xfrm>
-          <a:prstGeom prst="rect">
-            <a:avLst/>
-          </a:prstGeom>
-          <a:noFill/>
-        </p:spPr>
-        <p:txBody>
-          <a:bodyPr wrap="square" lIns="0" rIns="0">
-            <a:spAutoFit/>
-          </a:bodyPr>
-          <a:lstStyle/>
-          <a:p>
-            <a:pPr algn="l">
-              <a:lnSpc>
-                <a:spcPct val="115000"/>
-              </a:lnSpc>
-              <a:spcAft>
-                <a:spcPts val="600"/>
-              </a:spcAft>
-            </a:pPr>
-            <a:r>
-              <a:rPr sz="1200" b="0">
+            <a:off x="8065008" y="2139696"/>
+            <a:ext cx="1828800" cy="420624"/>
+          </a:xfrm>
+          <a:prstGeom prst="rect">
+            <a:avLst/>
+          </a:prstGeom>
+          <a:noFill/>
+        </p:spPr>
+        <p:txBody>
+          <a:bodyPr wrap="square" lIns="0" rIns="0">
+            <a:spAutoFit/>
+          </a:bodyPr>
+          <a:lstStyle/>
+          <a:p>
+            <a:pPr algn="l">
+              <a:lnSpc>
+                <a:spcPct val="115000"/>
+              </a:lnSpc>
+              <a:spcAft>
+                <a:spcPts val="600"/>
+              </a:spcAft>
+            </a:pPr>
+            <a:r>
+              <a:rPr sz="1300" b="0">
                 <a:solidFill>
                   <a:srgbClr val="101B33"/>
                 </a:solidFill>
                 <a:latin typeface="Arial"/>
               </a:rPr>
-              <a:t>0.1339</a:t>
+              <a:t>0.5092</a:t>
             </a:r>
           </a:p>
         </p:txBody>
@@ -6790,92 +5095,50 @@
         </p:nvSpPr>
         <p:spPr>
           <a:xfrm>
-            <a:off x="7632034" y="3584448"/>
-            <a:ext cx="1767058" cy="457200"/>
-          </a:xfrm>
-          <a:prstGeom prst="rect">
-            <a:avLst/>
-          </a:prstGeom>
-          <a:noFill/>
-        </p:spPr>
-        <p:txBody>
-          <a:bodyPr wrap="square" lIns="0" rIns="0">
-            <a:spAutoFit/>
-          </a:bodyPr>
-          <a:lstStyle/>
-          <a:p>
-            <a:pPr algn="l">
-              <a:lnSpc>
-                <a:spcPct val="115000"/>
-              </a:lnSpc>
-              <a:spcAft>
-                <a:spcPts val="600"/>
-              </a:spcAft>
-            </a:pPr>
-            <a:r>
-              <a:rPr sz="1200" b="0">
+            <a:off x="9893808" y="2139696"/>
+            <a:ext cx="1737360" cy="420624"/>
+          </a:xfrm>
+          <a:prstGeom prst="rect">
+            <a:avLst/>
+          </a:prstGeom>
+          <a:noFill/>
+        </p:spPr>
+        <p:txBody>
+          <a:bodyPr wrap="square" lIns="0" rIns="0">
+            <a:spAutoFit/>
+          </a:bodyPr>
+          <a:lstStyle/>
+          <a:p>
+            <a:pPr algn="l">
+              <a:lnSpc>
+                <a:spcPct val="115000"/>
+              </a:lnSpc>
+              <a:spcAft>
+                <a:spcPts val="600"/>
+              </a:spcAft>
+            </a:pPr>
+            <a:r>
+              <a:rPr sz="1300" b="0">
                 <a:solidFill>
                   <a:srgbClr val="101B33"/>
                 </a:solidFill>
                 <a:latin typeface="Arial"/>
               </a:rPr>
-              <a:t>0.1411</a:t>
-            </a:r>
-          </a:p>
-        </p:txBody>
-      </p:sp>
-      <p:sp>
-        <p:nvSpPr>
-          <p:cNvPr id="24" name="TextBox 23"/>
-          <p:cNvSpPr txBox="1"/>
-          <p:nvPr/>
-        </p:nvSpPr>
-        <p:spPr>
-          <a:xfrm>
-            <a:off x="9399092" y="3584448"/>
-            <a:ext cx="2232073" cy="457200"/>
-          </a:xfrm>
-          <a:prstGeom prst="rect">
-            <a:avLst/>
-          </a:prstGeom>
-          <a:noFill/>
-        </p:spPr>
-        <p:txBody>
-          <a:bodyPr wrap="square" lIns="0" rIns="0">
-            <a:spAutoFit/>
-          </a:bodyPr>
-          <a:lstStyle/>
-          <a:p>
-            <a:pPr algn="l">
-              <a:lnSpc>
-                <a:spcPct val="115000"/>
-              </a:lnSpc>
-              <a:spcAft>
-                <a:spcPts val="600"/>
-              </a:spcAft>
-            </a:pPr>
-            <a:r>
-              <a:rPr sz="1200" b="0">
-                <a:solidFill>
-                  <a:srgbClr val="101B33"/>
-                </a:solidFill>
-                <a:latin typeface="Arial"/>
-              </a:rPr>
-              <a:t>+0.0072 (+5.3%)</a:t>
-            </a:r>
-          </a:p>
-        </p:txBody>
-      </p:sp>
-      <p:sp>
-        <p:nvSpPr>
-          <p:cNvPr id="25" name="Rectangle 24"/>
+              <a:t>177.03</a:t>
+            </a:r>
+          </a:p>
+        </p:txBody>
+      </p:sp>
+      <p:sp>
+        <p:nvSpPr>
+          <p:cNvPr id="24" name="Rectangle 23"/>
           <p:cNvSpPr/>
           <p:nvPr/>
         </p:nvSpPr>
         <p:spPr>
           <a:xfrm>
-            <a:off x="640080" y="3977640"/>
-            <a:ext cx="10881360" cy="457200"/>
+            <a:off x="640080" y="2496312"/>
+            <a:ext cx="10881360" cy="420624"/>
           </a:xfrm>
           <a:prstGeom prst="rect">
             <a:avLst/>
@@ -6912,42 +5175,84 @@
       </p:sp>
       <p:sp>
         <p:nvSpPr>
+          <p:cNvPr id="25" name="TextBox 24"/>
+          <p:cNvSpPr txBox="1"/>
+          <p:nvPr/>
+        </p:nvSpPr>
+        <p:spPr>
+          <a:xfrm>
+            <a:off x="749808" y="2560320"/>
+            <a:ext cx="3840480" cy="420624"/>
+          </a:xfrm>
+          <a:prstGeom prst="rect">
+            <a:avLst/>
+          </a:prstGeom>
+          <a:noFill/>
+        </p:spPr>
+        <p:txBody>
+          <a:bodyPr wrap="square" lIns="0" rIns="0">
+            <a:spAutoFit/>
+          </a:bodyPr>
+          <a:lstStyle/>
+          <a:p>
+            <a:pPr algn="l">
+              <a:lnSpc>
+                <a:spcPct val="115000"/>
+              </a:lnSpc>
+              <a:spcAft>
+                <a:spcPts val="600"/>
+              </a:spcAft>
+            </a:pPr>
+            <a:r>
+              <a:rPr sz="1300" b="0">
+                <a:solidFill>
+                  <a:srgbClr val="101B33"/>
+                </a:solidFill>
+                <a:latin typeface="Arial"/>
+              </a:rPr>
+              <a:t>Chỉ AdaIN</a:t>
+            </a:r>
+          </a:p>
+        </p:txBody>
+      </p:sp>
+      <p:sp>
+        <p:nvSpPr>
           <p:cNvPr id="26" name="TextBox 25"/>
           <p:cNvSpPr txBox="1"/>
           <p:nvPr/>
         </p:nvSpPr>
         <p:spPr>
           <a:xfrm>
-            <a:off x="749808" y="4041648"/>
-            <a:ext cx="3348110" cy="457200"/>
-          </a:xfrm>
-          <a:prstGeom prst="rect">
-            <a:avLst/>
-          </a:prstGeom>
-          <a:noFill/>
-        </p:spPr>
-        <p:txBody>
-          <a:bodyPr wrap="square" lIns="0" rIns="0">
-            <a:spAutoFit/>
-          </a:bodyPr>
-          <a:lstStyle/>
-          <a:p>
-            <a:pPr algn="l">
-              <a:lnSpc>
-                <a:spcPct val="115000"/>
-              </a:lnSpc>
-              <a:spcAft>
-                <a:spcPts val="600"/>
-              </a:spcAft>
-            </a:pPr>
-            <a:r>
-              <a:rPr sz="1200" b="0">
+            <a:off x="4590288" y="2560320"/>
+            <a:ext cx="1737360" cy="420624"/>
+          </a:xfrm>
+          <a:prstGeom prst="rect">
+            <a:avLst/>
+          </a:prstGeom>
+          <a:noFill/>
+        </p:spPr>
+        <p:txBody>
+          <a:bodyPr wrap="square" lIns="0" rIns="0">
+            <a:spAutoFit/>
+          </a:bodyPr>
+          <a:lstStyle/>
+          <a:p>
+            <a:pPr algn="l">
+              <a:lnSpc>
+                <a:spcPct val="115000"/>
+              </a:lnSpc>
+              <a:spcAft>
+                <a:spcPts val="600"/>
+              </a:spcAft>
+            </a:pPr>
+            <a:r>
+              <a:rPr sz="1300" b="0">
                 <a:solidFill>
                   <a:srgbClr val="101B33"/>
                 </a:solidFill>
                 <a:latin typeface="Arial"/>
               </a:rPr>
-              <a:t>Trời quang (đối chứng) · mAP50</a:t>
+              <a:t>0.4521</a:t>
             </a:r>
           </a:p>
         </p:txBody>
@@ -6960,36 +5265,36 @@
         </p:nvSpPr>
         <p:spPr>
           <a:xfrm>
-            <a:off x="4097918" y="4041648"/>
-            <a:ext cx="1767058" cy="457200"/>
-          </a:xfrm>
-          <a:prstGeom prst="rect">
-            <a:avLst/>
-          </a:prstGeom>
-          <a:noFill/>
-        </p:spPr>
-        <p:txBody>
-          <a:bodyPr wrap="square" lIns="0" rIns="0">
-            <a:spAutoFit/>
-          </a:bodyPr>
-          <a:lstStyle/>
-          <a:p>
-            <a:pPr algn="l">
-              <a:lnSpc>
-                <a:spcPct val="115000"/>
-              </a:lnSpc>
-              <a:spcAft>
-                <a:spcPts val="600"/>
-              </a:spcAft>
-            </a:pPr>
-            <a:r>
-              <a:rPr sz="1200" b="0">
+            <a:off x="6327648" y="2560320"/>
+            <a:ext cx="1737360" cy="420624"/>
+          </a:xfrm>
+          <a:prstGeom prst="rect">
+            <a:avLst/>
+          </a:prstGeom>
+          <a:noFill/>
+        </p:spPr>
+        <p:txBody>
+          <a:bodyPr wrap="square" lIns="0" rIns="0">
+            <a:spAutoFit/>
+          </a:bodyPr>
+          <a:lstStyle/>
+          <a:p>
+            <a:pPr algn="l">
+              <a:lnSpc>
+                <a:spcPct val="115000"/>
+              </a:lnSpc>
+              <a:spcAft>
+                <a:spcPts val="600"/>
+              </a:spcAft>
+            </a:pPr>
+            <a:r>
+              <a:rPr sz="1300" b="0">
                 <a:solidFill>
                   <a:srgbClr val="101B33"/>
                 </a:solidFill>
                 <a:latin typeface="Arial"/>
               </a:rPr>
-              <a:t>0.3028</a:t>
+              <a:t>14.13</a:t>
             </a:r>
           </a:p>
         </p:txBody>
@@ -7002,36 +5307,36 @@
         </p:nvSpPr>
         <p:spPr>
           <a:xfrm>
-            <a:off x="5864976" y="4041648"/>
-            <a:ext cx="1767058" cy="457200"/>
-          </a:xfrm>
-          <a:prstGeom prst="rect">
-            <a:avLst/>
-          </a:prstGeom>
-          <a:noFill/>
-        </p:spPr>
-        <p:txBody>
-          <a:bodyPr wrap="square" lIns="0" rIns="0">
-            <a:spAutoFit/>
-          </a:bodyPr>
-          <a:lstStyle/>
-          <a:p>
-            <a:pPr algn="l">
-              <a:lnSpc>
-                <a:spcPct val="115000"/>
-              </a:lnSpc>
-              <a:spcAft>
-                <a:spcPts val="600"/>
-              </a:spcAft>
-            </a:pPr>
-            <a:r>
-              <a:rPr sz="1200" b="0">
+            <a:off x="8065008" y="2560320"/>
+            <a:ext cx="1828800" cy="420624"/>
+          </a:xfrm>
+          <a:prstGeom prst="rect">
+            <a:avLst/>
+          </a:prstGeom>
+          <a:noFill/>
+        </p:spPr>
+        <p:txBody>
+          <a:bodyPr wrap="square" lIns="0" rIns="0">
+            <a:spAutoFit/>
+          </a:bodyPr>
+          <a:lstStyle/>
+          <a:p>
+            <a:pPr algn="l">
+              <a:lnSpc>
+                <a:spcPct val="115000"/>
+              </a:lnSpc>
+              <a:spcAft>
+                <a:spcPts val="600"/>
+              </a:spcAft>
+            </a:pPr>
+            <a:r>
+              <a:rPr sz="1300" b="0">
                 <a:solidFill>
                   <a:srgbClr val="101B33"/>
                 </a:solidFill>
                 <a:latin typeface="Arial"/>
               </a:rPr>
-              <a:t>0.3204</a:t>
+              <a:t>0.6073</a:t>
             </a:r>
           </a:p>
         </p:txBody>
@@ -7044,92 +5349,50 @@
         </p:nvSpPr>
         <p:spPr>
           <a:xfrm>
-            <a:off x="7632034" y="4041648"/>
-            <a:ext cx="1767058" cy="457200"/>
-          </a:xfrm>
-          <a:prstGeom prst="rect">
-            <a:avLst/>
-          </a:prstGeom>
-          <a:noFill/>
-        </p:spPr>
-        <p:txBody>
-          <a:bodyPr wrap="square" lIns="0" rIns="0">
-            <a:spAutoFit/>
-          </a:bodyPr>
-          <a:lstStyle/>
-          <a:p>
-            <a:pPr algn="l">
-              <a:lnSpc>
-                <a:spcPct val="115000"/>
-              </a:lnSpc>
-              <a:spcAft>
-                <a:spcPts val="600"/>
-              </a:spcAft>
-            </a:pPr>
-            <a:r>
-              <a:rPr sz="1200" b="0">
+            <a:off x="9893808" y="2560320"/>
+            <a:ext cx="1737360" cy="420624"/>
+          </a:xfrm>
+          <a:prstGeom prst="rect">
+            <a:avLst/>
+          </a:prstGeom>
+          <a:noFill/>
+        </p:spPr>
+        <p:txBody>
+          <a:bodyPr wrap="square" lIns="0" rIns="0">
+            <a:spAutoFit/>
+          </a:bodyPr>
+          <a:lstStyle/>
+          <a:p>
+            <a:pPr algn="l">
+              <a:lnSpc>
+                <a:spcPct val="115000"/>
+              </a:lnSpc>
+              <a:spcAft>
+                <a:spcPts val="600"/>
+              </a:spcAft>
+            </a:pPr>
+            <a:r>
+              <a:rPr sz="1300" b="0">
                 <a:solidFill>
                   <a:srgbClr val="101B33"/>
                 </a:solidFill>
                 <a:latin typeface="Arial"/>
               </a:rPr>
-              <a:t>0.3349</a:t>
-            </a:r>
-          </a:p>
-        </p:txBody>
-      </p:sp>
-      <p:sp>
-        <p:nvSpPr>
-          <p:cNvPr id="30" name="TextBox 29"/>
-          <p:cNvSpPr txBox="1"/>
-          <p:nvPr/>
-        </p:nvSpPr>
-        <p:spPr>
-          <a:xfrm>
-            <a:off x="9399092" y="4041648"/>
-            <a:ext cx="2232073" cy="457200"/>
-          </a:xfrm>
-          <a:prstGeom prst="rect">
-            <a:avLst/>
-          </a:prstGeom>
-          <a:noFill/>
-        </p:spPr>
-        <p:txBody>
-          <a:bodyPr wrap="square" lIns="0" rIns="0">
-            <a:spAutoFit/>
-          </a:bodyPr>
-          <a:lstStyle/>
-          <a:p>
-            <a:pPr algn="l">
-              <a:lnSpc>
-                <a:spcPct val="115000"/>
-              </a:lnSpc>
-              <a:spcAft>
-                <a:spcPts val="600"/>
-              </a:spcAft>
-            </a:pPr>
-            <a:r>
-              <a:rPr sz="1200" b="0">
-                <a:solidFill>
-                  <a:srgbClr val="101B33"/>
-                </a:solidFill>
-                <a:latin typeface="Arial"/>
-              </a:rPr>
-              <a:t>+0.0145 (+4.5%)</a:t>
-            </a:r>
-          </a:p>
-        </p:txBody>
-      </p:sp>
-      <p:sp>
-        <p:nvSpPr>
-          <p:cNvPr id="31" name="Rectangle 30"/>
+              <a:t>125.85</a:t>
+            </a:r>
+          </a:p>
+        </p:txBody>
+      </p:sp>
+      <p:sp>
+        <p:nvSpPr>
+          <p:cNvPr id="30" name="Rectangle 29"/>
           <p:cNvSpPr/>
           <p:nvPr/>
         </p:nvSpPr>
         <p:spPr>
           <a:xfrm>
-            <a:off x="640080" y="4434840"/>
-            <a:ext cx="10881360" cy="457200"/>
+            <a:off x="640080" y="2916936"/>
+            <a:ext cx="10881360" cy="420624"/>
           </a:xfrm>
           <a:prstGeom prst="rect">
             <a:avLst/>
@@ -7166,14 +5429,438 @@
       </p:sp>
       <p:sp>
         <p:nvSpPr>
+          <p:cNvPr id="31" name="TextBox 30"/>
+          <p:cNvSpPr txBox="1"/>
+          <p:nvPr/>
+        </p:nvSpPr>
+        <p:spPr>
+          <a:xfrm>
+            <a:off x="749808" y="2980944"/>
+            <a:ext cx="3840480" cy="420624"/>
+          </a:xfrm>
+          <a:prstGeom prst="rect">
+            <a:avLst/>
+          </a:prstGeom>
+          <a:noFill/>
+        </p:spPr>
+        <p:txBody>
+          <a:bodyPr wrap="square" lIns="0" rIns="0">
+            <a:spAutoFit/>
+          </a:bodyPr>
+          <a:lstStyle/>
+          <a:p>
+            <a:pPr algn="l">
+              <a:lnSpc>
+                <a:spcPct val="115000"/>
+              </a:lnSpc>
+              <a:spcAft>
+                <a:spcPts val="600"/>
+              </a:spcAft>
+            </a:pPr>
+            <a:r>
+              <a:rPr sz="1300" b="0">
+                <a:solidFill>
+                  <a:srgbClr val="101B33"/>
+                </a:solidFill>
+                <a:latin typeface="Arial"/>
+              </a:rPr>
+              <a:t>AdaIN + GF + hạt (đề xuất)</a:t>
+            </a:r>
+          </a:p>
+        </p:txBody>
+      </p:sp>
+      <p:sp>
+        <p:nvSpPr>
           <p:cNvPr id="32" name="TextBox 31"/>
           <p:cNvSpPr txBox="1"/>
           <p:nvPr/>
         </p:nvSpPr>
         <p:spPr>
           <a:xfrm>
-            <a:off x="749808" y="4498848"/>
-            <a:ext cx="3348110" cy="457200"/>
+            <a:off x="4590288" y="2980944"/>
+            <a:ext cx="1737360" cy="420624"/>
+          </a:xfrm>
+          <a:prstGeom prst="rect">
+            <a:avLst/>
+          </a:prstGeom>
+          <a:noFill/>
+        </p:spPr>
+        <p:txBody>
+          <a:bodyPr wrap="square" lIns="0" rIns="0">
+            <a:spAutoFit/>
+          </a:bodyPr>
+          <a:lstStyle/>
+          <a:p>
+            <a:pPr algn="l">
+              <a:lnSpc>
+                <a:spcPct val="115000"/>
+              </a:lnSpc>
+              <a:spcAft>
+                <a:spcPts val="600"/>
+              </a:spcAft>
+            </a:pPr>
+            <a:r>
+              <a:rPr sz="1300" b="0">
+                <a:solidFill>
+                  <a:srgbClr val="101B33"/>
+                </a:solidFill>
+                <a:latin typeface="Arial"/>
+              </a:rPr>
+              <a:t>0.6100</a:t>
+            </a:r>
+          </a:p>
+        </p:txBody>
+      </p:sp>
+      <p:sp>
+        <p:nvSpPr>
+          <p:cNvPr id="33" name="TextBox 32"/>
+          <p:cNvSpPr txBox="1"/>
+          <p:nvPr/>
+        </p:nvSpPr>
+        <p:spPr>
+          <a:xfrm>
+            <a:off x="6327648" y="2980944"/>
+            <a:ext cx="1737360" cy="420624"/>
+          </a:xfrm>
+          <a:prstGeom prst="rect">
+            <a:avLst/>
+          </a:prstGeom>
+          <a:noFill/>
+        </p:spPr>
+        <p:txBody>
+          <a:bodyPr wrap="square" lIns="0" rIns="0">
+            <a:spAutoFit/>
+          </a:bodyPr>
+          <a:lstStyle/>
+          <a:p>
+            <a:pPr algn="l">
+              <a:lnSpc>
+                <a:spcPct val="115000"/>
+              </a:lnSpc>
+              <a:spcAft>
+                <a:spcPts val="600"/>
+              </a:spcAft>
+            </a:pPr>
+            <a:r>
+              <a:rPr sz="1300" b="0">
+                <a:solidFill>
+                  <a:srgbClr val="101B33"/>
+                </a:solidFill>
+                <a:latin typeface="Arial"/>
+              </a:rPr>
+              <a:t>14.61</a:t>
+            </a:r>
+          </a:p>
+        </p:txBody>
+      </p:sp>
+      <p:sp>
+        <p:nvSpPr>
+          <p:cNvPr id="34" name="TextBox 33"/>
+          <p:cNvSpPr txBox="1"/>
+          <p:nvPr/>
+        </p:nvSpPr>
+        <p:spPr>
+          <a:xfrm>
+            <a:off x="8065008" y="2980944"/>
+            <a:ext cx="1828800" cy="420624"/>
+          </a:xfrm>
+          <a:prstGeom prst="rect">
+            <a:avLst/>
+          </a:prstGeom>
+          <a:noFill/>
+        </p:spPr>
+        <p:txBody>
+          <a:bodyPr wrap="square" lIns="0" rIns="0">
+            <a:spAutoFit/>
+          </a:bodyPr>
+          <a:lstStyle/>
+          <a:p>
+            <a:pPr algn="l">
+              <a:lnSpc>
+                <a:spcPct val="115000"/>
+              </a:lnSpc>
+              <a:spcAft>
+                <a:spcPts val="600"/>
+              </a:spcAft>
+            </a:pPr>
+            <a:r>
+              <a:rPr sz="1300" b="0">
+                <a:solidFill>
+                  <a:srgbClr val="101B33"/>
+                </a:solidFill>
+                <a:latin typeface="Arial"/>
+              </a:rPr>
+              <a:t>0.4997</a:t>
+            </a:r>
+          </a:p>
+        </p:txBody>
+      </p:sp>
+      <p:sp>
+        <p:nvSpPr>
+          <p:cNvPr id="35" name="TextBox 34"/>
+          <p:cNvSpPr txBox="1"/>
+          <p:nvPr/>
+        </p:nvSpPr>
+        <p:spPr>
+          <a:xfrm>
+            <a:off x="9893808" y="2980944"/>
+            <a:ext cx="1737360" cy="420624"/>
+          </a:xfrm>
+          <a:prstGeom prst="rect">
+            <a:avLst/>
+          </a:prstGeom>
+          <a:noFill/>
+        </p:spPr>
+        <p:txBody>
+          <a:bodyPr wrap="square" lIns="0" rIns="0">
+            <a:spAutoFit/>
+          </a:bodyPr>
+          <a:lstStyle/>
+          <a:p>
+            <a:pPr algn="l">
+              <a:lnSpc>
+                <a:spcPct val="115000"/>
+              </a:lnSpc>
+              <a:spcAft>
+                <a:spcPts val="600"/>
+              </a:spcAft>
+            </a:pPr>
+            <a:r>
+              <a:rPr sz="1300" b="0">
+                <a:solidFill>
+                  <a:srgbClr val="101B33"/>
+                </a:solidFill>
+                <a:latin typeface="Arial"/>
+              </a:rPr>
+              <a:t>164.38</a:t>
+            </a:r>
+          </a:p>
+        </p:txBody>
+      </p:sp>
+      <p:sp>
+        <p:nvSpPr>
+          <p:cNvPr id="36" name="Rectangle 35"/>
+          <p:cNvSpPr/>
+          <p:nvPr/>
+        </p:nvSpPr>
+        <p:spPr>
+          <a:xfrm>
+            <a:off x="640080" y="3657600"/>
+            <a:ext cx="10881360" cy="402336"/>
+          </a:xfrm>
+          <a:prstGeom prst="rect">
+            <a:avLst/>
+          </a:prstGeom>
+          <a:solidFill>
+            <a:srgbClr val="101B33"/>
+          </a:solidFill>
+          <a:ln>
+            <a:noFill/>
+          </a:ln>
+          <a:effectLst/>
+        </p:spPr>
+        <p:style>
+          <a:lnRef idx="1">
+            <a:schemeClr val="accent1"/>
+          </a:lnRef>
+          <a:fillRef idx="3">
+            <a:schemeClr val="accent1"/>
+          </a:fillRef>
+          <a:effectRef idx="2">
+            <a:schemeClr val="accent1"/>
+          </a:effectRef>
+          <a:fontRef idx="minor">
+            <a:schemeClr val="lt1"/>
+          </a:fontRef>
+        </p:style>
+        <p:txBody>
+          <a:bodyPr rtlCol="0" anchor="ctr"/>
+          <a:lstStyle/>
+          <a:p>
+            <a:pPr algn="ctr"/>
+          </a:p>
+        </p:txBody>
+      </p:sp>
+      <p:sp>
+        <p:nvSpPr>
+          <p:cNvPr id="37" name="TextBox 36"/>
+          <p:cNvSpPr txBox="1"/>
+          <p:nvPr/>
+        </p:nvSpPr>
+        <p:spPr>
+          <a:xfrm>
+            <a:off x="749808" y="3721608"/>
+            <a:ext cx="1554480" cy="402336"/>
+          </a:xfrm>
+          <a:prstGeom prst="rect">
+            <a:avLst/>
+          </a:prstGeom>
+          <a:noFill/>
+        </p:spPr>
+        <p:txBody>
+          <a:bodyPr wrap="square" lIns="0" rIns="0">
+            <a:spAutoFit/>
+          </a:bodyPr>
+          <a:lstStyle/>
+          <a:p>
+            <a:pPr algn="l">
+              <a:lnSpc>
+                <a:spcPct val="115000"/>
+              </a:lnSpc>
+              <a:spcAft>
+                <a:spcPts val="600"/>
+              </a:spcAft>
+            </a:pPr>
+            <a:r>
+              <a:rPr sz="1200" b="1">
+                <a:solidFill>
+                  <a:srgbClr val="FFFFFF"/>
+                </a:solidFill>
+                <a:latin typeface="Arial"/>
+              </a:rPr>
+              <a:t>Chỉ số</a:t>
+            </a:r>
+          </a:p>
+        </p:txBody>
+      </p:sp>
+      <p:sp>
+        <p:nvSpPr>
+          <p:cNvPr id="38" name="TextBox 37"/>
+          <p:cNvSpPr txBox="1"/>
+          <p:nvPr/>
+        </p:nvSpPr>
+        <p:spPr>
+          <a:xfrm>
+            <a:off x="2304288" y="3721608"/>
+            <a:ext cx="5303520" cy="402336"/>
+          </a:xfrm>
+          <a:prstGeom prst="rect">
+            <a:avLst/>
+          </a:prstGeom>
+          <a:noFill/>
+        </p:spPr>
+        <p:txBody>
+          <a:bodyPr wrap="square" lIns="0" rIns="0">
+            <a:spAutoFit/>
+          </a:bodyPr>
+          <a:lstStyle/>
+          <a:p>
+            <a:pPr algn="l">
+              <a:lnSpc>
+                <a:spcPct val="115000"/>
+              </a:lnSpc>
+              <a:spcAft>
+                <a:spcPts val="600"/>
+              </a:spcAft>
+            </a:pPr>
+            <a:r>
+              <a:rPr sz="1200" b="1">
+                <a:solidFill>
+                  <a:srgbClr val="FFFFFF"/>
+                </a:solidFill>
+                <a:latin typeface="Arial"/>
+              </a:rPr>
+              <a:t>Cách tính</a:t>
+            </a:r>
+          </a:p>
+        </p:txBody>
+      </p:sp>
+      <p:sp>
+        <p:nvSpPr>
+          <p:cNvPr id="39" name="TextBox 38"/>
+          <p:cNvSpPr txBox="1"/>
+          <p:nvPr/>
+        </p:nvSpPr>
+        <p:spPr>
+          <a:xfrm>
+            <a:off x="7607808" y="3721608"/>
+            <a:ext cx="4023360" cy="402336"/>
+          </a:xfrm>
+          <a:prstGeom prst="rect">
+            <a:avLst/>
+          </a:prstGeom>
+          <a:noFill/>
+        </p:spPr>
+        <p:txBody>
+          <a:bodyPr wrap="square" lIns="0" rIns="0">
+            <a:spAutoFit/>
+          </a:bodyPr>
+          <a:lstStyle/>
+          <a:p>
+            <a:pPr algn="l">
+              <a:lnSpc>
+                <a:spcPct val="115000"/>
+              </a:lnSpc>
+              <a:spcAft>
+                <a:spcPts val="600"/>
+              </a:spcAft>
+            </a:pPr>
+            <a:r>
+              <a:rPr sz="1200" b="1">
+                <a:solidFill>
+                  <a:srgbClr val="FFFFFF"/>
+                </a:solidFill>
+                <a:latin typeface="Arial"/>
+              </a:rPr>
+              <a:t>Trả lời câu hỏi gì</a:t>
+            </a:r>
+          </a:p>
+        </p:txBody>
+      </p:sp>
+      <p:sp>
+        <p:nvSpPr>
+          <p:cNvPr id="40" name="Rectangle 39"/>
+          <p:cNvSpPr/>
+          <p:nvPr/>
+        </p:nvSpPr>
+        <p:spPr>
+          <a:xfrm>
+            <a:off x="640080" y="4059936"/>
+            <a:ext cx="10881360" cy="402336"/>
+          </a:xfrm>
+          <a:prstGeom prst="rect">
+            <a:avLst/>
+          </a:prstGeom>
+          <a:solidFill>
+            <a:srgbClr val="F4F6FA"/>
+          </a:solidFill>
+          <a:ln>
+            <a:noFill/>
+          </a:ln>
+          <a:effectLst/>
+        </p:spPr>
+        <p:style>
+          <a:lnRef idx="1">
+            <a:schemeClr val="accent1"/>
+          </a:lnRef>
+          <a:fillRef idx="3">
+            <a:schemeClr val="accent1"/>
+          </a:fillRef>
+          <a:effectRef idx="2">
+            <a:schemeClr val="accent1"/>
+          </a:effectRef>
+          <a:fontRef idx="minor">
+            <a:schemeClr val="lt1"/>
+          </a:fontRef>
+        </p:style>
+        <p:txBody>
+          <a:bodyPr rtlCol="0" anchor="ctr"/>
+          <a:lstStyle/>
+          <a:p>
+            <a:pPr algn="ctr"/>
+          </a:p>
+        </p:txBody>
+      </p:sp>
+      <p:sp>
+        <p:nvSpPr>
+          <p:cNvPr id="41" name="TextBox 40"/>
+          <p:cNvSpPr txBox="1"/>
+          <p:nvPr/>
+        </p:nvSpPr>
+        <p:spPr>
+          <a:xfrm>
+            <a:off x="749808" y="4123944"/>
+            <a:ext cx="1554480" cy="402336"/>
           </a:xfrm>
           <a:prstGeom prst="rect">
             <a:avLst/>
@@ -7201,21 +5888,21 @@
                 </a:solidFill>
                 <a:latin typeface="Arial"/>
               </a:rPr>
-              <a:t>Trời quang (đối chứng) · mAP50-95</a:t>
-            </a:r>
-          </a:p>
-        </p:txBody>
-      </p:sp>
-      <p:sp>
-        <p:nvSpPr>
-          <p:cNvPr id="33" name="TextBox 32"/>
-          <p:cNvSpPr txBox="1"/>
-          <p:nvPr/>
-        </p:nvSpPr>
-        <p:spPr>
-          <a:xfrm>
-            <a:off x="4097918" y="4498848"/>
-            <a:ext cx="1767058" cy="457200"/>
+              <a:t>SSIM ↑</a:t>
+            </a:r>
+          </a:p>
+        </p:txBody>
+      </p:sp>
+      <p:sp>
+        <p:nvSpPr>
+          <p:cNvPr id="42" name="TextBox 41"/>
+          <p:cNvSpPr txBox="1"/>
+          <p:nvPr/>
+        </p:nvSpPr>
+        <p:spPr>
+          <a:xfrm>
+            <a:off x="2304288" y="4123944"/>
+            <a:ext cx="5303520" cy="402336"/>
           </a:xfrm>
           <a:prstGeom prst="rect">
             <a:avLst/>
@@ -7243,21 +5930,21 @@
                 </a:solidFill>
                 <a:latin typeface="Arial"/>
               </a:rPr>
-              <a:t>0.1727</a:t>
-            </a:r>
-          </a:p>
-        </p:txBody>
-      </p:sp>
-      <p:sp>
-        <p:nvSpPr>
-          <p:cNvPr id="34" name="TextBox 33"/>
-          <p:cNvSpPr txBox="1"/>
-          <p:nvPr/>
-        </p:nvSpPr>
-        <p:spPr>
-          <a:xfrm>
-            <a:off x="5864976" y="4498848"/>
-            <a:ext cx="1767058" cy="457200"/>
+              <a:t>So cấu trúc cục bộ giữa ảnh gốc và ảnh sinh ra</a:t>
+            </a:r>
+          </a:p>
+        </p:txBody>
+      </p:sp>
+      <p:sp>
+        <p:nvSpPr>
+          <p:cNvPr id="43" name="TextBox 42"/>
+          <p:cNvSpPr txBox="1"/>
+          <p:nvPr/>
+        </p:nvSpPr>
+        <p:spPr>
+          <a:xfrm>
+            <a:off x="7607808" y="4123944"/>
+            <a:ext cx="4023360" cy="402336"/>
           </a:xfrm>
           <a:prstGeom prst="rect">
             <a:avLst/>
@@ -7285,21 +5972,65 @@
                 </a:solidFill>
                 <a:latin typeface="Arial"/>
               </a:rPr>
-              <a:t>0.1797</a:t>
-            </a:r>
-          </a:p>
-        </p:txBody>
-      </p:sp>
-      <p:sp>
-        <p:nvSpPr>
-          <p:cNvPr id="35" name="TextBox 34"/>
-          <p:cNvSpPr txBox="1"/>
-          <p:nvPr/>
-        </p:nvSpPr>
-        <p:spPr>
-          <a:xfrm>
-            <a:off x="7632034" y="4498848"/>
-            <a:ext cx="1767058" cy="457200"/>
+              <a:t>Ảnh có giữ nội dung không?</a:t>
+            </a:r>
+          </a:p>
+        </p:txBody>
+      </p:sp>
+      <p:sp>
+        <p:nvSpPr>
+          <p:cNvPr id="44" name="Rectangle 43"/>
+          <p:cNvSpPr/>
+          <p:nvPr/>
+        </p:nvSpPr>
+        <p:spPr>
+          <a:xfrm>
+            <a:off x="640080" y="4462272"/>
+            <a:ext cx="10881360" cy="402336"/>
+          </a:xfrm>
+          <a:prstGeom prst="rect">
+            <a:avLst/>
+          </a:prstGeom>
+          <a:solidFill>
+            <a:srgbClr val="FFFFFF"/>
+          </a:solidFill>
+          <a:ln>
+            <a:noFill/>
+          </a:ln>
+          <a:effectLst/>
+        </p:spPr>
+        <p:style>
+          <a:lnRef idx="1">
+            <a:schemeClr val="accent1"/>
+          </a:lnRef>
+          <a:fillRef idx="3">
+            <a:schemeClr val="accent1"/>
+          </a:fillRef>
+          <a:effectRef idx="2">
+            <a:schemeClr val="accent1"/>
+          </a:effectRef>
+          <a:fontRef idx="minor">
+            <a:schemeClr val="lt1"/>
+          </a:fontRef>
+        </p:style>
+        <p:txBody>
+          <a:bodyPr rtlCol="0" anchor="ctr"/>
+          <a:lstStyle/>
+          <a:p>
+            <a:pPr algn="ctr"/>
+          </a:p>
+        </p:txBody>
+      </p:sp>
+      <p:sp>
+        <p:nvSpPr>
+          <p:cNvPr id="45" name="TextBox 44"/>
+          <p:cNvSpPr txBox="1"/>
+          <p:nvPr/>
+        </p:nvSpPr>
+        <p:spPr>
+          <a:xfrm>
+            <a:off x="749808" y="4526280"/>
+            <a:ext cx="1554480" cy="402336"/>
           </a:xfrm>
           <a:prstGeom prst="rect">
             <a:avLst/>
@@ -7327,21 +6058,21 @@
                 </a:solidFill>
                 <a:latin typeface="Arial"/>
               </a:rPr>
-              <a:t>0.1877</a:t>
-            </a:r>
-          </a:p>
-        </p:txBody>
-      </p:sp>
-      <p:sp>
-        <p:nvSpPr>
-          <p:cNvPr id="36" name="TextBox 35"/>
-          <p:cNvSpPr txBox="1"/>
-          <p:nvPr/>
-        </p:nvSpPr>
-        <p:spPr>
-          <a:xfrm>
-            <a:off x="9399092" y="4498848"/>
-            <a:ext cx="2232073" cy="457200"/>
+              <a:t>PSNR ↑</a:t>
+            </a:r>
+          </a:p>
+        </p:txBody>
+      </p:sp>
+      <p:sp>
+        <p:nvSpPr>
+          <p:cNvPr id="46" name="TextBox 45"/>
+          <p:cNvSpPr txBox="1"/>
+          <p:nvPr/>
+        </p:nvSpPr>
+        <p:spPr>
+          <a:xfrm>
+            <a:off x="2304288" y="4526280"/>
+            <a:ext cx="5303520" cy="402336"/>
           </a:xfrm>
           <a:prstGeom prst="rect">
             <a:avLst/>
@@ -7369,49 +6100,450 @@
                 </a:solidFill>
                 <a:latin typeface="Arial"/>
               </a:rPr>
-              <a:t>+0.0080 (+4.5%)</a:t>
-            </a:r>
-          </a:p>
-        </p:txBody>
-      </p:sp>
-      <p:sp>
-        <p:nvSpPr>
-          <p:cNvPr id="37" name="TextBox 36"/>
+              <a:t>10·log₁₀(255² / MSE) — sai lệch theo từng điểm ảnh</a:t>
+            </a:r>
+          </a:p>
+        </p:txBody>
+      </p:sp>
+      <p:sp>
+        <p:nvSpPr>
+          <p:cNvPr id="47" name="TextBox 46"/>
+          <p:cNvSpPr txBox="1"/>
+          <p:nvPr/>
+        </p:nvSpPr>
+        <p:spPr>
+          <a:xfrm>
+            <a:off x="7607808" y="4526280"/>
+            <a:ext cx="4023360" cy="402336"/>
+          </a:xfrm>
+          <a:prstGeom prst="rect">
+            <a:avLst/>
+          </a:prstGeom>
+          <a:noFill/>
+        </p:spPr>
+        <p:txBody>
+          <a:bodyPr wrap="square" lIns="0" rIns="0">
+            <a:spAutoFit/>
+          </a:bodyPr>
+          <a:lstStyle/>
+          <a:p>
+            <a:pPr algn="l">
+              <a:lnSpc>
+                <a:spcPct val="115000"/>
+              </a:lnSpc>
+              <a:spcAft>
+                <a:spcPts val="600"/>
+              </a:spcAft>
+            </a:pPr>
+            <a:r>
+              <a:rPr sz="1200" b="0">
+                <a:solidFill>
+                  <a:srgbClr val="101B33"/>
+                </a:solidFill>
+                <a:latin typeface="Arial"/>
+              </a:rPr>
+              <a:t>Sai lệch nhiều hay ít?</a:t>
+            </a:r>
+          </a:p>
+        </p:txBody>
+      </p:sp>
+      <p:sp>
+        <p:nvSpPr>
+          <p:cNvPr id="48" name="Rectangle 47"/>
+          <p:cNvSpPr/>
+          <p:nvPr/>
+        </p:nvSpPr>
+        <p:spPr>
+          <a:xfrm>
+            <a:off x="640080" y="4864608"/>
+            <a:ext cx="10881360" cy="402336"/>
+          </a:xfrm>
+          <a:prstGeom prst="rect">
+            <a:avLst/>
+          </a:prstGeom>
+          <a:solidFill>
+            <a:srgbClr val="F4F6FA"/>
+          </a:solidFill>
+          <a:ln>
+            <a:noFill/>
+          </a:ln>
+          <a:effectLst/>
+        </p:spPr>
+        <p:style>
+          <a:lnRef idx="1">
+            <a:schemeClr val="accent1"/>
+          </a:lnRef>
+          <a:fillRef idx="3">
+            <a:schemeClr val="accent1"/>
+          </a:fillRef>
+          <a:effectRef idx="2">
+            <a:schemeClr val="accent1"/>
+          </a:effectRef>
+          <a:fontRef idx="minor">
+            <a:schemeClr val="lt1"/>
+          </a:fontRef>
+        </p:style>
+        <p:txBody>
+          <a:bodyPr rtlCol="0" anchor="ctr"/>
+          <a:lstStyle/>
+          <a:p>
+            <a:pPr algn="ctr"/>
+          </a:p>
+        </p:txBody>
+      </p:sp>
+      <p:sp>
+        <p:nvSpPr>
+          <p:cNvPr id="49" name="TextBox 48"/>
+          <p:cNvSpPr txBox="1"/>
+          <p:nvPr/>
+        </p:nvSpPr>
+        <p:spPr>
+          <a:xfrm>
+            <a:off x="749808" y="4928616"/>
+            <a:ext cx="1554480" cy="402336"/>
+          </a:xfrm>
+          <a:prstGeom prst="rect">
+            <a:avLst/>
+          </a:prstGeom>
+          <a:noFill/>
+        </p:spPr>
+        <p:txBody>
+          <a:bodyPr wrap="square" lIns="0" rIns="0">
+            <a:spAutoFit/>
+          </a:bodyPr>
+          <a:lstStyle/>
+          <a:p>
+            <a:pPr algn="l">
+              <a:lnSpc>
+                <a:spcPct val="115000"/>
+              </a:lnSpc>
+              <a:spcAft>
+                <a:spcPts val="600"/>
+              </a:spcAft>
+            </a:pPr>
+            <a:r>
+              <a:rPr sz="1200" b="0">
+                <a:solidFill>
+                  <a:srgbClr val="101B33"/>
+                </a:solidFill>
+                <a:latin typeface="Arial"/>
+              </a:rPr>
+              <a:t>EdgeRecall ↑</a:t>
+            </a:r>
+          </a:p>
+        </p:txBody>
+      </p:sp>
+      <p:sp>
+        <p:nvSpPr>
+          <p:cNvPr id="50" name="TextBox 49"/>
+          <p:cNvSpPr txBox="1"/>
+          <p:nvPr/>
+        </p:nvSpPr>
+        <p:spPr>
+          <a:xfrm>
+            <a:off x="2304288" y="4928616"/>
+            <a:ext cx="5303520" cy="402336"/>
+          </a:xfrm>
+          <a:prstGeom prst="rect">
+            <a:avLst/>
+          </a:prstGeom>
+          <a:noFill/>
+        </p:spPr>
+        <p:txBody>
+          <a:bodyPr wrap="square" lIns="0" rIns="0">
+            <a:spAutoFit/>
+          </a:bodyPr>
+          <a:lstStyle/>
+          <a:p>
+            <a:pPr algn="l">
+              <a:lnSpc>
+                <a:spcPct val="115000"/>
+              </a:lnSpc>
+              <a:spcAft>
+                <a:spcPts val="600"/>
+              </a:spcAft>
+            </a:pPr>
+            <a:r>
+              <a:rPr sz="1200" b="0">
+                <a:solidFill>
+                  <a:srgbClr val="101B33"/>
+                </a:solidFill>
+                <a:latin typeface="Arial"/>
+              </a:rPr>
+              <a:t>Tách biên Canny cả hai ảnh, đếm % biên GỐC còn tìm thấy</a:t>
+            </a:r>
+          </a:p>
+        </p:txBody>
+      </p:sp>
+      <p:sp>
+        <p:nvSpPr>
+          <p:cNvPr id="51" name="TextBox 50"/>
+          <p:cNvSpPr txBox="1"/>
+          <p:nvPr/>
+        </p:nvSpPr>
+        <p:spPr>
+          <a:xfrm>
+            <a:off x="7607808" y="4928616"/>
+            <a:ext cx="4023360" cy="402336"/>
+          </a:xfrm>
+          <a:prstGeom prst="rect">
+            <a:avLst/>
+          </a:prstGeom>
+          <a:noFill/>
+        </p:spPr>
+        <p:txBody>
+          <a:bodyPr wrap="square" lIns="0" rIns="0">
+            <a:spAutoFit/>
+          </a:bodyPr>
+          <a:lstStyle/>
+          <a:p>
+            <a:pPr algn="l">
+              <a:lnSpc>
+                <a:spcPct val="115000"/>
+              </a:lnSpc>
+              <a:spcAft>
+                <a:spcPts val="600"/>
+              </a:spcAft>
+            </a:pPr>
+            <a:r>
+              <a:rPr sz="1200" b="0">
+                <a:solidFill>
+                  <a:srgbClr val="101B33"/>
+                </a:solidFill>
+                <a:latin typeface="Arial"/>
+              </a:rPr>
+              <a:t>Hình dáng vật thể còn nguyên? ⇒ nhãn còn dùng được?</a:t>
+            </a:r>
+          </a:p>
+        </p:txBody>
+      </p:sp>
+      <p:sp>
+        <p:nvSpPr>
+          <p:cNvPr id="52" name="Rectangle 51"/>
+          <p:cNvSpPr/>
+          <p:nvPr/>
+        </p:nvSpPr>
+        <p:spPr>
+          <a:xfrm>
+            <a:off x="640080" y="5266944"/>
+            <a:ext cx="10881360" cy="402336"/>
+          </a:xfrm>
+          <a:prstGeom prst="rect">
+            <a:avLst/>
+          </a:prstGeom>
+          <a:solidFill>
+            <a:srgbClr val="FFFFFF"/>
+          </a:solidFill>
+          <a:ln>
+            <a:noFill/>
+          </a:ln>
+          <a:effectLst/>
+        </p:spPr>
+        <p:style>
+          <a:lnRef idx="1">
+            <a:schemeClr val="accent1"/>
+          </a:lnRef>
+          <a:fillRef idx="3">
+            <a:schemeClr val="accent1"/>
+          </a:fillRef>
+          <a:effectRef idx="2">
+            <a:schemeClr val="accent1"/>
+          </a:effectRef>
+          <a:fontRef idx="minor">
+            <a:schemeClr val="lt1"/>
+          </a:fontRef>
+        </p:style>
+        <p:txBody>
+          <a:bodyPr rtlCol="0" anchor="ctr"/>
+          <a:lstStyle/>
+          <a:p>
+            <a:pPr algn="ctr"/>
+          </a:p>
+        </p:txBody>
+      </p:sp>
+      <p:sp>
+        <p:nvSpPr>
+          <p:cNvPr id="53" name="TextBox 52"/>
+          <p:cNvSpPr txBox="1"/>
+          <p:nvPr/>
+        </p:nvSpPr>
+        <p:spPr>
+          <a:xfrm>
+            <a:off x="749808" y="5330952"/>
+            <a:ext cx="1554480" cy="402336"/>
+          </a:xfrm>
+          <a:prstGeom prst="rect">
+            <a:avLst/>
+          </a:prstGeom>
+          <a:noFill/>
+        </p:spPr>
+        <p:txBody>
+          <a:bodyPr wrap="square" lIns="0" rIns="0">
+            <a:spAutoFit/>
+          </a:bodyPr>
+          <a:lstStyle/>
+          <a:p>
+            <a:pPr algn="l">
+              <a:lnSpc>
+                <a:spcPct val="115000"/>
+              </a:lnSpc>
+              <a:spcAft>
+                <a:spcPts val="600"/>
+              </a:spcAft>
+            </a:pPr>
+            <a:r>
+              <a:rPr sz="1200" b="0">
+                <a:solidFill>
+                  <a:srgbClr val="101B33"/>
+                </a:solidFill>
+                <a:latin typeface="Arial"/>
+              </a:rPr>
+              <a:t>FID ↓</a:t>
+            </a:r>
+          </a:p>
+        </p:txBody>
+      </p:sp>
+      <p:sp>
+        <p:nvSpPr>
+          <p:cNvPr id="54" name="TextBox 53"/>
+          <p:cNvSpPr txBox="1"/>
+          <p:nvPr/>
+        </p:nvSpPr>
+        <p:spPr>
+          <a:xfrm>
+            <a:off x="2304288" y="5330952"/>
+            <a:ext cx="5303520" cy="402336"/>
+          </a:xfrm>
+          <a:prstGeom prst="rect">
+            <a:avLst/>
+          </a:prstGeom>
+          <a:noFill/>
+        </p:spPr>
+        <p:txBody>
+          <a:bodyPr wrap="square" lIns="0" rIns="0">
+            <a:spAutoFit/>
+          </a:bodyPr>
+          <a:lstStyle/>
+          <a:p>
+            <a:pPr algn="l">
+              <a:lnSpc>
+                <a:spcPct val="115000"/>
+              </a:lnSpc>
+              <a:spcAft>
+                <a:spcPts val="600"/>
+              </a:spcAft>
+            </a:pPr>
+            <a:r>
+              <a:rPr sz="1200" b="0">
+                <a:solidFill>
+                  <a:srgbClr val="101B33"/>
+                </a:solidFill>
+                <a:latin typeface="Arial"/>
+              </a:rPr>
+              <a:t>Khoảng cách phân bố đặc trưng InceptionV3 với ảnh mưa/tuyết THẬT</a:t>
+            </a:r>
+          </a:p>
+        </p:txBody>
+      </p:sp>
+      <p:sp>
+        <p:nvSpPr>
+          <p:cNvPr id="55" name="TextBox 54"/>
+          <p:cNvSpPr txBox="1"/>
+          <p:nvPr/>
+        </p:nvSpPr>
+        <p:spPr>
+          <a:xfrm>
+            <a:off x="7607808" y="5330952"/>
+            <a:ext cx="4023360" cy="402336"/>
+          </a:xfrm>
+          <a:prstGeom prst="rect">
+            <a:avLst/>
+          </a:prstGeom>
+          <a:noFill/>
+        </p:spPr>
+        <p:txBody>
+          <a:bodyPr wrap="square" lIns="0" rIns="0">
+            <a:spAutoFit/>
+          </a:bodyPr>
+          <a:lstStyle/>
+          <a:p>
+            <a:pPr algn="l">
+              <a:lnSpc>
+                <a:spcPct val="115000"/>
+              </a:lnSpc>
+              <a:spcAft>
+                <a:spcPts val="600"/>
+              </a:spcAft>
+            </a:pPr>
+            <a:r>
+              <a:rPr sz="1200" b="0">
+                <a:solidFill>
+                  <a:srgbClr val="101B33"/>
+                </a:solidFill>
+                <a:latin typeface="Arial"/>
+              </a:rPr>
+              <a:t>Ảnh sinh ra có giống ảnh chụp thật không?</a:t>
+            </a:r>
+          </a:p>
+        </p:txBody>
+      </p:sp>
+      <p:sp>
+        <p:nvSpPr>
+          <p:cNvPr id="56" name="TextBox 55"/>
           <p:cNvSpPr txBox="1"/>
           <p:nvPr/>
         </p:nvSpPr>
         <p:spPr>
           <a:xfrm>
             <a:off x="640080" y="5760720"/>
-            <a:ext cx="10881360" cy="822960"/>
-          </a:xfrm>
-          <a:prstGeom prst="rect">
-            <a:avLst/>
-          </a:prstGeom>
-          <a:noFill/>
-        </p:spPr>
-        <p:txBody>
-          <a:bodyPr wrap="square" lIns="0" rIns="0">
-            <a:spAutoFit/>
-          </a:bodyPr>
-          <a:lstStyle/>
-          <a:p>
-            <a:pPr algn="l">
-              <a:lnSpc>
-                <a:spcPct val="115000"/>
-              </a:lnSpc>
-              <a:spcAft>
-                <a:spcPts val="600"/>
-              </a:spcAft>
-            </a:pPr>
-            <a:r>
-              <a:rPr sz="1400" b="0">
+            <a:ext cx="10881360" cy="731520"/>
+          </a:xfrm>
+          <a:prstGeom prst="rect">
+            <a:avLst/>
+          </a:prstGeom>
+          <a:noFill/>
+        </p:spPr>
+        <p:txBody>
+          <a:bodyPr wrap="square" lIns="0" rIns="0">
+            <a:spAutoFit/>
+          </a:bodyPr>
+          <a:lstStyle/>
+          <a:p>
+            <a:pPr algn="l">
+              <a:lnSpc>
+                <a:spcPct val="115000"/>
+              </a:lnSpc>
+              <a:spcAft>
+                <a:spcPts val="600"/>
+              </a:spcAft>
+            </a:pPr>
+            <a:r>
+              <a:rPr sz="1300" b="0">
                 <a:solidFill>
                   <a:srgbClr val="5A6375"/>
                 </a:solidFill>
                 <a:latin typeface="Arial"/>
               </a:rPr>
-              <a:t>Hàng 'trời quang' là đối chứng: xác nhận việc thêm dữ liệu tăng cường không làm mô hình kém đi trên điều kiện bình thường.</a:t>
+              <a:t>Không phương pháp nào thắng tuyệt đối: bản đề xuất giữ nội dung tốt nhất (SSIM, PSNR), còn AdaIN thuần thắng FID vì lớp phủ hạt là dấu vết tổng hợp bị Inception phạt.</a:t>
+            </a:r>
+          </a:p>
+          <a:p>
+            <a:pPr algn="l">
+              <a:lnSpc>
+                <a:spcPct val="115000"/>
+              </a:lnSpc>
+              <a:spcAft>
+                <a:spcPts val="600"/>
+              </a:spcAft>
+            </a:pPr>
+            <a:r>
+              <a:rPr sz="1300" b="1">
+                <a:solidFill>
+                  <a:srgbClr val="101B33"/>
+                </a:solidFill>
+                <a:latin typeface="Arial"/>
+              </a:rPr>
+              <a:t>⇒ Với ảnh dashcam nên giảm mật độ hạt — mưa thật qua kính chắn gió gần như không thấy vệt rời.</a:t>
             </a:r>
           </a:p>
         </p:txBody>
@@ -7559,7 +6691,26 @@
                 </a:solidFill>
                 <a:latin typeface="Arial"/>
               </a:rPr>
-              <a:t>Hạn chế &amp; hướng phát triển</a:t>
+              <a:t>Thí nghiệm quyết định: dữ liệu này có thực sự hữu ích?</a:t>
+            </a:r>
+          </a:p>
+          <a:p>
+            <a:pPr algn="l">
+              <a:lnSpc>
+                <a:spcPct val="115000"/>
+              </a:lnSpc>
+              <a:spcAft>
+                <a:spcPts val="600"/>
+              </a:spcAft>
+            </a:pPr>
+            <a:r>
+              <a:rPr sz="1300" b="0">
+                <a:solidFill>
+                  <a:srgbClr val="B6C2D9"/>
+                </a:solidFill>
+                <a:latin typeface="Arial"/>
+              </a:rPr>
+              <a:t>YOLOv8n — chỉ khác nhau ở tập huấn luyện</a:t>
             </a:r>
           </a:p>
         </p:txBody>
@@ -7608,14 +6759,329 @@
       </p:sp>
       <p:sp>
         <p:nvSpPr>
-          <p:cNvPr id="6" name="Rectangle 5"/>
+          <p:cNvPr id="6" name="TextBox 5"/>
+          <p:cNvSpPr txBox="1"/>
+          <p:nvPr/>
+        </p:nvSpPr>
+        <p:spPr>
+          <a:xfrm>
+            <a:off x="640080" y="1234440"/>
+            <a:ext cx="10881360" cy="1188720"/>
+          </a:xfrm>
+          <a:prstGeom prst="rect">
+            <a:avLst/>
+          </a:prstGeom>
+          <a:noFill/>
+        </p:spPr>
+        <p:txBody>
+          <a:bodyPr wrap="square" lIns="0" rIns="0">
+            <a:spAutoFit/>
+          </a:bodyPr>
+          <a:lstStyle/>
+          <a:p>
+            <a:pPr algn="l">
+              <a:lnSpc>
+                <a:spcPct val="115000"/>
+              </a:lnSpc>
+              <a:spcAft>
+                <a:spcPts val="600"/>
+              </a:spcAft>
+            </a:pPr>
+            <a:r>
+              <a:rPr sz="1500" b="1">
+                <a:solidFill>
+                  <a:srgbClr val="101B33"/>
+                </a:solidFill>
+                <a:latin typeface="Arial"/>
+              </a:rPr>
+              <a:t>A. Baseline: ảnh trời quang   ·   B. Baseline-long: cùng ảnh đó, gấp đôi epoch   ·   C. Augmented: ảnh trời quang + ảnh sinh ra</a:t>
+            </a:r>
+          </a:p>
+          <a:p>
+            <a:pPr algn="l">
+              <a:lnSpc>
+                <a:spcPct val="115000"/>
+              </a:lnSpc>
+              <a:spcAft>
+                <a:spcPts val="600"/>
+              </a:spcAft>
+            </a:pPr>
+            <a:r>
+              <a:rPr sz="1300" b="0">
+                <a:solidFill>
+                  <a:srgbClr val="5A6375"/>
+                </a:solidFill>
+                <a:latin typeface="Arial"/>
+              </a:rPr>
+              <a:t>Nhánh B có ĐÚNG số bước cập nhật như C nhưng không có dữ liệu mới ⇒ so sánh công bằng là C − B. Cả hai đánh giá trên cùng tập test: ảnh mưa/tuyết THẬT của BDD100K, chưa từng dùng ở bất kỳ khâu nào khác.</a:t>
+            </a:r>
+          </a:p>
+        </p:txBody>
+      </p:sp>
+      <p:sp>
+        <p:nvSpPr>
+          <p:cNvPr id="7" name="Rectangle 6"/>
           <p:cNvSpPr/>
           <p:nvPr/>
         </p:nvSpPr>
         <p:spPr>
           <a:xfrm>
-            <a:off x="640080" y="1371600"/>
-            <a:ext cx="5349240" cy="4480560"/>
+            <a:off x="640080" y="2606040"/>
+            <a:ext cx="10881360" cy="457200"/>
+          </a:xfrm>
+          <a:prstGeom prst="rect">
+            <a:avLst/>
+          </a:prstGeom>
+          <a:solidFill>
+            <a:srgbClr val="101B33"/>
+          </a:solidFill>
+          <a:ln>
+            <a:noFill/>
+          </a:ln>
+          <a:effectLst/>
+        </p:spPr>
+        <p:style>
+          <a:lnRef idx="1">
+            <a:schemeClr val="accent1"/>
+          </a:lnRef>
+          <a:fillRef idx="3">
+            <a:schemeClr val="accent1"/>
+          </a:fillRef>
+          <a:effectRef idx="2">
+            <a:schemeClr val="accent1"/>
+          </a:effectRef>
+          <a:fontRef idx="minor">
+            <a:schemeClr val="lt1"/>
+          </a:fontRef>
+        </p:style>
+        <p:txBody>
+          <a:bodyPr rtlCol="0" anchor="ctr"/>
+          <a:lstStyle/>
+          <a:p>
+            <a:pPr algn="ctr"/>
+          </a:p>
+        </p:txBody>
+      </p:sp>
+      <p:sp>
+        <p:nvSpPr>
+          <p:cNvPr id="8" name="TextBox 7"/>
+          <p:cNvSpPr txBox="1"/>
+          <p:nvPr/>
+        </p:nvSpPr>
+        <p:spPr>
+          <a:xfrm>
+            <a:off x="749808" y="2670048"/>
+            <a:ext cx="3348110" cy="457200"/>
+          </a:xfrm>
+          <a:prstGeom prst="rect">
+            <a:avLst/>
+          </a:prstGeom>
+          <a:noFill/>
+        </p:spPr>
+        <p:txBody>
+          <a:bodyPr wrap="square" lIns="0" rIns="0">
+            <a:spAutoFit/>
+          </a:bodyPr>
+          <a:lstStyle/>
+          <a:p>
+            <a:pPr algn="l">
+              <a:lnSpc>
+                <a:spcPct val="115000"/>
+              </a:lnSpc>
+              <a:spcAft>
+                <a:spcPts val="600"/>
+              </a:spcAft>
+            </a:pPr>
+            <a:r>
+              <a:rPr sz="1200" b="1">
+                <a:solidFill>
+                  <a:srgbClr val="FFFFFF"/>
+                </a:solidFill>
+                <a:latin typeface="Arial"/>
+              </a:rPr>
+              <a:t>Tập kiểm tra</a:t>
+            </a:r>
+          </a:p>
+        </p:txBody>
+      </p:sp>
+      <p:sp>
+        <p:nvSpPr>
+          <p:cNvPr id="9" name="TextBox 8"/>
+          <p:cNvSpPr txBox="1"/>
+          <p:nvPr/>
+        </p:nvSpPr>
+        <p:spPr>
+          <a:xfrm>
+            <a:off x="4097918" y="2670048"/>
+            <a:ext cx="1767058" cy="457200"/>
+          </a:xfrm>
+          <a:prstGeom prst="rect">
+            <a:avLst/>
+          </a:prstGeom>
+          <a:noFill/>
+        </p:spPr>
+        <p:txBody>
+          <a:bodyPr wrap="square" lIns="0" rIns="0">
+            <a:spAutoFit/>
+          </a:bodyPr>
+          <a:lstStyle/>
+          <a:p>
+            <a:pPr algn="l">
+              <a:lnSpc>
+                <a:spcPct val="115000"/>
+              </a:lnSpc>
+              <a:spcAft>
+                <a:spcPts val="600"/>
+              </a:spcAft>
+            </a:pPr>
+            <a:r>
+              <a:rPr sz="1200" b="1">
+                <a:solidFill>
+                  <a:srgbClr val="FFFFFF"/>
+                </a:solidFill>
+                <a:latin typeface="Arial"/>
+              </a:rPr>
+              <a:t>A. Baseline</a:t>
+            </a:r>
+          </a:p>
+        </p:txBody>
+      </p:sp>
+      <p:sp>
+        <p:nvSpPr>
+          <p:cNvPr id="10" name="TextBox 9"/>
+          <p:cNvSpPr txBox="1"/>
+          <p:nvPr/>
+        </p:nvSpPr>
+        <p:spPr>
+          <a:xfrm>
+            <a:off x="5864976" y="2670048"/>
+            <a:ext cx="1767058" cy="457200"/>
+          </a:xfrm>
+          <a:prstGeom prst="rect">
+            <a:avLst/>
+          </a:prstGeom>
+          <a:noFill/>
+        </p:spPr>
+        <p:txBody>
+          <a:bodyPr wrap="square" lIns="0" rIns="0">
+            <a:spAutoFit/>
+          </a:bodyPr>
+          <a:lstStyle/>
+          <a:p>
+            <a:pPr algn="l">
+              <a:lnSpc>
+                <a:spcPct val="115000"/>
+              </a:lnSpc>
+              <a:spcAft>
+                <a:spcPts val="600"/>
+              </a:spcAft>
+            </a:pPr>
+            <a:r>
+              <a:rPr sz="1200" b="1">
+                <a:solidFill>
+                  <a:srgbClr val="FFFFFF"/>
+                </a:solidFill>
+                <a:latin typeface="Arial"/>
+              </a:rPr>
+              <a:t>B. Baseline-long</a:t>
+            </a:r>
+          </a:p>
+        </p:txBody>
+      </p:sp>
+      <p:sp>
+        <p:nvSpPr>
+          <p:cNvPr id="11" name="TextBox 10"/>
+          <p:cNvSpPr txBox="1"/>
+          <p:nvPr/>
+        </p:nvSpPr>
+        <p:spPr>
+          <a:xfrm>
+            <a:off x="7632034" y="2670048"/>
+            <a:ext cx="1767058" cy="457200"/>
+          </a:xfrm>
+          <a:prstGeom prst="rect">
+            <a:avLst/>
+          </a:prstGeom>
+          <a:noFill/>
+        </p:spPr>
+        <p:txBody>
+          <a:bodyPr wrap="square" lIns="0" rIns="0">
+            <a:spAutoFit/>
+          </a:bodyPr>
+          <a:lstStyle/>
+          <a:p>
+            <a:pPr algn="l">
+              <a:lnSpc>
+                <a:spcPct val="115000"/>
+              </a:lnSpc>
+              <a:spcAft>
+                <a:spcPts val="600"/>
+              </a:spcAft>
+            </a:pPr>
+            <a:r>
+              <a:rPr sz="1200" b="1">
+                <a:solidFill>
+                  <a:srgbClr val="FFFFFF"/>
+                </a:solidFill>
+                <a:latin typeface="Arial"/>
+              </a:rPr>
+              <a:t>C. + Tăng cường</a:t>
+            </a:r>
+          </a:p>
+        </p:txBody>
+      </p:sp>
+      <p:sp>
+        <p:nvSpPr>
+          <p:cNvPr id="12" name="TextBox 11"/>
+          <p:cNvSpPr txBox="1"/>
+          <p:nvPr/>
+        </p:nvSpPr>
+        <p:spPr>
+          <a:xfrm>
+            <a:off x="9399092" y="2670048"/>
+            <a:ext cx="2232073" cy="457200"/>
+          </a:xfrm>
+          <a:prstGeom prst="rect">
+            <a:avLst/>
+          </a:prstGeom>
+          <a:noFill/>
+        </p:spPr>
+        <p:txBody>
+          <a:bodyPr wrap="square" lIns="0" rIns="0">
+            <a:spAutoFit/>
+          </a:bodyPr>
+          <a:lstStyle/>
+          <a:p>
+            <a:pPr algn="l">
+              <a:lnSpc>
+                <a:spcPct val="115000"/>
+              </a:lnSpc>
+              <a:spcAft>
+                <a:spcPts val="600"/>
+              </a:spcAft>
+            </a:pPr>
+            <a:r>
+              <a:rPr sz="1200" b="1">
+                <a:solidFill>
+                  <a:srgbClr val="FFFFFF"/>
+                </a:solidFill>
+                <a:latin typeface="Arial"/>
+              </a:rPr>
+              <a:t>C − B</a:t>
+            </a:r>
+          </a:p>
+        </p:txBody>
+      </p:sp>
+      <p:sp>
+        <p:nvSpPr>
+          <p:cNvPr id="13" name="Rectangle 12"/>
+          <p:cNvSpPr/>
+          <p:nvPr/>
+        </p:nvSpPr>
+        <p:spPr>
+          <a:xfrm>
+            <a:off x="640080" y="3063240"/>
+            <a:ext cx="10881360" cy="457200"/>
           </a:xfrm>
           <a:prstGeom prst="rect">
             <a:avLst/>
@@ -7652,20 +7118,230 @@
       </p:sp>
       <p:sp>
         <p:nvSpPr>
-          <p:cNvPr id="7" name="Rectangle 6"/>
+          <p:cNvPr id="14" name="TextBox 13"/>
+          <p:cNvSpPr txBox="1"/>
+          <p:nvPr/>
+        </p:nvSpPr>
+        <p:spPr>
+          <a:xfrm>
+            <a:off x="749808" y="3127248"/>
+            <a:ext cx="3348110" cy="457200"/>
+          </a:xfrm>
+          <a:prstGeom prst="rect">
+            <a:avLst/>
+          </a:prstGeom>
+          <a:noFill/>
+        </p:spPr>
+        <p:txBody>
+          <a:bodyPr wrap="square" lIns="0" rIns="0">
+            <a:spAutoFit/>
+          </a:bodyPr>
+          <a:lstStyle/>
+          <a:p>
+            <a:pPr algn="l">
+              <a:lnSpc>
+                <a:spcPct val="115000"/>
+              </a:lnSpc>
+              <a:spcAft>
+                <a:spcPts val="600"/>
+              </a:spcAft>
+            </a:pPr>
+            <a:r>
+              <a:rPr sz="1200" b="0">
+                <a:solidFill>
+                  <a:srgbClr val="101B33"/>
+                </a:solidFill>
+                <a:latin typeface="Arial"/>
+              </a:rPr>
+              <a:t>Thời tiết xấu THẬT · mAP50</a:t>
+            </a:r>
+          </a:p>
+        </p:txBody>
+      </p:sp>
+      <p:sp>
+        <p:nvSpPr>
+          <p:cNvPr id="15" name="TextBox 14"/>
+          <p:cNvSpPr txBox="1"/>
+          <p:nvPr/>
+        </p:nvSpPr>
+        <p:spPr>
+          <a:xfrm>
+            <a:off x="4097918" y="3127248"/>
+            <a:ext cx="1767058" cy="457200"/>
+          </a:xfrm>
+          <a:prstGeom prst="rect">
+            <a:avLst/>
+          </a:prstGeom>
+          <a:noFill/>
+        </p:spPr>
+        <p:txBody>
+          <a:bodyPr wrap="square" lIns="0" rIns="0">
+            <a:spAutoFit/>
+          </a:bodyPr>
+          <a:lstStyle/>
+          <a:p>
+            <a:pPr algn="l">
+              <a:lnSpc>
+                <a:spcPct val="115000"/>
+              </a:lnSpc>
+              <a:spcAft>
+                <a:spcPts val="600"/>
+              </a:spcAft>
+            </a:pPr>
+            <a:r>
+              <a:rPr sz="1200" b="0">
+                <a:solidFill>
+                  <a:srgbClr val="101B33"/>
+                </a:solidFill>
+                <a:latin typeface="Arial"/>
+              </a:rPr>
+              <a:t>0.2363</a:t>
+            </a:r>
+          </a:p>
+        </p:txBody>
+      </p:sp>
+      <p:sp>
+        <p:nvSpPr>
+          <p:cNvPr id="16" name="TextBox 15"/>
+          <p:cNvSpPr txBox="1"/>
+          <p:nvPr/>
+        </p:nvSpPr>
+        <p:spPr>
+          <a:xfrm>
+            <a:off x="5864976" y="3127248"/>
+            <a:ext cx="1767058" cy="457200"/>
+          </a:xfrm>
+          <a:prstGeom prst="rect">
+            <a:avLst/>
+          </a:prstGeom>
+          <a:noFill/>
+        </p:spPr>
+        <p:txBody>
+          <a:bodyPr wrap="square" lIns="0" rIns="0">
+            <a:spAutoFit/>
+          </a:bodyPr>
+          <a:lstStyle/>
+          <a:p>
+            <a:pPr algn="l">
+              <a:lnSpc>
+                <a:spcPct val="115000"/>
+              </a:lnSpc>
+              <a:spcAft>
+                <a:spcPts val="600"/>
+              </a:spcAft>
+            </a:pPr>
+            <a:r>
+              <a:rPr sz="1200" b="0">
+                <a:solidFill>
+                  <a:srgbClr val="101B33"/>
+                </a:solidFill>
+                <a:latin typeface="Arial"/>
+              </a:rPr>
+              <a:t>0.2451</a:t>
+            </a:r>
+          </a:p>
+        </p:txBody>
+      </p:sp>
+      <p:sp>
+        <p:nvSpPr>
+          <p:cNvPr id="17" name="TextBox 16"/>
+          <p:cNvSpPr txBox="1"/>
+          <p:nvPr/>
+        </p:nvSpPr>
+        <p:spPr>
+          <a:xfrm>
+            <a:off x="7632034" y="3127248"/>
+            <a:ext cx="1767058" cy="457200"/>
+          </a:xfrm>
+          <a:prstGeom prst="rect">
+            <a:avLst/>
+          </a:prstGeom>
+          <a:noFill/>
+        </p:spPr>
+        <p:txBody>
+          <a:bodyPr wrap="square" lIns="0" rIns="0">
+            <a:spAutoFit/>
+          </a:bodyPr>
+          <a:lstStyle/>
+          <a:p>
+            <a:pPr algn="l">
+              <a:lnSpc>
+                <a:spcPct val="115000"/>
+              </a:lnSpc>
+              <a:spcAft>
+                <a:spcPts val="600"/>
+              </a:spcAft>
+            </a:pPr>
+            <a:r>
+              <a:rPr sz="1200" b="0">
+                <a:solidFill>
+                  <a:srgbClr val="101B33"/>
+                </a:solidFill>
+                <a:latin typeface="Arial"/>
+              </a:rPr>
+              <a:t>0.2603</a:t>
+            </a:r>
+          </a:p>
+        </p:txBody>
+      </p:sp>
+      <p:sp>
+        <p:nvSpPr>
+          <p:cNvPr id="18" name="TextBox 17"/>
+          <p:cNvSpPr txBox="1"/>
+          <p:nvPr/>
+        </p:nvSpPr>
+        <p:spPr>
+          <a:xfrm>
+            <a:off x="9399092" y="3127248"/>
+            <a:ext cx="2232073" cy="457200"/>
+          </a:xfrm>
+          <a:prstGeom prst="rect">
+            <a:avLst/>
+          </a:prstGeom>
+          <a:noFill/>
+        </p:spPr>
+        <p:txBody>
+          <a:bodyPr wrap="square" lIns="0" rIns="0">
+            <a:spAutoFit/>
+          </a:bodyPr>
+          <a:lstStyle/>
+          <a:p>
+            <a:pPr algn="l">
+              <a:lnSpc>
+                <a:spcPct val="115000"/>
+              </a:lnSpc>
+              <a:spcAft>
+                <a:spcPts val="600"/>
+              </a:spcAft>
+            </a:pPr>
+            <a:r>
+              <a:rPr sz="1200" b="0">
+                <a:solidFill>
+                  <a:srgbClr val="101B33"/>
+                </a:solidFill>
+                <a:latin typeface="Arial"/>
+              </a:rPr>
+              <a:t>+0.0153 (+6.2%)</a:t>
+            </a:r>
+          </a:p>
+        </p:txBody>
+      </p:sp>
+      <p:sp>
+        <p:nvSpPr>
+          <p:cNvPr id="19" name="Rectangle 18"/>
           <p:cNvSpPr/>
           <p:nvPr/>
         </p:nvSpPr>
         <p:spPr>
           <a:xfrm>
-            <a:off x="640080" y="1371600"/>
-            <a:ext cx="64008" cy="4480560"/>
+            <a:off x="640080" y="3520440"/>
+            <a:ext cx="10881360" cy="457200"/>
           </a:xfrm>
           <a:prstGeom prst="rect">
             <a:avLst/>
           </a:prstGeom>
           <a:solidFill>
-            <a:srgbClr val="E45A5A"/>
+            <a:srgbClr val="FFFFFF"/>
           </a:solidFill>
           <a:ln>
             <a:noFill/>
@@ -7696,79 +7372,224 @@
       </p:sp>
       <p:sp>
         <p:nvSpPr>
-          <p:cNvPr id="8" name="TextBox 7"/>
-          <p:cNvSpPr txBox="1"/>
-          <p:nvPr/>
-        </p:nvSpPr>
-        <p:spPr>
-          <a:xfrm>
-            <a:off x="896112" y="1536192"/>
-            <a:ext cx="4892040" cy="4480560"/>
-          </a:xfrm>
-          <a:prstGeom prst="rect">
-            <a:avLst/>
-          </a:prstGeom>
-          <a:noFill/>
-        </p:spPr>
-        <p:txBody>
-          <a:bodyPr wrap="square" lIns="0" rIns="0">
-            <a:spAutoFit/>
-          </a:bodyPr>
-          <a:lstStyle/>
-          <a:p>
-            <a:pPr algn="l">
-              <a:lnSpc>
-                <a:spcPct val="115000"/>
-              </a:lnSpc>
-              <a:spcAft>
-                <a:spcPts val="600"/>
-              </a:spcAft>
-            </a:pPr>
-            <a:r>
-              <a:rPr sz="1600" b="1">
+          <p:cNvPr id="20" name="TextBox 19"/>
+          <p:cNvSpPr txBox="1"/>
+          <p:nvPr/>
+        </p:nvSpPr>
+        <p:spPr>
+          <a:xfrm>
+            <a:off x="749808" y="3584448"/>
+            <a:ext cx="3348110" cy="457200"/>
+          </a:xfrm>
+          <a:prstGeom prst="rect">
+            <a:avLst/>
+          </a:prstGeom>
+          <a:noFill/>
+        </p:spPr>
+        <p:txBody>
+          <a:bodyPr wrap="square" lIns="0" rIns="0">
+            <a:spAutoFit/>
+          </a:bodyPr>
+          <a:lstStyle/>
+          <a:p>
+            <a:pPr algn="l">
+              <a:lnSpc>
+                <a:spcPct val="115000"/>
+              </a:lnSpc>
+              <a:spcAft>
+                <a:spcPts val="600"/>
+              </a:spcAft>
+            </a:pPr>
+            <a:r>
+              <a:rPr sz="1200" b="0">
                 <a:solidFill>
                   <a:srgbClr val="101B33"/>
                 </a:solidFill>
                 <a:latin typeface="Arial"/>
               </a:rPr>
-              <a:t>HẠN CHẾ</a:t>
-            </a:r>
-          </a:p>
-          <a:p>
-            <a:pPr algn="l">
-              <a:lnSpc>
-                <a:spcPct val="115000"/>
-              </a:lnSpc>
-              <a:spcAft>
-                <a:spcPts val="600"/>
-              </a:spcAft>
-            </a:pPr>
-            <a:r>
-              <a:rPr sz="1300" b="0">
-                <a:solidFill>
-                  <a:srgbClr val="5A6375"/>
-                </a:solidFill>
-                <a:latin typeface="Arial"/>
-              </a:rPr>
-              <a:t>
-· AdaIN chuyển thống kê TOÀN CỤC nên chưa phân biệt vùng trời / mặt đường — sương mù dày ở gần cũng như ở xa.
-· Không có bản đồ độ sâu thật; module vật lý dùng giả thiết mặt đường phẳng.
-· Chất lượng phụ thuộc ảnh tham chiếu: ảnh tham chiếu khác góc chụp quá nhiều sẽ cho tông màu lệch.
-· DAWN chỉ được dùng cho mục đích nghiên cứu, không dùng thương mại.</a:t>
-            </a:r>
-          </a:p>
-        </p:txBody>
-      </p:sp>
-      <p:sp>
-        <p:nvSpPr>
-          <p:cNvPr id="9" name="Rectangle 8"/>
+              <a:t>Thời tiết xấu THẬT · mAP50-95</a:t>
+            </a:r>
+          </a:p>
+        </p:txBody>
+      </p:sp>
+      <p:sp>
+        <p:nvSpPr>
+          <p:cNvPr id="21" name="TextBox 20"/>
+          <p:cNvSpPr txBox="1"/>
+          <p:nvPr/>
+        </p:nvSpPr>
+        <p:spPr>
+          <a:xfrm>
+            <a:off x="4097918" y="3584448"/>
+            <a:ext cx="1767058" cy="457200"/>
+          </a:xfrm>
+          <a:prstGeom prst="rect">
+            <a:avLst/>
+          </a:prstGeom>
+          <a:noFill/>
+        </p:spPr>
+        <p:txBody>
+          <a:bodyPr wrap="square" lIns="0" rIns="0">
+            <a:spAutoFit/>
+          </a:bodyPr>
+          <a:lstStyle/>
+          <a:p>
+            <a:pPr algn="l">
+              <a:lnSpc>
+                <a:spcPct val="115000"/>
+              </a:lnSpc>
+              <a:spcAft>
+                <a:spcPts val="600"/>
+              </a:spcAft>
+            </a:pPr>
+            <a:r>
+              <a:rPr sz="1200" b="0">
+                <a:solidFill>
+                  <a:srgbClr val="101B33"/>
+                </a:solidFill>
+                <a:latin typeface="Arial"/>
+              </a:rPr>
+              <a:t>0.1299</a:t>
+            </a:r>
+          </a:p>
+        </p:txBody>
+      </p:sp>
+      <p:sp>
+        <p:nvSpPr>
+          <p:cNvPr id="22" name="TextBox 21"/>
+          <p:cNvSpPr txBox="1"/>
+          <p:nvPr/>
+        </p:nvSpPr>
+        <p:spPr>
+          <a:xfrm>
+            <a:off x="5864976" y="3584448"/>
+            <a:ext cx="1767058" cy="457200"/>
+          </a:xfrm>
+          <a:prstGeom prst="rect">
+            <a:avLst/>
+          </a:prstGeom>
+          <a:noFill/>
+        </p:spPr>
+        <p:txBody>
+          <a:bodyPr wrap="square" lIns="0" rIns="0">
+            <a:spAutoFit/>
+          </a:bodyPr>
+          <a:lstStyle/>
+          <a:p>
+            <a:pPr algn="l">
+              <a:lnSpc>
+                <a:spcPct val="115000"/>
+              </a:lnSpc>
+              <a:spcAft>
+                <a:spcPts val="600"/>
+              </a:spcAft>
+            </a:pPr>
+            <a:r>
+              <a:rPr sz="1200" b="0">
+                <a:solidFill>
+                  <a:srgbClr val="101B33"/>
+                </a:solidFill>
+                <a:latin typeface="Arial"/>
+              </a:rPr>
+              <a:t>0.1339</a:t>
+            </a:r>
+          </a:p>
+        </p:txBody>
+      </p:sp>
+      <p:sp>
+        <p:nvSpPr>
+          <p:cNvPr id="23" name="TextBox 22"/>
+          <p:cNvSpPr txBox="1"/>
+          <p:nvPr/>
+        </p:nvSpPr>
+        <p:spPr>
+          <a:xfrm>
+            <a:off x="7632034" y="3584448"/>
+            <a:ext cx="1767058" cy="457200"/>
+          </a:xfrm>
+          <a:prstGeom prst="rect">
+            <a:avLst/>
+          </a:prstGeom>
+          <a:noFill/>
+        </p:spPr>
+        <p:txBody>
+          <a:bodyPr wrap="square" lIns="0" rIns="0">
+            <a:spAutoFit/>
+          </a:bodyPr>
+          <a:lstStyle/>
+          <a:p>
+            <a:pPr algn="l">
+              <a:lnSpc>
+                <a:spcPct val="115000"/>
+              </a:lnSpc>
+              <a:spcAft>
+                <a:spcPts val="600"/>
+              </a:spcAft>
+            </a:pPr>
+            <a:r>
+              <a:rPr sz="1200" b="0">
+                <a:solidFill>
+                  <a:srgbClr val="101B33"/>
+                </a:solidFill>
+                <a:latin typeface="Arial"/>
+              </a:rPr>
+              <a:t>0.1411</a:t>
+            </a:r>
+          </a:p>
+        </p:txBody>
+      </p:sp>
+      <p:sp>
+        <p:nvSpPr>
+          <p:cNvPr id="24" name="TextBox 23"/>
+          <p:cNvSpPr txBox="1"/>
+          <p:nvPr/>
+        </p:nvSpPr>
+        <p:spPr>
+          <a:xfrm>
+            <a:off x="9399092" y="3584448"/>
+            <a:ext cx="2232073" cy="457200"/>
+          </a:xfrm>
+          <a:prstGeom prst="rect">
+            <a:avLst/>
+          </a:prstGeom>
+          <a:noFill/>
+        </p:spPr>
+        <p:txBody>
+          <a:bodyPr wrap="square" lIns="0" rIns="0">
+            <a:spAutoFit/>
+          </a:bodyPr>
+          <a:lstStyle/>
+          <a:p>
+            <a:pPr algn="l">
+              <a:lnSpc>
+                <a:spcPct val="115000"/>
+              </a:lnSpc>
+              <a:spcAft>
+                <a:spcPts val="600"/>
+              </a:spcAft>
+            </a:pPr>
+            <a:r>
+              <a:rPr sz="1200" b="0">
+                <a:solidFill>
+                  <a:srgbClr val="101B33"/>
+                </a:solidFill>
+                <a:latin typeface="Arial"/>
+              </a:rPr>
+              <a:t>+0.0072 (+5.3%)</a:t>
+            </a:r>
+          </a:p>
+        </p:txBody>
+      </p:sp>
+      <p:sp>
+        <p:nvSpPr>
+          <p:cNvPr id="25" name="Rectangle 24"/>
           <p:cNvSpPr/>
           <p:nvPr/>
         </p:nvSpPr>
         <p:spPr>
           <a:xfrm>
-            <a:off x="6355080" y="1371600"/>
-            <a:ext cx="5349240" cy="4480560"/>
+            <a:off x="640080" y="3977640"/>
+            <a:ext cx="10881360" cy="457200"/>
           </a:xfrm>
           <a:prstGeom prst="rect">
             <a:avLst/>
@@ -7805,20 +7626,230 @@
       </p:sp>
       <p:sp>
         <p:nvSpPr>
-          <p:cNvPr id="10" name="Rectangle 9"/>
+          <p:cNvPr id="26" name="TextBox 25"/>
+          <p:cNvSpPr txBox="1"/>
+          <p:nvPr/>
+        </p:nvSpPr>
+        <p:spPr>
+          <a:xfrm>
+            <a:off x="749808" y="4041648"/>
+            <a:ext cx="3348110" cy="457200"/>
+          </a:xfrm>
+          <a:prstGeom prst="rect">
+            <a:avLst/>
+          </a:prstGeom>
+          <a:noFill/>
+        </p:spPr>
+        <p:txBody>
+          <a:bodyPr wrap="square" lIns="0" rIns="0">
+            <a:spAutoFit/>
+          </a:bodyPr>
+          <a:lstStyle/>
+          <a:p>
+            <a:pPr algn="l">
+              <a:lnSpc>
+                <a:spcPct val="115000"/>
+              </a:lnSpc>
+              <a:spcAft>
+                <a:spcPts val="600"/>
+              </a:spcAft>
+            </a:pPr>
+            <a:r>
+              <a:rPr sz="1200" b="0">
+                <a:solidFill>
+                  <a:srgbClr val="101B33"/>
+                </a:solidFill>
+                <a:latin typeface="Arial"/>
+              </a:rPr>
+              <a:t>Trời quang (đối chứng) · mAP50</a:t>
+            </a:r>
+          </a:p>
+        </p:txBody>
+      </p:sp>
+      <p:sp>
+        <p:nvSpPr>
+          <p:cNvPr id="27" name="TextBox 26"/>
+          <p:cNvSpPr txBox="1"/>
+          <p:nvPr/>
+        </p:nvSpPr>
+        <p:spPr>
+          <a:xfrm>
+            <a:off x="4097918" y="4041648"/>
+            <a:ext cx="1767058" cy="457200"/>
+          </a:xfrm>
+          <a:prstGeom prst="rect">
+            <a:avLst/>
+          </a:prstGeom>
+          <a:noFill/>
+        </p:spPr>
+        <p:txBody>
+          <a:bodyPr wrap="square" lIns="0" rIns="0">
+            <a:spAutoFit/>
+          </a:bodyPr>
+          <a:lstStyle/>
+          <a:p>
+            <a:pPr algn="l">
+              <a:lnSpc>
+                <a:spcPct val="115000"/>
+              </a:lnSpc>
+              <a:spcAft>
+                <a:spcPts val="600"/>
+              </a:spcAft>
+            </a:pPr>
+            <a:r>
+              <a:rPr sz="1200" b="0">
+                <a:solidFill>
+                  <a:srgbClr val="101B33"/>
+                </a:solidFill>
+                <a:latin typeface="Arial"/>
+              </a:rPr>
+              <a:t>0.3028</a:t>
+            </a:r>
+          </a:p>
+        </p:txBody>
+      </p:sp>
+      <p:sp>
+        <p:nvSpPr>
+          <p:cNvPr id="28" name="TextBox 27"/>
+          <p:cNvSpPr txBox="1"/>
+          <p:nvPr/>
+        </p:nvSpPr>
+        <p:spPr>
+          <a:xfrm>
+            <a:off x="5864976" y="4041648"/>
+            <a:ext cx="1767058" cy="457200"/>
+          </a:xfrm>
+          <a:prstGeom prst="rect">
+            <a:avLst/>
+          </a:prstGeom>
+          <a:noFill/>
+        </p:spPr>
+        <p:txBody>
+          <a:bodyPr wrap="square" lIns="0" rIns="0">
+            <a:spAutoFit/>
+          </a:bodyPr>
+          <a:lstStyle/>
+          <a:p>
+            <a:pPr algn="l">
+              <a:lnSpc>
+                <a:spcPct val="115000"/>
+              </a:lnSpc>
+              <a:spcAft>
+                <a:spcPts val="600"/>
+              </a:spcAft>
+            </a:pPr>
+            <a:r>
+              <a:rPr sz="1200" b="0">
+                <a:solidFill>
+                  <a:srgbClr val="101B33"/>
+                </a:solidFill>
+                <a:latin typeface="Arial"/>
+              </a:rPr>
+              <a:t>0.3204</a:t>
+            </a:r>
+          </a:p>
+        </p:txBody>
+      </p:sp>
+      <p:sp>
+        <p:nvSpPr>
+          <p:cNvPr id="29" name="TextBox 28"/>
+          <p:cNvSpPr txBox="1"/>
+          <p:nvPr/>
+        </p:nvSpPr>
+        <p:spPr>
+          <a:xfrm>
+            <a:off x="7632034" y="4041648"/>
+            <a:ext cx="1767058" cy="457200"/>
+          </a:xfrm>
+          <a:prstGeom prst="rect">
+            <a:avLst/>
+          </a:prstGeom>
+          <a:noFill/>
+        </p:spPr>
+        <p:txBody>
+          <a:bodyPr wrap="square" lIns="0" rIns="0">
+            <a:spAutoFit/>
+          </a:bodyPr>
+          <a:lstStyle/>
+          <a:p>
+            <a:pPr algn="l">
+              <a:lnSpc>
+                <a:spcPct val="115000"/>
+              </a:lnSpc>
+              <a:spcAft>
+                <a:spcPts val="600"/>
+              </a:spcAft>
+            </a:pPr>
+            <a:r>
+              <a:rPr sz="1200" b="0">
+                <a:solidFill>
+                  <a:srgbClr val="101B33"/>
+                </a:solidFill>
+                <a:latin typeface="Arial"/>
+              </a:rPr>
+              <a:t>0.3349</a:t>
+            </a:r>
+          </a:p>
+        </p:txBody>
+      </p:sp>
+      <p:sp>
+        <p:nvSpPr>
+          <p:cNvPr id="30" name="TextBox 29"/>
+          <p:cNvSpPr txBox="1"/>
+          <p:nvPr/>
+        </p:nvSpPr>
+        <p:spPr>
+          <a:xfrm>
+            <a:off x="9399092" y="4041648"/>
+            <a:ext cx="2232073" cy="457200"/>
+          </a:xfrm>
+          <a:prstGeom prst="rect">
+            <a:avLst/>
+          </a:prstGeom>
+          <a:noFill/>
+        </p:spPr>
+        <p:txBody>
+          <a:bodyPr wrap="square" lIns="0" rIns="0">
+            <a:spAutoFit/>
+          </a:bodyPr>
+          <a:lstStyle/>
+          <a:p>
+            <a:pPr algn="l">
+              <a:lnSpc>
+                <a:spcPct val="115000"/>
+              </a:lnSpc>
+              <a:spcAft>
+                <a:spcPts val="600"/>
+              </a:spcAft>
+            </a:pPr>
+            <a:r>
+              <a:rPr sz="1200" b="0">
+                <a:solidFill>
+                  <a:srgbClr val="101B33"/>
+                </a:solidFill>
+                <a:latin typeface="Arial"/>
+              </a:rPr>
+              <a:t>+0.0145 (+4.5%)</a:t>
+            </a:r>
+          </a:p>
+        </p:txBody>
+      </p:sp>
+      <p:sp>
+        <p:nvSpPr>
+          <p:cNvPr id="31" name="Rectangle 30"/>
           <p:cNvSpPr/>
           <p:nvPr/>
         </p:nvSpPr>
         <p:spPr>
           <a:xfrm>
-            <a:off x="6355080" y="1371600"/>
-            <a:ext cx="64008" cy="4480560"/>
+            <a:off x="640080" y="4434840"/>
+            <a:ext cx="10881360" cy="457200"/>
           </a:xfrm>
           <a:prstGeom prst="rect">
             <a:avLst/>
           </a:prstGeom>
           <a:solidFill>
-            <a:srgbClr val="18A099"/>
+            <a:srgbClr val="FFFFFF"/>
           </a:solidFill>
           <a:ln>
             <a:noFill/>
@@ -7849,66 +7880,252 @@
       </p:sp>
       <p:sp>
         <p:nvSpPr>
-          <p:cNvPr id="11" name="TextBox 10"/>
-          <p:cNvSpPr txBox="1"/>
-          <p:nvPr/>
-        </p:nvSpPr>
-        <p:spPr>
-          <a:xfrm>
-            <a:off x="6611112" y="1536192"/>
-            <a:ext cx="4892040" cy="4480560"/>
-          </a:xfrm>
-          <a:prstGeom prst="rect">
-            <a:avLst/>
-          </a:prstGeom>
-          <a:noFill/>
-        </p:spPr>
-        <p:txBody>
-          <a:bodyPr wrap="square" lIns="0" rIns="0">
-            <a:spAutoFit/>
-          </a:bodyPr>
-          <a:lstStyle/>
-          <a:p>
-            <a:pPr algn="l">
-              <a:lnSpc>
-                <a:spcPct val="115000"/>
-              </a:lnSpc>
-              <a:spcAft>
-                <a:spcPts val="600"/>
-              </a:spcAft>
-            </a:pPr>
-            <a:r>
-              <a:rPr sz="1600" b="1">
+          <p:cNvPr id="32" name="TextBox 31"/>
+          <p:cNvSpPr txBox="1"/>
+          <p:nvPr/>
+        </p:nvSpPr>
+        <p:spPr>
+          <a:xfrm>
+            <a:off x="749808" y="4498848"/>
+            <a:ext cx="3348110" cy="457200"/>
+          </a:xfrm>
+          <a:prstGeom prst="rect">
+            <a:avLst/>
+          </a:prstGeom>
+          <a:noFill/>
+        </p:spPr>
+        <p:txBody>
+          <a:bodyPr wrap="square" lIns="0" rIns="0">
+            <a:spAutoFit/>
+          </a:bodyPr>
+          <a:lstStyle/>
+          <a:p>
+            <a:pPr algn="l">
+              <a:lnSpc>
+                <a:spcPct val="115000"/>
+              </a:lnSpc>
+              <a:spcAft>
+                <a:spcPts val="600"/>
+              </a:spcAft>
+            </a:pPr>
+            <a:r>
+              <a:rPr sz="1200" b="0">
                 <a:solidFill>
                   <a:srgbClr val="101B33"/>
                 </a:solidFill>
                 <a:latin typeface="Arial"/>
               </a:rPr>
-              <a:t>HƯỚNG PHÁT TRIỂN</a:t>
-            </a:r>
-          </a:p>
-          <a:p>
-            <a:pPr algn="l">
-              <a:lnSpc>
-                <a:spcPct val="115000"/>
-              </a:lnSpc>
-              <a:spcAft>
-                <a:spcPts val="600"/>
-              </a:spcAft>
-            </a:pPr>
-            <a:r>
-              <a:rPr sz="1300" b="0">
+              <a:t>Trời quang (đối chứng) · mAP50-95</a:t>
+            </a:r>
+          </a:p>
+        </p:txBody>
+      </p:sp>
+      <p:sp>
+        <p:nvSpPr>
+          <p:cNvPr id="33" name="TextBox 32"/>
+          <p:cNvSpPr txBox="1"/>
+          <p:nvPr/>
+        </p:nvSpPr>
+        <p:spPr>
+          <a:xfrm>
+            <a:off x="4097918" y="4498848"/>
+            <a:ext cx="1767058" cy="457200"/>
+          </a:xfrm>
+          <a:prstGeom prst="rect">
+            <a:avLst/>
+          </a:prstGeom>
+          <a:noFill/>
+        </p:spPr>
+        <p:txBody>
+          <a:bodyPr wrap="square" lIns="0" rIns="0">
+            <a:spAutoFit/>
+          </a:bodyPr>
+          <a:lstStyle/>
+          <a:p>
+            <a:pPr algn="l">
+              <a:lnSpc>
+                <a:spcPct val="115000"/>
+              </a:lnSpc>
+              <a:spcAft>
+                <a:spcPts val="600"/>
+              </a:spcAft>
+            </a:pPr>
+            <a:r>
+              <a:rPr sz="1200" b="0">
+                <a:solidFill>
+                  <a:srgbClr val="101B33"/>
+                </a:solidFill>
+                <a:latin typeface="Arial"/>
+              </a:rPr>
+              <a:t>0.1727</a:t>
+            </a:r>
+          </a:p>
+        </p:txBody>
+      </p:sp>
+      <p:sp>
+        <p:nvSpPr>
+          <p:cNvPr id="34" name="TextBox 33"/>
+          <p:cNvSpPr txBox="1"/>
+          <p:nvPr/>
+        </p:nvSpPr>
+        <p:spPr>
+          <a:xfrm>
+            <a:off x="5864976" y="4498848"/>
+            <a:ext cx="1767058" cy="457200"/>
+          </a:xfrm>
+          <a:prstGeom prst="rect">
+            <a:avLst/>
+          </a:prstGeom>
+          <a:noFill/>
+        </p:spPr>
+        <p:txBody>
+          <a:bodyPr wrap="square" lIns="0" rIns="0">
+            <a:spAutoFit/>
+          </a:bodyPr>
+          <a:lstStyle/>
+          <a:p>
+            <a:pPr algn="l">
+              <a:lnSpc>
+                <a:spcPct val="115000"/>
+              </a:lnSpc>
+              <a:spcAft>
+                <a:spcPts val="600"/>
+              </a:spcAft>
+            </a:pPr>
+            <a:r>
+              <a:rPr sz="1200" b="0">
+                <a:solidFill>
+                  <a:srgbClr val="101B33"/>
+                </a:solidFill>
+                <a:latin typeface="Arial"/>
+              </a:rPr>
+              <a:t>0.1797</a:t>
+            </a:r>
+          </a:p>
+        </p:txBody>
+      </p:sp>
+      <p:sp>
+        <p:nvSpPr>
+          <p:cNvPr id="35" name="TextBox 34"/>
+          <p:cNvSpPr txBox="1"/>
+          <p:nvPr/>
+        </p:nvSpPr>
+        <p:spPr>
+          <a:xfrm>
+            <a:off x="7632034" y="4498848"/>
+            <a:ext cx="1767058" cy="457200"/>
+          </a:xfrm>
+          <a:prstGeom prst="rect">
+            <a:avLst/>
+          </a:prstGeom>
+          <a:noFill/>
+        </p:spPr>
+        <p:txBody>
+          <a:bodyPr wrap="square" lIns="0" rIns="0">
+            <a:spAutoFit/>
+          </a:bodyPr>
+          <a:lstStyle/>
+          <a:p>
+            <a:pPr algn="l">
+              <a:lnSpc>
+                <a:spcPct val="115000"/>
+              </a:lnSpc>
+              <a:spcAft>
+                <a:spcPts val="600"/>
+              </a:spcAft>
+            </a:pPr>
+            <a:r>
+              <a:rPr sz="1200" b="0">
+                <a:solidFill>
+                  <a:srgbClr val="101B33"/>
+                </a:solidFill>
+                <a:latin typeface="Arial"/>
+              </a:rPr>
+              <a:t>0.1877</a:t>
+            </a:r>
+          </a:p>
+        </p:txBody>
+      </p:sp>
+      <p:sp>
+        <p:nvSpPr>
+          <p:cNvPr id="36" name="TextBox 35"/>
+          <p:cNvSpPr txBox="1"/>
+          <p:nvPr/>
+        </p:nvSpPr>
+        <p:spPr>
+          <a:xfrm>
+            <a:off x="9399092" y="4498848"/>
+            <a:ext cx="2232073" cy="457200"/>
+          </a:xfrm>
+          <a:prstGeom prst="rect">
+            <a:avLst/>
+          </a:prstGeom>
+          <a:noFill/>
+        </p:spPr>
+        <p:txBody>
+          <a:bodyPr wrap="square" lIns="0" rIns="0">
+            <a:spAutoFit/>
+          </a:bodyPr>
+          <a:lstStyle/>
+          <a:p>
+            <a:pPr algn="l">
+              <a:lnSpc>
+                <a:spcPct val="115000"/>
+              </a:lnSpc>
+              <a:spcAft>
+                <a:spcPts val="600"/>
+              </a:spcAft>
+            </a:pPr>
+            <a:r>
+              <a:rPr sz="1200" b="0">
+                <a:solidFill>
+                  <a:srgbClr val="101B33"/>
+                </a:solidFill>
+                <a:latin typeface="Arial"/>
+              </a:rPr>
+              <a:t>+0.0080 (+4.5%)</a:t>
+            </a:r>
+          </a:p>
+        </p:txBody>
+      </p:sp>
+      <p:sp>
+        <p:nvSpPr>
+          <p:cNvPr id="37" name="TextBox 36"/>
+          <p:cNvSpPr txBox="1"/>
+          <p:nvPr/>
+        </p:nvSpPr>
+        <p:spPr>
+          <a:xfrm>
+            <a:off x="640080" y="5760720"/>
+            <a:ext cx="10881360" cy="822960"/>
+          </a:xfrm>
+          <a:prstGeom prst="rect">
+            <a:avLst/>
+          </a:prstGeom>
+          <a:noFill/>
+        </p:spPr>
+        <p:txBody>
+          <a:bodyPr wrap="square" lIns="0" rIns="0">
+            <a:spAutoFit/>
+          </a:bodyPr>
+          <a:lstStyle/>
+          <a:p>
+            <a:pPr algn="l">
+              <a:lnSpc>
+                <a:spcPct val="115000"/>
+              </a:lnSpc>
+              <a:spcAft>
+                <a:spcPts val="600"/>
+              </a:spcAft>
+            </a:pPr>
+            <a:r>
+              <a:rPr sz="1400" b="0">
                 <a:solidFill>
                   <a:srgbClr val="5A6375"/>
                 </a:solidFill>
                 <a:latin typeface="Arial"/>
               </a:rPr>
-              <a:t>
-· Thêm mặt nạ phân vùng trời / đường để đổi tông theo từng vùng.
-· Dùng mô hình ước lượng độ sâu đơn ảnh (Depth Anything) thay cho giả thiết phẳng.
-· Thay AdaIN bằng AdaAttN / WCT² để bám cấu trúc tốt hơn.
-· Thu thập ảnh tham chiếu thời tiết tại Việt Nam để khớp bối cảnh triển khai thực tế.
-· Mở rộng sang ban đêm, chói nắng ngược, đèn pha.</a:t>
+              <a:t>Hàng 'trời quang' là đối chứng: xác nhận việc thêm dữ liệu tăng cường không làm mô hình kém đi trên điều kiện bình thường.</a:t>
             </a:r>
           </a:p>
         </p:txBody>
@@ -7983,8 +8200,52 @@
         </p:nvSpPr>
         <p:spPr>
           <a:xfrm>
-            <a:off x="914400" y="1371600"/>
-            <a:ext cx="73152" cy="4206240"/>
+            <a:off x="0" y="0"/>
+            <a:ext cx="12191695" cy="914400"/>
+          </a:xfrm>
+          <a:prstGeom prst="rect">
+            <a:avLst/>
+          </a:prstGeom>
+          <a:solidFill>
+            <a:srgbClr val="0A1224"/>
+          </a:solidFill>
+          <a:ln>
+            <a:noFill/>
+          </a:ln>
+          <a:effectLst/>
+        </p:spPr>
+        <p:style>
+          <a:lnRef idx="1">
+            <a:schemeClr val="accent1"/>
+          </a:lnRef>
+          <a:fillRef idx="3">
+            <a:schemeClr val="accent1"/>
+          </a:fillRef>
+          <a:effectRef idx="2">
+            <a:schemeClr val="accent1"/>
+          </a:effectRef>
+          <a:fontRef idx="minor">
+            <a:schemeClr val="lt1"/>
+          </a:fontRef>
+        </p:style>
+        <p:txBody>
+          <a:bodyPr rtlCol="0" anchor="ctr"/>
+          <a:lstStyle/>
+          <a:p>
+            <a:pPr algn="ctr"/>
+          </a:p>
+        </p:txBody>
+      </p:sp>
+      <p:sp>
+        <p:nvSpPr>
+          <p:cNvPr id="4" name="Rectangle 3"/>
+          <p:cNvSpPr/>
+          <p:nvPr/>
+        </p:nvSpPr>
+        <p:spPr>
+          <a:xfrm>
+            <a:off x="0" y="914400"/>
+            <a:ext cx="12191695" cy="45720"/>
           </a:xfrm>
           <a:prstGeom prst="rect">
             <a:avLst/>
@@ -8021,112 +8282,160 @@
       </p:sp>
       <p:sp>
         <p:nvSpPr>
-          <p:cNvPr id="4" name="TextBox 3"/>
-          <p:cNvSpPr txBox="1"/>
-          <p:nvPr/>
-        </p:nvSpPr>
-        <p:spPr>
-          <a:xfrm>
-            <a:off x="1280160" y="1371600"/>
-            <a:ext cx="10058400" cy="4389120"/>
-          </a:xfrm>
-          <a:prstGeom prst="rect">
-            <a:avLst/>
-          </a:prstGeom>
-          <a:noFill/>
-        </p:spPr>
-        <p:txBody>
-          <a:bodyPr wrap="square" lIns="0" rIns="0">
-            <a:spAutoFit/>
-          </a:bodyPr>
-          <a:lstStyle/>
-          <a:p>
-            <a:pPr algn="l">
-              <a:lnSpc>
-                <a:spcPct val="115000"/>
-              </a:lnSpc>
-              <a:spcAft>
-                <a:spcPts val="600"/>
-              </a:spcAft>
-            </a:pPr>
-            <a:r>
-              <a:rPr sz="3400" b="1">
+          <p:cNvPr id="5" name="TextBox 4"/>
+          <p:cNvSpPr txBox="1"/>
+          <p:nvPr/>
+        </p:nvSpPr>
+        <p:spPr>
+          <a:xfrm>
+            <a:off x="731520" y="182880"/>
+            <a:ext cx="10698480" cy="640080"/>
+          </a:xfrm>
+          <a:prstGeom prst="rect">
+            <a:avLst/>
+          </a:prstGeom>
+          <a:noFill/>
+        </p:spPr>
+        <p:txBody>
+          <a:bodyPr wrap="square" lIns="0" rIns="0">
+            <a:spAutoFit/>
+          </a:bodyPr>
+          <a:lstStyle/>
+          <a:p>
+            <a:pPr algn="l">
+              <a:lnSpc>
+                <a:spcPct val="115000"/>
+              </a:lnSpc>
+              <a:spcAft>
+                <a:spcPts val="600"/>
+              </a:spcAft>
+            </a:pPr>
+            <a:r>
+              <a:rPr sz="3000" b="1">
                 <a:solidFill>
                   <a:srgbClr val="FFFFFF"/>
                 </a:solidFill>
                 <a:latin typeface="Arial"/>
               </a:rPr>
-              <a:t>KẾT LUẬN</a:t>
-            </a:r>
-          </a:p>
-          <a:p>
-            <a:pPr algn="l">
-              <a:lnSpc>
-                <a:spcPct val="115000"/>
-              </a:lnSpc>
-              <a:spcAft>
-                <a:spcPts val="600"/>
-              </a:spcAft>
-            </a:pPr>
-            <a:r>
-              <a:rPr sz="1000" b="0">
-                <a:solidFill>
-                  <a:srgbClr val="FFFFFF"/>
-                </a:solidFill>
-                <a:latin typeface="Arial"/>
-              </a:rPr>
-              <a:t/>
-            </a:r>
-          </a:p>
-          <a:p>
-            <a:pPr algn="l">
-              <a:lnSpc>
-                <a:spcPct val="115000"/>
-              </a:lnSpc>
-              <a:spcAft>
-                <a:spcPts val="600"/>
-              </a:spcAft>
-            </a:pPr>
-            <a:r>
-              <a:rPr sz="1800" b="0">
+              <a:t>KẾT LUẬN &amp; HƯỚNG PHÁT TRIỂN</a:t>
+            </a:r>
+          </a:p>
+        </p:txBody>
+      </p:sp>
+      <p:sp>
+        <p:nvSpPr>
+          <p:cNvPr id="6" name="Rectangle 5"/>
+          <p:cNvSpPr/>
+          <p:nvPr/>
+        </p:nvSpPr>
+        <p:spPr>
+          <a:xfrm>
+            <a:off x="640080" y="1234440"/>
+            <a:ext cx="54864" cy="2651760"/>
+          </a:xfrm>
+          <a:prstGeom prst="rect">
+            <a:avLst/>
+          </a:prstGeom>
+          <a:solidFill>
+            <a:srgbClr val="18A099"/>
+          </a:solidFill>
+          <a:ln>
+            <a:noFill/>
+          </a:ln>
+          <a:effectLst/>
+        </p:spPr>
+        <p:style>
+          <a:lnRef idx="1">
+            <a:schemeClr val="accent1"/>
+          </a:lnRef>
+          <a:fillRef idx="3">
+            <a:schemeClr val="accent1"/>
+          </a:fillRef>
+          <a:effectRef idx="2">
+            <a:schemeClr val="accent1"/>
+          </a:effectRef>
+          <a:fontRef idx="minor">
+            <a:schemeClr val="lt1"/>
+          </a:fontRef>
+        </p:style>
+        <p:txBody>
+          <a:bodyPr rtlCol="0" anchor="ctr"/>
+          <a:lstStyle/>
+          <a:p>
+            <a:pPr algn="ctr"/>
+          </a:p>
+        </p:txBody>
+      </p:sp>
+      <p:sp>
+        <p:nvSpPr>
+          <p:cNvPr id="7" name="TextBox 6"/>
+          <p:cNvSpPr txBox="1"/>
+          <p:nvPr/>
+        </p:nvSpPr>
+        <p:spPr>
+          <a:xfrm>
+            <a:off x="868680" y="1188720"/>
+            <a:ext cx="10607040" cy="2743200"/>
+          </a:xfrm>
+          <a:prstGeom prst="rect">
+            <a:avLst/>
+          </a:prstGeom>
+          <a:noFill/>
+        </p:spPr>
+        <p:txBody>
+          <a:bodyPr wrap="square" lIns="0" rIns="0">
+            <a:spAutoFit/>
+          </a:bodyPr>
+          <a:lstStyle/>
+          <a:p>
+            <a:pPr algn="l">
+              <a:lnSpc>
+                <a:spcPct val="122000"/>
+              </a:lnSpc>
+              <a:spcAft>
+                <a:spcPts val="600"/>
+              </a:spcAft>
+            </a:pPr>
+            <a:r>
+              <a:rPr sz="1600" b="0">
                 <a:solidFill>
                   <a:srgbClr val="D5DEEC"/>
                 </a:solidFill>
                 <a:latin typeface="Arial"/>
               </a:rPr>
-              <a:t>· Xây dựng trọn vẹn pipeline sinh ảnh giao thông thời tiết xấu từ 2 ảnh đầu vào, đúng yêu cầu đề bài.</a:t>
-            </a:r>
-          </a:p>
-          <a:p>
-            <a:pPr algn="l">
-              <a:lnSpc>
-                <a:spcPct val="115000"/>
-              </a:lnSpc>
-              <a:spcAft>
-                <a:spcPts val="600"/>
-              </a:spcAft>
-            </a:pPr>
-            <a:r>
-              <a:rPr sz="1800" b="0">
+              <a:t>· Pipeline hoàn chỉnh sinh ảnh thời tiết xấu từ 2 ảnh đầu vào, đúng yêu cầu đề bài.</a:t>
+            </a:r>
+          </a:p>
+          <a:p>
+            <a:pPr algn="l">
+              <a:lnSpc>
+                <a:spcPct val="122000"/>
+              </a:lnSpc>
+              <a:spcAft>
+                <a:spcPts val="600"/>
+              </a:spcAft>
+            </a:pPr>
+            <a:r>
+              <a:rPr sz="1600" b="0">
                 <a:solidFill>
                   <a:srgbClr val="D5DEEC"/>
                 </a:solidFill>
                 <a:latin typeface="Arial"/>
               </a:rPr>
-              <a:t>· Toàn bộ dùng mã nguồn mở; decoder chỉ 3,51 M tham số, huấn luyện 37 phút trên 1 GPU.</a:t>
-            </a:r>
-          </a:p>
-          <a:p>
-            <a:pPr algn="l">
-              <a:lnSpc>
-                <a:spcPct val="115000"/>
-              </a:lnSpc>
-              <a:spcAft>
-                <a:spcPts val="600"/>
-              </a:spcAft>
-            </a:pPr>
-            <a:r>
-              <a:rPr sz="1800" b="0">
+              <a:t>· Mã nguồn mở; chỉ 3,51 M tham số được học, huấn luyện 37 phút trên 1 GPU tiêu dùng.</a:t>
+            </a:r>
+          </a:p>
+          <a:p>
+            <a:pPr algn="l">
+              <a:lnSpc>
+                <a:spcPct val="122000"/>
+              </a:lnSpc>
+              <a:spcAft>
+                <a:spcPts val="600"/>
+              </a:spcAft>
+            </a:pPr>
+            <a:r>
+              <a:rPr sz="1600" b="0">
                 <a:solidFill>
                   <a:srgbClr val="D5DEEC"/>
                 </a:solidFill>
@@ -8138,90 +8447,379 @@
           <a:p>
             <a:pPr algn="l">
               <a:lnSpc>
-                <a:spcPct val="115000"/>
-              </a:lnSpc>
-              <a:spcAft>
-                <a:spcPts val="600"/>
-              </a:spcAft>
-            </a:pPr>
-            <a:r>
-              <a:rPr sz="1800" b="0">
+                <a:spcPct val="122000"/>
+              </a:lnSpc>
+              <a:spcAft>
+                <a:spcPts val="600"/>
+              </a:spcAft>
+            </a:pPr>
+            <a:r>
+              <a:rPr sz="1600" b="0">
                 <a:solidFill>
                   <a:srgbClr val="D5DEEC"/>
                 </a:solidFill>
                 <a:latin typeface="Arial"/>
               </a:rPr>
-              <a:t>· Có kiểm chứng định lượng (SSIM/EdgeRecall/FID) và thí nghiệm downstream với YOLOv8.</a:t>
-            </a:r>
-          </a:p>
-          <a:p>
-            <a:pPr algn="l">
-              <a:lnSpc>
-                <a:spcPct val="115000"/>
-              </a:lnSpc>
-              <a:spcAft>
-                <a:spcPts val="600"/>
-              </a:spcAft>
-            </a:pPr>
-            <a:r>
-              <a:rPr sz="1800" b="0">
+              <a:t>· Kiểm chứng bằng thí nghiệm thật: mAP50 trên ảnh thời tiết xấu thật tăng +6,2%.</a:t>
+            </a:r>
+          </a:p>
+          <a:p>
+            <a:pPr algn="l">
+              <a:lnSpc>
+                <a:spcPct val="122000"/>
+              </a:lnSpc>
+              <a:spcAft>
+                <a:spcPts val="600"/>
+              </a:spcAft>
+            </a:pPr>
+            <a:r>
+              <a:rPr sz="1600" b="0">
                 <a:solidFill>
                   <a:srgbClr val="D5DEEC"/>
                 </a:solidFill>
                 <a:latin typeface="Arial"/>
               </a:rPr>
-              <a:t>· Bàn giao: mã nguồn chạy được bằng 1 lệnh, web demo Gradio, mô hình đã huấn luyện,</a:t>
-            </a:r>
-          </a:p>
-          <a:p>
-            <a:pPr algn="l">
-              <a:lnSpc>
-                <a:spcPct val="115000"/>
-              </a:lnSpc>
-              <a:spcAft>
-                <a:spcPts val="600"/>
-              </a:spcAft>
-            </a:pPr>
-            <a:r>
-              <a:rPr sz="1800" b="0">
-                <a:solidFill>
-                  <a:srgbClr val="D5DEEC"/>
-                </a:solidFill>
-                <a:latin typeface="Arial"/>
-              </a:rPr>
-              <a:t>   báo cáo và slide — toàn bộ số liệu sinh tự động từ kết quả thật.</a:t>
-            </a:r>
-          </a:p>
-          <a:p>
-            <a:pPr algn="l">
-              <a:lnSpc>
-                <a:spcPct val="115000"/>
-              </a:lnSpc>
-              <a:spcAft>
-                <a:spcPts val="600"/>
-              </a:spcAft>
-            </a:pPr>
-            <a:r>
-              <a:rPr sz="1000" b="0">
-                <a:solidFill>
-                  <a:srgbClr val="FFFFFF"/>
-                </a:solidFill>
-                <a:latin typeface="Arial"/>
-              </a:rPr>
-              <a:t/>
-            </a:r>
-          </a:p>
-          <a:p>
-            <a:pPr algn="l">
-              <a:lnSpc>
-                <a:spcPct val="115000"/>
-              </a:lnSpc>
-              <a:spcAft>
-                <a:spcPts val="600"/>
-              </a:spcAft>
-            </a:pPr>
-            <a:r>
-              <a:rPr sz="2400" b="1">
+              <a:t>· Bàn giao mã nguồn chạy bằng 1 lệnh, web demo Gradio, báo cáo và slide.</a:t>
+            </a:r>
+          </a:p>
+        </p:txBody>
+      </p:sp>
+      <p:sp>
+        <p:nvSpPr>
+          <p:cNvPr id="8" name="Rectangle 7"/>
+          <p:cNvSpPr/>
+          <p:nvPr/>
+        </p:nvSpPr>
+        <p:spPr>
+          <a:xfrm>
+            <a:off x="640080" y="4114800"/>
+            <a:ext cx="5349240" cy="1920240"/>
+          </a:xfrm>
+          <a:prstGeom prst="rect">
+            <a:avLst/>
+          </a:prstGeom>
+          <a:solidFill>
+            <a:srgbClr val="16223C"/>
+          </a:solidFill>
+          <a:ln>
+            <a:noFill/>
+          </a:ln>
+          <a:effectLst/>
+        </p:spPr>
+        <p:style>
+          <a:lnRef idx="1">
+            <a:schemeClr val="accent1"/>
+          </a:lnRef>
+          <a:fillRef idx="3">
+            <a:schemeClr val="accent1"/>
+          </a:fillRef>
+          <a:effectRef idx="2">
+            <a:schemeClr val="accent1"/>
+          </a:effectRef>
+          <a:fontRef idx="minor">
+            <a:schemeClr val="lt1"/>
+          </a:fontRef>
+        </p:style>
+        <p:txBody>
+          <a:bodyPr rtlCol="0" anchor="ctr"/>
+          <a:lstStyle/>
+          <a:p>
+            <a:pPr algn="ctr"/>
+          </a:p>
+        </p:txBody>
+      </p:sp>
+      <p:sp>
+        <p:nvSpPr>
+          <p:cNvPr id="9" name="Rectangle 8"/>
+          <p:cNvSpPr/>
+          <p:nvPr/>
+        </p:nvSpPr>
+        <p:spPr>
+          <a:xfrm>
+            <a:off x="640080" y="4114800"/>
+            <a:ext cx="54864" cy="1920240"/>
+          </a:xfrm>
+          <a:prstGeom prst="rect">
+            <a:avLst/>
+          </a:prstGeom>
+          <a:solidFill>
+            <a:srgbClr val="E45A5A"/>
+          </a:solidFill>
+          <a:ln>
+            <a:noFill/>
+          </a:ln>
+          <a:effectLst/>
+        </p:spPr>
+        <p:style>
+          <a:lnRef idx="1">
+            <a:schemeClr val="accent1"/>
+          </a:lnRef>
+          <a:fillRef idx="3">
+            <a:schemeClr val="accent1"/>
+          </a:fillRef>
+          <a:effectRef idx="2">
+            <a:schemeClr val="accent1"/>
+          </a:effectRef>
+          <a:fontRef idx="minor">
+            <a:schemeClr val="lt1"/>
+          </a:fontRef>
+        </p:style>
+        <p:txBody>
+          <a:bodyPr rtlCol="0" anchor="ctr"/>
+          <a:lstStyle/>
+          <a:p>
+            <a:pPr algn="ctr"/>
+          </a:p>
+        </p:txBody>
+      </p:sp>
+      <p:sp>
+        <p:nvSpPr>
+          <p:cNvPr id="10" name="TextBox 9"/>
+          <p:cNvSpPr txBox="1"/>
+          <p:nvPr/>
+        </p:nvSpPr>
+        <p:spPr>
+          <a:xfrm>
+            <a:off x="868680" y="4251960"/>
+            <a:ext cx="4937760" cy="1783080"/>
+          </a:xfrm>
+          <a:prstGeom prst="rect">
+            <a:avLst/>
+          </a:prstGeom>
+          <a:noFill/>
+        </p:spPr>
+        <p:txBody>
+          <a:bodyPr wrap="square" lIns="0" rIns="0">
+            <a:spAutoFit/>
+          </a:bodyPr>
+          <a:lstStyle/>
+          <a:p>
+            <a:pPr algn="l">
+              <a:lnSpc>
+                <a:spcPct val="115000"/>
+              </a:lnSpc>
+              <a:spcAft>
+                <a:spcPts val="600"/>
+              </a:spcAft>
+            </a:pPr>
+            <a:r>
+              <a:rPr sz="1400" b="1">
+                <a:solidFill>
+                  <a:srgbClr val="E45A5A"/>
+                </a:solidFill>
+                <a:latin typeface="Arial"/>
+              </a:rPr>
+              <a:t>HẠN CHẾ</a:t>
+            </a:r>
+          </a:p>
+          <a:p>
+            <a:pPr algn="l">
+              <a:lnSpc>
+                <a:spcPct val="115000"/>
+              </a:lnSpc>
+              <a:spcAft>
+                <a:spcPts val="600"/>
+              </a:spcAft>
+            </a:pPr>
+            <a:r>
+              <a:rPr sz="1200" b="0">
+                <a:solidFill>
+                  <a:srgbClr val="B6C2D9"/>
+                </a:solidFill>
+                <a:latin typeface="Arial"/>
+              </a:rPr>
+              <a:t>· AdaIN chuyển thống kê TOÀN CỤC, chưa phân biệt vùng trời / mặt đường.
+· Không có bản đồ độ sâu thật; module vật lý giả thiết mặt đường phẳng.
+· Lớp phủ hạt làm giảm FID trên ảnh dashcam.
+· DAWN chỉ dùng cho nghiên cứu, không dùng thương mại.</a:t>
+            </a:r>
+          </a:p>
+        </p:txBody>
+      </p:sp>
+      <p:sp>
+        <p:nvSpPr>
+          <p:cNvPr id="11" name="Rectangle 10"/>
+          <p:cNvSpPr/>
+          <p:nvPr/>
+        </p:nvSpPr>
+        <p:spPr>
+          <a:xfrm>
+            <a:off x="6355080" y="4114800"/>
+            <a:ext cx="5349240" cy="1920240"/>
+          </a:xfrm>
+          <a:prstGeom prst="rect">
+            <a:avLst/>
+          </a:prstGeom>
+          <a:solidFill>
+            <a:srgbClr val="16223C"/>
+          </a:solidFill>
+          <a:ln>
+            <a:noFill/>
+          </a:ln>
+          <a:effectLst/>
+        </p:spPr>
+        <p:style>
+          <a:lnRef idx="1">
+            <a:schemeClr val="accent1"/>
+          </a:lnRef>
+          <a:fillRef idx="3">
+            <a:schemeClr val="accent1"/>
+          </a:fillRef>
+          <a:effectRef idx="2">
+            <a:schemeClr val="accent1"/>
+          </a:effectRef>
+          <a:fontRef idx="minor">
+            <a:schemeClr val="lt1"/>
+          </a:fontRef>
+        </p:style>
+        <p:txBody>
+          <a:bodyPr rtlCol="0" anchor="ctr"/>
+          <a:lstStyle/>
+          <a:p>
+            <a:pPr algn="ctr"/>
+          </a:p>
+        </p:txBody>
+      </p:sp>
+      <p:sp>
+        <p:nvSpPr>
+          <p:cNvPr id="12" name="Rectangle 11"/>
+          <p:cNvSpPr/>
+          <p:nvPr/>
+        </p:nvSpPr>
+        <p:spPr>
+          <a:xfrm>
+            <a:off x="6355080" y="4114800"/>
+            <a:ext cx="54864" cy="1920240"/>
+          </a:xfrm>
+          <a:prstGeom prst="rect">
+            <a:avLst/>
+          </a:prstGeom>
+          <a:solidFill>
+            <a:srgbClr val="18A099"/>
+          </a:solidFill>
+          <a:ln>
+            <a:noFill/>
+          </a:ln>
+          <a:effectLst/>
+        </p:spPr>
+        <p:style>
+          <a:lnRef idx="1">
+            <a:schemeClr val="accent1"/>
+          </a:lnRef>
+          <a:fillRef idx="3">
+            <a:schemeClr val="accent1"/>
+          </a:fillRef>
+          <a:effectRef idx="2">
+            <a:schemeClr val="accent1"/>
+          </a:effectRef>
+          <a:fontRef idx="minor">
+            <a:schemeClr val="lt1"/>
+          </a:fontRef>
+        </p:style>
+        <p:txBody>
+          <a:bodyPr rtlCol="0" anchor="ctr"/>
+          <a:lstStyle/>
+          <a:p>
+            <a:pPr algn="ctr"/>
+          </a:p>
+        </p:txBody>
+      </p:sp>
+      <p:sp>
+        <p:nvSpPr>
+          <p:cNvPr id="13" name="TextBox 12"/>
+          <p:cNvSpPr txBox="1"/>
+          <p:nvPr/>
+        </p:nvSpPr>
+        <p:spPr>
+          <a:xfrm>
+            <a:off x="6583680" y="4251960"/>
+            <a:ext cx="4937760" cy="1783080"/>
+          </a:xfrm>
+          <a:prstGeom prst="rect">
+            <a:avLst/>
+          </a:prstGeom>
+          <a:noFill/>
+        </p:spPr>
+        <p:txBody>
+          <a:bodyPr wrap="square" lIns="0" rIns="0">
+            <a:spAutoFit/>
+          </a:bodyPr>
+          <a:lstStyle/>
+          <a:p>
+            <a:pPr algn="l">
+              <a:lnSpc>
+                <a:spcPct val="115000"/>
+              </a:lnSpc>
+              <a:spcAft>
+                <a:spcPts val="600"/>
+              </a:spcAft>
+            </a:pPr>
+            <a:r>
+              <a:rPr sz="1400" b="1">
+                <a:solidFill>
+                  <a:srgbClr val="18A099"/>
+                </a:solidFill>
+                <a:latin typeface="Arial"/>
+              </a:rPr>
+              <a:t>HƯỚNG PHÁT TRIỂN</a:t>
+            </a:r>
+          </a:p>
+          <a:p>
+            <a:pPr algn="l">
+              <a:lnSpc>
+                <a:spcPct val="115000"/>
+              </a:lnSpc>
+              <a:spcAft>
+                <a:spcPts val="600"/>
+              </a:spcAft>
+            </a:pPr>
+            <a:r>
+              <a:rPr sz="1200" b="0">
+                <a:solidFill>
+                  <a:srgbClr val="B6C2D9"/>
+                </a:solidFill>
+                <a:latin typeface="Arial"/>
+              </a:rPr>
+              <a:t>· Thêm mặt nạ phân vùng trời / đường để đổi tông theo từng vùng.
+· Dùng mô hình ước lượng độ sâu đơn ảnh (Depth Anything).
+· Thay AdaIN bằng AdaAttN / WCT² để bám cấu trúc tốt hơn.
+· Thu thập ảnh tham chiếu thời tiết tại Việt Nam.</a:t>
+            </a:r>
+          </a:p>
+        </p:txBody>
+      </p:sp>
+      <p:sp>
+        <p:nvSpPr>
+          <p:cNvPr id="14" name="TextBox 13"/>
+          <p:cNvSpPr txBox="1"/>
+          <p:nvPr/>
+        </p:nvSpPr>
+        <p:spPr>
+          <a:xfrm>
+            <a:off x="640080" y="6263640"/>
+            <a:ext cx="10881360" cy="457200"/>
+          </a:xfrm>
+          <a:prstGeom prst="rect">
+            <a:avLst/>
+          </a:prstGeom>
+          <a:noFill/>
+        </p:spPr>
+        <p:txBody>
+          <a:bodyPr wrap="square" lIns="0" rIns="0">
+            <a:spAutoFit/>
+          </a:bodyPr>
+          <a:lstStyle/>
+          <a:p>
+            <a:pPr algn="ctr">
+              <a:lnSpc>
+                <a:spcPct val="115000"/>
+              </a:lnSpc>
+              <a:spcAft>
+                <a:spcPts val="600"/>
+              </a:spcAft>
+            </a:pPr>
+            <a:r>
+              <a:rPr sz="2000" b="1">
                 <a:solidFill>
                   <a:srgbClr val="18A099"/>
                 </a:solidFill>
@@ -12838,7 +13436,7 @@
                 </a:solidFill>
                 <a:latin typeface="Arial"/>
               </a:rPr>
-              <a:t>Huấn luyện</a:t>
+              <a:t>Tiền xử lý dữ liệu &amp; quy trình huấn luyện</a:t>
             </a:r>
           </a:p>
           <a:p>
@@ -12912,8 +13510,610 @@
         </p:nvSpPr>
         <p:spPr>
           <a:xfrm>
-            <a:off x="640080" y="1280160"/>
-            <a:ext cx="5120640" cy="329184"/>
+            <a:off x="640080" y="1234440"/>
+            <a:ext cx="5486400" cy="3429000"/>
+          </a:xfrm>
+          <a:prstGeom prst="rect">
+            <a:avLst/>
+          </a:prstGeom>
+          <a:solidFill>
+            <a:srgbClr val="F4F6FA"/>
+          </a:solidFill>
+          <a:ln>
+            <a:noFill/>
+          </a:ln>
+          <a:effectLst/>
+        </p:spPr>
+        <p:style>
+          <a:lnRef idx="1">
+            <a:schemeClr val="accent1"/>
+          </a:lnRef>
+          <a:fillRef idx="3">
+            <a:schemeClr val="accent1"/>
+          </a:fillRef>
+          <a:effectRef idx="2">
+            <a:schemeClr val="accent1"/>
+          </a:effectRef>
+          <a:fontRef idx="minor">
+            <a:schemeClr val="lt1"/>
+          </a:fontRef>
+        </p:style>
+        <p:txBody>
+          <a:bodyPr rtlCol="0" anchor="ctr"/>
+          <a:lstStyle/>
+          <a:p>
+            <a:pPr algn="ctr"/>
+          </a:p>
+        </p:txBody>
+      </p:sp>
+      <p:sp>
+        <p:nvSpPr>
+          <p:cNvPr id="7" name="Rectangle 6"/>
+          <p:cNvSpPr/>
+          <p:nvPr/>
+        </p:nvSpPr>
+        <p:spPr>
+          <a:xfrm>
+            <a:off x="640080" y="1234440"/>
+            <a:ext cx="5486400" cy="73152"/>
+          </a:xfrm>
+          <a:prstGeom prst="rect">
+            <a:avLst/>
+          </a:prstGeom>
+          <a:solidFill>
+            <a:srgbClr val="2E6FD9"/>
+          </a:solidFill>
+          <a:ln>
+            <a:noFill/>
+          </a:ln>
+          <a:effectLst/>
+        </p:spPr>
+        <p:style>
+          <a:lnRef idx="1">
+            <a:schemeClr val="accent1"/>
+          </a:lnRef>
+          <a:fillRef idx="3">
+            <a:schemeClr val="accent1"/>
+          </a:fillRef>
+          <a:effectRef idx="2">
+            <a:schemeClr val="accent1"/>
+          </a:effectRef>
+          <a:fontRef idx="minor">
+            <a:schemeClr val="lt1"/>
+          </a:fontRef>
+        </p:style>
+        <p:txBody>
+          <a:bodyPr rtlCol="0" anchor="ctr"/>
+          <a:lstStyle/>
+          <a:p>
+            <a:pPr algn="ctr"/>
+          </a:p>
+        </p:txBody>
+      </p:sp>
+      <p:sp>
+        <p:nvSpPr>
+          <p:cNvPr id="8" name="TextBox 7"/>
+          <p:cNvSpPr txBox="1"/>
+          <p:nvPr/>
+        </p:nvSpPr>
+        <p:spPr>
+          <a:xfrm>
+            <a:off x="868680" y="1371600"/>
+            <a:ext cx="5120640" cy="3200400"/>
+          </a:xfrm>
+          <a:prstGeom prst="rect">
+            <a:avLst/>
+          </a:prstGeom>
+          <a:noFill/>
+        </p:spPr>
+        <p:txBody>
+          <a:bodyPr wrap="square" lIns="0" rIns="0">
+            <a:spAutoFit/>
+          </a:bodyPr>
+          <a:lstStyle/>
+          <a:p>
+            <a:pPr algn="l">
+              <a:lnSpc>
+                <a:spcPct val="98000"/>
+              </a:lnSpc>
+              <a:spcAft>
+                <a:spcPts val="600"/>
+              </a:spcAft>
+            </a:pPr>
+            <a:r>
+              <a:rPr sz="1700" b="1">
+                <a:solidFill>
+                  <a:srgbClr val="101B33"/>
+                </a:solidFill>
+                <a:latin typeface="Arial"/>
+              </a:rPr>
+              <a:t>TIỀN XỬ LÝ</a:t>
+            </a:r>
+          </a:p>
+          <a:p>
+            <a:pPr algn="l">
+              <a:lnSpc>
+                <a:spcPct val="98000"/>
+              </a:lnSpc>
+              <a:spcAft>
+                <a:spcPts val="600"/>
+              </a:spcAft>
+            </a:pPr>
+            <a:r>
+              <a:rPr sz="1400" b="1">
+                <a:solidFill>
+                  <a:srgbClr val="2E6FD9"/>
+                </a:solidFill>
+                <a:latin typeface="Arial"/>
+              </a:rPr>
+              <a:t>① Lọc dữ liệu — chỉ giữ ảnh BAN NGÀY</a:t>
+            </a:r>
+          </a:p>
+          <a:p>
+            <a:pPr algn="l">
+              <a:lnSpc>
+                <a:spcPct val="98000"/>
+              </a:lnSpc>
+              <a:spcAft>
+                <a:spcPts val="600"/>
+              </a:spcAft>
+            </a:pPr>
+            <a:r>
+              <a:rPr sz="1200" b="0">
+                <a:solidFill>
+                  <a:srgbClr val="5A6375"/>
+                </a:solidFill>
+                <a:latin typeface="Arial"/>
+              </a:rPr>
+              <a:t>     clear / partly cloudy  →  ảnh nội dung</a:t>
+            </a:r>
+          </a:p>
+          <a:p>
+            <a:pPr algn="l">
+              <a:lnSpc>
+                <a:spcPct val="98000"/>
+              </a:lnSpc>
+              <a:spcAft>
+                <a:spcPts val="600"/>
+              </a:spcAft>
+            </a:pPr>
+            <a:r>
+              <a:rPr sz="1200" b="0">
+                <a:solidFill>
+                  <a:srgbClr val="5A6375"/>
+                </a:solidFill>
+                <a:latin typeface="Arial"/>
+              </a:rPr>
+              <a:t>     rainy / snowy  →  ảnh tham chiếu + tập test</a:t>
+            </a:r>
+          </a:p>
+          <a:p>
+            <a:pPr algn="l">
+              <a:lnSpc>
+                <a:spcPct val="98000"/>
+              </a:lnSpc>
+              <a:spcAft>
+                <a:spcPts val="600"/>
+              </a:spcAft>
+            </a:pPr>
+            <a:r>
+              <a:rPr sz="1400" b="1">
+                <a:solidFill>
+                  <a:srgbClr val="2E6FD9"/>
+                </a:solidFill>
+                <a:latin typeface="Arial"/>
+              </a:rPr>
+              <a:t>② Xử lý ảnh trước khi đưa vào mạng</a:t>
+            </a:r>
+          </a:p>
+          <a:p>
+            <a:pPr algn="l">
+              <a:lnSpc>
+                <a:spcPct val="98000"/>
+              </a:lnSpc>
+              <a:spcAft>
+                <a:spcPts val="600"/>
+              </a:spcAft>
+            </a:pPr>
+            <a:r>
+              <a:rPr sz="1200" b="0">
+                <a:solidFill>
+                  <a:srgbClr val="5A6375"/>
+                </a:solidFill>
+                <a:latin typeface="Arial"/>
+              </a:rPr>
+              <a:t>     Ảnh gốc 1280×720</a:t>
+            </a:r>
+          </a:p>
+          <a:p>
+            <a:pPr algn="l">
+              <a:lnSpc>
+                <a:spcPct val="98000"/>
+              </a:lnSpc>
+              <a:spcAft>
+                <a:spcPts val="600"/>
+              </a:spcAft>
+            </a:pPr>
+            <a:r>
+              <a:rPr sz="1200" b="0">
+                <a:solidFill>
+                  <a:srgbClr val="5A6375"/>
+                </a:solidFill>
+                <a:latin typeface="Arial"/>
+              </a:rPr>
+              <a:t>        ↓  resize cạnh ngắn về 320 px</a:t>
+            </a:r>
+          </a:p>
+          <a:p>
+            <a:pPr algn="l">
+              <a:lnSpc>
+                <a:spcPct val="98000"/>
+              </a:lnSpc>
+              <a:spcAft>
+                <a:spcPts val="600"/>
+              </a:spcAft>
+            </a:pPr>
+            <a:r>
+              <a:rPr sz="1200" b="0">
+                <a:solidFill>
+                  <a:srgbClr val="5A6375"/>
+                </a:solidFill>
+                <a:latin typeface="Arial"/>
+              </a:rPr>
+              <a:t>        ↓  cắt ngẫu nhiên 256×256  (tăng đa dạng)</a:t>
+            </a:r>
+          </a:p>
+          <a:p>
+            <a:pPr algn="l">
+              <a:lnSpc>
+                <a:spcPct val="98000"/>
+              </a:lnSpc>
+              <a:spcAft>
+                <a:spcPts val="600"/>
+              </a:spcAft>
+            </a:pPr>
+            <a:r>
+              <a:rPr sz="1200" b="0">
+                <a:solidFill>
+                  <a:srgbClr val="5A6375"/>
+                </a:solidFill>
+                <a:latin typeface="Arial"/>
+              </a:rPr>
+              <a:t>        ↓  lật ngang + chuẩn hoá về [0, 1]</a:t>
+            </a:r>
+          </a:p>
+          <a:p>
+            <a:pPr algn="l">
+              <a:lnSpc>
+                <a:spcPct val="98000"/>
+              </a:lnSpc>
+              <a:spcAft>
+                <a:spcPts val="600"/>
+              </a:spcAft>
+            </a:pPr>
+            <a:r>
+              <a:rPr sz="1200" b="1">
+                <a:solidFill>
+                  <a:srgbClr val="101B33"/>
+                </a:solidFill>
+                <a:latin typeface="Arial"/>
+              </a:rPr>
+              <a:t>     →  Tensor 8×3×256×256</a:t>
+            </a:r>
+          </a:p>
+        </p:txBody>
+      </p:sp>
+      <p:sp>
+        <p:nvSpPr>
+          <p:cNvPr id="9" name="Rectangle 8"/>
+          <p:cNvSpPr/>
+          <p:nvPr/>
+        </p:nvSpPr>
+        <p:spPr>
+          <a:xfrm>
+            <a:off x="6400800" y="1234440"/>
+            <a:ext cx="5120640" cy="3429000"/>
+          </a:xfrm>
+          <a:prstGeom prst="rect">
+            <a:avLst/>
+          </a:prstGeom>
+          <a:solidFill>
+            <a:srgbClr val="F4F6FA"/>
+          </a:solidFill>
+          <a:ln>
+            <a:noFill/>
+          </a:ln>
+          <a:effectLst/>
+        </p:spPr>
+        <p:style>
+          <a:lnRef idx="1">
+            <a:schemeClr val="accent1"/>
+          </a:lnRef>
+          <a:fillRef idx="3">
+            <a:schemeClr val="accent1"/>
+          </a:fillRef>
+          <a:effectRef idx="2">
+            <a:schemeClr val="accent1"/>
+          </a:effectRef>
+          <a:fontRef idx="minor">
+            <a:schemeClr val="lt1"/>
+          </a:fontRef>
+        </p:style>
+        <p:txBody>
+          <a:bodyPr rtlCol="0" anchor="ctr"/>
+          <a:lstStyle/>
+          <a:p>
+            <a:pPr algn="ctr"/>
+          </a:p>
+        </p:txBody>
+      </p:sp>
+      <p:sp>
+        <p:nvSpPr>
+          <p:cNvPr id="10" name="Rectangle 9"/>
+          <p:cNvSpPr/>
+          <p:nvPr/>
+        </p:nvSpPr>
+        <p:spPr>
+          <a:xfrm>
+            <a:off x="6400800" y="1234440"/>
+            <a:ext cx="5120640" cy="73152"/>
+          </a:xfrm>
+          <a:prstGeom prst="rect">
+            <a:avLst/>
+          </a:prstGeom>
+          <a:solidFill>
+            <a:srgbClr val="18A099"/>
+          </a:solidFill>
+          <a:ln>
+            <a:noFill/>
+          </a:ln>
+          <a:effectLst/>
+        </p:spPr>
+        <p:style>
+          <a:lnRef idx="1">
+            <a:schemeClr val="accent1"/>
+          </a:lnRef>
+          <a:fillRef idx="3">
+            <a:schemeClr val="accent1"/>
+          </a:fillRef>
+          <a:effectRef idx="2">
+            <a:schemeClr val="accent1"/>
+          </a:effectRef>
+          <a:fontRef idx="minor">
+            <a:schemeClr val="lt1"/>
+          </a:fontRef>
+        </p:style>
+        <p:txBody>
+          <a:bodyPr rtlCol="0" anchor="ctr"/>
+          <a:lstStyle/>
+          <a:p>
+            <a:pPr algn="ctr"/>
+          </a:p>
+        </p:txBody>
+      </p:sp>
+      <p:sp>
+        <p:nvSpPr>
+          <p:cNvPr id="11" name="TextBox 10"/>
+          <p:cNvSpPr txBox="1"/>
+          <p:nvPr/>
+        </p:nvSpPr>
+        <p:spPr>
+          <a:xfrm>
+            <a:off x="6629400" y="1371600"/>
+            <a:ext cx="4754880" cy="3200400"/>
+          </a:xfrm>
+          <a:prstGeom prst="rect">
+            <a:avLst/>
+          </a:prstGeom>
+          <a:noFill/>
+        </p:spPr>
+        <p:txBody>
+          <a:bodyPr wrap="square" lIns="0" rIns="0">
+            <a:spAutoFit/>
+          </a:bodyPr>
+          <a:lstStyle/>
+          <a:p>
+            <a:pPr algn="l">
+              <a:lnSpc>
+                <a:spcPct val="98000"/>
+              </a:lnSpc>
+              <a:spcAft>
+                <a:spcPts val="600"/>
+              </a:spcAft>
+            </a:pPr>
+            <a:r>
+              <a:rPr sz="1700" b="1">
+                <a:solidFill>
+                  <a:srgbClr val="101B33"/>
+                </a:solidFill>
+                <a:latin typeface="Arial"/>
+              </a:rPr>
+              <a:t>MỘT BƯỚC HUẤN LUYỆN</a:t>
+            </a:r>
+          </a:p>
+          <a:p>
+            <a:pPr algn="l">
+              <a:lnSpc>
+                <a:spcPct val="98000"/>
+              </a:lnSpc>
+              <a:spcAft>
+                <a:spcPts val="600"/>
+              </a:spcAft>
+            </a:pPr>
+            <a:r>
+              <a:rPr sz="1200" b="0">
+                <a:solidFill>
+                  <a:srgbClr val="5A6375"/>
+                </a:solidFill>
+                <a:latin typeface="Arial"/>
+              </a:rPr>
+              <a:t>1.  Lấy 8 ảnh trời quang + 8 ảnh thời tiết ngẫu nhiên</a:t>
+            </a:r>
+          </a:p>
+          <a:p>
+            <a:pPr algn="l">
+              <a:lnSpc>
+                <a:spcPct val="98000"/>
+              </a:lnSpc>
+              <a:spcAft>
+                <a:spcPts val="600"/>
+              </a:spcAft>
+            </a:pPr>
+            <a:r>
+              <a:rPr sz="1200" b="0">
+                <a:solidFill>
+                  <a:srgbClr val="5A6375"/>
+                </a:solidFill>
+                <a:latin typeface="Arial"/>
+              </a:rPr>
+              <a:t>2.  Đưa cả hai qua VGG-19  →  đặc trưng c và s</a:t>
+            </a:r>
+          </a:p>
+          <a:p>
+            <a:pPr algn="l">
+              <a:lnSpc>
+                <a:spcPct val="98000"/>
+              </a:lnSpc>
+              <a:spcAft>
+                <a:spcPts val="600"/>
+              </a:spcAft>
+            </a:pPr>
+            <a:r>
+              <a:rPr sz="1200" b="0">
+                <a:solidFill>
+                  <a:srgbClr val="5A6375"/>
+                </a:solidFill>
+                <a:latin typeface="Arial"/>
+              </a:rPr>
+              <a:t>3.  t = AdaIN(c, s)          (trộn thống kê)</a:t>
+            </a:r>
+          </a:p>
+          <a:p>
+            <a:pPr algn="l">
+              <a:lnSpc>
+                <a:spcPct val="98000"/>
+              </a:lnSpc>
+              <a:spcAft>
+                <a:spcPts val="600"/>
+              </a:spcAft>
+            </a:pPr>
+            <a:r>
+              <a:rPr sz="1200" b="0">
+                <a:solidFill>
+                  <a:srgbClr val="5A6375"/>
+                </a:solidFill>
+                <a:latin typeface="Arial"/>
+              </a:rPr>
+              <a:t>4.  out = Decoder(t)        (dựng lại thành ảnh)</a:t>
+            </a:r>
+          </a:p>
+          <a:p>
+            <a:pPr algn="l">
+              <a:lnSpc>
+                <a:spcPct val="98000"/>
+              </a:lnSpc>
+              <a:spcAft>
+                <a:spcPts val="600"/>
+              </a:spcAft>
+            </a:pPr>
+            <a:r>
+              <a:rPr sz="1200" b="0">
+                <a:solidFill>
+                  <a:srgbClr val="5A6375"/>
+                </a:solidFill>
+                <a:latin typeface="Arial"/>
+              </a:rPr>
+              <a:t>5.  Đưa out qua VGG lần nữa  →  tính 3 loss</a:t>
+            </a:r>
+          </a:p>
+          <a:p>
+            <a:pPr algn="l">
+              <a:lnSpc>
+                <a:spcPct val="98000"/>
+              </a:lnSpc>
+              <a:spcAft>
+                <a:spcPts val="600"/>
+              </a:spcAft>
+            </a:pPr>
+            <a:r>
+              <a:rPr sz="1200" b="0">
+                <a:solidFill>
+                  <a:srgbClr val="5A6375"/>
+                </a:solidFill>
+                <a:latin typeface="Arial"/>
+              </a:rPr>
+              <a:t>6.  Cập nhật Decoder bằng Adam</a:t>
+            </a:r>
+          </a:p>
+          <a:p>
+            <a:pPr algn="l">
+              <a:lnSpc>
+                <a:spcPct val="98000"/>
+              </a:lnSpc>
+              <a:spcAft>
+                <a:spcPts val="600"/>
+              </a:spcAft>
+            </a:pPr>
+            <a:r>
+              <a:rPr sz="1200" b="1">
+                <a:solidFill>
+                  <a:srgbClr val="101B33"/>
+                </a:solidFill>
+                <a:latin typeface="Arial"/>
+              </a:rPr>
+              <a:t>Ghép cặp NGẪU NHIÊN mỗi bước ⇒ decoder học tái</a:t>
+            </a:r>
+          </a:p>
+          <a:p>
+            <a:pPr algn="l">
+              <a:lnSpc>
+                <a:spcPct val="98000"/>
+              </a:lnSpc>
+              <a:spcAft>
+                <a:spcPts val="600"/>
+              </a:spcAft>
+            </a:pPr>
+            <a:r>
+              <a:rPr sz="1200" b="1">
+                <a:solidFill>
+                  <a:srgbClr val="101B33"/>
+                </a:solidFill>
+                <a:latin typeface="Arial"/>
+              </a:rPr>
+              <a:t>tạo cho MỌI phong cách ⇒ thời tiết mới chỉ cần đưa</a:t>
+            </a:r>
+          </a:p>
+          <a:p>
+            <a:pPr algn="l">
+              <a:lnSpc>
+                <a:spcPct val="98000"/>
+              </a:lnSpc>
+              <a:spcAft>
+                <a:spcPts val="600"/>
+              </a:spcAft>
+            </a:pPr>
+            <a:r>
+              <a:rPr sz="1200" b="1">
+                <a:solidFill>
+                  <a:srgbClr val="101B33"/>
+                </a:solidFill>
+                <a:latin typeface="Arial"/>
+              </a:rPr>
+              <a:t>ảnh tham chiếu vào, KHÔNG phải huấn luyện lại.</a:t>
+            </a:r>
+          </a:p>
+        </p:txBody>
+      </p:sp>
+      <p:sp>
+        <p:nvSpPr>
+          <p:cNvPr id="12" name="Rectangle 11"/>
+          <p:cNvSpPr/>
+          <p:nvPr/>
+        </p:nvSpPr>
+        <p:spPr>
+          <a:xfrm>
+            <a:off x="640080" y="4864608"/>
+            <a:ext cx="10881360" cy="384048"/>
           </a:xfrm>
           <a:prstGeom prst="rect">
             <a:avLst/>
@@ -12950,36 +14150,36 @@
       </p:sp>
       <p:sp>
         <p:nvSpPr>
-          <p:cNvPr id="7" name="TextBox 6"/>
-          <p:cNvSpPr txBox="1"/>
-          <p:nvPr/>
-        </p:nvSpPr>
-        <p:spPr>
-          <a:xfrm>
-            <a:off x="749808" y="1344168"/>
-            <a:ext cx="1920240" cy="329184"/>
-          </a:xfrm>
-          <a:prstGeom prst="rect">
-            <a:avLst/>
-          </a:prstGeom>
-          <a:noFill/>
-        </p:spPr>
-        <p:txBody>
-          <a:bodyPr wrap="square" lIns="0" rIns="0">
-            <a:spAutoFit/>
-          </a:bodyPr>
-          <a:lstStyle/>
-          <a:p>
-            <a:pPr algn="l">
-              <a:lnSpc>
-                <a:spcPct val="115000"/>
-              </a:lnSpc>
-              <a:spcAft>
-                <a:spcPts val="600"/>
-              </a:spcAft>
-            </a:pPr>
-            <a:r>
-              <a:rPr sz="1300" b="1">
+          <p:cNvPr id="13" name="TextBox 12"/>
+          <p:cNvSpPr txBox="1"/>
+          <p:nvPr/>
+        </p:nvSpPr>
+        <p:spPr>
+          <a:xfrm>
+            <a:off x="749808" y="4928616"/>
+            <a:ext cx="1568484" cy="384048"/>
+          </a:xfrm>
+          <a:prstGeom prst="rect">
+            <a:avLst/>
+          </a:prstGeom>
+          <a:noFill/>
+        </p:spPr>
+        <p:txBody>
+          <a:bodyPr wrap="square" lIns="0" rIns="0">
+            <a:spAutoFit/>
+          </a:bodyPr>
+          <a:lstStyle/>
+          <a:p>
+            <a:pPr algn="l">
+              <a:lnSpc>
+                <a:spcPct val="115000"/>
+              </a:lnSpc>
+              <a:spcAft>
+                <a:spcPts val="600"/>
+              </a:spcAft>
+            </a:pPr>
+            <a:r>
+              <a:rPr sz="1200" b="1">
                 <a:solidFill>
                   <a:srgbClr val="FFFFFF"/>
                 </a:solidFill>
@@ -12992,36 +14192,36 @@
       </p:sp>
       <p:sp>
         <p:nvSpPr>
-          <p:cNvPr id="8" name="TextBox 7"/>
-          <p:cNvSpPr txBox="1"/>
-          <p:nvPr/>
-        </p:nvSpPr>
-        <p:spPr>
-          <a:xfrm>
-            <a:off x="2670048" y="1344168"/>
-            <a:ext cx="3200400" cy="329184"/>
-          </a:xfrm>
-          <a:prstGeom prst="rect">
-            <a:avLst/>
-          </a:prstGeom>
-          <a:noFill/>
-        </p:spPr>
-        <p:txBody>
-          <a:bodyPr wrap="square" lIns="0" rIns="0">
-            <a:spAutoFit/>
-          </a:bodyPr>
-          <a:lstStyle/>
-          <a:p>
-            <a:pPr algn="l">
-              <a:lnSpc>
-                <a:spcPct val="115000"/>
-              </a:lnSpc>
-              <a:spcAft>
-                <a:spcPts val="600"/>
-              </a:spcAft>
-            </a:pPr>
-            <a:r>
-              <a:rPr sz="1300" b="1">
+          <p:cNvPr id="14" name="TextBox 13"/>
+          <p:cNvSpPr txBox="1"/>
+          <p:nvPr/>
+        </p:nvSpPr>
+        <p:spPr>
+          <a:xfrm>
+            <a:off x="2318292" y="4928616"/>
+            <a:ext cx="4509392" cy="384048"/>
+          </a:xfrm>
+          <a:prstGeom prst="rect">
+            <a:avLst/>
+          </a:prstGeom>
+          <a:noFill/>
+        </p:spPr>
+        <p:txBody>
+          <a:bodyPr wrap="square" lIns="0" rIns="0">
+            <a:spAutoFit/>
+          </a:bodyPr>
+          <a:lstStyle/>
+          <a:p>
+            <a:pPr algn="l">
+              <a:lnSpc>
+                <a:spcPct val="115000"/>
+              </a:lnSpc>
+              <a:spcAft>
+                <a:spcPts val="600"/>
+              </a:spcAft>
+            </a:pPr>
+            <a:r>
+              <a:rPr sz="1200" b="1">
                 <a:solidFill>
                   <a:srgbClr val="FFFFFF"/>
                 </a:solidFill>
@@ -13034,14 +14234,98 @@
       </p:sp>
       <p:sp>
         <p:nvSpPr>
-          <p:cNvPr id="9" name="Rectangle 8"/>
+          <p:cNvPr id="15" name="TextBox 14"/>
+          <p:cNvSpPr txBox="1"/>
+          <p:nvPr/>
+        </p:nvSpPr>
+        <p:spPr>
+          <a:xfrm>
+            <a:off x="6827684" y="4928616"/>
+            <a:ext cx="1862575" cy="384048"/>
+          </a:xfrm>
+          <a:prstGeom prst="rect">
+            <a:avLst/>
+          </a:prstGeom>
+          <a:noFill/>
+        </p:spPr>
+        <p:txBody>
+          <a:bodyPr wrap="square" lIns="0" rIns="0">
+            <a:spAutoFit/>
+          </a:bodyPr>
+          <a:lstStyle/>
+          <a:p>
+            <a:pPr algn="l">
+              <a:lnSpc>
+                <a:spcPct val="115000"/>
+              </a:lnSpc>
+              <a:spcAft>
+                <a:spcPts val="600"/>
+              </a:spcAft>
+            </a:pPr>
+            <a:r>
+              <a:rPr sz="1200" b="1">
+                <a:solidFill>
+                  <a:srgbClr val="FFFFFF"/>
+                </a:solidFill>
+                <a:latin typeface="Arial"/>
+              </a:rPr>
+              <a:t>Thành phần</a:t>
+            </a:r>
+          </a:p>
+        </p:txBody>
+      </p:sp>
+      <p:sp>
+        <p:nvSpPr>
+          <p:cNvPr id="16" name="TextBox 15"/>
+          <p:cNvSpPr txBox="1"/>
+          <p:nvPr/>
+        </p:nvSpPr>
+        <p:spPr>
+          <a:xfrm>
+            <a:off x="8690259" y="4928616"/>
+            <a:ext cx="2940908" cy="384048"/>
+          </a:xfrm>
+          <a:prstGeom prst="rect">
+            <a:avLst/>
+          </a:prstGeom>
+          <a:noFill/>
+        </p:spPr>
+        <p:txBody>
+          <a:bodyPr wrap="square" lIns="0" rIns="0">
+            <a:spAutoFit/>
+          </a:bodyPr>
+          <a:lstStyle/>
+          <a:p>
+            <a:pPr algn="l">
+              <a:lnSpc>
+                <a:spcPct val="115000"/>
+              </a:lnSpc>
+              <a:spcAft>
+                <a:spcPts val="600"/>
+              </a:spcAft>
+            </a:pPr>
+            <a:r>
+              <a:rPr sz="1200" b="1">
+                <a:solidFill>
+                  <a:srgbClr val="FFFFFF"/>
+                </a:solidFill>
+                <a:latin typeface="Arial"/>
+              </a:rPr>
+              <a:t>Giá trị</a:t>
+            </a:r>
+          </a:p>
+        </p:txBody>
+      </p:sp>
+      <p:sp>
+        <p:nvSpPr>
+          <p:cNvPr id="17" name="Rectangle 16"/>
           <p:cNvSpPr/>
           <p:nvPr/>
         </p:nvSpPr>
         <p:spPr>
           <a:xfrm>
-            <a:off x="640080" y="1609344"/>
-            <a:ext cx="5120640" cy="329184"/>
+            <a:off x="640080" y="5248656"/>
+            <a:ext cx="10881360" cy="384048"/>
           </a:xfrm>
           <a:prstGeom prst="rect">
             <a:avLst/>
@@ -13078,36 +14362,36 @@
       </p:sp>
       <p:sp>
         <p:nvSpPr>
-          <p:cNvPr id="10" name="TextBox 9"/>
-          <p:cNvSpPr txBox="1"/>
-          <p:nvPr/>
-        </p:nvSpPr>
-        <p:spPr>
-          <a:xfrm>
-            <a:off x="749808" y="1673352"/>
-            <a:ext cx="1920240" cy="329184"/>
-          </a:xfrm>
-          <a:prstGeom prst="rect">
-            <a:avLst/>
-          </a:prstGeom>
-          <a:noFill/>
-        </p:spPr>
-        <p:txBody>
-          <a:bodyPr wrap="square" lIns="0" rIns="0">
-            <a:spAutoFit/>
-          </a:bodyPr>
-          <a:lstStyle/>
-          <a:p>
-            <a:pPr algn="l">
-              <a:lnSpc>
-                <a:spcPct val="115000"/>
-              </a:lnSpc>
-              <a:spcAft>
-                <a:spcPts val="600"/>
-              </a:spcAft>
-            </a:pPr>
-            <a:r>
-              <a:rPr sz="1300" b="0">
+          <p:cNvPr id="18" name="TextBox 17"/>
+          <p:cNvSpPr txBox="1"/>
+          <p:nvPr/>
+        </p:nvSpPr>
+        <p:spPr>
+          <a:xfrm>
+            <a:off x="749808" y="5312664"/>
+            <a:ext cx="1568484" cy="384048"/>
+          </a:xfrm>
+          <a:prstGeom prst="rect">
+            <a:avLst/>
+          </a:prstGeom>
+          <a:noFill/>
+        </p:spPr>
+        <p:txBody>
+          <a:bodyPr wrap="square" lIns="0" rIns="0">
+            <a:spAutoFit/>
+          </a:bodyPr>
+          <a:lstStyle/>
+          <a:p>
+            <a:pPr algn="l">
+              <a:lnSpc>
+                <a:spcPct val="115000"/>
+              </a:lnSpc>
+              <a:spcAft>
+                <a:spcPts val="600"/>
+              </a:spcAft>
+            </a:pPr>
+            <a:r>
+              <a:rPr sz="1200" b="0">
                 <a:solidFill>
                   <a:srgbClr val="101B33"/>
                 </a:solidFill>
@@ -13120,56 +14404,140 @@
       </p:sp>
       <p:sp>
         <p:nvSpPr>
-          <p:cNvPr id="11" name="TextBox 10"/>
-          <p:cNvSpPr txBox="1"/>
-          <p:nvPr/>
-        </p:nvSpPr>
-        <p:spPr>
-          <a:xfrm>
-            <a:off x="2670048" y="1673352"/>
-            <a:ext cx="3200400" cy="329184"/>
-          </a:xfrm>
-          <a:prstGeom prst="rect">
-            <a:avLst/>
-          </a:prstGeom>
-          <a:noFill/>
-        </p:spPr>
-        <p:txBody>
-          <a:bodyPr wrap="square" lIns="0" rIns="0">
-            <a:spAutoFit/>
-          </a:bodyPr>
-          <a:lstStyle/>
-          <a:p>
-            <a:pPr algn="l">
-              <a:lnSpc>
-                <a:spcPct val="115000"/>
-              </a:lnSpc>
-              <a:spcAft>
-                <a:spcPts val="600"/>
-              </a:spcAft>
-            </a:pPr>
-            <a:r>
-              <a:rPr sz="1300" b="0">
+          <p:cNvPr id="19" name="TextBox 18"/>
+          <p:cNvSpPr txBox="1"/>
+          <p:nvPr/>
+        </p:nvSpPr>
+        <p:spPr>
+          <a:xfrm>
+            <a:off x="2318292" y="5312664"/>
+            <a:ext cx="4509392" cy="384048"/>
+          </a:xfrm>
+          <a:prstGeom prst="rect">
+            <a:avLst/>
+          </a:prstGeom>
+          <a:noFill/>
+        </p:spPr>
+        <p:txBody>
+          <a:bodyPr wrap="square" lIns="0" rIns="0">
+            <a:spAutoFit/>
+          </a:bodyPr>
+          <a:lstStyle/>
+          <a:p>
+            <a:pPr algn="l">
+              <a:lnSpc>
+                <a:spcPct val="115000"/>
+              </a:lnSpc>
+              <a:spcAft>
+                <a:spcPts val="600"/>
+              </a:spcAft>
+            </a:pPr>
+            <a:r>
+              <a:rPr sz="1200" b="0">
                 <a:solidFill>
                   <a:srgbClr val="101B33"/>
                 </a:solidFill>
                 <a:latin typeface="Arial"/>
               </a:rPr>
-              <a:t>VGG-19 (ImageNet), đóng băng</a:t>
-            </a:r>
-          </a:p>
-        </p:txBody>
-      </p:sp>
-      <p:sp>
-        <p:nvSpPr>
-          <p:cNvPr id="12" name="Rectangle 11"/>
+              <a:t>VGG-19 pretrain, đóng băng — 0 tham số học</a:t>
+            </a:r>
+          </a:p>
+        </p:txBody>
+      </p:sp>
+      <p:sp>
+        <p:nvSpPr>
+          <p:cNvPr id="20" name="TextBox 19"/>
+          <p:cNvSpPr txBox="1"/>
+          <p:nvPr/>
+        </p:nvSpPr>
+        <p:spPr>
+          <a:xfrm>
+            <a:off x="6827684" y="5312664"/>
+            <a:ext cx="1862575" cy="384048"/>
+          </a:xfrm>
+          <a:prstGeom prst="rect">
+            <a:avLst/>
+          </a:prstGeom>
+          <a:noFill/>
+        </p:spPr>
+        <p:txBody>
+          <a:bodyPr wrap="square" lIns="0" rIns="0">
+            <a:spAutoFit/>
+          </a:bodyPr>
+          <a:lstStyle/>
+          <a:p>
+            <a:pPr algn="l">
+              <a:lnSpc>
+                <a:spcPct val="115000"/>
+              </a:lnSpc>
+              <a:spcAft>
+                <a:spcPts val="600"/>
+              </a:spcAft>
+            </a:pPr>
+            <a:r>
+              <a:rPr sz="1200" b="0">
+                <a:solidFill>
+                  <a:srgbClr val="101B33"/>
+                </a:solidFill>
+                <a:latin typeface="Arial"/>
+              </a:rPr>
+              <a:t>Batch / số bước</a:t>
+            </a:r>
+          </a:p>
+        </p:txBody>
+      </p:sp>
+      <p:sp>
+        <p:nvSpPr>
+          <p:cNvPr id="21" name="TextBox 20"/>
+          <p:cNvSpPr txBox="1"/>
+          <p:nvPr/>
+        </p:nvSpPr>
+        <p:spPr>
+          <a:xfrm>
+            <a:off x="8690259" y="5312664"/>
+            <a:ext cx="2940908" cy="384048"/>
+          </a:xfrm>
+          <a:prstGeom prst="rect">
+            <a:avLst/>
+          </a:prstGeom>
+          <a:noFill/>
+        </p:spPr>
+        <p:txBody>
+          <a:bodyPr wrap="square" lIns="0" rIns="0">
+            <a:spAutoFit/>
+          </a:bodyPr>
+          <a:lstStyle/>
+          <a:p>
+            <a:pPr algn="l">
+              <a:lnSpc>
+                <a:spcPct val="115000"/>
+              </a:lnSpc>
+              <a:spcAft>
+                <a:spcPts val="600"/>
+              </a:spcAft>
+            </a:pPr>
+            <a:r>
+              <a:rPr sz="1200" b="0">
+                <a:solidFill>
+                  <a:srgbClr val="101B33"/>
+                </a:solidFill>
+                <a:latin typeface="Arial"/>
+              </a:rPr>
+              <a:t>8 / 12.000</a:t>
+            </a:r>
+          </a:p>
+        </p:txBody>
+      </p:sp>
+      <p:sp>
+        <p:nvSpPr>
+          <p:cNvPr id="22" name="Rectangle 21"/>
           <p:cNvSpPr/>
           <p:nvPr/>
         </p:nvSpPr>
         <p:spPr>
           <a:xfrm>
-            <a:off x="640080" y="1938528"/>
-            <a:ext cx="5120640" cy="329184"/>
+            <a:off x="640080" y="5632704"/>
+            <a:ext cx="10881360" cy="384048"/>
           </a:xfrm>
           <a:prstGeom prst="rect">
             <a:avLst/>
@@ -13206,36 +14574,36 @@
       </p:sp>
       <p:sp>
         <p:nvSpPr>
-          <p:cNvPr id="13" name="TextBox 12"/>
-          <p:cNvSpPr txBox="1"/>
-          <p:nvPr/>
-        </p:nvSpPr>
-        <p:spPr>
-          <a:xfrm>
-            <a:off x="749808" y="2002536"/>
-            <a:ext cx="1920240" cy="329184"/>
-          </a:xfrm>
-          <a:prstGeom prst="rect">
-            <a:avLst/>
-          </a:prstGeom>
-          <a:noFill/>
-        </p:spPr>
-        <p:txBody>
-          <a:bodyPr wrap="square" lIns="0" rIns="0">
-            <a:spAutoFit/>
-          </a:bodyPr>
-          <a:lstStyle/>
-          <a:p>
-            <a:pPr algn="l">
-              <a:lnSpc>
-                <a:spcPct val="115000"/>
-              </a:lnSpc>
-              <a:spcAft>
-                <a:spcPts val="600"/>
-              </a:spcAft>
-            </a:pPr>
-            <a:r>
-              <a:rPr sz="1300" b="0">
+          <p:cNvPr id="23" name="TextBox 22"/>
+          <p:cNvSpPr txBox="1"/>
+          <p:nvPr/>
+        </p:nvSpPr>
+        <p:spPr>
+          <a:xfrm>
+            <a:off x="749808" y="5696712"/>
+            <a:ext cx="1568484" cy="384048"/>
+          </a:xfrm>
+          <a:prstGeom prst="rect">
+            <a:avLst/>
+          </a:prstGeom>
+          <a:noFill/>
+        </p:spPr>
+        <p:txBody>
+          <a:bodyPr wrap="square" lIns="0" rIns="0">
+            <a:spAutoFit/>
+          </a:bodyPr>
+          <a:lstStyle/>
+          <a:p>
+            <a:pPr algn="l">
+              <a:lnSpc>
+                <a:spcPct val="115000"/>
+              </a:lnSpc>
+              <a:spcAft>
+                <a:spcPts val="600"/>
+              </a:spcAft>
+            </a:pPr>
+            <a:r>
+              <a:rPr sz="1200" b="0">
                 <a:solidFill>
                   <a:srgbClr val="101B33"/>
                 </a:solidFill>
@@ -13248,56 +14616,140 @@
       </p:sp>
       <p:sp>
         <p:nvSpPr>
-          <p:cNvPr id="14" name="TextBox 13"/>
-          <p:cNvSpPr txBox="1"/>
-          <p:nvPr/>
-        </p:nvSpPr>
-        <p:spPr>
-          <a:xfrm>
-            <a:off x="2670048" y="2002536"/>
-            <a:ext cx="3200400" cy="329184"/>
-          </a:xfrm>
-          <a:prstGeom prst="rect">
-            <a:avLst/>
-          </a:prstGeom>
-          <a:noFill/>
-        </p:spPr>
-        <p:txBody>
-          <a:bodyPr wrap="square" lIns="0" rIns="0">
-            <a:spAutoFit/>
-          </a:bodyPr>
-          <a:lstStyle/>
-          <a:p>
-            <a:pPr algn="l">
-              <a:lnSpc>
-                <a:spcPct val="115000"/>
-              </a:lnSpc>
-              <a:spcAft>
-                <a:spcPts val="600"/>
-              </a:spcAft>
-            </a:pPr>
-            <a:r>
-              <a:rPr sz="1300" b="0">
+          <p:cNvPr id="24" name="TextBox 23"/>
+          <p:cNvSpPr txBox="1"/>
+          <p:nvPr/>
+        </p:nvSpPr>
+        <p:spPr>
+          <a:xfrm>
+            <a:off x="2318292" y="5696712"/>
+            <a:ext cx="4509392" cy="384048"/>
+          </a:xfrm>
+          <a:prstGeom prst="rect">
+            <a:avLst/>
+          </a:prstGeom>
+          <a:noFill/>
+        </p:spPr>
+        <p:txBody>
+          <a:bodyPr wrap="square" lIns="0" rIns="0">
+            <a:spAutoFit/>
+          </a:bodyPr>
+          <a:lstStyle/>
+          <a:p>
+            <a:pPr algn="l">
+              <a:lnSpc>
+                <a:spcPct val="115000"/>
+              </a:lnSpc>
+              <a:spcAft>
+                <a:spcPts val="600"/>
+              </a:spcAft>
+            </a:pPr>
+            <a:r>
+              <a:rPr sz="1200" b="0">
                 <a:solidFill>
                   <a:srgbClr val="101B33"/>
                 </a:solidFill>
                 <a:latin typeface="Arial"/>
               </a:rPr>
-              <a:t>3,51 M tham số</a:t>
-            </a:r>
-          </a:p>
-        </p:txBody>
-      </p:sp>
-      <p:sp>
-        <p:nvSpPr>
-          <p:cNvPr id="15" name="Rectangle 14"/>
+              <a:t>3,51 M tham số — DUY NHẤT được học</a:t>
+            </a:r>
+          </a:p>
+        </p:txBody>
+      </p:sp>
+      <p:sp>
+        <p:nvSpPr>
+          <p:cNvPr id="25" name="TextBox 24"/>
+          <p:cNvSpPr txBox="1"/>
+          <p:nvPr/>
+        </p:nvSpPr>
+        <p:spPr>
+          <a:xfrm>
+            <a:off x="6827684" y="5696712"/>
+            <a:ext cx="1862575" cy="384048"/>
+          </a:xfrm>
+          <a:prstGeom prst="rect">
+            <a:avLst/>
+          </a:prstGeom>
+          <a:noFill/>
+        </p:spPr>
+        <p:txBody>
+          <a:bodyPr wrap="square" lIns="0" rIns="0">
+            <a:spAutoFit/>
+          </a:bodyPr>
+          <a:lstStyle/>
+          <a:p>
+            <a:pPr algn="l">
+              <a:lnSpc>
+                <a:spcPct val="115000"/>
+              </a:lnSpc>
+              <a:spcAft>
+                <a:spcPts val="600"/>
+              </a:spcAft>
+            </a:pPr>
+            <a:r>
+              <a:rPr sz="1200" b="0">
+                <a:solidFill>
+                  <a:srgbClr val="101B33"/>
+                </a:solidFill>
+                <a:latin typeface="Arial"/>
+              </a:rPr>
+              <a:t>Optimizer</a:t>
+            </a:r>
+          </a:p>
+        </p:txBody>
+      </p:sp>
+      <p:sp>
+        <p:nvSpPr>
+          <p:cNvPr id="26" name="TextBox 25"/>
+          <p:cNvSpPr txBox="1"/>
+          <p:nvPr/>
+        </p:nvSpPr>
+        <p:spPr>
+          <a:xfrm>
+            <a:off x="8690259" y="5696712"/>
+            <a:ext cx="2940908" cy="384048"/>
+          </a:xfrm>
+          <a:prstGeom prst="rect">
+            <a:avLst/>
+          </a:prstGeom>
+          <a:noFill/>
+        </p:spPr>
+        <p:txBody>
+          <a:bodyPr wrap="square" lIns="0" rIns="0">
+            <a:spAutoFit/>
+          </a:bodyPr>
+          <a:lstStyle/>
+          <a:p>
+            <a:pPr algn="l">
+              <a:lnSpc>
+                <a:spcPct val="115000"/>
+              </a:lnSpc>
+              <a:spcAft>
+                <a:spcPts val="600"/>
+              </a:spcAft>
+            </a:pPr>
+            <a:r>
+              <a:rPr sz="1200" b="0">
+                <a:solidFill>
+                  <a:srgbClr val="101B33"/>
+                </a:solidFill>
+                <a:latin typeface="Arial"/>
+              </a:rPr>
+              <a:t>Adam, lr 1e-4, decay 5e-5</a:t>
+            </a:r>
+          </a:p>
+        </p:txBody>
+      </p:sp>
+      <p:sp>
+        <p:nvSpPr>
+          <p:cNvPr id="27" name="Rectangle 26"/>
           <p:cNvSpPr/>
           <p:nvPr/>
         </p:nvSpPr>
         <p:spPr>
           <a:xfrm>
-            <a:off x="640080" y="2267712"/>
-            <a:ext cx="5120640" cy="329184"/>
+            <a:off x="640080" y="6016752"/>
+            <a:ext cx="10881360" cy="384048"/>
           </a:xfrm>
           <a:prstGeom prst="rect">
             <a:avLst/>
@@ -13334,908 +14786,172 @@
       </p:sp>
       <p:sp>
         <p:nvSpPr>
-          <p:cNvPr id="16" name="TextBox 15"/>
-          <p:cNvSpPr txBox="1"/>
-          <p:nvPr/>
-        </p:nvSpPr>
-        <p:spPr>
-          <a:xfrm>
-            <a:off x="749808" y="2331720"/>
-            <a:ext cx="1920240" cy="329184"/>
-          </a:xfrm>
-          <a:prstGeom prst="rect">
-            <a:avLst/>
-          </a:prstGeom>
-          <a:noFill/>
-        </p:spPr>
-        <p:txBody>
-          <a:bodyPr wrap="square" lIns="0" rIns="0">
-            <a:spAutoFit/>
-          </a:bodyPr>
-          <a:lstStyle/>
-          <a:p>
-            <a:pPr algn="l">
-              <a:lnSpc>
-                <a:spcPct val="115000"/>
-              </a:lnSpc>
-              <a:spcAft>
-                <a:spcPts val="600"/>
-              </a:spcAft>
-            </a:pPr>
-            <a:r>
-              <a:rPr sz="1300" b="0">
+          <p:cNvPr id="28" name="TextBox 27"/>
+          <p:cNvSpPr txBox="1"/>
+          <p:nvPr/>
+        </p:nvSpPr>
+        <p:spPr>
+          <a:xfrm>
+            <a:off x="749808" y="6080760"/>
+            <a:ext cx="1568484" cy="384048"/>
+          </a:xfrm>
+          <a:prstGeom prst="rect">
+            <a:avLst/>
+          </a:prstGeom>
+          <a:noFill/>
+        </p:spPr>
+        <p:txBody>
+          <a:bodyPr wrap="square" lIns="0" rIns="0">
+            <a:spAutoFit/>
+          </a:bodyPr>
+          <a:lstStyle/>
+          <a:p>
+            <a:pPr algn="l">
+              <a:lnSpc>
+                <a:spcPct val="115000"/>
+              </a:lnSpc>
+              <a:spcAft>
+                <a:spcPts val="600"/>
+              </a:spcAft>
+            </a:pPr>
+            <a:r>
+              <a:rPr sz="1200" b="0">
                 <a:solidFill>
                   <a:srgbClr val="101B33"/>
                 </a:solidFill>
                 <a:latin typeface="Arial"/>
               </a:rPr>
-              <a:t>Ảnh huấn luyện</a:t>
-            </a:r>
-          </a:p>
-        </p:txBody>
-      </p:sp>
-      <p:sp>
-        <p:nvSpPr>
-          <p:cNvPr id="17" name="TextBox 16"/>
-          <p:cNvSpPr txBox="1"/>
-          <p:nvPr/>
-        </p:nvSpPr>
-        <p:spPr>
-          <a:xfrm>
-            <a:off x="2670048" y="2331720"/>
-            <a:ext cx="3200400" cy="329184"/>
-          </a:xfrm>
-          <a:prstGeom prst="rect">
-            <a:avLst/>
-          </a:prstGeom>
-          <a:noFill/>
-        </p:spPr>
-        <p:txBody>
-          <a:bodyPr wrap="square" lIns="0" rIns="0">
-            <a:spAutoFit/>
-          </a:bodyPr>
-          <a:lstStyle/>
-          <a:p>
-            <a:pPr algn="l">
-              <a:lnSpc>
-                <a:spcPct val="115000"/>
-              </a:lnSpc>
-              <a:spcAft>
-                <a:spcPts val="600"/>
-              </a:spcAft>
-            </a:pPr>
-            <a:r>
-              <a:rPr sz="1300" b="0">
+              <a:t>Dữ liệu</a:t>
+            </a:r>
+          </a:p>
+        </p:txBody>
+      </p:sp>
+      <p:sp>
+        <p:nvSpPr>
+          <p:cNvPr id="29" name="TextBox 28"/>
+          <p:cNvSpPr txBox="1"/>
+          <p:nvPr/>
+        </p:nvSpPr>
+        <p:spPr>
+          <a:xfrm>
+            <a:off x="2318292" y="6080760"/>
+            <a:ext cx="4509392" cy="384048"/>
+          </a:xfrm>
+          <a:prstGeom prst="rect">
+            <a:avLst/>
+          </a:prstGeom>
+          <a:noFill/>
+        </p:spPr>
+        <p:txBody>
+          <a:bodyPr wrap="square" lIns="0" rIns="0">
+            <a:spAutoFit/>
+          </a:bodyPr>
+          <a:lstStyle/>
+          <a:p>
+            <a:pPr algn="l">
+              <a:lnSpc>
+                <a:spcPct val="115000"/>
+              </a:lnSpc>
+              <a:spcAft>
+                <a:spcPts val="600"/>
+              </a:spcAft>
+            </a:pPr>
+            <a:r>
+              <a:rPr sz="1200" b="0">
                 <a:solidFill>
                   <a:srgbClr val="101B33"/>
                 </a:solidFill>
                 <a:latin typeface="Arial"/>
               </a:rPr>
-              <a:t>2.160 nội dung × 1.327 style</a:t>
-            </a:r>
-          </a:p>
-        </p:txBody>
-      </p:sp>
-      <p:sp>
-        <p:nvSpPr>
-          <p:cNvPr id="18" name="Rectangle 17"/>
-          <p:cNvSpPr/>
-          <p:nvPr/>
-        </p:nvSpPr>
-        <p:spPr>
-          <a:xfrm>
-            <a:off x="640080" y="2596896"/>
-            <a:ext cx="5120640" cy="329184"/>
-          </a:xfrm>
-          <a:prstGeom prst="rect">
-            <a:avLst/>
-          </a:prstGeom>
-          <a:solidFill>
-            <a:srgbClr val="FFFFFF"/>
-          </a:solidFill>
-          <a:ln>
-            <a:noFill/>
-          </a:ln>
-          <a:effectLst/>
-        </p:spPr>
-        <p:style>
-          <a:lnRef idx="1">
-            <a:schemeClr val="accent1"/>
-          </a:lnRef>
-          <a:fillRef idx="3">
-            <a:schemeClr val="accent1"/>
-          </a:fillRef>
-          <a:effectRef idx="2">
-            <a:schemeClr val="accent1"/>
-          </a:effectRef>
-          <a:fontRef idx="minor">
-            <a:schemeClr val="lt1"/>
-          </a:fontRef>
-        </p:style>
-        <p:txBody>
-          <a:bodyPr rtlCol="0" anchor="ctr"/>
-          <a:lstStyle/>
-          <a:p>
-            <a:pPr algn="ctr"/>
-          </a:p>
-        </p:txBody>
-      </p:sp>
-      <p:sp>
-        <p:nvSpPr>
-          <p:cNvPr id="19" name="TextBox 18"/>
-          <p:cNvSpPr txBox="1"/>
-          <p:nvPr/>
-        </p:nvSpPr>
-        <p:spPr>
-          <a:xfrm>
-            <a:off x="749808" y="2660904"/>
-            <a:ext cx="1920240" cy="329184"/>
-          </a:xfrm>
-          <a:prstGeom prst="rect">
-            <a:avLst/>
-          </a:prstGeom>
-          <a:noFill/>
-        </p:spPr>
-        <p:txBody>
-          <a:bodyPr wrap="square" lIns="0" rIns="0">
-            <a:spAutoFit/>
-          </a:bodyPr>
-          <a:lstStyle/>
-          <a:p>
-            <a:pPr algn="l">
-              <a:lnSpc>
-                <a:spcPct val="115000"/>
-              </a:lnSpc>
-              <a:spcAft>
-                <a:spcPts val="600"/>
-              </a:spcAft>
-            </a:pPr>
-            <a:r>
-              <a:rPr sz="1300" b="0">
+              <a:t>2.160 ảnh nội dung × 1.327 ảnh tham chiếu</a:t>
+            </a:r>
+          </a:p>
+        </p:txBody>
+      </p:sp>
+      <p:sp>
+        <p:nvSpPr>
+          <p:cNvPr id="30" name="TextBox 29"/>
+          <p:cNvSpPr txBox="1"/>
+          <p:nvPr/>
+        </p:nvSpPr>
+        <p:spPr>
+          <a:xfrm>
+            <a:off x="6827684" y="6080760"/>
+            <a:ext cx="1862575" cy="384048"/>
+          </a:xfrm>
+          <a:prstGeom prst="rect">
+            <a:avLst/>
+          </a:prstGeom>
+          <a:noFill/>
+        </p:spPr>
+        <p:txBody>
+          <a:bodyPr wrap="square" lIns="0" rIns="0">
+            <a:spAutoFit/>
+          </a:bodyPr>
+          <a:lstStyle/>
+          <a:p>
+            <a:pPr algn="l">
+              <a:lnSpc>
+                <a:spcPct val="115000"/>
+              </a:lnSpc>
+              <a:spcAft>
+                <a:spcPts val="600"/>
+              </a:spcAft>
+            </a:pPr>
+            <a:r>
+              <a:rPr sz="1200" b="0">
                 <a:solidFill>
                   <a:srgbClr val="101B33"/>
                 </a:solidFill>
                 <a:latin typeface="Arial"/>
               </a:rPr>
-              <a:t>Kích thước</a:t>
-            </a:r>
-          </a:p>
-        </p:txBody>
-      </p:sp>
-      <p:sp>
-        <p:nvSpPr>
-          <p:cNvPr id="20" name="TextBox 19"/>
-          <p:cNvSpPr txBox="1"/>
-          <p:nvPr/>
-        </p:nvSpPr>
-        <p:spPr>
-          <a:xfrm>
-            <a:off x="2670048" y="2660904"/>
-            <a:ext cx="3200400" cy="329184"/>
-          </a:xfrm>
-          <a:prstGeom prst="rect">
-            <a:avLst/>
-          </a:prstGeom>
-          <a:noFill/>
-        </p:spPr>
-        <p:txBody>
-          <a:bodyPr wrap="square" lIns="0" rIns="0">
-            <a:spAutoFit/>
-          </a:bodyPr>
-          <a:lstStyle/>
-          <a:p>
-            <a:pPr algn="l">
-              <a:lnSpc>
-                <a:spcPct val="115000"/>
-              </a:lnSpc>
-              <a:spcAft>
-                <a:spcPts val="600"/>
-              </a:spcAft>
-            </a:pPr>
-            <a:r>
-              <a:rPr sz="1300" b="0">
+              <a:t>Thời gian</a:t>
+            </a:r>
+          </a:p>
+        </p:txBody>
+      </p:sp>
+      <p:sp>
+        <p:nvSpPr>
+          <p:cNvPr id="31" name="TextBox 30"/>
+          <p:cNvSpPr txBox="1"/>
+          <p:nvPr/>
+        </p:nvSpPr>
+        <p:spPr>
+          <a:xfrm>
+            <a:off x="8690259" y="6080760"/>
+            <a:ext cx="2940908" cy="384048"/>
+          </a:xfrm>
+          <a:prstGeom prst="rect">
+            <a:avLst/>
+          </a:prstGeom>
+          <a:noFill/>
+        </p:spPr>
+        <p:txBody>
+          <a:bodyPr wrap="square" lIns="0" rIns="0">
+            <a:spAutoFit/>
+          </a:bodyPr>
+          <a:lstStyle/>
+          <a:p>
+            <a:pPr algn="l">
+              <a:lnSpc>
+                <a:spcPct val="115000"/>
+              </a:lnSpc>
+              <a:spcAft>
+                <a:spcPts val="600"/>
+              </a:spcAft>
+            </a:pPr>
+            <a:r>
+              <a:rPr sz="1200" b="0">
                 <a:solidFill>
                   <a:srgbClr val="101B33"/>
                 </a:solidFill>
                 <a:latin typeface="Arial"/>
               </a:rPr>
-              <a:t>resize 320 → crop 256</a:t>
-            </a:r>
-          </a:p>
-        </p:txBody>
-      </p:sp>
-      <p:sp>
-        <p:nvSpPr>
-          <p:cNvPr id="21" name="Rectangle 20"/>
-          <p:cNvSpPr/>
-          <p:nvPr/>
-        </p:nvSpPr>
-        <p:spPr>
-          <a:xfrm>
-            <a:off x="640080" y="2926080"/>
-            <a:ext cx="5120640" cy="329184"/>
-          </a:xfrm>
-          <a:prstGeom prst="rect">
-            <a:avLst/>
-          </a:prstGeom>
-          <a:solidFill>
-            <a:srgbClr val="F4F6FA"/>
-          </a:solidFill>
-          <a:ln>
-            <a:noFill/>
-          </a:ln>
-          <a:effectLst/>
-        </p:spPr>
-        <p:style>
-          <a:lnRef idx="1">
-            <a:schemeClr val="accent1"/>
-          </a:lnRef>
-          <a:fillRef idx="3">
-            <a:schemeClr val="accent1"/>
-          </a:fillRef>
-          <a:effectRef idx="2">
-            <a:schemeClr val="accent1"/>
-          </a:effectRef>
-          <a:fontRef idx="minor">
-            <a:schemeClr val="lt1"/>
-          </a:fontRef>
-        </p:style>
-        <p:txBody>
-          <a:bodyPr rtlCol="0" anchor="ctr"/>
-          <a:lstStyle/>
-          <a:p>
-            <a:pPr algn="ctr"/>
-          </a:p>
-        </p:txBody>
-      </p:sp>
-      <p:sp>
-        <p:nvSpPr>
-          <p:cNvPr id="22" name="TextBox 21"/>
-          <p:cNvSpPr txBox="1"/>
-          <p:nvPr/>
-        </p:nvSpPr>
-        <p:spPr>
-          <a:xfrm>
-            <a:off x="749808" y="2990088"/>
-            <a:ext cx="1920240" cy="329184"/>
-          </a:xfrm>
-          <a:prstGeom prst="rect">
-            <a:avLst/>
-          </a:prstGeom>
-          <a:noFill/>
-        </p:spPr>
-        <p:txBody>
-          <a:bodyPr wrap="square" lIns="0" rIns="0">
-            <a:spAutoFit/>
-          </a:bodyPr>
-          <a:lstStyle/>
-          <a:p>
-            <a:pPr algn="l">
-              <a:lnSpc>
-                <a:spcPct val="115000"/>
-              </a:lnSpc>
-              <a:spcAft>
-                <a:spcPts val="600"/>
-              </a:spcAft>
-            </a:pPr>
-            <a:r>
-              <a:rPr sz="1300" b="0">
-                <a:solidFill>
-                  <a:srgbClr val="101B33"/>
-                </a:solidFill>
-                <a:latin typeface="Arial"/>
-              </a:rPr>
-              <a:t>Batch / bước</a:t>
-            </a:r>
-          </a:p>
-        </p:txBody>
-      </p:sp>
-      <p:sp>
-        <p:nvSpPr>
-          <p:cNvPr id="23" name="TextBox 22"/>
-          <p:cNvSpPr txBox="1"/>
-          <p:nvPr/>
-        </p:nvSpPr>
-        <p:spPr>
-          <a:xfrm>
-            <a:off x="2670048" y="2990088"/>
-            <a:ext cx="3200400" cy="329184"/>
-          </a:xfrm>
-          <a:prstGeom prst="rect">
-            <a:avLst/>
-          </a:prstGeom>
-          <a:noFill/>
-        </p:spPr>
-        <p:txBody>
-          <a:bodyPr wrap="square" lIns="0" rIns="0">
-            <a:spAutoFit/>
-          </a:bodyPr>
-          <a:lstStyle/>
-          <a:p>
-            <a:pPr algn="l">
-              <a:lnSpc>
-                <a:spcPct val="115000"/>
-              </a:lnSpc>
-              <a:spcAft>
-                <a:spcPts val="600"/>
-              </a:spcAft>
-            </a:pPr>
-            <a:r>
-              <a:rPr sz="1300" b="0">
-                <a:solidFill>
-                  <a:srgbClr val="101B33"/>
-                </a:solidFill>
-                <a:latin typeface="Arial"/>
-              </a:rPr>
-              <a:t>8 / 12.000</a:t>
-            </a:r>
-          </a:p>
-        </p:txBody>
-      </p:sp>
-      <p:sp>
-        <p:nvSpPr>
-          <p:cNvPr id="24" name="Rectangle 23"/>
-          <p:cNvSpPr/>
-          <p:nvPr/>
-        </p:nvSpPr>
-        <p:spPr>
-          <a:xfrm>
-            <a:off x="640080" y="3255264"/>
-            <a:ext cx="5120640" cy="329184"/>
-          </a:xfrm>
-          <a:prstGeom prst="rect">
-            <a:avLst/>
-          </a:prstGeom>
-          <a:solidFill>
-            <a:srgbClr val="FFFFFF"/>
-          </a:solidFill>
-          <a:ln>
-            <a:noFill/>
-          </a:ln>
-          <a:effectLst/>
-        </p:spPr>
-        <p:style>
-          <a:lnRef idx="1">
-            <a:schemeClr val="accent1"/>
-          </a:lnRef>
-          <a:fillRef idx="3">
-            <a:schemeClr val="accent1"/>
-          </a:fillRef>
-          <a:effectRef idx="2">
-            <a:schemeClr val="accent1"/>
-          </a:effectRef>
-          <a:fontRef idx="minor">
-            <a:schemeClr val="lt1"/>
-          </a:fontRef>
-        </p:style>
-        <p:txBody>
-          <a:bodyPr rtlCol="0" anchor="ctr"/>
-          <a:lstStyle/>
-          <a:p>
-            <a:pPr algn="ctr"/>
-          </a:p>
-        </p:txBody>
-      </p:sp>
-      <p:sp>
-        <p:nvSpPr>
-          <p:cNvPr id="25" name="TextBox 24"/>
-          <p:cNvSpPr txBox="1"/>
-          <p:nvPr/>
-        </p:nvSpPr>
-        <p:spPr>
-          <a:xfrm>
-            <a:off x="749808" y="3319272"/>
-            <a:ext cx="1920240" cy="329184"/>
-          </a:xfrm>
-          <a:prstGeom prst="rect">
-            <a:avLst/>
-          </a:prstGeom>
-          <a:noFill/>
-        </p:spPr>
-        <p:txBody>
-          <a:bodyPr wrap="square" lIns="0" rIns="0">
-            <a:spAutoFit/>
-          </a:bodyPr>
-          <a:lstStyle/>
-          <a:p>
-            <a:pPr algn="l">
-              <a:lnSpc>
-                <a:spcPct val="115000"/>
-              </a:lnSpc>
-              <a:spcAft>
-                <a:spcPts val="600"/>
-              </a:spcAft>
-            </a:pPr>
-            <a:r>
-              <a:rPr sz="1300" b="0">
-                <a:solidFill>
-                  <a:srgbClr val="101B33"/>
-                </a:solidFill>
-                <a:latin typeface="Arial"/>
-              </a:rPr>
-              <a:t>Optimizer</a:t>
-            </a:r>
-          </a:p>
-        </p:txBody>
-      </p:sp>
-      <p:sp>
-        <p:nvSpPr>
-          <p:cNvPr id="26" name="TextBox 25"/>
-          <p:cNvSpPr txBox="1"/>
-          <p:nvPr/>
-        </p:nvSpPr>
-        <p:spPr>
-          <a:xfrm>
-            <a:off x="2670048" y="3319272"/>
-            <a:ext cx="3200400" cy="329184"/>
-          </a:xfrm>
-          <a:prstGeom prst="rect">
-            <a:avLst/>
-          </a:prstGeom>
-          <a:noFill/>
-        </p:spPr>
-        <p:txBody>
-          <a:bodyPr wrap="square" lIns="0" rIns="0">
-            <a:spAutoFit/>
-          </a:bodyPr>
-          <a:lstStyle/>
-          <a:p>
-            <a:pPr algn="l">
-              <a:lnSpc>
-                <a:spcPct val="115000"/>
-              </a:lnSpc>
-              <a:spcAft>
-                <a:spcPts val="600"/>
-              </a:spcAft>
-            </a:pPr>
-            <a:r>
-              <a:rPr sz="1300" b="0">
-                <a:solidFill>
-                  <a:srgbClr val="101B33"/>
-                </a:solidFill>
-                <a:latin typeface="Arial"/>
-              </a:rPr>
-              <a:t>Adam, lr 1e-4, decay 5e-5</a:t>
-            </a:r>
-          </a:p>
-        </p:txBody>
-      </p:sp>
-      <p:sp>
-        <p:nvSpPr>
-          <p:cNvPr id="27" name="Rectangle 26"/>
-          <p:cNvSpPr/>
-          <p:nvPr/>
-        </p:nvSpPr>
-        <p:spPr>
-          <a:xfrm>
-            <a:off x="640080" y="3584448"/>
-            <a:ext cx="5120640" cy="329184"/>
-          </a:xfrm>
-          <a:prstGeom prst="rect">
-            <a:avLst/>
-          </a:prstGeom>
-          <a:solidFill>
-            <a:srgbClr val="F4F6FA"/>
-          </a:solidFill>
-          <a:ln>
-            <a:noFill/>
-          </a:ln>
-          <a:effectLst/>
-        </p:spPr>
-        <p:style>
-          <a:lnRef idx="1">
-            <a:schemeClr val="accent1"/>
-          </a:lnRef>
-          <a:fillRef idx="3">
-            <a:schemeClr val="accent1"/>
-          </a:fillRef>
-          <a:effectRef idx="2">
-            <a:schemeClr val="accent1"/>
-          </a:effectRef>
-          <a:fontRef idx="minor">
-            <a:schemeClr val="lt1"/>
-          </a:fontRef>
-        </p:style>
-        <p:txBody>
-          <a:bodyPr rtlCol="0" anchor="ctr"/>
-          <a:lstStyle/>
-          <a:p>
-            <a:pPr algn="ctr"/>
-          </a:p>
-        </p:txBody>
-      </p:sp>
-      <p:sp>
-        <p:nvSpPr>
-          <p:cNvPr id="28" name="TextBox 27"/>
-          <p:cNvSpPr txBox="1"/>
-          <p:nvPr/>
-        </p:nvSpPr>
-        <p:spPr>
-          <a:xfrm>
-            <a:off x="749808" y="3648456"/>
-            <a:ext cx="1920240" cy="329184"/>
-          </a:xfrm>
-          <a:prstGeom prst="rect">
-            <a:avLst/>
-          </a:prstGeom>
-          <a:noFill/>
-        </p:spPr>
-        <p:txBody>
-          <a:bodyPr wrap="square" lIns="0" rIns="0">
-            <a:spAutoFit/>
-          </a:bodyPr>
-          <a:lstStyle/>
-          <a:p>
-            <a:pPr algn="l">
-              <a:lnSpc>
-                <a:spcPct val="115000"/>
-              </a:lnSpc>
-              <a:spcAft>
-                <a:spcPts val="600"/>
-              </a:spcAft>
-            </a:pPr>
-            <a:r>
-              <a:rPr sz="1300" b="0">
-                <a:solidFill>
-                  <a:srgbClr val="101B33"/>
-                </a:solidFill>
-                <a:latin typeface="Arial"/>
-              </a:rPr>
-              <a:t>Mixed precision</a:t>
-            </a:r>
-          </a:p>
-        </p:txBody>
-      </p:sp>
-      <p:sp>
-        <p:nvSpPr>
-          <p:cNvPr id="29" name="TextBox 28"/>
-          <p:cNvSpPr txBox="1"/>
-          <p:nvPr/>
-        </p:nvSpPr>
-        <p:spPr>
-          <a:xfrm>
-            <a:off x="2670048" y="3648456"/>
-            <a:ext cx="3200400" cy="329184"/>
-          </a:xfrm>
-          <a:prstGeom prst="rect">
-            <a:avLst/>
-          </a:prstGeom>
-          <a:noFill/>
-        </p:spPr>
-        <p:txBody>
-          <a:bodyPr wrap="square" lIns="0" rIns="0">
-            <a:spAutoFit/>
-          </a:bodyPr>
-          <a:lstStyle/>
-          <a:p>
-            <a:pPr algn="l">
-              <a:lnSpc>
-                <a:spcPct val="115000"/>
-              </a:lnSpc>
-              <a:spcAft>
-                <a:spcPts val="600"/>
-              </a:spcAft>
-            </a:pPr>
-            <a:r>
-              <a:rPr sz="1300" b="0">
-                <a:solidFill>
-                  <a:srgbClr val="101B33"/>
-                </a:solidFill>
-                <a:latin typeface="Arial"/>
-              </a:rPr>
-              <a:t>bfloat16</a:t>
-            </a:r>
-          </a:p>
-        </p:txBody>
-      </p:sp>
-      <p:sp>
-        <p:nvSpPr>
-          <p:cNvPr id="30" name="Rectangle 29"/>
-          <p:cNvSpPr/>
-          <p:nvPr/>
-        </p:nvSpPr>
-        <p:spPr>
-          <a:xfrm>
-            <a:off x="640080" y="3913632"/>
-            <a:ext cx="5120640" cy="329184"/>
-          </a:xfrm>
-          <a:prstGeom prst="rect">
-            <a:avLst/>
-          </a:prstGeom>
-          <a:solidFill>
-            <a:srgbClr val="FFFFFF"/>
-          </a:solidFill>
-          <a:ln>
-            <a:noFill/>
-          </a:ln>
-          <a:effectLst/>
-        </p:spPr>
-        <p:style>
-          <a:lnRef idx="1">
-            <a:schemeClr val="accent1"/>
-          </a:lnRef>
-          <a:fillRef idx="3">
-            <a:schemeClr val="accent1"/>
-          </a:fillRef>
-          <a:effectRef idx="2">
-            <a:schemeClr val="accent1"/>
-          </a:effectRef>
-          <a:fontRef idx="minor">
-            <a:schemeClr val="lt1"/>
-          </a:fontRef>
-        </p:style>
-        <p:txBody>
-          <a:bodyPr rtlCol="0" anchor="ctr"/>
-          <a:lstStyle/>
-          <a:p>
-            <a:pPr algn="ctr"/>
-          </a:p>
-        </p:txBody>
-      </p:sp>
-      <p:sp>
-        <p:nvSpPr>
-          <p:cNvPr id="31" name="TextBox 30"/>
-          <p:cNvSpPr txBox="1"/>
-          <p:nvPr/>
-        </p:nvSpPr>
-        <p:spPr>
-          <a:xfrm>
-            <a:off x="749808" y="3977640"/>
-            <a:ext cx="1920240" cy="329184"/>
-          </a:xfrm>
-          <a:prstGeom prst="rect">
-            <a:avLst/>
-          </a:prstGeom>
-          <a:noFill/>
-        </p:spPr>
-        <p:txBody>
-          <a:bodyPr wrap="square" lIns="0" rIns="0">
-            <a:spAutoFit/>
-          </a:bodyPr>
-          <a:lstStyle/>
-          <a:p>
-            <a:pPr algn="l">
-              <a:lnSpc>
-                <a:spcPct val="115000"/>
-              </a:lnSpc>
-              <a:spcAft>
-                <a:spcPts val="600"/>
-              </a:spcAft>
-            </a:pPr>
-            <a:r>
-              <a:rPr sz="1300" b="0">
-                <a:solidFill>
-                  <a:srgbClr val="101B33"/>
-                </a:solidFill>
-                <a:latin typeface="Arial"/>
-              </a:rPr>
-              <a:t>Thời gian</a:t>
-            </a:r>
-          </a:p>
-        </p:txBody>
-      </p:sp>
-      <p:sp>
-        <p:nvSpPr>
-          <p:cNvPr id="32" name="TextBox 31"/>
-          <p:cNvSpPr txBox="1"/>
-          <p:nvPr/>
-        </p:nvSpPr>
-        <p:spPr>
-          <a:xfrm>
-            <a:off x="2670048" y="3977640"/>
-            <a:ext cx="3200400" cy="329184"/>
-          </a:xfrm>
-          <a:prstGeom prst="rect">
-            <a:avLst/>
-          </a:prstGeom>
-          <a:noFill/>
-        </p:spPr>
-        <p:txBody>
-          <a:bodyPr wrap="square" lIns="0" rIns="0">
-            <a:spAutoFit/>
-          </a:bodyPr>
-          <a:lstStyle/>
-          <a:p>
-            <a:pPr algn="l">
-              <a:lnSpc>
-                <a:spcPct val="115000"/>
-              </a:lnSpc>
-              <a:spcAft>
-                <a:spcPts val="600"/>
-              </a:spcAft>
-            </a:pPr>
-            <a:r>
-              <a:rPr sz="1300" b="0">
-                <a:solidFill>
-                  <a:srgbClr val="101B33"/>
-                </a:solidFill>
-                <a:latin typeface="Arial"/>
-              </a:rPr>
               <a:t>37 phút (RTX 5060 Ti)</a:t>
             </a:r>
           </a:p>
         </p:txBody>
       </p:sp>
-      <p:sp>
-        <p:nvSpPr>
-          <p:cNvPr id="33" name="TextBox 32"/>
-          <p:cNvSpPr txBox="1"/>
-          <p:nvPr/>
-        </p:nvSpPr>
-        <p:spPr>
-          <a:xfrm>
-            <a:off x="6126480" y="1280160"/>
-            <a:ext cx="5394960" cy="2194560"/>
-          </a:xfrm>
-          <a:prstGeom prst="rect">
-            <a:avLst/>
-          </a:prstGeom>
-          <a:noFill/>
-        </p:spPr>
-        <p:txBody>
-          <a:bodyPr wrap="square" lIns="0" rIns="0">
-            <a:spAutoFit/>
-          </a:bodyPr>
-          <a:lstStyle/>
-          <a:p>
-            <a:pPr algn="l">
-              <a:lnSpc>
-                <a:spcPct val="115000"/>
-              </a:lnSpc>
-              <a:spcAft>
-                <a:spcPts val="600"/>
-              </a:spcAft>
-            </a:pPr>
-            <a:r>
-              <a:rPr sz="1900" b="1">
-                <a:solidFill>
-                  <a:srgbClr val="101B33"/>
-                </a:solidFill>
-                <a:latin typeface="Arial"/>
-              </a:rPr>
-              <a:t>Hàm mất mát</a:t>
-            </a:r>
-          </a:p>
-          <a:p>
-            <a:pPr algn="l">
-              <a:lnSpc>
-                <a:spcPct val="115000"/>
-              </a:lnSpc>
-              <a:spcAft>
-                <a:spcPts val="600"/>
-              </a:spcAft>
-            </a:pPr>
-            <a:r>
-              <a:rPr sz="1500" b="1">
-                <a:solidFill>
-                  <a:srgbClr val="2E6FD9"/>
-                </a:solidFill>
-                <a:latin typeface="Arial"/>
-              </a:rPr>
-              <a:t>L  =  L_content  +  10 · L_style  +  1 · L_identity</a:t>
-            </a:r>
-          </a:p>
-          <a:p>
-            <a:pPr algn="l">
-              <a:lnSpc>
-                <a:spcPct val="115000"/>
-              </a:lnSpc>
-              <a:spcAft>
-                <a:spcPts val="600"/>
-              </a:spcAft>
-            </a:pPr>
-            <a:r>
-              <a:rPr sz="1400" b="0">
-                <a:solidFill>
-                  <a:srgbClr val="5A6375"/>
-                </a:solidFill>
-                <a:latin typeface="Arial"/>
-              </a:rPr>
-              <a:t>· L_content — khớp đặc trưng đầu ra với đặc trưng AdaIN → giữ bố cục.</a:t>
-            </a:r>
-          </a:p>
-          <a:p>
-            <a:pPr algn="l">
-              <a:lnSpc>
-                <a:spcPct val="115000"/>
-              </a:lnSpc>
-              <a:spcAft>
-                <a:spcPts val="600"/>
-              </a:spcAft>
-            </a:pPr>
-            <a:r>
-              <a:rPr sz="1400" b="0">
-                <a:solidFill>
-                  <a:srgbClr val="5A6375"/>
-                </a:solidFill>
-                <a:latin typeface="Arial"/>
-              </a:rPr>
-              <a:t>· L_style — khớp mean/std ở 4 tầng VGG → giống tông thời tiết.</a:t>
-            </a:r>
-          </a:p>
-          <a:p>
-            <a:pPr algn="l">
-              <a:lnSpc>
-                <a:spcPct val="115000"/>
-              </a:lnSpc>
-              <a:spcAft>
-                <a:spcPts val="600"/>
-              </a:spcAft>
-            </a:pPr>
-            <a:r>
-              <a:rPr sz="1400" b="0">
-                <a:solidFill>
-                  <a:srgbClr val="5A6375"/>
-                </a:solidFill>
-                <a:latin typeface="Arial"/>
-              </a:rPr>
-              <a:t>· L_identity — khi style = content thì đầu ra phải bằng ảnh gốc.</a:t>
-            </a:r>
-          </a:p>
-          <a:p>
-            <a:pPr algn="l">
-              <a:lnSpc>
-                <a:spcPct val="115000"/>
-              </a:lnSpc>
-              <a:spcAft>
-                <a:spcPts val="600"/>
-              </a:spcAft>
-            </a:pPr>
-            <a:r>
-              <a:rPr sz="1400" b="0">
-                <a:solidFill>
-                  <a:srgbClr val="5A6375"/>
-                </a:solidFill>
-                <a:latin typeface="Arial"/>
-              </a:rPr>
-              <a:t>   Đây là điểm bổ sung so với AdaIN gốc: ép decoder trung thực,</a:t>
-            </a:r>
-          </a:p>
-          <a:p>
-            <a:pPr algn="l">
-              <a:lnSpc>
-                <a:spcPct val="115000"/>
-              </a:lnSpc>
-              <a:spcAft>
-                <a:spcPts val="600"/>
-              </a:spcAft>
-            </a:pPr>
-            <a:r>
-              <a:rPr sz="1400" b="0">
-                <a:solidFill>
-                  <a:srgbClr val="5A6375"/>
-                </a:solidFill>
-                <a:latin typeface="Arial"/>
-              </a:rPr>
-              <a:t>   giảm méo cấu trúc — điều kiện sống còn để nhãn còn dùng được.</a:t>
-            </a:r>
-          </a:p>
-        </p:txBody>
-      </p:sp>
-      <p:pic>
-        <p:nvPicPr>
-          <p:cNvPr id="34" name="Picture 33" descr="fig_loss.png"/>
-          <p:cNvPicPr>
-            <a:picLocks noChangeAspect="1"/>
-          </p:cNvPicPr>
-          <p:nvPr/>
-        </p:nvPicPr>
-        <p:blipFill>
-          <a:blip r:embed="rId2"/>
-          <a:stretch>
-            <a:fillRect/>
-          </a:stretch>
-        </p:blipFill>
-        <p:spPr>
-          <a:xfrm>
-            <a:off x="2123667" y="4434840"/>
-            <a:ext cx="7914185" cy="2011680"/>
-          </a:xfrm>
-          <a:prstGeom prst="rect">
-            <a:avLst/>
-          </a:prstGeom>
-        </p:spPr>
-      </p:pic>
     </p:spTree>
   </p:cSld>
   <p:clrMapOvr>
@@ -14379,7 +15095,7 @@
                 </a:solidFill>
                 <a:latin typeface="Arial"/>
               </a:rPr>
-              <a:t>Kết quả — 5 loại thời tiết</a:t>
+              <a:t>Hàm mất mát</a:t>
             </a:r>
           </a:p>
           <a:p>
@@ -14398,7 +15114,7 @@
                 </a:solidFill>
                 <a:latin typeface="Arial"/>
               </a:rPr>
-              <a:t>Cùng một ảnh gốc, đổi ảnh tham chiếu là đổi thời tiết</a:t>
+              <a:t>Ba thành phần, mỗi thành phần giữ một thứ khác nhau</a:t>
             </a:r>
           </a:p>
         </p:txBody>
@@ -14445,9 +15161,698 @@
           </a:p>
         </p:txBody>
       </p:sp>
+      <p:sp>
+        <p:nvSpPr>
+          <p:cNvPr id="6" name="Rectangle 5"/>
+          <p:cNvSpPr/>
+          <p:nvPr/>
+        </p:nvSpPr>
+        <p:spPr>
+          <a:xfrm>
+            <a:off x="640080" y="1188720"/>
+            <a:ext cx="10881360" cy="868680"/>
+          </a:xfrm>
+          <a:prstGeom prst="rect">
+            <a:avLst/>
+          </a:prstGeom>
+          <a:solidFill>
+            <a:srgbClr val="101B33"/>
+          </a:solidFill>
+          <a:ln>
+            <a:noFill/>
+          </a:ln>
+          <a:effectLst/>
+        </p:spPr>
+        <p:style>
+          <a:lnRef idx="1">
+            <a:schemeClr val="accent1"/>
+          </a:lnRef>
+          <a:fillRef idx="3">
+            <a:schemeClr val="accent1"/>
+          </a:fillRef>
+          <a:effectRef idx="2">
+            <a:schemeClr val="accent1"/>
+          </a:effectRef>
+          <a:fontRef idx="minor">
+            <a:schemeClr val="lt1"/>
+          </a:fontRef>
+        </p:style>
+        <p:txBody>
+          <a:bodyPr rtlCol="0" anchor="ctr"/>
+          <a:lstStyle/>
+          <a:p>
+            <a:pPr algn="ctr"/>
+          </a:p>
+        </p:txBody>
+      </p:sp>
+      <p:sp>
+        <p:nvSpPr>
+          <p:cNvPr id="7" name="TextBox 6"/>
+          <p:cNvSpPr txBox="1"/>
+          <p:nvPr/>
+        </p:nvSpPr>
+        <p:spPr>
+          <a:xfrm>
+            <a:off x="640080" y="1371600"/>
+            <a:ext cx="10881360" cy="640080"/>
+          </a:xfrm>
+          <a:prstGeom prst="rect">
+            <a:avLst/>
+          </a:prstGeom>
+          <a:noFill/>
+        </p:spPr>
+        <p:txBody>
+          <a:bodyPr wrap="square" lIns="0" rIns="0">
+            <a:spAutoFit/>
+          </a:bodyPr>
+          <a:lstStyle/>
+          <a:p>
+            <a:pPr algn="ctr">
+              <a:lnSpc>
+                <a:spcPct val="115000"/>
+              </a:lnSpc>
+              <a:spcAft>
+                <a:spcPts val="600"/>
+              </a:spcAft>
+            </a:pPr>
+            <a:r>
+              <a:rPr sz="2600" b="1">
+                <a:solidFill>
+                  <a:srgbClr val="18A099"/>
+                </a:solidFill>
+                <a:latin typeface="Arial"/>
+              </a:rPr>
+              <a:t>L  =  L_content  +  10 · L_style  +  1 · L_identity</a:t>
+            </a:r>
+          </a:p>
+        </p:txBody>
+      </p:sp>
+      <p:sp>
+        <p:nvSpPr>
+          <p:cNvPr id="8" name="Rectangle 7"/>
+          <p:cNvSpPr/>
+          <p:nvPr/>
+        </p:nvSpPr>
+        <p:spPr>
+          <a:xfrm>
+            <a:off x="640080" y="2286000"/>
+            <a:ext cx="3291840" cy="2377440"/>
+          </a:xfrm>
+          <a:prstGeom prst="rect">
+            <a:avLst/>
+          </a:prstGeom>
+          <a:solidFill>
+            <a:srgbClr val="F4F6FA"/>
+          </a:solidFill>
+          <a:ln>
+            <a:noFill/>
+          </a:ln>
+          <a:effectLst/>
+        </p:spPr>
+        <p:style>
+          <a:lnRef idx="1">
+            <a:schemeClr val="accent1"/>
+          </a:lnRef>
+          <a:fillRef idx="3">
+            <a:schemeClr val="accent1"/>
+          </a:fillRef>
+          <a:effectRef idx="2">
+            <a:schemeClr val="accent1"/>
+          </a:effectRef>
+          <a:fontRef idx="minor">
+            <a:schemeClr val="lt1"/>
+          </a:fontRef>
+        </p:style>
+        <p:txBody>
+          <a:bodyPr rtlCol="0" anchor="ctr"/>
+          <a:lstStyle/>
+          <a:p>
+            <a:pPr algn="ctr"/>
+          </a:p>
+        </p:txBody>
+      </p:sp>
+      <p:sp>
+        <p:nvSpPr>
+          <p:cNvPr id="9" name="Rectangle 8"/>
+          <p:cNvSpPr/>
+          <p:nvPr/>
+        </p:nvSpPr>
+        <p:spPr>
+          <a:xfrm>
+            <a:off x="640080" y="2286000"/>
+            <a:ext cx="3291840" cy="73152"/>
+          </a:xfrm>
+          <a:prstGeom prst="rect">
+            <a:avLst/>
+          </a:prstGeom>
+          <a:solidFill>
+            <a:srgbClr val="2E6FD9"/>
+          </a:solidFill>
+          <a:ln>
+            <a:noFill/>
+          </a:ln>
+          <a:effectLst/>
+        </p:spPr>
+        <p:style>
+          <a:lnRef idx="1">
+            <a:schemeClr val="accent1"/>
+          </a:lnRef>
+          <a:fillRef idx="3">
+            <a:schemeClr val="accent1"/>
+          </a:fillRef>
+          <a:effectRef idx="2">
+            <a:schemeClr val="accent1"/>
+          </a:effectRef>
+          <a:fontRef idx="minor">
+            <a:schemeClr val="lt1"/>
+          </a:fontRef>
+        </p:style>
+        <p:txBody>
+          <a:bodyPr rtlCol="0" anchor="ctr"/>
+          <a:lstStyle/>
+          <a:p>
+            <a:pPr algn="ctr"/>
+          </a:p>
+        </p:txBody>
+      </p:sp>
+      <p:sp>
+        <p:nvSpPr>
+          <p:cNvPr id="10" name="TextBox 9"/>
+          <p:cNvSpPr txBox="1"/>
+          <p:nvPr/>
+        </p:nvSpPr>
+        <p:spPr>
+          <a:xfrm>
+            <a:off x="841248" y="2450592"/>
+            <a:ext cx="2926080" cy="2194560"/>
+          </a:xfrm>
+          <a:prstGeom prst="rect">
+            <a:avLst/>
+          </a:prstGeom>
+          <a:noFill/>
+        </p:spPr>
+        <p:txBody>
+          <a:bodyPr wrap="square" lIns="0" rIns="0">
+            <a:spAutoFit/>
+          </a:bodyPr>
+          <a:lstStyle/>
+          <a:p>
+            <a:pPr algn="l">
+              <a:lnSpc>
+                <a:spcPct val="108000"/>
+              </a:lnSpc>
+              <a:spcAft>
+                <a:spcPts val="600"/>
+              </a:spcAft>
+            </a:pPr>
+            <a:r>
+              <a:rPr sz="1600" b="1">
+                <a:solidFill>
+                  <a:srgbClr val="101B33"/>
+                </a:solidFill>
+                <a:latin typeface="Arial"/>
+              </a:rPr>
+              <a:t>① L_content</a:t>
+            </a:r>
+          </a:p>
+          <a:p>
+            <a:pPr algn="l">
+              <a:lnSpc>
+                <a:spcPct val="108000"/>
+              </a:lnSpc>
+              <a:spcAft>
+                <a:spcPts val="600"/>
+              </a:spcAft>
+            </a:pPr>
+            <a:r>
+              <a:rPr sz="1300" b="1">
+                <a:solidFill>
+                  <a:srgbClr val="2E6FD9"/>
+                </a:solidFill>
+                <a:latin typeface="Arial"/>
+              </a:rPr>
+              <a:t>MSE( VGG(ảnh_ra) , t )</a:t>
+            </a:r>
+          </a:p>
+          <a:p>
+            <a:pPr algn="l">
+              <a:lnSpc>
+                <a:spcPct val="108000"/>
+              </a:lnSpc>
+              <a:spcAft>
+                <a:spcPts val="600"/>
+              </a:spcAft>
+            </a:pPr>
+            <a:r>
+              <a:rPr sz="1200" b="0">
+                <a:solidFill>
+                  <a:srgbClr val="5A6375"/>
+                </a:solidFill>
+                <a:latin typeface="Arial"/>
+              </a:rPr>
+              <a:t>Ép ảnh ra có đặc trưng đúng bằng t = AdaIN(c,s). Decoder vẽ sai vị trí xe là loss tăng ngay.</a:t>
+            </a:r>
+          </a:p>
+          <a:p>
+            <a:pPr algn="l">
+              <a:lnSpc>
+                <a:spcPct val="108000"/>
+              </a:lnSpc>
+              <a:spcAft>
+                <a:spcPts val="600"/>
+              </a:spcAft>
+            </a:pPr>
+            <a:r>
+              <a:rPr sz="1200" b="1">
+                <a:solidFill>
+                  <a:srgbClr val="101B33"/>
+                </a:solidFill>
+                <a:latin typeface="Arial"/>
+              </a:rPr>
+              <a:t>→ GIỮ BỐ CỤC CẢNH</a:t>
+            </a:r>
+          </a:p>
+        </p:txBody>
+      </p:sp>
+      <p:sp>
+        <p:nvSpPr>
+          <p:cNvPr id="11" name="Rectangle 10"/>
+          <p:cNvSpPr/>
+          <p:nvPr/>
+        </p:nvSpPr>
+        <p:spPr>
+          <a:xfrm>
+            <a:off x="4434840" y="2286000"/>
+            <a:ext cx="3291840" cy="2377440"/>
+          </a:xfrm>
+          <a:prstGeom prst="rect">
+            <a:avLst/>
+          </a:prstGeom>
+          <a:solidFill>
+            <a:srgbClr val="F4F6FA"/>
+          </a:solidFill>
+          <a:ln>
+            <a:noFill/>
+          </a:ln>
+          <a:effectLst/>
+        </p:spPr>
+        <p:style>
+          <a:lnRef idx="1">
+            <a:schemeClr val="accent1"/>
+          </a:lnRef>
+          <a:fillRef idx="3">
+            <a:schemeClr val="accent1"/>
+          </a:fillRef>
+          <a:effectRef idx="2">
+            <a:schemeClr val="accent1"/>
+          </a:effectRef>
+          <a:fontRef idx="minor">
+            <a:schemeClr val="lt1"/>
+          </a:fontRef>
+        </p:style>
+        <p:txBody>
+          <a:bodyPr rtlCol="0" anchor="ctr"/>
+          <a:lstStyle/>
+          <a:p>
+            <a:pPr algn="ctr"/>
+          </a:p>
+        </p:txBody>
+      </p:sp>
+      <p:sp>
+        <p:nvSpPr>
+          <p:cNvPr id="12" name="Rectangle 11"/>
+          <p:cNvSpPr/>
+          <p:nvPr/>
+        </p:nvSpPr>
+        <p:spPr>
+          <a:xfrm>
+            <a:off x="4434840" y="2286000"/>
+            <a:ext cx="3291840" cy="73152"/>
+          </a:xfrm>
+          <a:prstGeom prst="rect">
+            <a:avLst/>
+          </a:prstGeom>
+          <a:solidFill>
+            <a:srgbClr val="E48A2E"/>
+          </a:solidFill>
+          <a:ln>
+            <a:noFill/>
+          </a:ln>
+          <a:effectLst/>
+        </p:spPr>
+        <p:style>
+          <a:lnRef idx="1">
+            <a:schemeClr val="accent1"/>
+          </a:lnRef>
+          <a:fillRef idx="3">
+            <a:schemeClr val="accent1"/>
+          </a:fillRef>
+          <a:effectRef idx="2">
+            <a:schemeClr val="accent1"/>
+          </a:effectRef>
+          <a:fontRef idx="minor">
+            <a:schemeClr val="lt1"/>
+          </a:fontRef>
+        </p:style>
+        <p:txBody>
+          <a:bodyPr rtlCol="0" anchor="ctr"/>
+          <a:lstStyle/>
+          <a:p>
+            <a:pPr algn="ctr"/>
+          </a:p>
+        </p:txBody>
+      </p:sp>
+      <p:sp>
+        <p:nvSpPr>
+          <p:cNvPr id="13" name="TextBox 12"/>
+          <p:cNvSpPr txBox="1"/>
+          <p:nvPr/>
+        </p:nvSpPr>
+        <p:spPr>
+          <a:xfrm>
+            <a:off x="4636008" y="2450592"/>
+            <a:ext cx="2926080" cy="2194560"/>
+          </a:xfrm>
+          <a:prstGeom prst="rect">
+            <a:avLst/>
+          </a:prstGeom>
+          <a:noFill/>
+        </p:spPr>
+        <p:txBody>
+          <a:bodyPr wrap="square" lIns="0" rIns="0">
+            <a:spAutoFit/>
+          </a:bodyPr>
+          <a:lstStyle/>
+          <a:p>
+            <a:pPr algn="l">
+              <a:lnSpc>
+                <a:spcPct val="108000"/>
+              </a:lnSpc>
+              <a:spcAft>
+                <a:spcPts val="600"/>
+              </a:spcAft>
+            </a:pPr>
+            <a:r>
+              <a:rPr sz="1600" b="1">
+                <a:solidFill>
+                  <a:srgbClr val="101B33"/>
+                </a:solidFill>
+                <a:latin typeface="Arial"/>
+              </a:rPr>
+              <a:t>② L_style</a:t>
+            </a:r>
+          </a:p>
+          <a:p>
+            <a:pPr algn="l">
+              <a:lnSpc>
+                <a:spcPct val="108000"/>
+              </a:lnSpc>
+              <a:spcAft>
+                <a:spcPts val="600"/>
+              </a:spcAft>
+            </a:pPr>
+            <a:r>
+              <a:rPr sz="1300" b="1">
+                <a:solidFill>
+                  <a:srgbClr val="E48A2E"/>
+                </a:solidFill>
+                <a:latin typeface="Arial"/>
+              </a:rPr>
+              <a:t>Σ MSE(μ, σ) qua 4 tầng VGG</a:t>
+            </a:r>
+          </a:p>
+          <a:p>
+            <a:pPr algn="l">
+              <a:lnSpc>
+                <a:spcPct val="108000"/>
+              </a:lnSpc>
+              <a:spcAft>
+                <a:spcPts val="600"/>
+              </a:spcAft>
+            </a:pPr>
+            <a:r>
+              <a:rPr sz="1200" b="0">
+                <a:solidFill>
+                  <a:srgbClr val="5A6375"/>
+                </a:solidFill>
+                <a:latin typeface="Arial"/>
+              </a:rPr>
+              <a:t>Chỉ so trung bình và độ lệch chuẩn, KHÔNG so từng điểm ảnh — vì phong cách nằm ở thống kê.</a:t>
+            </a:r>
+          </a:p>
+          <a:p>
+            <a:pPr algn="l">
+              <a:lnSpc>
+                <a:spcPct val="108000"/>
+              </a:lnSpc>
+              <a:spcAft>
+                <a:spcPts val="600"/>
+              </a:spcAft>
+            </a:pPr>
+            <a:r>
+              <a:rPr sz="1200" b="1">
+                <a:solidFill>
+                  <a:srgbClr val="101B33"/>
+                </a:solidFill>
+                <a:latin typeface="Arial"/>
+              </a:rPr>
+              <a:t>→ GIỐNG TÔNG THỜI TIẾT</a:t>
+            </a:r>
+          </a:p>
+        </p:txBody>
+      </p:sp>
+      <p:sp>
+        <p:nvSpPr>
+          <p:cNvPr id="14" name="Rectangle 13"/>
+          <p:cNvSpPr/>
+          <p:nvPr/>
+        </p:nvSpPr>
+        <p:spPr>
+          <a:xfrm>
+            <a:off x="8229600" y="2286000"/>
+            <a:ext cx="3291840" cy="2377440"/>
+          </a:xfrm>
+          <a:prstGeom prst="rect">
+            <a:avLst/>
+          </a:prstGeom>
+          <a:solidFill>
+            <a:srgbClr val="F4F6FA"/>
+          </a:solidFill>
+          <a:ln>
+            <a:noFill/>
+          </a:ln>
+          <a:effectLst/>
+        </p:spPr>
+        <p:style>
+          <a:lnRef idx="1">
+            <a:schemeClr val="accent1"/>
+          </a:lnRef>
+          <a:fillRef idx="3">
+            <a:schemeClr val="accent1"/>
+          </a:fillRef>
+          <a:effectRef idx="2">
+            <a:schemeClr val="accent1"/>
+          </a:effectRef>
+          <a:fontRef idx="minor">
+            <a:schemeClr val="lt1"/>
+          </a:fontRef>
+        </p:style>
+        <p:txBody>
+          <a:bodyPr rtlCol="0" anchor="ctr"/>
+          <a:lstStyle/>
+          <a:p>
+            <a:pPr algn="ctr"/>
+          </a:p>
+        </p:txBody>
+      </p:sp>
+      <p:sp>
+        <p:nvSpPr>
+          <p:cNvPr id="15" name="Rectangle 14"/>
+          <p:cNvSpPr/>
+          <p:nvPr/>
+        </p:nvSpPr>
+        <p:spPr>
+          <a:xfrm>
+            <a:off x="8229600" y="2286000"/>
+            <a:ext cx="3291840" cy="73152"/>
+          </a:xfrm>
+          <a:prstGeom prst="rect">
+            <a:avLst/>
+          </a:prstGeom>
+          <a:solidFill>
+            <a:srgbClr val="18A099"/>
+          </a:solidFill>
+          <a:ln>
+            <a:noFill/>
+          </a:ln>
+          <a:effectLst/>
+        </p:spPr>
+        <p:style>
+          <a:lnRef idx="1">
+            <a:schemeClr val="accent1"/>
+          </a:lnRef>
+          <a:fillRef idx="3">
+            <a:schemeClr val="accent1"/>
+          </a:fillRef>
+          <a:effectRef idx="2">
+            <a:schemeClr val="accent1"/>
+          </a:effectRef>
+          <a:fontRef idx="minor">
+            <a:schemeClr val="lt1"/>
+          </a:fontRef>
+        </p:style>
+        <p:txBody>
+          <a:bodyPr rtlCol="0" anchor="ctr"/>
+          <a:lstStyle/>
+          <a:p>
+            <a:pPr algn="ctr"/>
+          </a:p>
+        </p:txBody>
+      </p:sp>
+      <p:sp>
+        <p:nvSpPr>
+          <p:cNvPr id="16" name="TextBox 15"/>
+          <p:cNvSpPr txBox="1"/>
+          <p:nvPr/>
+        </p:nvSpPr>
+        <p:spPr>
+          <a:xfrm>
+            <a:off x="8430768" y="2450592"/>
+            <a:ext cx="2926080" cy="2194560"/>
+          </a:xfrm>
+          <a:prstGeom prst="rect">
+            <a:avLst/>
+          </a:prstGeom>
+          <a:noFill/>
+        </p:spPr>
+        <p:txBody>
+          <a:bodyPr wrap="square" lIns="0" rIns="0">
+            <a:spAutoFit/>
+          </a:bodyPr>
+          <a:lstStyle/>
+          <a:p>
+            <a:pPr algn="l">
+              <a:lnSpc>
+                <a:spcPct val="108000"/>
+              </a:lnSpc>
+              <a:spcAft>
+                <a:spcPts val="600"/>
+              </a:spcAft>
+            </a:pPr>
+            <a:r>
+              <a:rPr sz="1600" b="1">
+                <a:solidFill>
+                  <a:srgbClr val="101B33"/>
+                </a:solidFill>
+                <a:latin typeface="Arial"/>
+              </a:rPr>
+              <a:t>③ L_identity</a:t>
+            </a:r>
+          </a:p>
+          <a:p>
+            <a:pPr algn="l">
+              <a:lnSpc>
+                <a:spcPct val="108000"/>
+              </a:lnSpc>
+              <a:spcAft>
+                <a:spcPts val="600"/>
+              </a:spcAft>
+            </a:pPr>
+            <a:r>
+              <a:rPr sz="1300" b="1">
+                <a:solidFill>
+                  <a:srgbClr val="18A099"/>
+                </a:solidFill>
+                <a:latin typeface="Arial"/>
+              </a:rPr>
+              <a:t>MSE( Decoder(VGG(c)) , c )</a:t>
+            </a:r>
+          </a:p>
+          <a:p>
+            <a:pPr algn="l">
+              <a:lnSpc>
+                <a:spcPct val="108000"/>
+              </a:lnSpc>
+              <a:spcAft>
+                <a:spcPts val="600"/>
+              </a:spcAft>
+            </a:pPr>
+            <a:r>
+              <a:rPr sz="1200" b="0">
+                <a:solidFill>
+                  <a:srgbClr val="5A6375"/>
+                </a:solidFill>
+                <a:latin typeface="Arial"/>
+              </a:rPr>
+              <a:t>Nếu style = content thì đầu ra PHẢI bằng đúng ảnh gốc. Điểm nhóm bổ sung so với bài báo gốc.</a:t>
+            </a:r>
+          </a:p>
+          <a:p>
+            <a:pPr algn="l">
+              <a:lnSpc>
+                <a:spcPct val="108000"/>
+              </a:lnSpc>
+              <a:spcAft>
+                <a:spcPts val="600"/>
+              </a:spcAft>
+            </a:pPr>
+            <a:r>
+              <a:rPr sz="1200" b="1">
+                <a:solidFill>
+                  <a:srgbClr val="101B33"/>
+                </a:solidFill>
+                <a:latin typeface="Arial"/>
+              </a:rPr>
+              <a:t>→ GIỮ CẤU TRÚC, nhãn còn dùng được</a:t>
+            </a:r>
+          </a:p>
+        </p:txBody>
+      </p:sp>
+      <p:sp>
+        <p:nvSpPr>
+          <p:cNvPr id="17" name="TextBox 16"/>
+          <p:cNvSpPr txBox="1"/>
+          <p:nvPr/>
+        </p:nvSpPr>
+        <p:spPr>
+          <a:xfrm>
+            <a:off x="640080" y="4846320"/>
+            <a:ext cx="10881360" cy="365760"/>
+          </a:xfrm>
+          <a:prstGeom prst="rect">
+            <a:avLst/>
+          </a:prstGeom>
+          <a:noFill/>
+        </p:spPr>
+        <p:txBody>
+          <a:bodyPr wrap="square" lIns="0" rIns="0">
+            <a:spAutoFit/>
+          </a:bodyPr>
+          <a:lstStyle/>
+          <a:p>
+            <a:pPr algn="l">
+              <a:lnSpc>
+                <a:spcPct val="115000"/>
+              </a:lnSpc>
+              <a:spcAft>
+                <a:spcPts val="600"/>
+              </a:spcAft>
+            </a:pPr>
+            <a:r>
+              <a:rPr sz="1300" b="0">
+                <a:solidFill>
+                  <a:srgbClr val="5A6375"/>
+                </a:solidFill>
+                <a:latin typeface="Arial"/>
+              </a:rPr>
+              <a:t>Đường cong huấn luyện thực tế — loss giảm mạnh 3.000 bước đầu rồi đi ngang; từ bước 10.000 chỉ còn giảm ~1% mỗi 1.000 bước ⇒ dừng ở 12.000 bước.</a:t>
+            </a:r>
+          </a:p>
+        </p:txBody>
+      </p:sp>
       <p:pic>
         <p:nvPicPr>
-          <p:cNvPr id="6" name="Picture 5" descr="fig_weather_types.jpg"/>
+          <p:cNvPr id="18" name="Picture 17" descr="fig_loss.png"/>
           <p:cNvPicPr>
             <a:picLocks noChangeAspect="1"/>
           </p:cNvPicPr>
@@ -14461,8 +15866,8 @@
         </p:blipFill>
         <p:spPr>
           <a:xfrm>
-            <a:off x="457200" y="2208193"/>
-            <a:ext cx="11247120" cy="3173133"/>
+            <a:off x="3382742" y="5230368"/>
+            <a:ext cx="5396035" cy="1371600"/>
           </a:xfrm>
           <a:prstGeom prst="rect">
             <a:avLst/>
@@ -14612,7 +16017,7 @@
                 </a:solidFill>
                 <a:latin typeface="Arial"/>
               </a:rPr>
-              <a:t>Kết quả — ví dụ đầu vào/đầu ra</a:t>
+              <a:t>Kết quả — 5 loại thời tiết</a:t>
             </a:r>
           </a:p>
           <a:p>
@@ -14631,7 +16036,7 @@
                 </a:solidFill>
                 <a:latin typeface="Arial"/>
               </a:rPr>
-              <a:t>Trái: 2 đầu vào · Phải: ảnh sinh ra</a:t>
+              <a:t>Cùng một ảnh gốc, đổi ảnh tham chiếu là đổi thời tiết</a:t>
             </a:r>
           </a:p>
         </p:txBody>
@@ -14680,7 +16085,7 @@
       </p:sp>
       <p:pic>
         <p:nvPicPr>
-          <p:cNvPr id="6" name="Picture 5" descr="fig_examples.jpg"/>
+          <p:cNvPr id="6" name="Picture 5" descr="fig_weather_types.jpg"/>
           <p:cNvPicPr>
             <a:picLocks noChangeAspect="1"/>
           </p:cNvPicPr>
@@ -14694,8 +16099,8 @@
         </p:blipFill>
         <p:spPr>
           <a:xfrm>
-            <a:off x="2407987" y="1234440"/>
-            <a:ext cx="7345546" cy="5120639"/>
+            <a:off x="457200" y="2208193"/>
+            <a:ext cx="11247120" cy="3173133"/>
           </a:xfrm>
           <a:prstGeom prst="rect">
             <a:avLst/>

--- a/slides/BaoCao_TangCuongDuLieuThoiTiet.pptx
+++ b/slides/BaoCao_TangCuongDuLieuThoiTiet.pptx
@@ -11978,8 +11978,8 @@
         </p:nvSpPr>
         <p:spPr>
           <a:xfrm>
-            <a:off x="548640" y="1371600"/>
-            <a:ext cx="3337560" cy="3017520"/>
+            <a:off x="548640" y="1325880"/>
+            <a:ext cx="3337560" cy="3291840"/>
           </a:xfrm>
           <a:prstGeom prst="rect">
             <a:avLst/>
@@ -12022,7 +12022,7 @@
         </p:nvSpPr>
         <p:spPr>
           <a:xfrm>
-            <a:off x="548640" y="1371600"/>
+            <a:off x="548640" y="1325880"/>
             <a:ext cx="3337560" cy="82296"/>
           </a:xfrm>
           <a:prstGeom prst="rect">
@@ -12066,8 +12066,8 @@
         </p:nvSpPr>
         <p:spPr>
           <a:xfrm>
-            <a:off x="777240" y="1600200"/>
-            <a:ext cx="2926080" cy="2743200"/>
+            <a:off x="777240" y="1536192"/>
+            <a:ext cx="2926080" cy="3108960"/>
           </a:xfrm>
           <a:prstGeom prst="rect">
             <a:avLst/>
@@ -12095,27 +12095,28 @@
                 </a:solidFill>
                 <a:latin typeface="Arial"/>
               </a:rPr>
-              <a:t>① AdaIN  (học sâu)</a:t>
-            </a:r>
-          </a:p>
-          <a:p>
-            <a:pPr algn="l">
-              <a:lnSpc>
-                <a:spcPct val="115000"/>
-              </a:lnSpc>
-              <a:spcAft>
-                <a:spcPts val="600"/>
-              </a:spcAft>
-            </a:pPr>
-            <a:r>
-              <a:rPr sz="1300" b="0">
+              <a:t>① AdaIN + Decoder</a:t>
+            </a:r>
+          </a:p>
+          <a:p>
+            <a:pPr algn="l">
+              <a:lnSpc>
+                <a:spcPct val="115000"/>
+              </a:lnSpc>
+              <a:spcAft>
+                <a:spcPts val="600"/>
+              </a:spcAft>
+            </a:pPr>
+            <a:r>
+              <a:rPr sz="1200" b="0">
                 <a:solidFill>
                   <a:srgbClr val="5A6375"/>
                 </a:solidFill>
                 <a:latin typeface="Arial"/>
               </a:rPr>
-              <a:t>Chuẩn hoá đặc trưng VGG của ảnh gốc rồi nhuộm lại bằng mean/std của ảnh thời tiết.
-→ Đổi tông màu, độ sáng, độ mù toàn cục.</a:t>
+              <a:t>AdaIN nhuộm đặc trưng VGG của ảnh gốc bằng mean/std của ảnh thời tiết.
+Decoder dựng đặc trưng đã nhuộm trở lại thành ảnh RGB — phần DUY NHẤT được huấn luyện.
+→ Đổi tông màu, độ sáng, độ mù.</a:t>
             </a:r>
           </a:p>
         </p:txBody>
@@ -12128,8 +12129,8 @@
         </p:nvSpPr>
         <p:spPr>
           <a:xfrm>
-            <a:off x="4434840" y="1371600"/>
-            <a:ext cx="3337560" cy="3017520"/>
+            <a:off x="4434840" y="1325880"/>
+            <a:ext cx="3337560" cy="3291840"/>
           </a:xfrm>
           <a:prstGeom prst="rect">
             <a:avLst/>
@@ -12172,7 +12173,7 @@
         </p:nvSpPr>
         <p:spPr>
           <a:xfrm>
-            <a:off x="4434840" y="1371600"/>
+            <a:off x="4434840" y="1325880"/>
             <a:ext cx="3337560" cy="82296"/>
           </a:xfrm>
           <a:prstGeom prst="rect">
@@ -12216,8 +12217,8 @@
         </p:nvSpPr>
         <p:spPr>
           <a:xfrm>
-            <a:off x="4663440" y="1600200"/>
-            <a:ext cx="2926080" cy="2743200"/>
+            <a:off x="4663440" y="1536192"/>
+            <a:ext cx="2926080" cy="3108960"/>
           </a:xfrm>
           <a:prstGeom prst="rect">
             <a:avLst/>
@@ -12258,7 +12259,7 @@
               </a:spcAft>
             </a:pPr>
             <a:r>
-              <a:rPr sz="1300" b="0">
+              <a:rPr sz="1200" b="0">
                 <a:solidFill>
                   <a:srgbClr val="5A6375"/>
                 </a:solidFill>
@@ -12266,7 +12267,7 @@
               </a:rPr>
               <a:t>Dùng ảnh gốc làm ảnh dẫn hướng, lọc tuyến tính cục bộ q = a·I + b.
 Bán kính lớn (32) → a, b mượt → đầu ra = ẢNH GỐC nhân trường tương phản + lệch màu.
-→ Giữ 100% chi tiết ảnh chụp, chỉ đổi tông thời tiết.</a:t>
+→ Giữ 100% chi tiết ảnh chụp.</a:t>
             </a:r>
           </a:p>
         </p:txBody>
@@ -12279,8 +12280,8 @@
         </p:nvSpPr>
         <p:spPr>
           <a:xfrm>
-            <a:off x="8321040" y="1371600"/>
-            <a:ext cx="3337560" cy="3017520"/>
+            <a:off x="8321040" y="1325880"/>
+            <a:ext cx="3337560" cy="3291840"/>
           </a:xfrm>
           <a:prstGeom prst="rect">
             <a:avLst/>
@@ -12323,7 +12324,7 @@
         </p:nvSpPr>
         <p:spPr>
           <a:xfrm>
-            <a:off x="8321040" y="1371600"/>
+            <a:off x="8321040" y="1325880"/>
             <a:ext cx="3337560" cy="82296"/>
           </a:xfrm>
           <a:prstGeom prst="rect">
@@ -12367,8 +12368,8 @@
         </p:nvSpPr>
         <p:spPr>
           <a:xfrm>
-            <a:off x="8549640" y="1600200"/>
-            <a:ext cx="2926080" cy="2743200"/>
+            <a:off x="8549640" y="1536192"/>
+            <a:ext cx="2926080" cy="3108960"/>
           </a:xfrm>
           <a:prstGeom prst="rect">
             <a:avLst/>
@@ -12409,7 +12410,7 @@
               </a:spcAft>
             </a:pPr>
             <a:r>
-              <a:rPr sz="1300" b="0">
+              <a:rPr sz="1200" b="0">
                 <a:solidFill>
                   <a:srgbClr val="5A6375"/>
                 </a:solidFill>
@@ -12429,7 +12430,7 @@
         </p:nvSpPr>
         <p:spPr>
           <a:xfrm>
-            <a:off x="548640" y="4617720"/>
+            <a:off x="548640" y="4892040"/>
             <a:ext cx="11064240" cy="1463040"/>
           </a:xfrm>
           <a:prstGeom prst="rect">
@@ -12625,7 +12626,7 @@
                 </a:solidFill>
                 <a:latin typeface="Arial"/>
               </a:rPr>
-              <a:t>① AdaIN — trái tim của phương pháp</a:t>
+              <a:t>① Khối học sâu: AdaIN + Decoder</a:t>
             </a:r>
           </a:p>
           <a:p>
@@ -12644,7 +12645,7 @@
                 </a:solidFill>
                 <a:latin typeface="Arial"/>
               </a:rPr>
-              <a:t>Huang &amp; Belongie, ICCV 2017</a:t>
+              <a:t>AdaIN trộn thống kê (0 tham số) · Decoder dựng lại ảnh (phần DUY NHẤT được học)</a:t>
             </a:r>
           </a:p>
         </p:txBody>
@@ -12699,8 +12700,8 @@
         </p:nvSpPr>
         <p:spPr>
           <a:xfrm>
-            <a:off x="640080" y="1371600"/>
-            <a:ext cx="10881360" cy="1234440"/>
+            <a:off x="640080" y="1170432"/>
+            <a:ext cx="10881360" cy="914400"/>
           </a:xfrm>
           <a:prstGeom prst="rect">
             <a:avLst/>
@@ -12743,8 +12744,8 @@
         </p:nvSpPr>
         <p:spPr>
           <a:xfrm>
-            <a:off x="640080" y="1627632"/>
-            <a:ext cx="10881360" cy="914400"/>
+            <a:off x="640080" y="1316736"/>
+            <a:ext cx="10881360" cy="731520"/>
           </a:xfrm>
           <a:prstGeom prst="rect">
             <a:avLst/>
@@ -12766,7 +12767,7 @@
               </a:spcAft>
             </a:pPr>
             <a:r>
-              <a:rPr sz="3000" b="1">
+              <a:rPr sz="2600" b="1">
                 <a:solidFill>
                   <a:srgbClr val="18A099"/>
                 </a:solidFill>
@@ -12785,14 +12786,14 @@
         </p:nvSpPr>
         <p:spPr>
           <a:xfrm>
-            <a:off x="640080" y="3026664"/>
-            <a:ext cx="100584" cy="100584"/>
+            <a:off x="640080" y="2286000"/>
+            <a:ext cx="5486400" cy="3246120"/>
           </a:xfrm>
           <a:prstGeom prst="rect">
             <a:avLst/>
           </a:prstGeom>
           <a:solidFill>
-            <a:srgbClr val="18A099"/>
+            <a:srgbClr val="F4F6FA"/>
           </a:solidFill>
           <a:ln>
             <a:noFill/>
@@ -12823,62 +12824,20 @@
       </p:sp>
       <p:sp>
         <p:nvSpPr>
-          <p:cNvPr id="9" name="TextBox 8"/>
-          <p:cNvSpPr txBox="1"/>
-          <p:nvPr/>
-        </p:nvSpPr>
-        <p:spPr>
-          <a:xfrm>
-            <a:off x="914400" y="2926080"/>
-            <a:ext cx="10607040" cy="548640"/>
-          </a:xfrm>
-          <a:prstGeom prst="rect">
-            <a:avLst/>
-          </a:prstGeom>
-          <a:noFill/>
-        </p:spPr>
-        <p:txBody>
-          <a:bodyPr wrap="square" lIns="0" rIns="0">
-            <a:spAutoFit/>
-          </a:bodyPr>
-          <a:lstStyle/>
-          <a:p>
-            <a:pPr algn="l">
-              <a:lnSpc>
-                <a:spcPct val="115000"/>
-              </a:lnSpc>
-              <a:spcAft>
-                <a:spcPts val="600"/>
-              </a:spcAft>
-            </a:pPr>
-            <a:r>
-              <a:rPr sz="1600" b="1">
-                <a:solidFill>
-                  <a:srgbClr val="101B33"/>
-                </a:solidFill>
-                <a:latin typeface="Arial"/>
-              </a:rPr>
-              <a:t>c = đặc trưng VGG của ảnh giao thông,  s = đặc trưng VGG của ảnh thời tiết.</a:t>
-            </a:r>
-          </a:p>
-        </p:txBody>
-      </p:sp>
-      <p:sp>
-        <p:nvSpPr>
-          <p:cNvPr id="10" name="Rectangle 9"/>
+          <p:cNvPr id="9" name="Rectangle 8"/>
           <p:cNvSpPr/>
           <p:nvPr/>
         </p:nvSpPr>
         <p:spPr>
           <a:xfrm>
-            <a:off x="640080" y="3575304"/>
-            <a:ext cx="100584" cy="100584"/>
+            <a:off x="640080" y="2286000"/>
+            <a:ext cx="5486400" cy="73152"/>
           </a:xfrm>
           <a:prstGeom prst="rect">
             <a:avLst/>
           </a:prstGeom>
           <a:solidFill>
-            <a:srgbClr val="18A099"/>
+            <a:srgbClr val="2E6FD9"/>
           </a:solidFill>
           <a:ln>
             <a:noFill/>
@@ -12909,14 +12868,14 @@
       </p:sp>
       <p:sp>
         <p:nvSpPr>
-          <p:cNvPr id="11" name="TextBox 10"/>
+          <p:cNvPr id="10" name="TextBox 9"/>
           <p:cNvSpPr txBox="1"/>
           <p:nvPr/>
         </p:nvSpPr>
         <p:spPr>
           <a:xfrm>
-            <a:off x="914400" y="3474720"/>
-            <a:ext cx="10607040" cy="548640"/>
+            <a:off x="868680" y="2432304"/>
+            <a:ext cx="5120640" cy="3017520"/>
           </a:xfrm>
           <a:prstGeom prst="rect">
             <a:avLst/>
@@ -12931,40 +12890,211 @@
           <a:p>
             <a:pPr algn="l">
               <a:lnSpc>
-                <a:spcPct val="115000"/>
-              </a:lnSpc>
-              <a:spcAft>
-                <a:spcPts val="600"/>
-              </a:spcAft>
-            </a:pPr>
-            <a:r>
-              <a:rPr sz="1600" b="0">
+                <a:spcPct val="98000"/>
+              </a:lnSpc>
+              <a:spcAft>
+                <a:spcPts val="600"/>
+              </a:spcAft>
+            </a:pPr>
+            <a:r>
+              <a:rPr sz="1600" b="1">
                 <a:solidFill>
                   <a:srgbClr val="101B33"/>
                 </a:solidFill>
                 <a:latin typeface="Arial"/>
               </a:rPr>
-              <a:t>Bước 1 — ( c − μ(c) ) / σ(c): xoá phong cách gốc (trời quang), giữ lại cấu trúc không gian.</a:t>
-            </a:r>
-          </a:p>
-        </p:txBody>
-      </p:sp>
-      <p:sp>
-        <p:nvSpPr>
-          <p:cNvPr id="12" name="Rectangle 11"/>
+              <a:t>AdaIN — 0 THAM SỐ HỌC</a:t>
+            </a:r>
+          </a:p>
+          <a:p>
+            <a:pPr algn="l">
+              <a:lnSpc>
+                <a:spcPct val="98000"/>
+              </a:lnSpc>
+              <a:spcAft>
+                <a:spcPts val="600"/>
+              </a:spcAft>
+            </a:pPr>
+            <a:r>
+              <a:rPr sz="1200" b="0">
+                <a:solidFill>
+                  <a:srgbClr val="5A6375"/>
+                </a:solidFill>
+                <a:latin typeface="Arial"/>
+              </a:rPr>
+              <a:t>c = đặc trưng VGG ảnh giao thông</a:t>
+            </a:r>
+          </a:p>
+          <a:p>
+            <a:pPr algn="l">
+              <a:lnSpc>
+                <a:spcPct val="98000"/>
+              </a:lnSpc>
+              <a:spcAft>
+                <a:spcPts val="600"/>
+              </a:spcAft>
+            </a:pPr>
+            <a:r>
+              <a:rPr sz="1200" b="0">
+                <a:solidFill>
+                  <a:srgbClr val="5A6375"/>
+                </a:solidFill>
+                <a:latin typeface="Arial"/>
+              </a:rPr>
+              <a:t>s = đặc trưng VGG ảnh thời tiết</a:t>
+            </a:r>
+          </a:p>
+          <a:p>
+            <a:pPr algn="l">
+              <a:lnSpc>
+                <a:spcPct val="98000"/>
+              </a:lnSpc>
+              <a:spcAft>
+                <a:spcPts val="600"/>
+              </a:spcAft>
+            </a:pPr>
+            <a:r>
+              <a:rPr sz="1300" b="1">
+                <a:solidFill>
+                  <a:srgbClr val="2E6FD9"/>
+                </a:solidFill>
+                <a:latin typeface="Arial"/>
+              </a:rPr>
+              <a:t>Bước 1 — ( c − μ(c) ) / σ(c)</a:t>
+            </a:r>
+          </a:p>
+          <a:p>
+            <a:pPr algn="l">
+              <a:lnSpc>
+                <a:spcPct val="98000"/>
+              </a:lnSpc>
+              <a:spcAft>
+                <a:spcPts val="600"/>
+              </a:spcAft>
+            </a:pPr>
+            <a:r>
+              <a:rPr sz="1200" b="0">
+                <a:solidFill>
+                  <a:srgbClr val="5A6375"/>
+                </a:solidFill>
+                <a:latin typeface="Arial"/>
+              </a:rPr>
+              <a:t>     xoá phong cách gốc (tông trời quang),</a:t>
+            </a:r>
+          </a:p>
+          <a:p>
+            <a:pPr algn="l">
+              <a:lnSpc>
+                <a:spcPct val="98000"/>
+              </a:lnSpc>
+              <a:spcAft>
+                <a:spcPts val="600"/>
+              </a:spcAft>
+            </a:pPr>
+            <a:r>
+              <a:rPr sz="1200" b="0">
+                <a:solidFill>
+                  <a:srgbClr val="5A6375"/>
+                </a:solidFill>
+                <a:latin typeface="Arial"/>
+              </a:rPr>
+              <a:t>     GIỮ NGUYÊN cấu trúc không gian</a:t>
+            </a:r>
+          </a:p>
+          <a:p>
+            <a:pPr algn="l">
+              <a:lnSpc>
+                <a:spcPct val="98000"/>
+              </a:lnSpc>
+              <a:spcAft>
+                <a:spcPts val="600"/>
+              </a:spcAft>
+            </a:pPr>
+            <a:r>
+              <a:rPr sz="1300" b="1">
+                <a:solidFill>
+                  <a:srgbClr val="2E6FD9"/>
+                </a:solidFill>
+                <a:latin typeface="Arial"/>
+              </a:rPr>
+              <a:t>Bước 2 — nhân σ(s), cộng μ(s)</a:t>
+            </a:r>
+          </a:p>
+          <a:p>
+            <a:pPr algn="l">
+              <a:lnSpc>
+                <a:spcPct val="98000"/>
+              </a:lnSpc>
+              <a:spcAft>
+                <a:spcPts val="600"/>
+              </a:spcAft>
+            </a:pPr>
+            <a:r>
+              <a:rPr sz="1200" b="0">
+                <a:solidFill>
+                  <a:srgbClr val="5A6375"/>
+                </a:solidFill>
+                <a:latin typeface="Arial"/>
+              </a:rPr>
+              <a:t>     'nhuộm' bằng thống kê ảnh thời tiết</a:t>
+            </a:r>
+          </a:p>
+          <a:p>
+            <a:pPr algn="l">
+              <a:lnSpc>
+                <a:spcPct val="98000"/>
+              </a:lnSpc>
+              <a:spcAft>
+                <a:spcPts val="600"/>
+              </a:spcAft>
+            </a:pPr>
+            <a:r>
+              <a:rPr sz="1200" b="1">
+                <a:solidFill>
+                  <a:srgbClr val="101B33"/>
+                </a:solidFill>
+                <a:latin typeface="Arial"/>
+              </a:rPr>
+              <a:t>Chỉ đổi thống kê THEO KÊNH ⇒ bản đồ đặc trưng</a:t>
+            </a:r>
+          </a:p>
+          <a:p>
+            <a:pPr algn="l">
+              <a:lnSpc>
+                <a:spcPct val="98000"/>
+              </a:lnSpc>
+              <a:spcAft>
+                <a:spcPts val="600"/>
+              </a:spcAft>
+            </a:pPr>
+            <a:r>
+              <a:rPr sz="1200" b="1">
+                <a:solidFill>
+                  <a:srgbClr val="101B33"/>
+                </a:solidFill>
+                <a:latin typeface="Arial"/>
+              </a:rPr>
+              <a:t>không bị dịch chuyển ⇒ giữ nguyên bố cục.</a:t>
+            </a:r>
+          </a:p>
+        </p:txBody>
+      </p:sp>
+      <p:sp>
+        <p:nvSpPr>
+          <p:cNvPr id="11" name="Rectangle 10"/>
           <p:cNvSpPr/>
           <p:nvPr/>
         </p:nvSpPr>
         <p:spPr>
           <a:xfrm>
-            <a:off x="640080" y="4123944"/>
-            <a:ext cx="100584" cy="100584"/>
+            <a:off x="6400800" y="2286000"/>
+            <a:ext cx="5120640" cy="3246120"/>
           </a:xfrm>
           <a:prstGeom prst="rect">
             <a:avLst/>
           </a:prstGeom>
           <a:solidFill>
-            <a:srgbClr val="18A099"/>
+            <a:srgbClr val="F4F6FA"/>
           </a:solidFill>
           <a:ln>
             <a:noFill/>
@@ -12995,62 +13125,20 @@
       </p:sp>
       <p:sp>
         <p:nvSpPr>
-          <p:cNvPr id="13" name="TextBox 12"/>
-          <p:cNvSpPr txBox="1"/>
-          <p:nvPr/>
-        </p:nvSpPr>
-        <p:spPr>
-          <a:xfrm>
-            <a:off x="914400" y="4023360"/>
-            <a:ext cx="10607040" cy="548640"/>
-          </a:xfrm>
-          <a:prstGeom prst="rect">
-            <a:avLst/>
-          </a:prstGeom>
-          <a:noFill/>
-        </p:spPr>
-        <p:txBody>
-          <a:bodyPr wrap="square" lIns="0" rIns="0">
-            <a:spAutoFit/>
-          </a:bodyPr>
-          <a:lstStyle/>
-          <a:p>
-            <a:pPr algn="l">
-              <a:lnSpc>
-                <a:spcPct val="115000"/>
-              </a:lnSpc>
-              <a:spcAft>
-                <a:spcPts val="600"/>
-              </a:spcAft>
-            </a:pPr>
-            <a:r>
-              <a:rPr sz="1600" b="0">
-                <a:solidFill>
-                  <a:srgbClr val="101B33"/>
-                </a:solidFill>
-                <a:latin typeface="Arial"/>
-              </a:rPr>
-              <a:t>Bước 2 — nhân σ(s), cộng μ(s): 'nhuộm' bằng thống kê của ảnh thời tiết.</a:t>
-            </a:r>
-          </a:p>
-        </p:txBody>
-      </p:sp>
-      <p:sp>
-        <p:nvSpPr>
-          <p:cNvPr id="14" name="Rectangle 13"/>
+          <p:cNvPr id="12" name="Rectangle 11"/>
           <p:cNvSpPr/>
           <p:nvPr/>
         </p:nvSpPr>
         <p:spPr>
           <a:xfrm>
-            <a:off x="640080" y="4672584"/>
-            <a:ext cx="100584" cy="100584"/>
+            <a:off x="6400800" y="2286000"/>
+            <a:ext cx="5120640" cy="73152"/>
           </a:xfrm>
           <a:prstGeom prst="rect">
             <a:avLst/>
           </a:prstGeom>
           <a:solidFill>
-            <a:srgbClr val="18A099"/>
+            <a:srgbClr val="E48A2E"/>
           </a:solidFill>
           <a:ln>
             <a:noFill/>
@@ -13081,14 +13169,14 @@
       </p:sp>
       <p:sp>
         <p:nvSpPr>
-          <p:cNvPr id="15" name="TextBox 14"/>
+          <p:cNvPr id="13" name="TextBox 12"/>
           <p:cNvSpPr txBox="1"/>
           <p:nvPr/>
         </p:nvSpPr>
         <p:spPr>
           <a:xfrm>
-            <a:off x="914400" y="4572000"/>
-            <a:ext cx="10607040" cy="548640"/>
+            <a:off x="6629400" y="2432304"/>
+            <a:ext cx="4754880" cy="3017520"/>
           </a:xfrm>
           <a:prstGeom prst="rect">
             <a:avLst/>
@@ -13103,78 +13191,224 @@
           <a:p>
             <a:pPr algn="l">
               <a:lnSpc>
-                <a:spcPct val="115000"/>
-              </a:lnSpc>
-              <a:spcAft>
-                <a:spcPts val="600"/>
-              </a:spcAft>
-            </a:pPr>
-            <a:r>
-              <a:rPr sz="1600" b="1">
+                <a:spcPct val="96000"/>
+              </a:lnSpc>
+              <a:spcAft>
+                <a:spcPts val="600"/>
+              </a:spcAft>
+            </a:pPr>
+            <a:r>
+              <a:rPr sz="1400" b="1">
                 <a:solidFill>
                   <a:srgbClr val="101B33"/>
                 </a:solidFill>
                 <a:latin typeface="Arial"/>
               </a:rPr>
-              <a:t>Chỉ đổi thống kê THEO KÊNH ⇒ bản đồ đặc trưng không bị dịch chuyển ⇒ giữ bố cục.</a:t>
-            </a:r>
-          </a:p>
-        </p:txBody>
-      </p:sp>
-      <p:sp>
-        <p:nvSpPr>
-          <p:cNvPr id="16" name="Rectangle 15"/>
-          <p:cNvSpPr/>
-          <p:nvPr/>
-        </p:nvSpPr>
-        <p:spPr>
-          <a:xfrm>
-            <a:off x="640080" y="5221224"/>
-            <a:ext cx="100584" cy="100584"/>
-          </a:xfrm>
-          <a:prstGeom prst="rect">
-            <a:avLst/>
-          </a:prstGeom>
-          <a:solidFill>
-            <a:srgbClr val="18A099"/>
-          </a:solidFill>
-          <a:ln>
-            <a:noFill/>
-          </a:ln>
-          <a:effectLst/>
-        </p:spPr>
-        <p:style>
-          <a:lnRef idx="1">
-            <a:schemeClr val="accent1"/>
-          </a:lnRef>
-          <a:fillRef idx="3">
-            <a:schemeClr val="accent1"/>
-          </a:fillRef>
-          <a:effectRef idx="2">
-            <a:schemeClr val="accent1"/>
-          </a:effectRef>
-          <a:fontRef idx="minor">
-            <a:schemeClr val="lt1"/>
-          </a:fontRef>
-        </p:style>
-        <p:txBody>
-          <a:bodyPr rtlCol="0" anchor="ctr"/>
-          <a:lstStyle/>
-          <a:p>
-            <a:pPr algn="ctr"/>
-          </a:p>
-        </p:txBody>
-      </p:sp>
-      <p:sp>
-        <p:nvSpPr>
-          <p:cNvPr id="17" name="TextBox 16"/>
+              <a:t>DECODER — 3,51 M THAM SỐ, PHẦN DUY NHẤT ĐƯỢC HỌC</a:t>
+            </a:r>
+          </a:p>
+          <a:p>
+            <a:pPr algn="l">
+              <a:lnSpc>
+                <a:spcPct val="96000"/>
+              </a:lnSpc>
+              <a:spcAft>
+                <a:spcPts val="600"/>
+              </a:spcAft>
+            </a:pPr>
+            <a:r>
+              <a:rPr sz="1200" b="0">
+                <a:solidFill>
+                  <a:srgbClr val="5A6375"/>
+                </a:solidFill>
+                <a:latin typeface="Arial"/>
+              </a:rPr>
+              <a:t>Vì sao cần? VGG chỉ NÉN ảnh thành đặc trưng, không</a:t>
+            </a:r>
+          </a:p>
+          <a:p>
+            <a:pPr algn="l">
+              <a:lnSpc>
+                <a:spcPct val="96000"/>
+              </a:lnSpc>
+              <a:spcAft>
+                <a:spcPts val="600"/>
+              </a:spcAft>
+            </a:pPr>
+            <a:r>
+              <a:rPr sz="1200" b="0">
+                <a:solidFill>
+                  <a:srgbClr val="5A6375"/>
+                </a:solidFill>
+                <a:latin typeface="Arial"/>
+              </a:rPr>
+              <a:t>có mạng nào giải nén ngược lại ⇒ phải tự huấn luyện.</a:t>
+            </a:r>
+          </a:p>
+          <a:p>
+            <a:pPr algn="l">
+              <a:lnSpc>
+                <a:spcPct val="96000"/>
+              </a:lnSpc>
+              <a:spcAft>
+                <a:spcPts val="600"/>
+              </a:spcAft>
+            </a:pPr>
+            <a:r>
+              <a:rPr sz="1300" b="1">
+                <a:solidFill>
+                  <a:srgbClr val="E48A2E"/>
+                </a:solidFill>
+                <a:latin typeface="Arial"/>
+              </a:rPr>
+              <a:t>Kiến trúc — phản chiếu ngược VGG-19</a:t>
+            </a:r>
+          </a:p>
+          <a:p>
+            <a:pPr algn="l">
+              <a:lnSpc>
+                <a:spcPct val="96000"/>
+              </a:lnSpc>
+              <a:spcAft>
+                <a:spcPts val="600"/>
+              </a:spcAft>
+            </a:pPr>
+            <a:r>
+              <a:rPr sz="1200" b="0">
+                <a:solidFill>
+                  <a:srgbClr val="5A6375"/>
+                </a:solidFill>
+                <a:latin typeface="Arial"/>
+              </a:rPr>
+              <a:t>     512 kênh @ 32×32   (1/8 độ phân giải)</a:t>
+            </a:r>
+          </a:p>
+          <a:p>
+            <a:pPr algn="l">
+              <a:lnSpc>
+                <a:spcPct val="96000"/>
+              </a:lnSpc>
+              <a:spcAft>
+                <a:spcPts val="600"/>
+              </a:spcAft>
+            </a:pPr>
+            <a:r>
+              <a:rPr sz="1200" b="0">
+                <a:solidFill>
+                  <a:srgbClr val="5A6375"/>
+                </a:solidFill>
+                <a:latin typeface="Arial"/>
+              </a:rPr>
+              <a:t>        ↓  9 lớp Conv 3×3 + ReLU</a:t>
+            </a:r>
+          </a:p>
+          <a:p>
+            <a:pPr algn="l">
+              <a:lnSpc>
+                <a:spcPct val="96000"/>
+              </a:lnSpc>
+              <a:spcAft>
+                <a:spcPts val="600"/>
+              </a:spcAft>
+            </a:pPr>
+            <a:r>
+              <a:rPr sz="1200" b="0">
+                <a:solidFill>
+                  <a:srgbClr val="5A6375"/>
+                </a:solidFill>
+                <a:latin typeface="Arial"/>
+              </a:rPr>
+              <a:t>        ↓  3 lần Upsample ×2</a:t>
+            </a:r>
+          </a:p>
+          <a:p>
+            <a:pPr algn="l">
+              <a:lnSpc>
+                <a:spcPct val="96000"/>
+              </a:lnSpc>
+              <a:spcAft>
+                <a:spcPts val="600"/>
+              </a:spcAft>
+            </a:pPr>
+            <a:r>
+              <a:rPr sz="1200" b="0">
+                <a:solidFill>
+                  <a:srgbClr val="5A6375"/>
+                </a:solidFill>
+                <a:latin typeface="Arial"/>
+              </a:rPr>
+              <a:t>     3 kênh @ 256×256   (ảnh RGB)</a:t>
+            </a:r>
+          </a:p>
+          <a:p>
+            <a:pPr algn="l">
+              <a:lnSpc>
+                <a:spcPct val="96000"/>
+              </a:lnSpc>
+              <a:spcAft>
+                <a:spcPts val="600"/>
+              </a:spcAft>
+            </a:pPr>
+            <a:r>
+              <a:rPr sz="1200" b="0">
+                <a:solidFill>
+                  <a:srgbClr val="5A6375"/>
+                </a:solidFill>
+                <a:latin typeface="Arial"/>
+              </a:rPr>
+              <a:t>· ReflectionPad thay zero-pad → không có viền đen</a:t>
+            </a:r>
+          </a:p>
+          <a:p>
+            <a:pPr algn="l">
+              <a:lnSpc>
+                <a:spcPct val="96000"/>
+              </a:lnSpc>
+              <a:spcAft>
+                <a:spcPts val="600"/>
+              </a:spcAft>
+            </a:pPr>
+            <a:r>
+              <a:rPr sz="1200" b="0">
+                <a:solidFill>
+                  <a:srgbClr val="5A6375"/>
+                </a:solidFill>
+                <a:latin typeface="Arial"/>
+              </a:rPr>
+              <a:t>· Upsample nearest thay ConvTranspose → không bị</a:t>
+            </a:r>
+          </a:p>
+          <a:p>
+            <a:pPr algn="l">
+              <a:lnSpc>
+                <a:spcPct val="96000"/>
+              </a:lnSpc>
+              <a:spcAft>
+                <a:spcPts val="600"/>
+              </a:spcAft>
+            </a:pPr>
+            <a:r>
+              <a:rPr sz="1200" b="0">
+                <a:solidFill>
+                  <a:srgbClr val="5A6375"/>
+                </a:solidFill>
+                <a:latin typeface="Arial"/>
+              </a:rPr>
+              <a:t>   vệt caro (checkerboard artifact)</a:t>
+            </a:r>
+          </a:p>
+        </p:txBody>
+      </p:sp>
+      <p:sp>
+        <p:nvSpPr>
+          <p:cNvPr id="14" name="TextBox 13"/>
           <p:cNvSpPr txBox="1"/>
           <p:nvPr/>
         </p:nvSpPr>
         <p:spPr>
           <a:xfrm>
-            <a:off x="914400" y="5120640"/>
-            <a:ext cx="10607040" cy="548640"/>
+            <a:off x="640080" y="5715000"/>
+            <a:ext cx="10881360" cy="822960"/>
           </a:xfrm>
           <a:prstGeom prst="rect">
             <a:avLst/>
@@ -13196,99 +13430,32 @@
               </a:spcAft>
             </a:pPr>
             <a:r>
-              <a:rPr sz="1600" b="0">
+              <a:rPr sz="1400" b="1">
                 <a:solidFill>
                   <a:srgbClr val="101B33"/>
                 </a:solidFill>
                 <a:latin typeface="Arial"/>
               </a:rPr>
-              <a:t>Không có tham số học nào trong AdaIN — chỉ Decoder (3,51 triệu tham số) được huấn luyện.</a:t>
-            </a:r>
-          </a:p>
-        </p:txBody>
-      </p:sp>
-      <p:sp>
-        <p:nvSpPr>
-          <p:cNvPr id="18" name="Rectangle 17"/>
-          <p:cNvSpPr/>
-          <p:nvPr/>
-        </p:nvSpPr>
-        <p:spPr>
-          <a:xfrm>
-            <a:off x="640080" y="5769864"/>
-            <a:ext cx="100584" cy="100584"/>
-          </a:xfrm>
-          <a:prstGeom prst="rect">
-            <a:avLst/>
-          </a:prstGeom>
-          <a:solidFill>
-            <a:srgbClr val="18A099"/>
-          </a:solidFill>
-          <a:ln>
-            <a:noFill/>
-          </a:ln>
-          <a:effectLst/>
-        </p:spPr>
-        <p:style>
-          <a:lnRef idx="1">
-            <a:schemeClr val="accent1"/>
-          </a:lnRef>
-          <a:fillRef idx="3">
-            <a:schemeClr val="accent1"/>
-          </a:fillRef>
-          <a:effectRef idx="2">
-            <a:schemeClr val="accent1"/>
-          </a:effectRef>
-          <a:fontRef idx="minor">
-            <a:schemeClr val="lt1"/>
-          </a:fontRef>
-        </p:style>
-        <p:txBody>
-          <a:bodyPr rtlCol="0" anchor="ctr"/>
-          <a:lstStyle/>
-          <a:p>
-            <a:pPr algn="ctr"/>
-          </a:p>
-        </p:txBody>
-      </p:sp>
-      <p:sp>
-        <p:nvSpPr>
-          <p:cNvPr id="19" name="TextBox 18"/>
-          <p:cNvSpPr txBox="1"/>
-          <p:nvPr/>
-        </p:nvSpPr>
-        <p:spPr>
-          <a:xfrm>
-            <a:off x="914400" y="5669280"/>
-            <a:ext cx="10607040" cy="548640"/>
-          </a:xfrm>
-          <a:prstGeom prst="rect">
-            <a:avLst/>
-          </a:prstGeom>
-          <a:noFill/>
-        </p:spPr>
-        <p:txBody>
-          <a:bodyPr wrap="square" lIns="0" rIns="0">
-            <a:spAutoFit/>
-          </a:bodyPr>
-          <a:lstStyle/>
-          <a:p>
-            <a:pPr algn="l">
-              <a:lnSpc>
-                <a:spcPct val="115000"/>
-              </a:lnSpc>
-              <a:spcAft>
-                <a:spcPts val="600"/>
-              </a:spcAft>
-            </a:pPr>
-            <a:r>
-              <a:rPr sz="1600" b="1">
-                <a:solidFill>
-                  <a:srgbClr val="101B33"/>
-                </a:solidFill>
-                <a:latin typeface="Arial"/>
-              </a:rPr>
-              <a:t>Hệ quả: thời tiết mới chỉ cần đưa ảnh tham chiếu vào, KHÔNG huấn luyện lại.</a:t>
+              <a:t>Hệ quả quan trọng: AdaIN không chứa tham số nào, còn Decoder chỉ học cách "dựng ảnh từ đặc trưng" — không học riêng loại thời tiết nào.</a:t>
+            </a:r>
+          </a:p>
+          <a:p>
+            <a:pPr algn="l">
+              <a:lnSpc>
+                <a:spcPct val="115000"/>
+              </a:lnSpc>
+              <a:spcAft>
+                <a:spcPts val="600"/>
+              </a:spcAft>
+            </a:pPr>
+            <a:r>
+              <a:rPr sz="1400" b="0">
+                <a:solidFill>
+                  <a:srgbClr val="5A6375"/>
+                </a:solidFill>
+                <a:latin typeface="Arial"/>
+              </a:rPr>
+              <a:t>⇒ Thêm loại thời tiết mới chỉ cần đưa ảnh tham chiếu vào, KHÔNG phải huấn luyện lại.</a:t>
             </a:r>
           </a:p>
         </p:txBody>
